--- a/docs/pptx/carbo/jx-carbo-linsubhr-ratio-hosp3.pptx
+++ b/docs/pptx/carbo/jx-carbo-linsubhr-ratio-hosp3.pptx
@@ -2271,7 +2271,7 @@
           </p:nvSpPr>
           <p:spPr>
             <a:xfrm>
-              <a:off x="817517" y="5114368"/>
+              <a:off x="817517" y="5142518"/>
               <a:ext cx="7799693" cy="0"/>
             </a:xfrm>
             <a:custGeom>
@@ -2314,7 +2314,7 @@
           </p:nvSpPr>
           <p:spPr>
             <a:xfrm>
-              <a:off x="817517" y="4244691"/>
+              <a:off x="817517" y="4313054"/>
               <a:ext cx="7799693" cy="0"/>
             </a:xfrm>
             <a:custGeom>
@@ -2357,7 +2357,7 @@
           </p:nvSpPr>
           <p:spPr>
             <a:xfrm>
-              <a:off x="817517" y="3375014"/>
+              <a:off x="817517" y="3483591"/>
               <a:ext cx="7799693" cy="0"/>
             </a:xfrm>
             <a:custGeom>
@@ -2400,7 +2400,7 @@
           </p:nvSpPr>
           <p:spPr>
             <a:xfrm>
-              <a:off x="817517" y="2505337"/>
+              <a:off x="817517" y="2654127"/>
               <a:ext cx="7799693" cy="0"/>
             </a:xfrm>
             <a:custGeom>
@@ -2443,15 +2443,15 @@
           </p:nvSpPr>
           <p:spPr>
             <a:xfrm>
-              <a:off x="1615213" y="1896563"/>
-              <a:ext cx="0" cy="3826579"/>
+              <a:off x="1615213" y="2073503"/>
+              <a:ext cx="0" cy="3649639"/>
             </a:xfrm>
             <a:custGeom>
               <a:avLst/>
               <a:pathLst>
-                <a:path w="0" h="3826579">
+                <a:path w="0" h="3649639">
                   <a:moveTo>
-                    <a:pt x="0" y="3826579"/>
+                    <a:pt x="0" y="3649639"/>
                   </a:moveTo>
                   <a:lnTo>
                     <a:pt x="0" y="0"/>
@@ -2486,15 +2486,15 @@
           </p:nvSpPr>
           <p:spPr>
             <a:xfrm>
-              <a:off x="3387871" y="1896563"/>
-              <a:ext cx="0" cy="3826579"/>
+              <a:off x="3387871" y="2073503"/>
+              <a:ext cx="0" cy="3649639"/>
             </a:xfrm>
             <a:custGeom>
               <a:avLst/>
               <a:pathLst>
-                <a:path w="0" h="3826579">
+                <a:path w="0" h="3649639">
                   <a:moveTo>
-                    <a:pt x="0" y="3826579"/>
+                    <a:pt x="0" y="3649639"/>
                   </a:moveTo>
                   <a:lnTo>
                     <a:pt x="0" y="0"/>
@@ -2529,15 +2529,15 @@
           </p:nvSpPr>
           <p:spPr>
             <a:xfrm>
-              <a:off x="5160528" y="1896563"/>
-              <a:ext cx="0" cy="3826579"/>
+              <a:off x="5160528" y="2073503"/>
+              <a:ext cx="0" cy="3649639"/>
             </a:xfrm>
             <a:custGeom>
               <a:avLst/>
               <a:pathLst>
-                <a:path w="0" h="3826579">
+                <a:path w="0" h="3649639">
                   <a:moveTo>
-                    <a:pt x="0" y="3826579"/>
+                    <a:pt x="0" y="3649639"/>
                   </a:moveTo>
                   <a:lnTo>
                     <a:pt x="0" y="0"/>
@@ -2572,15 +2572,15 @@
           </p:nvSpPr>
           <p:spPr>
             <a:xfrm>
-              <a:off x="6933186" y="1896563"/>
-              <a:ext cx="0" cy="3826579"/>
+              <a:off x="6933186" y="2073503"/>
+              <a:ext cx="0" cy="3649639"/>
             </a:xfrm>
             <a:custGeom>
               <a:avLst/>
               <a:pathLst>
-                <a:path w="0" h="3826579">
+                <a:path w="0" h="3649639">
                   <a:moveTo>
-                    <a:pt x="0" y="3826579"/>
+                    <a:pt x="0" y="3649639"/>
                   </a:moveTo>
                   <a:lnTo>
                     <a:pt x="0" y="0"/>
@@ -2615,7 +2615,7 @@
           </p:nvSpPr>
           <p:spPr>
             <a:xfrm>
-              <a:off x="817517" y="5549207"/>
+              <a:off x="817517" y="5557249"/>
               <a:ext cx="7799693" cy="0"/>
             </a:xfrm>
             <a:custGeom>
@@ -2658,7 +2658,7 @@
           </p:nvSpPr>
           <p:spPr>
             <a:xfrm>
-              <a:off x="817517" y="4679530"/>
+              <a:off x="817517" y="4727786"/>
               <a:ext cx="7799693" cy="0"/>
             </a:xfrm>
             <a:custGeom>
@@ -2701,7 +2701,7 @@
           </p:nvSpPr>
           <p:spPr>
             <a:xfrm>
-              <a:off x="817517" y="3809853"/>
+              <a:off x="817517" y="3898322"/>
               <a:ext cx="7799693" cy="0"/>
             </a:xfrm>
             <a:custGeom>
@@ -2744,7 +2744,7 @@
           </p:nvSpPr>
           <p:spPr>
             <a:xfrm>
-              <a:off x="817517" y="2940175"/>
+              <a:off x="817517" y="3068859"/>
               <a:ext cx="7799693" cy="0"/>
             </a:xfrm>
             <a:custGeom>
@@ -2787,7 +2787,7 @@
           </p:nvSpPr>
           <p:spPr>
             <a:xfrm>
-              <a:off x="817517" y="2070498"/>
+              <a:off x="817517" y="2239395"/>
               <a:ext cx="7799693" cy="0"/>
             </a:xfrm>
             <a:custGeom>
@@ -2830,15 +2830,15 @@
           </p:nvSpPr>
           <p:spPr>
             <a:xfrm>
-              <a:off x="2501542" y="1896563"/>
-              <a:ext cx="0" cy="3826579"/>
+              <a:off x="2501542" y="2073503"/>
+              <a:ext cx="0" cy="3649639"/>
             </a:xfrm>
             <a:custGeom>
               <a:avLst/>
               <a:pathLst>
-                <a:path w="0" h="3826579">
+                <a:path w="0" h="3649639">
                   <a:moveTo>
-                    <a:pt x="0" y="3826579"/>
+                    <a:pt x="0" y="3649639"/>
                   </a:moveTo>
                   <a:lnTo>
                     <a:pt x="0" y="0"/>
@@ -2873,15 +2873,15 @@
           </p:nvSpPr>
           <p:spPr>
             <a:xfrm>
-              <a:off x="4274200" y="1896563"/>
-              <a:ext cx="0" cy="3826579"/>
+              <a:off x="4274200" y="2073503"/>
+              <a:ext cx="0" cy="3649639"/>
             </a:xfrm>
             <a:custGeom>
               <a:avLst/>
               <a:pathLst>
-                <a:path w="0" h="3826579">
+                <a:path w="0" h="3649639">
                   <a:moveTo>
-                    <a:pt x="0" y="3826579"/>
+                    <a:pt x="0" y="3649639"/>
                   </a:moveTo>
                   <a:lnTo>
                     <a:pt x="0" y="0"/>
@@ -2916,15 +2916,15 @@
           </p:nvSpPr>
           <p:spPr>
             <a:xfrm>
-              <a:off x="6046857" y="1896563"/>
-              <a:ext cx="0" cy="3826579"/>
+              <a:off x="6046857" y="2073503"/>
+              <a:ext cx="0" cy="3649639"/>
             </a:xfrm>
             <a:custGeom>
               <a:avLst/>
               <a:pathLst>
-                <a:path w="0" h="3826579">
+                <a:path w="0" h="3649639">
                   <a:moveTo>
-                    <a:pt x="0" y="3826579"/>
+                    <a:pt x="0" y="3649639"/>
                   </a:moveTo>
                   <a:lnTo>
                     <a:pt x="0" y="0"/>
@@ -2959,15 +2959,15 @@
           </p:nvSpPr>
           <p:spPr>
             <a:xfrm>
-              <a:off x="7819515" y="1896563"/>
-              <a:ext cx="0" cy="3826579"/>
+              <a:off x="7819515" y="2073503"/>
+              <a:ext cx="0" cy="3649639"/>
             </a:xfrm>
             <a:custGeom>
               <a:avLst/>
               <a:pathLst>
-                <a:path w="0" h="3826579">
+                <a:path w="0" h="3649639">
                   <a:moveTo>
-                    <a:pt x="0" y="3826579"/>
+                    <a:pt x="0" y="3649639"/>
                   </a:moveTo>
                   <a:lnTo>
                     <a:pt x="0" y="0"/>
@@ -3002,477 +3002,477 @@
           </p:nvSpPr>
           <p:spPr>
             <a:xfrm>
-              <a:off x="1393431" y="1896563"/>
-              <a:ext cx="6827869" cy="3651698"/>
+              <a:off x="1393431" y="2073503"/>
+              <a:ext cx="6827869" cy="3482845"/>
             </a:xfrm>
             <a:custGeom>
               <a:avLst/>
               <a:pathLst>
-                <a:path w="6827869" h="3651698">
+                <a:path w="6827869" h="3482845">
                   <a:moveTo>
                     <a:pt x="1990881" y="0"/>
                   </a:moveTo>
                   <a:lnTo>
-                    <a:pt x="2000019" y="59884"/>
-                  </a:lnTo>
-                  <a:lnTo>
-                    <a:pt x="2076651" y="500522"/>
-                  </a:lnTo>
-                  <a:lnTo>
-                    <a:pt x="2153284" y="887118"/>
-                  </a:lnTo>
-                  <a:lnTo>
-                    <a:pt x="2229916" y="1226299"/>
-                  </a:lnTo>
-                  <a:lnTo>
-                    <a:pt x="2306549" y="1523880"/>
-                  </a:lnTo>
-                  <a:lnTo>
-                    <a:pt x="2383181" y="1784965"/>
-                  </a:lnTo>
-                  <a:lnTo>
-                    <a:pt x="2459814" y="2014028"/>
-                  </a:lnTo>
-                  <a:lnTo>
-                    <a:pt x="2536447" y="2214998"/>
-                  </a:lnTo>
-                  <a:lnTo>
-                    <a:pt x="2613079" y="2391320"/>
-                  </a:lnTo>
-                  <a:lnTo>
-                    <a:pt x="2689712" y="2546016"/>
-                  </a:lnTo>
-                  <a:lnTo>
-                    <a:pt x="2766344" y="2681740"/>
-                  </a:lnTo>
-                  <a:lnTo>
-                    <a:pt x="2842977" y="2788305"/>
-                  </a:lnTo>
-                  <a:lnTo>
-                    <a:pt x="2919609" y="2821238"/>
-                  </a:lnTo>
-                  <a:lnTo>
-                    <a:pt x="2996242" y="2852916"/>
-                  </a:lnTo>
-                  <a:lnTo>
-                    <a:pt x="3072874" y="2883387"/>
-                  </a:lnTo>
-                  <a:lnTo>
-                    <a:pt x="3149507" y="2912697"/>
-                  </a:lnTo>
-                  <a:lnTo>
-                    <a:pt x="3226140" y="2940891"/>
-                  </a:lnTo>
-                  <a:lnTo>
-                    <a:pt x="3302772" y="2968010"/>
-                  </a:lnTo>
-                  <a:lnTo>
-                    <a:pt x="3379405" y="2994096"/>
-                  </a:lnTo>
-                  <a:lnTo>
-                    <a:pt x="3456037" y="3019188"/>
-                  </a:lnTo>
-                  <a:lnTo>
-                    <a:pt x="3532670" y="3043324"/>
-                  </a:lnTo>
-                  <a:lnTo>
-                    <a:pt x="3609302" y="3066540"/>
-                  </a:lnTo>
-                  <a:lnTo>
-                    <a:pt x="3685935" y="3088872"/>
-                  </a:lnTo>
-                  <a:lnTo>
-                    <a:pt x="3762567" y="3110353"/>
-                  </a:lnTo>
-                  <a:lnTo>
-                    <a:pt x="3839200" y="3131015"/>
-                  </a:lnTo>
-                  <a:lnTo>
-                    <a:pt x="3915832" y="3150890"/>
-                  </a:lnTo>
-                  <a:lnTo>
-                    <a:pt x="3992465" y="3170008"/>
-                  </a:lnTo>
-                  <a:lnTo>
-                    <a:pt x="4069098" y="3188397"/>
-                  </a:lnTo>
-                  <a:lnTo>
-                    <a:pt x="4145730" y="3206086"/>
-                  </a:lnTo>
-                  <a:lnTo>
-                    <a:pt x="4222363" y="3223101"/>
-                  </a:lnTo>
-                  <a:lnTo>
-                    <a:pt x="4298995" y="3239467"/>
-                  </a:lnTo>
-                  <a:lnTo>
-                    <a:pt x="4375628" y="3255210"/>
-                  </a:lnTo>
-                  <a:lnTo>
-                    <a:pt x="4452260" y="3270353"/>
-                  </a:lnTo>
-                  <a:lnTo>
-                    <a:pt x="4528893" y="3284919"/>
-                  </a:lnTo>
-                  <a:lnTo>
-                    <a:pt x="4605525" y="3298930"/>
-                  </a:lnTo>
-                  <a:lnTo>
-                    <a:pt x="4682158" y="3312407"/>
-                  </a:lnTo>
-                  <a:lnTo>
-                    <a:pt x="4758790" y="3325371"/>
-                  </a:lnTo>
-                  <a:lnTo>
-                    <a:pt x="4835423" y="3337841"/>
-                  </a:lnTo>
-                  <a:lnTo>
-                    <a:pt x="4912056" y="3349835"/>
-                  </a:lnTo>
-                  <a:lnTo>
-                    <a:pt x="4988688" y="3361373"/>
-                  </a:lnTo>
-                  <a:lnTo>
-                    <a:pt x="5065321" y="3372471"/>
-                  </a:lnTo>
-                  <a:lnTo>
-                    <a:pt x="5141953" y="3383146"/>
-                  </a:lnTo>
-                  <a:lnTo>
-                    <a:pt x="5218586" y="3393415"/>
-                  </a:lnTo>
-                  <a:lnTo>
-                    <a:pt x="5295218" y="3403292"/>
-                  </a:lnTo>
-                  <a:lnTo>
-                    <a:pt x="5371851" y="3412793"/>
-                  </a:lnTo>
-                  <a:lnTo>
-                    <a:pt x="5448483" y="3421931"/>
-                  </a:lnTo>
-                  <a:lnTo>
-                    <a:pt x="5525116" y="3430722"/>
-                  </a:lnTo>
-                  <a:lnTo>
-                    <a:pt x="5601749" y="3439178"/>
-                  </a:lnTo>
-                  <a:lnTo>
-                    <a:pt x="5678381" y="3447311"/>
-                  </a:lnTo>
-                  <a:lnTo>
-                    <a:pt x="5755014" y="3455135"/>
-                  </a:lnTo>
-                  <a:lnTo>
-                    <a:pt x="5831646" y="3462660"/>
-                  </a:lnTo>
-                  <a:lnTo>
-                    <a:pt x="5908279" y="3469899"/>
-                  </a:lnTo>
-                  <a:lnTo>
-                    <a:pt x="5984911" y="3476862"/>
-                  </a:lnTo>
-                  <a:lnTo>
-                    <a:pt x="6061544" y="3483559"/>
-                  </a:lnTo>
-                  <a:lnTo>
-                    <a:pt x="6138176" y="3490002"/>
-                  </a:lnTo>
-                  <a:lnTo>
-                    <a:pt x="6214809" y="3496199"/>
-                  </a:lnTo>
-                  <a:lnTo>
-                    <a:pt x="6291441" y="3502160"/>
-                  </a:lnTo>
-                  <a:lnTo>
-                    <a:pt x="6368074" y="3507893"/>
-                  </a:lnTo>
-                  <a:lnTo>
-                    <a:pt x="6444707" y="3513409"/>
-                  </a:lnTo>
-                  <a:lnTo>
-                    <a:pt x="6521339" y="3518714"/>
-                  </a:lnTo>
-                  <a:lnTo>
-                    <a:pt x="6597972" y="3523817"/>
-                  </a:lnTo>
-                  <a:lnTo>
-                    <a:pt x="6674604" y="3528725"/>
-                  </a:lnTo>
-                  <a:lnTo>
-                    <a:pt x="6751237" y="3533447"/>
-                  </a:lnTo>
-                  <a:lnTo>
-                    <a:pt x="6827869" y="3537988"/>
-                  </a:lnTo>
-                  <a:lnTo>
-                    <a:pt x="6827869" y="3651698"/>
-                  </a:lnTo>
-                  <a:lnTo>
-                    <a:pt x="6751237" y="3651566"/>
-                  </a:lnTo>
-                  <a:lnTo>
-                    <a:pt x="6674604" y="3651416"/>
-                  </a:lnTo>
-                  <a:lnTo>
-                    <a:pt x="6597972" y="3651244"/>
-                  </a:lnTo>
-                  <a:lnTo>
-                    <a:pt x="6521339" y="3651048"/>
-                  </a:lnTo>
-                  <a:lnTo>
-                    <a:pt x="6444707" y="3650825"/>
-                  </a:lnTo>
-                  <a:lnTo>
-                    <a:pt x="6368074" y="3650571"/>
-                  </a:lnTo>
-                  <a:lnTo>
-                    <a:pt x="6291441" y="3650282"/>
-                  </a:lnTo>
-                  <a:lnTo>
-                    <a:pt x="6214809" y="3649952"/>
-                  </a:lnTo>
-                  <a:lnTo>
-                    <a:pt x="6138176" y="3649575"/>
-                  </a:lnTo>
-                  <a:lnTo>
-                    <a:pt x="6061544" y="3649146"/>
-                  </a:lnTo>
-                  <a:lnTo>
-                    <a:pt x="5984911" y="3648657"/>
-                  </a:lnTo>
-                  <a:lnTo>
-                    <a:pt x="5908279" y="3648100"/>
-                  </a:lnTo>
-                  <a:lnTo>
-                    <a:pt x="5831646" y="3647465"/>
-                  </a:lnTo>
-                  <a:lnTo>
-                    <a:pt x="5755014" y="3646741"/>
-                  </a:lnTo>
-                  <a:lnTo>
-                    <a:pt x="5678381" y="3645916"/>
-                  </a:lnTo>
-                  <a:lnTo>
-                    <a:pt x="5601749" y="3644976"/>
-                  </a:lnTo>
-                  <a:lnTo>
-                    <a:pt x="5525116" y="3643904"/>
-                  </a:lnTo>
-                  <a:lnTo>
-                    <a:pt x="5448483" y="3642683"/>
-                  </a:lnTo>
-                  <a:lnTo>
-                    <a:pt x="5371851" y="3641290"/>
-                  </a:lnTo>
-                  <a:lnTo>
-                    <a:pt x="5295218" y="3639703"/>
-                  </a:lnTo>
-                  <a:lnTo>
-                    <a:pt x="5218586" y="3637894"/>
-                  </a:lnTo>
-                  <a:lnTo>
-                    <a:pt x="5141953" y="3635832"/>
-                  </a:lnTo>
-                  <a:lnTo>
-                    <a:pt x="5065321" y="3633482"/>
-                  </a:lnTo>
-                  <a:lnTo>
-                    <a:pt x="4988688" y="3630804"/>
-                  </a:lnTo>
-                  <a:lnTo>
-                    <a:pt x="4912056" y="3627751"/>
-                  </a:lnTo>
-                  <a:lnTo>
-                    <a:pt x="4835423" y="3624271"/>
-                  </a:lnTo>
-                  <a:lnTo>
-                    <a:pt x="4758790" y="3620305"/>
-                  </a:lnTo>
-                  <a:lnTo>
-                    <a:pt x="4682158" y="3615784"/>
-                  </a:lnTo>
-                  <a:lnTo>
-                    <a:pt x="4605525" y="3610631"/>
-                  </a:lnTo>
-                  <a:lnTo>
-                    <a:pt x="4528893" y="3604759"/>
-                  </a:lnTo>
-                  <a:lnTo>
-                    <a:pt x="4452260" y="3598065"/>
-                  </a:lnTo>
-                  <a:lnTo>
-                    <a:pt x="4375628" y="3590435"/>
-                  </a:lnTo>
-                  <a:lnTo>
-                    <a:pt x="4298995" y="3581739"/>
-                  </a:lnTo>
-                  <a:lnTo>
-                    <a:pt x="4222363" y="3571827"/>
-                  </a:lnTo>
-                  <a:lnTo>
-                    <a:pt x="4145730" y="3560530"/>
-                  </a:lnTo>
-                  <a:lnTo>
-                    <a:pt x="4069098" y="3547653"/>
-                  </a:lnTo>
-                  <a:lnTo>
-                    <a:pt x="3992465" y="3532977"/>
-                  </a:lnTo>
-                  <a:lnTo>
-                    <a:pt x="3915832" y="3516248"/>
-                  </a:lnTo>
-                  <a:lnTo>
-                    <a:pt x="3839200" y="3497182"/>
-                  </a:lnTo>
-                  <a:lnTo>
-                    <a:pt x="3762567" y="3475449"/>
-                  </a:lnTo>
-                  <a:lnTo>
-                    <a:pt x="3685935" y="3450679"/>
-                  </a:lnTo>
-                  <a:lnTo>
-                    <a:pt x="3609302" y="3422447"/>
-                  </a:lnTo>
-                  <a:lnTo>
-                    <a:pt x="3532670" y="3390267"/>
-                  </a:lnTo>
-                  <a:lnTo>
-                    <a:pt x="3456037" y="3353590"/>
-                  </a:lnTo>
-                  <a:lnTo>
-                    <a:pt x="3379405" y="3311784"/>
-                  </a:lnTo>
-                  <a:lnTo>
-                    <a:pt x="3302772" y="3264136"/>
-                  </a:lnTo>
-                  <a:lnTo>
-                    <a:pt x="3226140" y="3209826"/>
-                  </a:lnTo>
-                  <a:lnTo>
-                    <a:pt x="3149507" y="3147924"/>
-                  </a:lnTo>
-                  <a:lnTo>
-                    <a:pt x="3072874" y="3077369"/>
-                  </a:lnTo>
-                  <a:lnTo>
-                    <a:pt x="2996242" y="2996950"/>
-                  </a:lnTo>
-                  <a:lnTo>
-                    <a:pt x="2919609" y="2905290"/>
-                  </a:lnTo>
-                  <a:lnTo>
-                    <a:pt x="2842977" y="2800817"/>
-                  </a:lnTo>
-                  <a:lnTo>
-                    <a:pt x="2766344" y="2754067"/>
-                  </a:lnTo>
-                  <a:lnTo>
-                    <a:pt x="2689712" y="2718473"/>
-                  </a:lnTo>
-                  <a:lnTo>
-                    <a:pt x="2613079" y="2681470"/>
-                  </a:lnTo>
-                  <a:lnTo>
-                    <a:pt x="2536447" y="2643000"/>
-                  </a:lnTo>
-                  <a:lnTo>
-                    <a:pt x="2459814" y="2603007"/>
-                  </a:lnTo>
-                  <a:lnTo>
-                    <a:pt x="2383181" y="2561430"/>
-                  </a:lnTo>
-                  <a:lnTo>
-                    <a:pt x="2306549" y="2518205"/>
-                  </a:lnTo>
-                  <a:lnTo>
-                    <a:pt x="2229916" y="2473269"/>
-                  </a:lnTo>
-                  <a:lnTo>
-                    <a:pt x="2153284" y="2426552"/>
-                  </a:lnTo>
-                  <a:lnTo>
-                    <a:pt x="2076651" y="2377985"/>
-                  </a:lnTo>
-                  <a:lnTo>
-                    <a:pt x="2000019" y="2327494"/>
-                  </a:lnTo>
-                  <a:lnTo>
-                    <a:pt x="1923386" y="2275003"/>
-                  </a:lnTo>
-                  <a:lnTo>
-                    <a:pt x="1846754" y="2220433"/>
-                  </a:lnTo>
-                  <a:lnTo>
-                    <a:pt x="1770121" y="2163701"/>
-                  </a:lnTo>
-                  <a:lnTo>
-                    <a:pt x="1693489" y="2104722"/>
-                  </a:lnTo>
-                  <a:lnTo>
-                    <a:pt x="1616856" y="2043407"/>
-                  </a:lnTo>
-                  <a:lnTo>
-                    <a:pt x="1540223" y="1979663"/>
-                  </a:lnTo>
-                  <a:lnTo>
-                    <a:pt x="1463591" y="1913394"/>
-                  </a:lnTo>
-                  <a:lnTo>
-                    <a:pt x="1386958" y="1844500"/>
-                  </a:lnTo>
-                  <a:lnTo>
-                    <a:pt x="1310326" y="1772878"/>
-                  </a:lnTo>
-                  <a:lnTo>
-                    <a:pt x="1233693" y="1698418"/>
-                  </a:lnTo>
-                  <a:lnTo>
-                    <a:pt x="1157061" y="1621008"/>
-                  </a:lnTo>
-                  <a:lnTo>
-                    <a:pt x="1080428" y="1540532"/>
-                  </a:lnTo>
-                  <a:lnTo>
-                    <a:pt x="1003796" y="1456869"/>
-                  </a:lnTo>
-                  <a:lnTo>
-                    <a:pt x="927163" y="1369891"/>
-                  </a:lnTo>
-                  <a:lnTo>
-                    <a:pt x="850530" y="1279469"/>
-                  </a:lnTo>
-                  <a:lnTo>
-                    <a:pt x="773898" y="1185464"/>
-                  </a:lnTo>
-                  <a:lnTo>
-                    <a:pt x="697265" y="1087736"/>
-                  </a:lnTo>
-                  <a:lnTo>
-                    <a:pt x="620633" y="986137"/>
-                  </a:lnTo>
-                  <a:lnTo>
-                    <a:pt x="544000" y="880513"/>
-                  </a:lnTo>
-                  <a:lnTo>
-                    <a:pt x="467368" y="770705"/>
-                  </a:lnTo>
-                  <a:lnTo>
-                    <a:pt x="390735" y="656548"/>
-                  </a:lnTo>
-                  <a:lnTo>
-                    <a:pt x="314103" y="537869"/>
-                  </a:lnTo>
-                  <a:lnTo>
-                    <a:pt x="237470" y="414488"/>
-                  </a:lnTo>
-                  <a:lnTo>
-                    <a:pt x="160838" y="286221"/>
-                  </a:lnTo>
-                  <a:lnTo>
-                    <a:pt x="84205" y="152872"/>
-                  </a:lnTo>
-                  <a:lnTo>
-                    <a:pt x="7572" y="14242"/>
+                    <a:pt x="2000019" y="57115"/>
+                  </a:lnTo>
+                  <a:lnTo>
+                    <a:pt x="2076651" y="477378"/>
+                  </a:lnTo>
+                  <a:lnTo>
+                    <a:pt x="2153284" y="846098"/>
+                  </a:lnTo>
+                  <a:lnTo>
+                    <a:pt x="2229916" y="1169595"/>
+                  </a:lnTo>
+                  <a:lnTo>
+                    <a:pt x="2306549" y="1453417"/>
+                  </a:lnTo>
+                  <a:lnTo>
+                    <a:pt x="2383181" y="1702429"/>
+                  </a:lnTo>
+                  <a:lnTo>
+                    <a:pt x="2459814" y="1920900"/>
+                  </a:lnTo>
+                  <a:lnTo>
+                    <a:pt x="2536447" y="2112577"/>
+                  </a:lnTo>
+                  <a:lnTo>
+                    <a:pt x="2613079" y="2280746"/>
+                  </a:lnTo>
+                  <a:lnTo>
+                    <a:pt x="2689712" y="2428289"/>
+                  </a:lnTo>
+                  <a:lnTo>
+                    <a:pt x="2766344" y="2557737"/>
+                  </a:lnTo>
+                  <a:lnTo>
+                    <a:pt x="2842977" y="2659375"/>
+                  </a:lnTo>
+                  <a:lnTo>
+                    <a:pt x="2919609" y="2690785"/>
+                  </a:lnTo>
+                  <a:lnTo>
+                    <a:pt x="2996242" y="2720998"/>
+                  </a:lnTo>
+                  <a:lnTo>
+                    <a:pt x="3072874" y="2750060"/>
+                  </a:lnTo>
+                  <a:lnTo>
+                    <a:pt x="3149507" y="2778015"/>
+                  </a:lnTo>
+                  <a:lnTo>
+                    <a:pt x="3226140" y="2804905"/>
+                  </a:lnTo>
+                  <a:lnTo>
+                    <a:pt x="3302772" y="2830770"/>
+                  </a:lnTo>
+                  <a:lnTo>
+                    <a:pt x="3379405" y="2855650"/>
+                  </a:lnTo>
+                  <a:lnTo>
+                    <a:pt x="3456037" y="2879582"/>
+                  </a:lnTo>
+                  <a:lnTo>
+                    <a:pt x="3532670" y="2902602"/>
+                  </a:lnTo>
+                  <a:lnTo>
+                    <a:pt x="3609302" y="2924745"/>
+                  </a:lnTo>
+                  <a:lnTo>
+                    <a:pt x="3685935" y="2946044"/>
+                  </a:lnTo>
+                  <a:lnTo>
+                    <a:pt x="3762567" y="2966531"/>
+                  </a:lnTo>
+                  <a:lnTo>
+                    <a:pt x="3839200" y="2986238"/>
+                  </a:lnTo>
+                  <a:lnTo>
+                    <a:pt x="3915832" y="3005194"/>
+                  </a:lnTo>
+                  <a:lnTo>
+                    <a:pt x="3992465" y="3023428"/>
+                  </a:lnTo>
+                  <a:lnTo>
+                    <a:pt x="4069098" y="3040967"/>
+                  </a:lnTo>
+                  <a:lnTo>
+                    <a:pt x="4145730" y="3057838"/>
+                  </a:lnTo>
+                  <a:lnTo>
+                    <a:pt x="4222363" y="3074066"/>
+                  </a:lnTo>
+                  <a:lnTo>
+                    <a:pt x="4298995" y="3089676"/>
+                  </a:lnTo>
+                  <a:lnTo>
+                    <a:pt x="4375628" y="3104690"/>
+                  </a:lnTo>
+                  <a:lnTo>
+                    <a:pt x="4452260" y="3119133"/>
+                  </a:lnTo>
+                  <a:lnTo>
+                    <a:pt x="4528893" y="3133026"/>
+                  </a:lnTo>
+                  <a:lnTo>
+                    <a:pt x="4605525" y="3146389"/>
+                  </a:lnTo>
+                  <a:lnTo>
+                    <a:pt x="4682158" y="3159243"/>
+                  </a:lnTo>
+                  <a:lnTo>
+                    <a:pt x="4758790" y="3171607"/>
+                  </a:lnTo>
+                  <a:lnTo>
+                    <a:pt x="4835423" y="3183500"/>
+                  </a:lnTo>
+                  <a:lnTo>
+                    <a:pt x="4912056" y="3194940"/>
+                  </a:lnTo>
+                  <a:lnTo>
+                    <a:pt x="4988688" y="3205944"/>
+                  </a:lnTo>
+                  <a:lnTo>
+                    <a:pt x="5065321" y="3216529"/>
+                  </a:lnTo>
+                  <a:lnTo>
+                    <a:pt x="5141953" y="3226711"/>
+                  </a:lnTo>
+                  <a:lnTo>
+                    <a:pt x="5218586" y="3236504"/>
+                  </a:lnTo>
+                  <a:lnTo>
+                    <a:pt x="5295218" y="3245925"/>
+                  </a:lnTo>
+                  <a:lnTo>
+                    <a:pt x="5371851" y="3254986"/>
+                  </a:lnTo>
+                  <a:lnTo>
+                    <a:pt x="5448483" y="3263702"/>
+                  </a:lnTo>
+                  <a:lnTo>
+                    <a:pt x="5525116" y="3272087"/>
+                  </a:lnTo>
+                  <a:lnTo>
+                    <a:pt x="5601749" y="3280151"/>
+                  </a:lnTo>
+                  <a:lnTo>
+                    <a:pt x="5678381" y="3287909"/>
+                  </a:lnTo>
+                  <a:lnTo>
+                    <a:pt x="5755014" y="3295370"/>
+                  </a:lnTo>
+                  <a:lnTo>
+                    <a:pt x="5831646" y="3302548"/>
+                  </a:lnTo>
+                  <a:lnTo>
+                    <a:pt x="5908279" y="3309452"/>
+                  </a:lnTo>
+                  <a:lnTo>
+                    <a:pt x="5984911" y="3316093"/>
+                  </a:lnTo>
+                  <a:lnTo>
+                    <a:pt x="6061544" y="3322481"/>
+                  </a:lnTo>
+                  <a:lnTo>
+                    <a:pt x="6138176" y="3328625"/>
+                  </a:lnTo>
+                  <a:lnTo>
+                    <a:pt x="6214809" y="3334536"/>
+                  </a:lnTo>
+                  <a:lnTo>
+                    <a:pt x="6291441" y="3340221"/>
+                  </a:lnTo>
+                  <a:lnTo>
+                    <a:pt x="6368074" y="3345690"/>
+                  </a:lnTo>
+                  <a:lnTo>
+                    <a:pt x="6444707" y="3350950"/>
+                  </a:lnTo>
+                  <a:lnTo>
+                    <a:pt x="6521339" y="3356010"/>
+                  </a:lnTo>
+                  <a:lnTo>
+                    <a:pt x="6597972" y="3360877"/>
+                  </a:lnTo>
+                  <a:lnTo>
+                    <a:pt x="6674604" y="3365558"/>
+                  </a:lnTo>
+                  <a:lnTo>
+                    <a:pt x="6751237" y="3370062"/>
+                  </a:lnTo>
+                  <a:lnTo>
+                    <a:pt x="6827869" y="3374393"/>
+                  </a:lnTo>
+                  <a:lnTo>
+                    <a:pt x="6827869" y="3482845"/>
+                  </a:lnTo>
+                  <a:lnTo>
+                    <a:pt x="6751237" y="3482719"/>
+                  </a:lnTo>
+                  <a:lnTo>
+                    <a:pt x="6674604" y="3482575"/>
+                  </a:lnTo>
+                  <a:lnTo>
+                    <a:pt x="6597972" y="3482412"/>
+                  </a:lnTo>
+                  <a:lnTo>
+                    <a:pt x="6521339" y="3482225"/>
+                  </a:lnTo>
+                  <a:lnTo>
+                    <a:pt x="6444707" y="3482013"/>
+                  </a:lnTo>
+                  <a:lnTo>
+                    <a:pt x="6368074" y="3481770"/>
+                  </a:lnTo>
+                  <a:lnTo>
+                    <a:pt x="6291441" y="3481494"/>
+                  </a:lnTo>
+                  <a:lnTo>
+                    <a:pt x="6214809" y="3481179"/>
+                  </a:lnTo>
+                  <a:lnTo>
+                    <a:pt x="6138176" y="3480820"/>
+                  </a:lnTo>
+                  <a:lnTo>
+                    <a:pt x="6061544" y="3480411"/>
+                  </a:lnTo>
+                  <a:lnTo>
+                    <a:pt x="5984911" y="3479945"/>
+                  </a:lnTo>
+                  <a:lnTo>
+                    <a:pt x="5908279" y="3479413"/>
+                  </a:lnTo>
+                  <a:lnTo>
+                    <a:pt x="5831646" y="3478808"/>
+                  </a:lnTo>
+                  <a:lnTo>
+                    <a:pt x="5755014" y="3478117"/>
+                  </a:lnTo>
+                  <a:lnTo>
+                    <a:pt x="5678381" y="3477331"/>
+                  </a:lnTo>
+                  <a:lnTo>
+                    <a:pt x="5601749" y="3476434"/>
+                  </a:lnTo>
+                  <a:lnTo>
+                    <a:pt x="5525116" y="3475411"/>
+                  </a:lnTo>
+                  <a:lnTo>
+                    <a:pt x="5448483" y="3474246"/>
+                  </a:lnTo>
+                  <a:lnTo>
+                    <a:pt x="5371851" y="3472918"/>
+                  </a:lnTo>
+                  <a:lnTo>
+                    <a:pt x="5295218" y="3471404"/>
+                  </a:lnTo>
+                  <a:lnTo>
+                    <a:pt x="5218586" y="3469679"/>
+                  </a:lnTo>
+                  <a:lnTo>
+                    <a:pt x="5141953" y="3467713"/>
+                  </a:lnTo>
+                  <a:lnTo>
+                    <a:pt x="5065321" y="3465471"/>
+                  </a:lnTo>
+                  <a:lnTo>
+                    <a:pt x="4988688" y="3462917"/>
+                  </a:lnTo>
+                  <a:lnTo>
+                    <a:pt x="4912056" y="3460005"/>
+                  </a:lnTo>
+                  <a:lnTo>
+                    <a:pt x="4835423" y="3456686"/>
+                  </a:lnTo>
+                  <a:lnTo>
+                    <a:pt x="4758790" y="3452903"/>
+                  </a:lnTo>
+                  <a:lnTo>
+                    <a:pt x="4682158" y="3448592"/>
+                  </a:lnTo>
+                  <a:lnTo>
+                    <a:pt x="4605525" y="3443677"/>
+                  </a:lnTo>
+                  <a:lnTo>
+                    <a:pt x="4528893" y="3438076"/>
+                  </a:lnTo>
+                  <a:lnTo>
+                    <a:pt x="4452260" y="3431692"/>
+                  </a:lnTo>
+                  <a:lnTo>
+                    <a:pt x="4375628" y="3424415"/>
+                  </a:lnTo>
+                  <a:lnTo>
+                    <a:pt x="4298995" y="3416121"/>
+                  </a:lnTo>
+                  <a:lnTo>
+                    <a:pt x="4222363" y="3406667"/>
+                  </a:lnTo>
+                  <a:lnTo>
+                    <a:pt x="4145730" y="3395892"/>
+                  </a:lnTo>
+                  <a:lnTo>
+                    <a:pt x="4069098" y="3383611"/>
+                  </a:lnTo>
+                  <a:lnTo>
+                    <a:pt x="3992465" y="3369613"/>
+                  </a:lnTo>
+                  <a:lnTo>
+                    <a:pt x="3915832" y="3353658"/>
+                  </a:lnTo>
+                  <a:lnTo>
+                    <a:pt x="3839200" y="3335473"/>
+                  </a:lnTo>
+                  <a:lnTo>
+                    <a:pt x="3762567" y="3314746"/>
+                  </a:lnTo>
+                  <a:lnTo>
+                    <a:pt x="3685935" y="3291121"/>
+                  </a:lnTo>
+                  <a:lnTo>
+                    <a:pt x="3609302" y="3264194"/>
+                  </a:lnTo>
+                  <a:lnTo>
+                    <a:pt x="3532670" y="3233503"/>
+                  </a:lnTo>
+                  <a:lnTo>
+                    <a:pt x="3456037" y="3198521"/>
+                  </a:lnTo>
+                  <a:lnTo>
+                    <a:pt x="3379405" y="3158649"/>
+                  </a:lnTo>
+                  <a:lnTo>
+                    <a:pt x="3302772" y="3113203"/>
+                  </a:lnTo>
+                  <a:lnTo>
+                    <a:pt x="3226140" y="3061404"/>
+                  </a:lnTo>
+                  <a:lnTo>
+                    <a:pt x="3149507" y="3002365"/>
+                  </a:lnTo>
+                  <a:lnTo>
+                    <a:pt x="3072874" y="2935072"/>
+                  </a:lnTo>
+                  <a:lnTo>
+                    <a:pt x="2996242" y="2858372"/>
+                  </a:lnTo>
+                  <a:lnTo>
+                    <a:pt x="2919609" y="2770951"/>
+                  </a:lnTo>
+                  <a:lnTo>
+                    <a:pt x="2842977" y="2671308"/>
+                  </a:lnTo>
+                  <a:lnTo>
+                    <a:pt x="2766344" y="2626720"/>
+                  </a:lnTo>
+                  <a:lnTo>
+                    <a:pt x="2689712" y="2592772"/>
+                  </a:lnTo>
+                  <a:lnTo>
+                    <a:pt x="2613079" y="2557480"/>
+                  </a:lnTo>
+                  <a:lnTo>
+                    <a:pt x="2536447" y="2520789"/>
+                  </a:lnTo>
+                  <a:lnTo>
+                    <a:pt x="2459814" y="2482645"/>
+                  </a:lnTo>
+                  <a:lnTo>
+                    <a:pt x="2383181" y="2442990"/>
+                  </a:lnTo>
+                  <a:lnTo>
+                    <a:pt x="2306549" y="2401764"/>
+                  </a:lnTo>
+                  <a:lnTo>
+                    <a:pt x="2229916" y="2358906"/>
+                  </a:lnTo>
+                  <a:lnTo>
+                    <a:pt x="2153284" y="2314349"/>
+                  </a:lnTo>
+                  <a:lnTo>
+                    <a:pt x="2076651" y="2268028"/>
+                  </a:lnTo>
+                  <a:lnTo>
+                    <a:pt x="2000019" y="2219872"/>
+                  </a:lnTo>
+                  <a:lnTo>
+                    <a:pt x="1923386" y="2169808"/>
+                  </a:lnTo>
+                  <a:lnTo>
+                    <a:pt x="1846754" y="2117761"/>
+                  </a:lnTo>
+                  <a:lnTo>
+                    <a:pt x="1770121" y="2063653"/>
+                  </a:lnTo>
+                  <a:lnTo>
+                    <a:pt x="1693489" y="2007401"/>
+                  </a:lnTo>
+                  <a:lnTo>
+                    <a:pt x="1616856" y="1948921"/>
+                  </a:lnTo>
+                  <a:lnTo>
+                    <a:pt x="1540223" y="1888124"/>
+                  </a:lnTo>
+                  <a:lnTo>
+                    <a:pt x="1463591" y="1824920"/>
+                  </a:lnTo>
+                  <a:lnTo>
+                    <a:pt x="1386958" y="1759211"/>
+                  </a:lnTo>
+                  <a:lnTo>
+                    <a:pt x="1310326" y="1690900"/>
+                  </a:lnTo>
+                  <a:lnTo>
+                    <a:pt x="1233693" y="1619883"/>
+                  </a:lnTo>
+                  <a:lnTo>
+                    <a:pt x="1157061" y="1546053"/>
+                  </a:lnTo>
+                  <a:lnTo>
+                    <a:pt x="1080428" y="1469299"/>
+                  </a:lnTo>
+                  <a:lnTo>
+                    <a:pt x="1003796" y="1389504"/>
+                  </a:lnTo>
+                  <a:lnTo>
+                    <a:pt x="927163" y="1306548"/>
+                  </a:lnTo>
+                  <a:lnTo>
+                    <a:pt x="850530" y="1220307"/>
+                  </a:lnTo>
+                  <a:lnTo>
+                    <a:pt x="773898" y="1130649"/>
+                  </a:lnTo>
+                  <a:lnTo>
+                    <a:pt x="697265" y="1037439"/>
+                  </a:lnTo>
+                  <a:lnTo>
+                    <a:pt x="620633" y="940538"/>
+                  </a:lnTo>
+                  <a:lnTo>
+                    <a:pt x="544000" y="839798"/>
+                  </a:lnTo>
+                  <a:lnTo>
+                    <a:pt x="467368" y="735068"/>
+                  </a:lnTo>
+                  <a:lnTo>
+                    <a:pt x="390735" y="626189"/>
+                  </a:lnTo>
+                  <a:lnTo>
+                    <a:pt x="314103" y="512998"/>
+                  </a:lnTo>
+                  <a:lnTo>
+                    <a:pt x="237470" y="395322"/>
+                  </a:lnTo>
+                  <a:lnTo>
+                    <a:pt x="160838" y="272986"/>
+                  </a:lnTo>
+                  <a:lnTo>
+                    <a:pt x="84205" y="145804"/>
+                  </a:lnTo>
+                  <a:lnTo>
+                    <a:pt x="7572" y="13583"/>
                   </a:lnTo>
                   <a:lnTo>
                     <a:pt x="0" y="0"/>
@@ -3501,207 +3501,207 @@
           </p:nvSpPr>
           <p:spPr>
             <a:xfrm>
-              <a:off x="3384313" y="1896563"/>
-              <a:ext cx="4836987" cy="3537988"/>
+              <a:off x="3384313" y="2073503"/>
+              <a:ext cx="4836987" cy="3374393"/>
             </a:xfrm>
             <a:custGeom>
               <a:avLst/>
               <a:pathLst>
-                <a:path w="4836987" h="3537988">
+                <a:path w="4836987" h="3374393">
                   <a:moveTo>
                     <a:pt x="0" y="0"/>
                   </a:moveTo>
                   <a:lnTo>
-                    <a:pt x="9137" y="59884"/>
-                  </a:lnTo>
-                  <a:lnTo>
-                    <a:pt x="85769" y="500522"/>
-                  </a:lnTo>
-                  <a:lnTo>
-                    <a:pt x="162402" y="887118"/>
-                  </a:lnTo>
-                  <a:lnTo>
-                    <a:pt x="239035" y="1226299"/>
-                  </a:lnTo>
-                  <a:lnTo>
-                    <a:pt x="315667" y="1523880"/>
-                  </a:lnTo>
-                  <a:lnTo>
-                    <a:pt x="392300" y="1784965"/>
-                  </a:lnTo>
-                  <a:lnTo>
-                    <a:pt x="468932" y="2014028"/>
-                  </a:lnTo>
-                  <a:lnTo>
-                    <a:pt x="545565" y="2214998"/>
-                  </a:lnTo>
-                  <a:lnTo>
-                    <a:pt x="622197" y="2391320"/>
-                  </a:lnTo>
-                  <a:lnTo>
-                    <a:pt x="698830" y="2546016"/>
-                  </a:lnTo>
-                  <a:lnTo>
-                    <a:pt x="775462" y="2681740"/>
-                  </a:lnTo>
-                  <a:lnTo>
-                    <a:pt x="852095" y="2788305"/>
-                  </a:lnTo>
-                  <a:lnTo>
-                    <a:pt x="928727" y="2821238"/>
-                  </a:lnTo>
-                  <a:lnTo>
-                    <a:pt x="1005360" y="2852916"/>
-                  </a:lnTo>
-                  <a:lnTo>
-                    <a:pt x="1081993" y="2883387"/>
-                  </a:lnTo>
-                  <a:lnTo>
-                    <a:pt x="1158625" y="2912697"/>
-                  </a:lnTo>
-                  <a:lnTo>
-                    <a:pt x="1235258" y="2940891"/>
-                  </a:lnTo>
-                  <a:lnTo>
-                    <a:pt x="1311890" y="2968010"/>
-                  </a:lnTo>
-                  <a:lnTo>
-                    <a:pt x="1388523" y="2994096"/>
-                  </a:lnTo>
-                  <a:lnTo>
-                    <a:pt x="1465155" y="3019188"/>
-                  </a:lnTo>
-                  <a:lnTo>
-                    <a:pt x="1541788" y="3043324"/>
-                  </a:lnTo>
-                  <a:lnTo>
-                    <a:pt x="1618420" y="3066540"/>
-                  </a:lnTo>
-                  <a:lnTo>
-                    <a:pt x="1695053" y="3088872"/>
-                  </a:lnTo>
-                  <a:lnTo>
-                    <a:pt x="1771686" y="3110353"/>
-                  </a:lnTo>
-                  <a:lnTo>
-                    <a:pt x="1848318" y="3131015"/>
-                  </a:lnTo>
-                  <a:lnTo>
-                    <a:pt x="1924951" y="3150890"/>
-                  </a:lnTo>
-                  <a:lnTo>
-                    <a:pt x="2001583" y="3170008"/>
-                  </a:lnTo>
-                  <a:lnTo>
-                    <a:pt x="2078216" y="3188397"/>
-                  </a:lnTo>
-                  <a:lnTo>
-                    <a:pt x="2154848" y="3206086"/>
-                  </a:lnTo>
-                  <a:lnTo>
-                    <a:pt x="2231481" y="3223101"/>
-                  </a:lnTo>
-                  <a:lnTo>
-                    <a:pt x="2308113" y="3239467"/>
-                  </a:lnTo>
-                  <a:lnTo>
-                    <a:pt x="2384746" y="3255210"/>
-                  </a:lnTo>
-                  <a:lnTo>
-                    <a:pt x="2461378" y="3270353"/>
-                  </a:lnTo>
-                  <a:lnTo>
-                    <a:pt x="2538011" y="3284919"/>
-                  </a:lnTo>
-                  <a:lnTo>
-                    <a:pt x="2614644" y="3298930"/>
-                  </a:lnTo>
-                  <a:lnTo>
-                    <a:pt x="2691276" y="3312407"/>
-                  </a:lnTo>
-                  <a:lnTo>
-                    <a:pt x="2767909" y="3325371"/>
-                  </a:lnTo>
-                  <a:lnTo>
-                    <a:pt x="2844541" y="3337841"/>
-                  </a:lnTo>
-                  <a:lnTo>
-                    <a:pt x="2921174" y="3349835"/>
-                  </a:lnTo>
-                  <a:lnTo>
-                    <a:pt x="2997806" y="3361373"/>
-                  </a:lnTo>
-                  <a:lnTo>
-                    <a:pt x="3074439" y="3372471"/>
-                  </a:lnTo>
-                  <a:lnTo>
-                    <a:pt x="3151071" y="3383146"/>
-                  </a:lnTo>
-                  <a:lnTo>
-                    <a:pt x="3227704" y="3393415"/>
-                  </a:lnTo>
-                  <a:lnTo>
-                    <a:pt x="3304336" y="3403292"/>
-                  </a:lnTo>
-                  <a:lnTo>
-                    <a:pt x="3380969" y="3412793"/>
-                  </a:lnTo>
-                  <a:lnTo>
-                    <a:pt x="3457602" y="3421931"/>
-                  </a:lnTo>
-                  <a:lnTo>
-                    <a:pt x="3534234" y="3430722"/>
-                  </a:lnTo>
-                  <a:lnTo>
-                    <a:pt x="3610867" y="3439178"/>
-                  </a:lnTo>
-                  <a:lnTo>
-                    <a:pt x="3687499" y="3447311"/>
-                  </a:lnTo>
-                  <a:lnTo>
-                    <a:pt x="3764132" y="3455135"/>
-                  </a:lnTo>
-                  <a:lnTo>
-                    <a:pt x="3840764" y="3462660"/>
-                  </a:lnTo>
-                  <a:lnTo>
-                    <a:pt x="3917397" y="3469899"/>
-                  </a:lnTo>
-                  <a:lnTo>
-                    <a:pt x="3994029" y="3476862"/>
-                  </a:lnTo>
-                  <a:lnTo>
-                    <a:pt x="4070662" y="3483559"/>
-                  </a:lnTo>
-                  <a:lnTo>
-                    <a:pt x="4147295" y="3490002"/>
-                  </a:lnTo>
-                  <a:lnTo>
-                    <a:pt x="4223927" y="3496199"/>
-                  </a:lnTo>
-                  <a:lnTo>
-                    <a:pt x="4300560" y="3502160"/>
-                  </a:lnTo>
-                  <a:lnTo>
-                    <a:pt x="4377192" y="3507893"/>
-                  </a:lnTo>
-                  <a:lnTo>
-                    <a:pt x="4453825" y="3513409"/>
-                  </a:lnTo>
-                  <a:lnTo>
-                    <a:pt x="4530457" y="3518714"/>
-                  </a:lnTo>
-                  <a:lnTo>
-                    <a:pt x="4607090" y="3523817"/>
-                  </a:lnTo>
-                  <a:lnTo>
-                    <a:pt x="4683722" y="3528725"/>
-                  </a:lnTo>
-                  <a:lnTo>
-                    <a:pt x="4760355" y="3533447"/>
-                  </a:lnTo>
-                  <a:lnTo>
-                    <a:pt x="4836987" y="3537988"/>
+                    <a:pt x="9137" y="57115"/>
+                  </a:lnTo>
+                  <a:lnTo>
+                    <a:pt x="85769" y="477378"/>
+                  </a:lnTo>
+                  <a:lnTo>
+                    <a:pt x="162402" y="846098"/>
+                  </a:lnTo>
+                  <a:lnTo>
+                    <a:pt x="239035" y="1169595"/>
+                  </a:lnTo>
+                  <a:lnTo>
+                    <a:pt x="315667" y="1453417"/>
+                  </a:lnTo>
+                  <a:lnTo>
+                    <a:pt x="392300" y="1702429"/>
+                  </a:lnTo>
+                  <a:lnTo>
+                    <a:pt x="468932" y="1920900"/>
+                  </a:lnTo>
+                  <a:lnTo>
+                    <a:pt x="545565" y="2112577"/>
+                  </a:lnTo>
+                  <a:lnTo>
+                    <a:pt x="622197" y="2280746"/>
+                  </a:lnTo>
+                  <a:lnTo>
+                    <a:pt x="698830" y="2428289"/>
+                  </a:lnTo>
+                  <a:lnTo>
+                    <a:pt x="775462" y="2557737"/>
+                  </a:lnTo>
+                  <a:lnTo>
+                    <a:pt x="852095" y="2659375"/>
+                  </a:lnTo>
+                  <a:lnTo>
+                    <a:pt x="928727" y="2690785"/>
+                  </a:lnTo>
+                  <a:lnTo>
+                    <a:pt x="1005360" y="2720998"/>
+                  </a:lnTo>
+                  <a:lnTo>
+                    <a:pt x="1081993" y="2750060"/>
+                  </a:lnTo>
+                  <a:lnTo>
+                    <a:pt x="1158625" y="2778015"/>
+                  </a:lnTo>
+                  <a:lnTo>
+                    <a:pt x="1235258" y="2804905"/>
+                  </a:lnTo>
+                  <a:lnTo>
+                    <a:pt x="1311890" y="2830770"/>
+                  </a:lnTo>
+                  <a:lnTo>
+                    <a:pt x="1388523" y="2855650"/>
+                  </a:lnTo>
+                  <a:lnTo>
+                    <a:pt x="1465155" y="2879582"/>
+                  </a:lnTo>
+                  <a:lnTo>
+                    <a:pt x="1541788" y="2902602"/>
+                  </a:lnTo>
+                  <a:lnTo>
+                    <a:pt x="1618420" y="2924745"/>
+                  </a:lnTo>
+                  <a:lnTo>
+                    <a:pt x="1695053" y="2946044"/>
+                  </a:lnTo>
+                  <a:lnTo>
+                    <a:pt x="1771686" y="2966531"/>
+                  </a:lnTo>
+                  <a:lnTo>
+                    <a:pt x="1848318" y="2986238"/>
+                  </a:lnTo>
+                  <a:lnTo>
+                    <a:pt x="1924951" y="3005194"/>
+                  </a:lnTo>
+                  <a:lnTo>
+                    <a:pt x="2001583" y="3023428"/>
+                  </a:lnTo>
+                  <a:lnTo>
+                    <a:pt x="2078216" y="3040967"/>
+                  </a:lnTo>
+                  <a:lnTo>
+                    <a:pt x="2154848" y="3057838"/>
+                  </a:lnTo>
+                  <a:lnTo>
+                    <a:pt x="2231481" y="3074066"/>
+                  </a:lnTo>
+                  <a:lnTo>
+                    <a:pt x="2308113" y="3089676"/>
+                  </a:lnTo>
+                  <a:lnTo>
+                    <a:pt x="2384746" y="3104690"/>
+                  </a:lnTo>
+                  <a:lnTo>
+                    <a:pt x="2461378" y="3119133"/>
+                  </a:lnTo>
+                  <a:lnTo>
+                    <a:pt x="2538011" y="3133026"/>
+                  </a:lnTo>
+                  <a:lnTo>
+                    <a:pt x="2614644" y="3146389"/>
+                  </a:lnTo>
+                  <a:lnTo>
+                    <a:pt x="2691276" y="3159243"/>
+                  </a:lnTo>
+                  <a:lnTo>
+                    <a:pt x="2767909" y="3171607"/>
+                  </a:lnTo>
+                  <a:lnTo>
+                    <a:pt x="2844541" y="3183500"/>
+                  </a:lnTo>
+                  <a:lnTo>
+                    <a:pt x="2921174" y="3194940"/>
+                  </a:lnTo>
+                  <a:lnTo>
+                    <a:pt x="2997806" y="3205944"/>
+                  </a:lnTo>
+                  <a:lnTo>
+                    <a:pt x="3074439" y="3216529"/>
+                  </a:lnTo>
+                  <a:lnTo>
+                    <a:pt x="3151071" y="3226711"/>
+                  </a:lnTo>
+                  <a:lnTo>
+                    <a:pt x="3227704" y="3236504"/>
+                  </a:lnTo>
+                  <a:lnTo>
+                    <a:pt x="3304336" y="3245925"/>
+                  </a:lnTo>
+                  <a:lnTo>
+                    <a:pt x="3380969" y="3254986"/>
+                  </a:lnTo>
+                  <a:lnTo>
+                    <a:pt x="3457602" y="3263702"/>
+                  </a:lnTo>
+                  <a:lnTo>
+                    <a:pt x="3534234" y="3272087"/>
+                  </a:lnTo>
+                  <a:lnTo>
+                    <a:pt x="3610867" y="3280151"/>
+                  </a:lnTo>
+                  <a:lnTo>
+                    <a:pt x="3687499" y="3287909"/>
+                  </a:lnTo>
+                  <a:lnTo>
+                    <a:pt x="3764132" y="3295370"/>
+                  </a:lnTo>
+                  <a:lnTo>
+                    <a:pt x="3840764" y="3302548"/>
+                  </a:lnTo>
+                  <a:lnTo>
+                    <a:pt x="3917397" y="3309452"/>
+                  </a:lnTo>
+                  <a:lnTo>
+                    <a:pt x="3994029" y="3316093"/>
+                  </a:lnTo>
+                  <a:lnTo>
+                    <a:pt x="4070662" y="3322481"/>
+                  </a:lnTo>
+                  <a:lnTo>
+                    <a:pt x="4147295" y="3328625"/>
+                  </a:lnTo>
+                  <a:lnTo>
+                    <a:pt x="4223927" y="3334536"/>
+                  </a:lnTo>
+                  <a:lnTo>
+                    <a:pt x="4300560" y="3340221"/>
+                  </a:lnTo>
+                  <a:lnTo>
+                    <a:pt x="4377192" y="3345690"/>
+                  </a:lnTo>
+                  <a:lnTo>
+                    <a:pt x="4453825" y="3350950"/>
+                  </a:lnTo>
+                  <a:lnTo>
+                    <a:pt x="4530457" y="3356010"/>
+                  </a:lnTo>
+                  <a:lnTo>
+                    <a:pt x="4607090" y="3360877"/>
+                  </a:lnTo>
+                  <a:lnTo>
+                    <a:pt x="4683722" y="3365558"/>
+                  </a:lnTo>
+                  <a:lnTo>
+                    <a:pt x="4760355" y="3370062"/>
+                  </a:lnTo>
+                  <a:lnTo>
+                    <a:pt x="4836987" y="3374393"/>
                   </a:lnTo>
                 </a:path>
               </a:pathLst>
@@ -3721,282 +3721,282 @@
           </p:nvSpPr>
           <p:spPr>
             <a:xfrm>
-              <a:off x="1393431" y="1896563"/>
-              <a:ext cx="6827869" cy="3651698"/>
+              <a:off x="1393431" y="2073503"/>
+              <a:ext cx="6827869" cy="3482845"/>
             </a:xfrm>
             <a:custGeom>
               <a:avLst/>
               <a:pathLst>
-                <a:path w="6827869" h="3651698">
+                <a:path w="6827869" h="3482845">
                   <a:moveTo>
-                    <a:pt x="6827869" y="3651698"/>
+                    <a:pt x="6827869" y="3482845"/>
                   </a:moveTo>
                   <a:lnTo>
-                    <a:pt x="6751237" y="3651566"/>
-                  </a:lnTo>
-                  <a:lnTo>
-                    <a:pt x="6674604" y="3651416"/>
-                  </a:lnTo>
-                  <a:lnTo>
-                    <a:pt x="6597972" y="3651244"/>
-                  </a:lnTo>
-                  <a:lnTo>
-                    <a:pt x="6521339" y="3651048"/>
-                  </a:lnTo>
-                  <a:lnTo>
-                    <a:pt x="6444707" y="3650825"/>
-                  </a:lnTo>
-                  <a:lnTo>
-                    <a:pt x="6368074" y="3650571"/>
-                  </a:lnTo>
-                  <a:lnTo>
-                    <a:pt x="6291441" y="3650282"/>
-                  </a:lnTo>
-                  <a:lnTo>
-                    <a:pt x="6214809" y="3649952"/>
-                  </a:lnTo>
-                  <a:lnTo>
-                    <a:pt x="6138176" y="3649575"/>
-                  </a:lnTo>
-                  <a:lnTo>
-                    <a:pt x="6061544" y="3649146"/>
-                  </a:lnTo>
-                  <a:lnTo>
-                    <a:pt x="5984911" y="3648657"/>
-                  </a:lnTo>
-                  <a:lnTo>
-                    <a:pt x="5908279" y="3648100"/>
-                  </a:lnTo>
-                  <a:lnTo>
-                    <a:pt x="5831646" y="3647465"/>
-                  </a:lnTo>
-                  <a:lnTo>
-                    <a:pt x="5755014" y="3646741"/>
-                  </a:lnTo>
-                  <a:lnTo>
-                    <a:pt x="5678381" y="3645916"/>
-                  </a:lnTo>
-                  <a:lnTo>
-                    <a:pt x="5601749" y="3644976"/>
-                  </a:lnTo>
-                  <a:lnTo>
-                    <a:pt x="5525116" y="3643904"/>
-                  </a:lnTo>
-                  <a:lnTo>
-                    <a:pt x="5448483" y="3642683"/>
-                  </a:lnTo>
-                  <a:lnTo>
-                    <a:pt x="5371851" y="3641290"/>
-                  </a:lnTo>
-                  <a:lnTo>
-                    <a:pt x="5295218" y="3639703"/>
-                  </a:lnTo>
-                  <a:lnTo>
-                    <a:pt x="5218586" y="3637894"/>
-                  </a:lnTo>
-                  <a:lnTo>
-                    <a:pt x="5141953" y="3635832"/>
-                  </a:lnTo>
-                  <a:lnTo>
-                    <a:pt x="5065321" y="3633482"/>
-                  </a:lnTo>
-                  <a:lnTo>
-                    <a:pt x="4988688" y="3630804"/>
-                  </a:lnTo>
-                  <a:lnTo>
-                    <a:pt x="4912056" y="3627751"/>
-                  </a:lnTo>
-                  <a:lnTo>
-                    <a:pt x="4835423" y="3624271"/>
-                  </a:lnTo>
-                  <a:lnTo>
-                    <a:pt x="4758790" y="3620305"/>
-                  </a:lnTo>
-                  <a:lnTo>
-                    <a:pt x="4682158" y="3615784"/>
-                  </a:lnTo>
-                  <a:lnTo>
-                    <a:pt x="4605525" y="3610631"/>
-                  </a:lnTo>
-                  <a:lnTo>
-                    <a:pt x="4528893" y="3604759"/>
-                  </a:lnTo>
-                  <a:lnTo>
-                    <a:pt x="4452260" y="3598065"/>
-                  </a:lnTo>
-                  <a:lnTo>
-                    <a:pt x="4375628" y="3590435"/>
-                  </a:lnTo>
-                  <a:lnTo>
-                    <a:pt x="4298995" y="3581739"/>
-                  </a:lnTo>
-                  <a:lnTo>
-                    <a:pt x="4222363" y="3571827"/>
-                  </a:lnTo>
-                  <a:lnTo>
-                    <a:pt x="4145730" y="3560530"/>
-                  </a:lnTo>
-                  <a:lnTo>
-                    <a:pt x="4069098" y="3547653"/>
-                  </a:lnTo>
-                  <a:lnTo>
-                    <a:pt x="3992465" y="3532977"/>
-                  </a:lnTo>
-                  <a:lnTo>
-                    <a:pt x="3915832" y="3516248"/>
-                  </a:lnTo>
-                  <a:lnTo>
-                    <a:pt x="3839200" y="3497182"/>
-                  </a:lnTo>
-                  <a:lnTo>
-                    <a:pt x="3762567" y="3475449"/>
-                  </a:lnTo>
-                  <a:lnTo>
-                    <a:pt x="3685935" y="3450679"/>
-                  </a:lnTo>
-                  <a:lnTo>
-                    <a:pt x="3609302" y="3422447"/>
-                  </a:lnTo>
-                  <a:lnTo>
-                    <a:pt x="3532670" y="3390267"/>
-                  </a:lnTo>
-                  <a:lnTo>
-                    <a:pt x="3456037" y="3353590"/>
-                  </a:lnTo>
-                  <a:lnTo>
-                    <a:pt x="3379405" y="3311784"/>
-                  </a:lnTo>
-                  <a:lnTo>
-                    <a:pt x="3302772" y="3264136"/>
-                  </a:lnTo>
-                  <a:lnTo>
-                    <a:pt x="3226140" y="3209826"/>
-                  </a:lnTo>
-                  <a:lnTo>
-                    <a:pt x="3149507" y="3147924"/>
-                  </a:lnTo>
-                  <a:lnTo>
-                    <a:pt x="3072874" y="3077369"/>
-                  </a:lnTo>
-                  <a:lnTo>
-                    <a:pt x="2996242" y="2996950"/>
-                  </a:lnTo>
-                  <a:lnTo>
-                    <a:pt x="2919609" y="2905290"/>
-                  </a:lnTo>
-                  <a:lnTo>
-                    <a:pt x="2842977" y="2800817"/>
-                  </a:lnTo>
-                  <a:lnTo>
-                    <a:pt x="2766344" y="2754067"/>
-                  </a:lnTo>
-                  <a:lnTo>
-                    <a:pt x="2689712" y="2718473"/>
-                  </a:lnTo>
-                  <a:lnTo>
-                    <a:pt x="2613079" y="2681470"/>
-                  </a:lnTo>
-                  <a:lnTo>
-                    <a:pt x="2536447" y="2643000"/>
-                  </a:lnTo>
-                  <a:lnTo>
-                    <a:pt x="2459814" y="2603007"/>
-                  </a:lnTo>
-                  <a:lnTo>
-                    <a:pt x="2383181" y="2561430"/>
-                  </a:lnTo>
-                  <a:lnTo>
-                    <a:pt x="2306549" y="2518205"/>
-                  </a:lnTo>
-                  <a:lnTo>
-                    <a:pt x="2229916" y="2473269"/>
-                  </a:lnTo>
-                  <a:lnTo>
-                    <a:pt x="2153284" y="2426552"/>
-                  </a:lnTo>
-                  <a:lnTo>
-                    <a:pt x="2076651" y="2377985"/>
-                  </a:lnTo>
-                  <a:lnTo>
-                    <a:pt x="2000019" y="2327494"/>
-                  </a:lnTo>
-                  <a:lnTo>
-                    <a:pt x="1923386" y="2275003"/>
-                  </a:lnTo>
-                  <a:lnTo>
-                    <a:pt x="1846754" y="2220433"/>
-                  </a:lnTo>
-                  <a:lnTo>
-                    <a:pt x="1770121" y="2163701"/>
-                  </a:lnTo>
-                  <a:lnTo>
-                    <a:pt x="1693489" y="2104722"/>
-                  </a:lnTo>
-                  <a:lnTo>
-                    <a:pt x="1616856" y="2043407"/>
-                  </a:lnTo>
-                  <a:lnTo>
-                    <a:pt x="1540223" y="1979663"/>
-                  </a:lnTo>
-                  <a:lnTo>
-                    <a:pt x="1463591" y="1913394"/>
-                  </a:lnTo>
-                  <a:lnTo>
-                    <a:pt x="1386958" y="1844500"/>
-                  </a:lnTo>
-                  <a:lnTo>
-                    <a:pt x="1310326" y="1772878"/>
-                  </a:lnTo>
-                  <a:lnTo>
-                    <a:pt x="1233693" y="1698418"/>
-                  </a:lnTo>
-                  <a:lnTo>
-                    <a:pt x="1157061" y="1621008"/>
-                  </a:lnTo>
-                  <a:lnTo>
-                    <a:pt x="1080428" y="1540532"/>
-                  </a:lnTo>
-                  <a:lnTo>
-                    <a:pt x="1003796" y="1456869"/>
-                  </a:lnTo>
-                  <a:lnTo>
-                    <a:pt x="927163" y="1369891"/>
-                  </a:lnTo>
-                  <a:lnTo>
-                    <a:pt x="850530" y="1279469"/>
-                  </a:lnTo>
-                  <a:lnTo>
-                    <a:pt x="773898" y="1185464"/>
-                  </a:lnTo>
-                  <a:lnTo>
-                    <a:pt x="697265" y="1087736"/>
-                  </a:lnTo>
-                  <a:lnTo>
-                    <a:pt x="620633" y="986137"/>
-                  </a:lnTo>
-                  <a:lnTo>
-                    <a:pt x="544000" y="880513"/>
-                  </a:lnTo>
-                  <a:lnTo>
-                    <a:pt x="467368" y="770705"/>
-                  </a:lnTo>
-                  <a:lnTo>
-                    <a:pt x="390735" y="656548"/>
-                  </a:lnTo>
-                  <a:lnTo>
-                    <a:pt x="314103" y="537869"/>
-                  </a:lnTo>
-                  <a:lnTo>
-                    <a:pt x="237470" y="414488"/>
-                  </a:lnTo>
-                  <a:lnTo>
-                    <a:pt x="160838" y="286221"/>
-                  </a:lnTo>
-                  <a:lnTo>
-                    <a:pt x="84205" y="152872"/>
-                  </a:lnTo>
-                  <a:lnTo>
-                    <a:pt x="7572" y="14242"/>
+                    <a:pt x="6751237" y="3482719"/>
+                  </a:lnTo>
+                  <a:lnTo>
+                    <a:pt x="6674604" y="3482575"/>
+                  </a:lnTo>
+                  <a:lnTo>
+                    <a:pt x="6597972" y="3482412"/>
+                  </a:lnTo>
+                  <a:lnTo>
+                    <a:pt x="6521339" y="3482225"/>
+                  </a:lnTo>
+                  <a:lnTo>
+                    <a:pt x="6444707" y="3482013"/>
+                  </a:lnTo>
+                  <a:lnTo>
+                    <a:pt x="6368074" y="3481770"/>
+                  </a:lnTo>
+                  <a:lnTo>
+                    <a:pt x="6291441" y="3481494"/>
+                  </a:lnTo>
+                  <a:lnTo>
+                    <a:pt x="6214809" y="3481179"/>
+                  </a:lnTo>
+                  <a:lnTo>
+                    <a:pt x="6138176" y="3480820"/>
+                  </a:lnTo>
+                  <a:lnTo>
+                    <a:pt x="6061544" y="3480411"/>
+                  </a:lnTo>
+                  <a:lnTo>
+                    <a:pt x="5984911" y="3479945"/>
+                  </a:lnTo>
+                  <a:lnTo>
+                    <a:pt x="5908279" y="3479413"/>
+                  </a:lnTo>
+                  <a:lnTo>
+                    <a:pt x="5831646" y="3478808"/>
+                  </a:lnTo>
+                  <a:lnTo>
+                    <a:pt x="5755014" y="3478117"/>
+                  </a:lnTo>
+                  <a:lnTo>
+                    <a:pt x="5678381" y="3477331"/>
+                  </a:lnTo>
+                  <a:lnTo>
+                    <a:pt x="5601749" y="3476434"/>
+                  </a:lnTo>
+                  <a:lnTo>
+                    <a:pt x="5525116" y="3475411"/>
+                  </a:lnTo>
+                  <a:lnTo>
+                    <a:pt x="5448483" y="3474246"/>
+                  </a:lnTo>
+                  <a:lnTo>
+                    <a:pt x="5371851" y="3472918"/>
+                  </a:lnTo>
+                  <a:lnTo>
+                    <a:pt x="5295218" y="3471404"/>
+                  </a:lnTo>
+                  <a:lnTo>
+                    <a:pt x="5218586" y="3469679"/>
+                  </a:lnTo>
+                  <a:lnTo>
+                    <a:pt x="5141953" y="3467713"/>
+                  </a:lnTo>
+                  <a:lnTo>
+                    <a:pt x="5065321" y="3465471"/>
+                  </a:lnTo>
+                  <a:lnTo>
+                    <a:pt x="4988688" y="3462917"/>
+                  </a:lnTo>
+                  <a:lnTo>
+                    <a:pt x="4912056" y="3460005"/>
+                  </a:lnTo>
+                  <a:lnTo>
+                    <a:pt x="4835423" y="3456686"/>
+                  </a:lnTo>
+                  <a:lnTo>
+                    <a:pt x="4758790" y="3452903"/>
+                  </a:lnTo>
+                  <a:lnTo>
+                    <a:pt x="4682158" y="3448592"/>
+                  </a:lnTo>
+                  <a:lnTo>
+                    <a:pt x="4605525" y="3443677"/>
+                  </a:lnTo>
+                  <a:lnTo>
+                    <a:pt x="4528893" y="3438076"/>
+                  </a:lnTo>
+                  <a:lnTo>
+                    <a:pt x="4452260" y="3431692"/>
+                  </a:lnTo>
+                  <a:lnTo>
+                    <a:pt x="4375628" y="3424415"/>
+                  </a:lnTo>
+                  <a:lnTo>
+                    <a:pt x="4298995" y="3416121"/>
+                  </a:lnTo>
+                  <a:lnTo>
+                    <a:pt x="4222363" y="3406667"/>
+                  </a:lnTo>
+                  <a:lnTo>
+                    <a:pt x="4145730" y="3395892"/>
+                  </a:lnTo>
+                  <a:lnTo>
+                    <a:pt x="4069098" y="3383611"/>
+                  </a:lnTo>
+                  <a:lnTo>
+                    <a:pt x="3992465" y="3369613"/>
+                  </a:lnTo>
+                  <a:lnTo>
+                    <a:pt x="3915832" y="3353658"/>
+                  </a:lnTo>
+                  <a:lnTo>
+                    <a:pt x="3839200" y="3335473"/>
+                  </a:lnTo>
+                  <a:lnTo>
+                    <a:pt x="3762567" y="3314746"/>
+                  </a:lnTo>
+                  <a:lnTo>
+                    <a:pt x="3685935" y="3291121"/>
+                  </a:lnTo>
+                  <a:lnTo>
+                    <a:pt x="3609302" y="3264194"/>
+                  </a:lnTo>
+                  <a:lnTo>
+                    <a:pt x="3532670" y="3233503"/>
+                  </a:lnTo>
+                  <a:lnTo>
+                    <a:pt x="3456037" y="3198521"/>
+                  </a:lnTo>
+                  <a:lnTo>
+                    <a:pt x="3379405" y="3158649"/>
+                  </a:lnTo>
+                  <a:lnTo>
+                    <a:pt x="3302772" y="3113203"/>
+                  </a:lnTo>
+                  <a:lnTo>
+                    <a:pt x="3226140" y="3061404"/>
+                  </a:lnTo>
+                  <a:lnTo>
+                    <a:pt x="3149507" y="3002365"/>
+                  </a:lnTo>
+                  <a:lnTo>
+                    <a:pt x="3072874" y="2935072"/>
+                  </a:lnTo>
+                  <a:lnTo>
+                    <a:pt x="2996242" y="2858372"/>
+                  </a:lnTo>
+                  <a:lnTo>
+                    <a:pt x="2919609" y="2770951"/>
+                  </a:lnTo>
+                  <a:lnTo>
+                    <a:pt x="2842977" y="2671308"/>
+                  </a:lnTo>
+                  <a:lnTo>
+                    <a:pt x="2766344" y="2626720"/>
+                  </a:lnTo>
+                  <a:lnTo>
+                    <a:pt x="2689712" y="2592772"/>
+                  </a:lnTo>
+                  <a:lnTo>
+                    <a:pt x="2613079" y="2557480"/>
+                  </a:lnTo>
+                  <a:lnTo>
+                    <a:pt x="2536447" y="2520789"/>
+                  </a:lnTo>
+                  <a:lnTo>
+                    <a:pt x="2459814" y="2482645"/>
+                  </a:lnTo>
+                  <a:lnTo>
+                    <a:pt x="2383181" y="2442990"/>
+                  </a:lnTo>
+                  <a:lnTo>
+                    <a:pt x="2306549" y="2401764"/>
+                  </a:lnTo>
+                  <a:lnTo>
+                    <a:pt x="2229916" y="2358906"/>
+                  </a:lnTo>
+                  <a:lnTo>
+                    <a:pt x="2153284" y="2314349"/>
+                  </a:lnTo>
+                  <a:lnTo>
+                    <a:pt x="2076651" y="2268028"/>
+                  </a:lnTo>
+                  <a:lnTo>
+                    <a:pt x="2000019" y="2219872"/>
+                  </a:lnTo>
+                  <a:lnTo>
+                    <a:pt x="1923386" y="2169808"/>
+                  </a:lnTo>
+                  <a:lnTo>
+                    <a:pt x="1846754" y="2117761"/>
+                  </a:lnTo>
+                  <a:lnTo>
+                    <a:pt x="1770121" y="2063653"/>
+                  </a:lnTo>
+                  <a:lnTo>
+                    <a:pt x="1693489" y="2007401"/>
+                  </a:lnTo>
+                  <a:lnTo>
+                    <a:pt x="1616856" y="1948921"/>
+                  </a:lnTo>
+                  <a:lnTo>
+                    <a:pt x="1540223" y="1888124"/>
+                  </a:lnTo>
+                  <a:lnTo>
+                    <a:pt x="1463591" y="1824920"/>
+                  </a:lnTo>
+                  <a:lnTo>
+                    <a:pt x="1386958" y="1759211"/>
+                  </a:lnTo>
+                  <a:lnTo>
+                    <a:pt x="1310326" y="1690900"/>
+                  </a:lnTo>
+                  <a:lnTo>
+                    <a:pt x="1233693" y="1619883"/>
+                  </a:lnTo>
+                  <a:lnTo>
+                    <a:pt x="1157061" y="1546053"/>
+                  </a:lnTo>
+                  <a:lnTo>
+                    <a:pt x="1080428" y="1469299"/>
+                  </a:lnTo>
+                  <a:lnTo>
+                    <a:pt x="1003796" y="1389504"/>
+                  </a:lnTo>
+                  <a:lnTo>
+                    <a:pt x="927163" y="1306548"/>
+                  </a:lnTo>
+                  <a:lnTo>
+                    <a:pt x="850530" y="1220307"/>
+                  </a:lnTo>
+                  <a:lnTo>
+                    <a:pt x="773898" y="1130649"/>
+                  </a:lnTo>
+                  <a:lnTo>
+                    <a:pt x="697265" y="1037439"/>
+                  </a:lnTo>
+                  <a:lnTo>
+                    <a:pt x="620633" y="940538"/>
+                  </a:lnTo>
+                  <a:lnTo>
+                    <a:pt x="544000" y="839798"/>
+                  </a:lnTo>
+                  <a:lnTo>
+                    <a:pt x="467368" y="735068"/>
+                  </a:lnTo>
+                  <a:lnTo>
+                    <a:pt x="390735" y="626189"/>
+                  </a:lnTo>
+                  <a:lnTo>
+                    <a:pt x="314103" y="512998"/>
+                  </a:lnTo>
+                  <a:lnTo>
+                    <a:pt x="237470" y="395322"/>
+                  </a:lnTo>
+                  <a:lnTo>
+                    <a:pt x="160838" y="272986"/>
+                  </a:lnTo>
+                  <a:lnTo>
+                    <a:pt x="84205" y="145804"/>
+                  </a:lnTo>
+                  <a:lnTo>
+                    <a:pt x="7572" y="13583"/>
                   </a:lnTo>
                   <a:lnTo>
                     <a:pt x="0" y="0"/>
@@ -4019,225 +4019,225 @@
           </p:nvSpPr>
           <p:spPr>
             <a:xfrm>
-              <a:off x="2928313" y="1896563"/>
-              <a:ext cx="5292987" cy="3642234"/>
+              <a:off x="2928313" y="2073503"/>
+              <a:ext cx="5292987" cy="3473819"/>
             </a:xfrm>
             <a:custGeom>
               <a:avLst/>
               <a:pathLst>
-                <a:path w="5292987" h="3642234">
+                <a:path w="5292987" h="3473819">
                   <a:moveTo>
                     <a:pt x="0" y="0"/>
                   </a:moveTo>
                   <a:lnTo>
-                    <a:pt x="5341" y="22406"/>
-                  </a:lnTo>
-                  <a:lnTo>
-                    <a:pt x="81974" y="317712"/>
-                  </a:lnTo>
-                  <a:lnTo>
-                    <a:pt x="158606" y="588996"/>
-                  </a:lnTo>
-                  <a:lnTo>
-                    <a:pt x="235239" y="838211"/>
-                  </a:lnTo>
-                  <a:lnTo>
-                    <a:pt x="311871" y="1067155"/>
-                  </a:lnTo>
-                  <a:lnTo>
-                    <a:pt x="388504" y="1277474"/>
-                  </a:lnTo>
-                  <a:lnTo>
-                    <a:pt x="465136" y="1470685"/>
-                  </a:lnTo>
-                  <a:lnTo>
-                    <a:pt x="541769" y="1648179"/>
-                  </a:lnTo>
-                  <a:lnTo>
-                    <a:pt x="618401" y="1811234"/>
-                  </a:lnTo>
-                  <a:lnTo>
-                    <a:pt x="695034" y="1961026"/>
-                  </a:lnTo>
-                  <a:lnTo>
-                    <a:pt x="771667" y="2098632"/>
-                  </a:lnTo>
-                  <a:lnTo>
-                    <a:pt x="848299" y="2225045"/>
-                  </a:lnTo>
-                  <a:lnTo>
-                    <a:pt x="924932" y="2341175"/>
-                  </a:lnTo>
-                  <a:lnTo>
-                    <a:pt x="1001564" y="2447858"/>
-                  </a:lnTo>
-                  <a:lnTo>
-                    <a:pt x="1078197" y="2545862"/>
-                  </a:lnTo>
-                  <a:lnTo>
-                    <a:pt x="1154829" y="2635895"/>
-                  </a:lnTo>
-                  <a:lnTo>
-                    <a:pt x="1231462" y="2718603"/>
-                  </a:lnTo>
-                  <a:lnTo>
-                    <a:pt x="1308094" y="2794584"/>
-                  </a:lnTo>
-                  <a:lnTo>
-                    <a:pt x="1384727" y="2864384"/>
-                  </a:lnTo>
-                  <a:lnTo>
-                    <a:pt x="1461359" y="2928506"/>
-                  </a:lnTo>
-                  <a:lnTo>
-                    <a:pt x="1537992" y="2987411"/>
-                  </a:lnTo>
-                  <a:lnTo>
-                    <a:pt x="1614625" y="3041525"/>
-                  </a:lnTo>
-                  <a:lnTo>
-                    <a:pt x="1691257" y="3091237"/>
-                  </a:lnTo>
-                  <a:lnTo>
-                    <a:pt x="1767890" y="3136906"/>
-                  </a:lnTo>
-                  <a:lnTo>
-                    <a:pt x="1844522" y="3178859"/>
-                  </a:lnTo>
-                  <a:lnTo>
-                    <a:pt x="1921155" y="3217399"/>
-                  </a:lnTo>
-                  <a:lnTo>
-                    <a:pt x="1997787" y="3252805"/>
-                  </a:lnTo>
-                  <a:lnTo>
-                    <a:pt x="2074420" y="3285330"/>
-                  </a:lnTo>
-                  <a:lnTo>
-                    <a:pt x="2151052" y="3315210"/>
-                  </a:lnTo>
-                  <a:lnTo>
-                    <a:pt x="2227685" y="3342659"/>
-                  </a:lnTo>
-                  <a:lnTo>
-                    <a:pt x="2304318" y="3367875"/>
-                  </a:lnTo>
-                  <a:lnTo>
-                    <a:pt x="2380950" y="3391039"/>
-                  </a:lnTo>
-                  <a:lnTo>
-                    <a:pt x="2457583" y="3412320"/>
-                  </a:lnTo>
-                  <a:lnTo>
-                    <a:pt x="2534215" y="3431869"/>
-                  </a:lnTo>
-                  <a:lnTo>
-                    <a:pt x="2610848" y="3449828"/>
-                  </a:lnTo>
-                  <a:lnTo>
-                    <a:pt x="2687480" y="3466327"/>
-                  </a:lnTo>
-                  <a:lnTo>
-                    <a:pt x="2764113" y="3481483"/>
-                  </a:lnTo>
-                  <a:lnTo>
-                    <a:pt x="2840745" y="3495406"/>
-                  </a:lnTo>
-                  <a:lnTo>
-                    <a:pt x="2917378" y="3508197"/>
-                  </a:lnTo>
-                  <a:lnTo>
-                    <a:pt x="2994010" y="3519947"/>
-                  </a:lnTo>
-                  <a:lnTo>
-                    <a:pt x="3070643" y="3530741"/>
-                  </a:lnTo>
-                  <a:lnTo>
-                    <a:pt x="3147276" y="3540657"/>
-                  </a:lnTo>
-                  <a:lnTo>
-                    <a:pt x="3223908" y="3549767"/>
-                  </a:lnTo>
-                  <a:lnTo>
-                    <a:pt x="3300541" y="3558136"/>
-                  </a:lnTo>
-                  <a:lnTo>
-                    <a:pt x="3377173" y="3565823"/>
-                  </a:lnTo>
-                  <a:lnTo>
-                    <a:pt x="3453806" y="3572886"/>
-                  </a:lnTo>
-                  <a:lnTo>
-                    <a:pt x="3530438" y="3579374"/>
-                  </a:lnTo>
-                  <a:lnTo>
-                    <a:pt x="3607071" y="3585334"/>
-                  </a:lnTo>
-                  <a:lnTo>
-                    <a:pt x="3683703" y="3590809"/>
-                  </a:lnTo>
-                  <a:lnTo>
-                    <a:pt x="3760336" y="3595839"/>
-                  </a:lnTo>
-                  <a:lnTo>
-                    <a:pt x="3836968" y="3600460"/>
-                  </a:lnTo>
-                  <a:lnTo>
-                    <a:pt x="3913601" y="3604705"/>
-                  </a:lnTo>
-                  <a:lnTo>
-                    <a:pt x="3990234" y="3608605"/>
-                  </a:lnTo>
-                  <a:lnTo>
-                    <a:pt x="4066866" y="3612187"/>
-                  </a:lnTo>
-                  <a:lnTo>
-                    <a:pt x="4143499" y="3615478"/>
-                  </a:lnTo>
-                  <a:lnTo>
-                    <a:pt x="4220131" y="3618501"/>
-                  </a:lnTo>
-                  <a:lnTo>
-                    <a:pt x="4296764" y="3621279"/>
-                  </a:lnTo>
-                  <a:lnTo>
-                    <a:pt x="4373396" y="3623830"/>
-                  </a:lnTo>
-                  <a:lnTo>
-                    <a:pt x="4450029" y="3626174"/>
-                  </a:lnTo>
-                  <a:lnTo>
-                    <a:pt x="4526661" y="3628327"/>
-                  </a:lnTo>
-                  <a:lnTo>
-                    <a:pt x="4603294" y="3630305"/>
-                  </a:lnTo>
-                  <a:lnTo>
-                    <a:pt x="4679927" y="3632122"/>
-                  </a:lnTo>
-                  <a:lnTo>
-                    <a:pt x="4756559" y="3633791"/>
-                  </a:lnTo>
-                  <a:lnTo>
-                    <a:pt x="4833192" y="3635325"/>
-                  </a:lnTo>
-                  <a:lnTo>
-                    <a:pt x="4909824" y="3636734"/>
-                  </a:lnTo>
-                  <a:lnTo>
-                    <a:pt x="4986457" y="3638028"/>
-                  </a:lnTo>
-                  <a:lnTo>
-                    <a:pt x="5063089" y="3639217"/>
-                  </a:lnTo>
-                  <a:lnTo>
-                    <a:pt x="5139722" y="3640309"/>
-                  </a:lnTo>
-                  <a:lnTo>
-                    <a:pt x="5216354" y="3641312"/>
-                  </a:lnTo>
-                  <a:lnTo>
-                    <a:pt x="5292987" y="3642234"/>
+                    <a:pt x="5341" y="21370"/>
+                  </a:lnTo>
+                  <a:lnTo>
+                    <a:pt x="81974" y="303021"/>
+                  </a:lnTo>
+                  <a:lnTo>
+                    <a:pt x="158606" y="561761"/>
+                  </a:lnTo>
+                  <a:lnTo>
+                    <a:pt x="235239" y="799453"/>
+                  </a:lnTo>
+                  <a:lnTo>
+                    <a:pt x="311871" y="1017810"/>
+                  </a:lnTo>
+                  <a:lnTo>
+                    <a:pt x="388504" y="1218404"/>
+                  </a:lnTo>
+                  <a:lnTo>
+                    <a:pt x="465136" y="1402681"/>
+                  </a:lnTo>
+                  <a:lnTo>
+                    <a:pt x="541769" y="1571968"/>
+                  </a:lnTo>
+                  <a:lnTo>
+                    <a:pt x="618401" y="1727483"/>
+                  </a:lnTo>
+                  <a:lnTo>
+                    <a:pt x="695034" y="1870349"/>
+                  </a:lnTo>
+                  <a:lnTo>
+                    <a:pt x="771667" y="2001592"/>
+                  </a:lnTo>
+                  <a:lnTo>
+                    <a:pt x="848299" y="2122160"/>
+                  </a:lnTo>
+                  <a:lnTo>
+                    <a:pt x="924932" y="2232920"/>
+                  </a:lnTo>
+                  <a:lnTo>
+                    <a:pt x="1001564" y="2334670"/>
+                  </a:lnTo>
+                  <a:lnTo>
+                    <a:pt x="1078197" y="2428143"/>
+                  </a:lnTo>
+                  <a:lnTo>
+                    <a:pt x="1154829" y="2514012"/>
+                  </a:lnTo>
+                  <a:lnTo>
+                    <a:pt x="1231462" y="2592896"/>
+                  </a:lnTo>
+                  <a:lnTo>
+                    <a:pt x="1308094" y="2665363"/>
+                  </a:lnTo>
+                  <a:lnTo>
+                    <a:pt x="1384727" y="2731936"/>
+                  </a:lnTo>
+                  <a:lnTo>
+                    <a:pt x="1461359" y="2793092"/>
+                  </a:lnTo>
+                  <a:lnTo>
+                    <a:pt x="1537992" y="2849275"/>
+                  </a:lnTo>
+                  <a:lnTo>
+                    <a:pt x="1614625" y="2900886"/>
+                  </a:lnTo>
+                  <a:lnTo>
+                    <a:pt x="1691257" y="2948300"/>
+                  </a:lnTo>
+                  <a:lnTo>
+                    <a:pt x="1767890" y="2991856"/>
+                  </a:lnTo>
+                  <a:lnTo>
+                    <a:pt x="1844522" y="3031870"/>
+                  </a:lnTo>
+                  <a:lnTo>
+                    <a:pt x="1921155" y="3068628"/>
+                  </a:lnTo>
+                  <a:lnTo>
+                    <a:pt x="1997787" y="3102396"/>
+                  </a:lnTo>
+                  <a:lnTo>
+                    <a:pt x="2074420" y="3133418"/>
+                  </a:lnTo>
+                  <a:lnTo>
+                    <a:pt x="2151052" y="3161916"/>
+                  </a:lnTo>
+                  <a:lnTo>
+                    <a:pt x="2227685" y="3188095"/>
+                  </a:lnTo>
+                  <a:lnTo>
+                    <a:pt x="2304318" y="3212145"/>
+                  </a:lnTo>
+                  <a:lnTo>
+                    <a:pt x="2380950" y="3234239"/>
+                  </a:lnTo>
+                  <a:lnTo>
+                    <a:pt x="2457583" y="3254536"/>
+                  </a:lnTo>
+                  <a:lnTo>
+                    <a:pt x="2534215" y="3273181"/>
+                  </a:lnTo>
+                  <a:lnTo>
+                    <a:pt x="2610848" y="3290310"/>
+                  </a:lnTo>
+                  <a:lnTo>
+                    <a:pt x="2687480" y="3306045"/>
+                  </a:lnTo>
+                  <a:lnTo>
+                    <a:pt x="2764113" y="3320500"/>
+                  </a:lnTo>
+                  <a:lnTo>
+                    <a:pt x="2840745" y="3333780"/>
+                  </a:lnTo>
+                  <a:lnTo>
+                    <a:pt x="2917378" y="3345979"/>
+                  </a:lnTo>
+                  <a:lnTo>
+                    <a:pt x="2994010" y="3357186"/>
+                  </a:lnTo>
+                  <a:lnTo>
+                    <a:pt x="3070643" y="3367481"/>
+                  </a:lnTo>
+                  <a:lnTo>
+                    <a:pt x="3147276" y="3376939"/>
+                  </a:lnTo>
+                  <a:lnTo>
+                    <a:pt x="3223908" y="3385627"/>
+                  </a:lnTo>
+                  <a:lnTo>
+                    <a:pt x="3300541" y="3393609"/>
+                  </a:lnTo>
+                  <a:lnTo>
+                    <a:pt x="3377173" y="3400941"/>
+                  </a:lnTo>
+                  <a:lnTo>
+                    <a:pt x="3453806" y="3407677"/>
+                  </a:lnTo>
+                  <a:lnTo>
+                    <a:pt x="3530438" y="3413865"/>
+                  </a:lnTo>
+                  <a:lnTo>
+                    <a:pt x="3607071" y="3419550"/>
+                  </a:lnTo>
+                  <a:lnTo>
+                    <a:pt x="3683703" y="3424772"/>
+                  </a:lnTo>
+                  <a:lnTo>
+                    <a:pt x="3760336" y="3429569"/>
+                  </a:lnTo>
+                  <a:lnTo>
+                    <a:pt x="3836968" y="3433976"/>
+                  </a:lnTo>
+                  <a:lnTo>
+                    <a:pt x="3913601" y="3438025"/>
+                  </a:lnTo>
+                  <a:lnTo>
+                    <a:pt x="3990234" y="3441744"/>
+                  </a:lnTo>
+                  <a:lnTo>
+                    <a:pt x="4066866" y="3445161"/>
+                  </a:lnTo>
+                  <a:lnTo>
+                    <a:pt x="4143499" y="3448300"/>
+                  </a:lnTo>
+                  <a:lnTo>
+                    <a:pt x="4220131" y="3451183"/>
+                  </a:lnTo>
+                  <a:lnTo>
+                    <a:pt x="4296764" y="3453832"/>
+                  </a:lnTo>
+                  <a:lnTo>
+                    <a:pt x="4373396" y="3456265"/>
+                  </a:lnTo>
+                  <a:lnTo>
+                    <a:pt x="4450029" y="3458501"/>
+                  </a:lnTo>
+                  <a:lnTo>
+                    <a:pt x="4526661" y="3460554"/>
+                  </a:lnTo>
+                  <a:lnTo>
+                    <a:pt x="4603294" y="3462441"/>
+                  </a:lnTo>
+                  <a:lnTo>
+                    <a:pt x="4679927" y="3464174"/>
+                  </a:lnTo>
+                  <a:lnTo>
+                    <a:pt x="4756559" y="3465766"/>
+                  </a:lnTo>
+                  <a:lnTo>
+                    <a:pt x="4833192" y="3467229"/>
+                  </a:lnTo>
+                  <a:lnTo>
+                    <a:pt x="4909824" y="3468573"/>
+                  </a:lnTo>
+                  <a:lnTo>
+                    <a:pt x="4986457" y="3469807"/>
+                  </a:lnTo>
+                  <a:lnTo>
+                    <a:pt x="5063089" y="3470941"/>
+                  </a:lnTo>
+                  <a:lnTo>
+                    <a:pt x="5139722" y="3471982"/>
+                  </a:lnTo>
+                  <a:lnTo>
+                    <a:pt x="5216354" y="3472939"/>
+                  </a:lnTo>
+                  <a:lnTo>
+                    <a:pt x="5292987" y="3473819"/>
                   </a:lnTo>
                 </a:path>
               </a:pathLst>
@@ -4266,7 +4266,7 @@
           </p:nvSpPr>
           <p:spPr>
             <a:xfrm>
-              <a:off x="817517" y="4679530"/>
+              <a:off x="817517" y="4727786"/>
               <a:ext cx="7799693" cy="0"/>
             </a:xfrm>
             <a:custGeom>
@@ -4309,15 +4309,15 @@
           </p:nvSpPr>
           <p:spPr>
             <a:xfrm>
-              <a:off x="4224261" y="1896563"/>
-              <a:ext cx="0" cy="3826579"/>
+              <a:off x="4224261" y="2073503"/>
+              <a:ext cx="0" cy="3649639"/>
             </a:xfrm>
             <a:custGeom>
               <a:avLst/>
               <a:pathLst>
-                <a:path w="0" h="3826579">
+                <a:path w="0" h="3649639">
                   <a:moveTo>
-                    <a:pt x="0" y="3826579"/>
+                    <a:pt x="0" y="3649639"/>
                   </a:moveTo>
                   <a:lnTo>
                     <a:pt x="0" y="0"/>
@@ -4352,7 +4352,7 @@
           </p:nvSpPr>
           <p:spPr>
             <a:xfrm>
-              <a:off x="692708" y="5509156"/>
+              <a:off x="692708" y="5517199"/>
               <a:ext cx="62179" cy="80101"/>
             </a:xfrm>
             <a:prstGeom prst="rect">
@@ -4398,7 +4398,7 @@
           </p:nvSpPr>
           <p:spPr>
             <a:xfrm>
-              <a:off x="692708" y="4639479"/>
+              <a:off x="692708" y="4687735"/>
               <a:ext cx="62179" cy="80101"/>
             </a:xfrm>
             <a:prstGeom prst="rect">
@@ -4444,7 +4444,7 @@
           </p:nvSpPr>
           <p:spPr>
             <a:xfrm>
-              <a:off x="692708" y="3769802"/>
+              <a:off x="692708" y="3858272"/>
               <a:ext cx="62179" cy="80101"/>
             </a:xfrm>
             <a:prstGeom prst="rect">
@@ -4490,7 +4490,7 @@
           </p:nvSpPr>
           <p:spPr>
             <a:xfrm>
-              <a:off x="692708" y="2900125"/>
+              <a:off x="692708" y="3028808"/>
               <a:ext cx="62179" cy="80101"/>
             </a:xfrm>
             <a:prstGeom prst="rect">
@@ -4536,7 +4536,7 @@
           </p:nvSpPr>
           <p:spPr>
             <a:xfrm>
-              <a:off x="692708" y="2030448"/>
+              <a:off x="692708" y="2199345"/>
               <a:ext cx="62179" cy="80101"/>
             </a:xfrm>
             <a:prstGeom prst="rect">
@@ -4812,7 +4812,7 @@
           </p:nvSpPr>
           <p:spPr>
             <a:xfrm rot="-5400000">
-              <a:off x="68446" y="3759743"/>
+              <a:off x="68446" y="3848213"/>
               <a:ext cx="1016904" cy="100218"/>
             </a:xfrm>
             <a:prstGeom prst="rect">
@@ -4853,6 +4853,52 @@
         <p:sp>
           <p:nvSpPr>
             <p:cNvPr id="38" name="tx38"/>
+            <p:cNvSpPr/>
+            <p:nvPr/>
+          </p:nvSpPr>
+          <p:spPr>
+            <a:xfrm>
+              <a:off x="817517" y="1896563"/>
+              <a:ext cx="5753313" cy="82021"/>
+            </a:xfrm>
+            <a:prstGeom prst="rect">
+              <a:avLst/>
+            </a:prstGeom>
+            <a:noFill/>
+          </p:spPr>
+          <p:txBody>
+            <a:bodyPr lIns="0" rIns="0" tIns="0" bIns="0" anchorCtr="1" anchor="ctr" wrap="none"/>
+            <a:lstStyle/>
+            <a:p>
+              <a:pPr algn="l" marL="0" marR="0" indent="0">
+                <a:lnSpc>
+                  <a:spcPts val="900"/>
+                </a:lnSpc>
+                <a:spcBef>
+                  <a:spcPts val="0"/>
+                </a:spcBef>
+                <a:spcAft>
+                  <a:spcPts val="0"/>
+                </a:spcAft>
+              </a:pPr>
+              <a:r>
+                <a:rPr sz="900">
+                  <a:solidFill>
+                    <a:srgbClr val="404040">
+                      <a:alpha val="100000"/>
+                    </a:srgbClr>
+                  </a:solidFill>
+                  <a:latin typeface="Helvetica"/>
+                  <a:cs typeface="Helvetica"/>
+                </a:rPr>
+                <a:t>subHR per 0.1 ratio decline: 2.67 (1.57-4.54)  |  per IQR decline (Δ = 0.30): 18.84 (3.83-92.51)  |  IQR: [0.85, 1.15]</a:t>
+              </a:r>
+            </a:p>
+          </p:txBody>
+        </p:sp>
+        <p:sp>
+          <p:nvSpPr>
+            <p:cNvPr id="39" name="tx39"/>
             <p:cNvSpPr/>
             <p:nvPr/>
           </p:nvSpPr>

--- a/docs/pptx/carbo/jx-carbo-linsubhr-ratio-hosp3.pptx
+++ b/docs/pptx/carbo/jx-carbo-linsubhr-ratio-hosp3.pptx
@@ -4859,7 +4859,7 @@
           <p:spPr>
             <a:xfrm>
               <a:off x="817517" y="1896563"/>
-              <a:ext cx="5753313" cy="82021"/>
+              <a:ext cx="6363218" cy="82021"/>
             </a:xfrm>
             <a:prstGeom prst="rect">
               <a:avLst/>
@@ -4891,7 +4891,7 @@
                   <a:latin typeface="Helvetica"/>
                   <a:cs typeface="Helvetica"/>
                 </a:rPr>
-                <a:t>subHR per 0.1 ratio decline: 2.67 (1.57-4.54)  |  per IQR decline (Δ = 0.30): 18.84 (3.83-92.51)  |  IQR: [0.85, 1.15]</a:t>
+                <a:t>subHR per 0.1 ratio decline: 2.67 (1.57-4.54), p = &lt;0.001  |  per IQR decline (Δ = 0.30): 18.84 (3.83-92.51)  |  IQR: [0.85, 1.15]</a:t>
               </a:r>
             </a:p>
           </p:txBody>

--- a/docs/pptx/carbo/jx-carbo-linsubhr-ratio-hosp3.pptx
+++ b/docs/pptx/carbo/jx-carbo-linsubhr-ratio-hosp3.pptx
@@ -2443,7 +2443,7 @@
           </p:nvSpPr>
           <p:spPr>
             <a:xfrm>
-              <a:off x="1615213" y="2073503"/>
+              <a:off x="1467192" y="2073503"/>
               <a:ext cx="0" cy="3649639"/>
             </a:xfrm>
             <a:custGeom>
@@ -2486,7 +2486,7 @@
           </p:nvSpPr>
           <p:spPr>
             <a:xfrm>
-              <a:off x="3387871" y="2073503"/>
+              <a:off x="3538150" y="2073503"/>
               <a:ext cx="0" cy="3649639"/>
             </a:xfrm>
             <a:custGeom>
@@ -2529,7 +2529,7 @@
           </p:nvSpPr>
           <p:spPr>
             <a:xfrm>
-              <a:off x="5160528" y="2073503"/>
+              <a:off x="5609107" y="2073503"/>
               <a:ext cx="0" cy="3649639"/>
             </a:xfrm>
             <a:custGeom>
@@ -2572,7 +2572,7 @@
           </p:nvSpPr>
           <p:spPr>
             <a:xfrm>
-              <a:off x="6933186" y="2073503"/>
+              <a:off x="7680065" y="2073503"/>
               <a:ext cx="0" cy="3649639"/>
             </a:xfrm>
             <a:custGeom>
@@ -2830,7 +2830,7 @@
           </p:nvSpPr>
           <p:spPr>
             <a:xfrm>
-              <a:off x="2501542" y="2073503"/>
+              <a:off x="2502671" y="2073503"/>
               <a:ext cx="0" cy="3649639"/>
             </a:xfrm>
             <a:custGeom>
@@ -2873,7 +2873,7 @@
           </p:nvSpPr>
           <p:spPr>
             <a:xfrm>
-              <a:off x="4274200" y="2073503"/>
+              <a:off x="4573628" y="2073503"/>
               <a:ext cx="0" cy="3649639"/>
             </a:xfrm>
             <a:custGeom>
@@ -2916,7 +2916,7 @@
           </p:nvSpPr>
           <p:spPr>
             <a:xfrm>
-              <a:off x="6046857" y="2073503"/>
+              <a:off x="6644586" y="2073503"/>
               <a:ext cx="0" cy="3649639"/>
             </a:xfrm>
             <a:custGeom>
@@ -2953,526 +2953,483 @@
         </p:sp>
         <p:sp>
           <p:nvSpPr>
-            <p:cNvPr id="20" name="pl20"/>
+            <p:cNvPr id="20" name="pg20"/>
             <p:cNvSpPr/>
             <p:nvPr/>
           </p:nvSpPr>
           <p:spPr>
             <a:xfrm>
-              <a:off x="7819515" y="2073503"/>
-              <a:ext cx="0" cy="3649639"/>
+              <a:off x="1881196" y="2073503"/>
+              <a:ext cx="6381482" cy="3482845"/>
             </a:xfrm>
             <a:custGeom>
               <a:avLst/>
               <a:pathLst>
-                <a:path w="0" h="3649639">
+                <a:path w="6381482" h="3482845">
                   <a:moveTo>
-                    <a:pt x="0" y="3649639"/>
+                    <a:pt x="1860723" y="0"/>
                   </a:moveTo>
                   <a:lnTo>
-                    <a:pt x="0" y="0"/>
-                  </a:lnTo>
-                  <a:lnTo>
-                    <a:pt x="0" y="0"/>
-                  </a:lnTo>
-                </a:path>
-              </a:pathLst>
-            </a:custGeom>
-            <a:ln w="13550" cap="flat">
-              <a:solidFill>
-                <a:srgbClr val="EBEBEB">
-                  <a:alpha val="100000"/>
-                </a:srgbClr>
-              </a:solidFill>
-              <a:prstDash val="solid"/>
-              <a:round/>
-            </a:ln>
-          </p:spPr>
-          <p:txBody>
-            <a:bodyPr/>
-            <a:lstStyle/>
-            <a:p/>
-          </p:txBody>
-        </p:sp>
-        <p:sp>
-          <p:nvSpPr>
-            <p:cNvPr id="21" name="pg21"/>
-            <p:cNvSpPr/>
-            <p:nvPr/>
-          </p:nvSpPr>
-          <p:spPr>
-            <a:xfrm>
-              <a:off x="1393431" y="2073503"/>
-              <a:ext cx="6827869" cy="3482845"/>
-            </a:xfrm>
-            <a:custGeom>
-              <a:avLst/>
-              <a:pathLst>
-                <a:path w="6827869" h="3482845">
-                  <a:moveTo>
-                    <a:pt x="1990881" y="0"/>
-                  </a:moveTo>
-                  <a:lnTo>
-                    <a:pt x="2000019" y="57115"/>
-                  </a:lnTo>
-                  <a:lnTo>
-                    <a:pt x="2076651" y="477378"/>
-                  </a:lnTo>
-                  <a:lnTo>
-                    <a:pt x="2153284" y="846098"/>
-                  </a:lnTo>
-                  <a:lnTo>
-                    <a:pt x="2229916" y="1169595"/>
-                  </a:lnTo>
-                  <a:lnTo>
-                    <a:pt x="2306549" y="1453417"/>
-                  </a:lnTo>
-                  <a:lnTo>
-                    <a:pt x="2383181" y="1702429"/>
-                  </a:lnTo>
-                  <a:lnTo>
-                    <a:pt x="2459814" y="1920900"/>
-                  </a:lnTo>
-                  <a:lnTo>
-                    <a:pt x="2536447" y="2112577"/>
-                  </a:lnTo>
-                  <a:lnTo>
-                    <a:pt x="2613079" y="2280746"/>
-                  </a:lnTo>
-                  <a:lnTo>
-                    <a:pt x="2689712" y="2428289"/>
-                  </a:lnTo>
-                  <a:lnTo>
-                    <a:pt x="2766344" y="2557737"/>
-                  </a:lnTo>
-                  <a:lnTo>
-                    <a:pt x="2842977" y="2659375"/>
-                  </a:lnTo>
-                  <a:lnTo>
-                    <a:pt x="2919609" y="2690785"/>
-                  </a:lnTo>
-                  <a:lnTo>
-                    <a:pt x="2996242" y="2720998"/>
-                  </a:lnTo>
-                  <a:lnTo>
-                    <a:pt x="3072874" y="2750060"/>
-                  </a:lnTo>
-                  <a:lnTo>
-                    <a:pt x="3149507" y="2778015"/>
-                  </a:lnTo>
-                  <a:lnTo>
-                    <a:pt x="3226140" y="2804905"/>
-                  </a:lnTo>
-                  <a:lnTo>
-                    <a:pt x="3302772" y="2830770"/>
-                  </a:lnTo>
-                  <a:lnTo>
-                    <a:pt x="3379405" y="2855650"/>
-                  </a:lnTo>
-                  <a:lnTo>
-                    <a:pt x="3456037" y="2879582"/>
-                  </a:lnTo>
-                  <a:lnTo>
-                    <a:pt x="3532670" y="2902602"/>
-                  </a:lnTo>
-                  <a:lnTo>
-                    <a:pt x="3609302" y="2924745"/>
-                  </a:lnTo>
-                  <a:lnTo>
-                    <a:pt x="3685935" y="2946044"/>
-                  </a:lnTo>
-                  <a:lnTo>
-                    <a:pt x="3762567" y="2966531"/>
-                  </a:lnTo>
-                  <a:lnTo>
-                    <a:pt x="3839200" y="2986238"/>
-                  </a:lnTo>
-                  <a:lnTo>
-                    <a:pt x="3915832" y="3005194"/>
-                  </a:lnTo>
-                  <a:lnTo>
-                    <a:pt x="3992465" y="3023428"/>
-                  </a:lnTo>
-                  <a:lnTo>
-                    <a:pt x="4069098" y="3040967"/>
-                  </a:lnTo>
-                  <a:lnTo>
-                    <a:pt x="4145730" y="3057838"/>
-                  </a:lnTo>
-                  <a:lnTo>
-                    <a:pt x="4222363" y="3074066"/>
-                  </a:lnTo>
-                  <a:lnTo>
-                    <a:pt x="4298995" y="3089676"/>
-                  </a:lnTo>
-                  <a:lnTo>
-                    <a:pt x="4375628" y="3104690"/>
-                  </a:lnTo>
-                  <a:lnTo>
-                    <a:pt x="4452260" y="3119133"/>
-                  </a:lnTo>
-                  <a:lnTo>
-                    <a:pt x="4528893" y="3133026"/>
-                  </a:lnTo>
-                  <a:lnTo>
-                    <a:pt x="4605525" y="3146389"/>
-                  </a:lnTo>
-                  <a:lnTo>
-                    <a:pt x="4682158" y="3159243"/>
-                  </a:lnTo>
-                  <a:lnTo>
-                    <a:pt x="4758790" y="3171607"/>
-                  </a:lnTo>
-                  <a:lnTo>
-                    <a:pt x="4835423" y="3183500"/>
-                  </a:lnTo>
-                  <a:lnTo>
-                    <a:pt x="4912056" y="3194940"/>
-                  </a:lnTo>
-                  <a:lnTo>
-                    <a:pt x="4988688" y="3205944"/>
-                  </a:lnTo>
-                  <a:lnTo>
-                    <a:pt x="5065321" y="3216529"/>
-                  </a:lnTo>
-                  <a:lnTo>
-                    <a:pt x="5141953" y="3226711"/>
-                  </a:lnTo>
-                  <a:lnTo>
-                    <a:pt x="5218586" y="3236504"/>
-                  </a:lnTo>
-                  <a:lnTo>
-                    <a:pt x="5295218" y="3245925"/>
-                  </a:lnTo>
-                  <a:lnTo>
-                    <a:pt x="5371851" y="3254986"/>
-                  </a:lnTo>
-                  <a:lnTo>
-                    <a:pt x="5448483" y="3263702"/>
-                  </a:lnTo>
-                  <a:lnTo>
-                    <a:pt x="5525116" y="3272087"/>
-                  </a:lnTo>
-                  <a:lnTo>
-                    <a:pt x="5601749" y="3280151"/>
-                  </a:lnTo>
-                  <a:lnTo>
-                    <a:pt x="5678381" y="3287909"/>
-                  </a:lnTo>
-                  <a:lnTo>
-                    <a:pt x="5755014" y="3295370"/>
-                  </a:lnTo>
-                  <a:lnTo>
-                    <a:pt x="5831646" y="3302548"/>
-                  </a:lnTo>
-                  <a:lnTo>
-                    <a:pt x="5908279" y="3309452"/>
-                  </a:lnTo>
-                  <a:lnTo>
-                    <a:pt x="5984911" y="3316093"/>
-                  </a:lnTo>
-                  <a:lnTo>
-                    <a:pt x="6061544" y="3322481"/>
-                  </a:lnTo>
-                  <a:lnTo>
-                    <a:pt x="6138176" y="3328625"/>
-                  </a:lnTo>
-                  <a:lnTo>
-                    <a:pt x="6214809" y="3334536"/>
-                  </a:lnTo>
-                  <a:lnTo>
-                    <a:pt x="6291441" y="3340221"/>
-                  </a:lnTo>
-                  <a:lnTo>
-                    <a:pt x="6368074" y="3345690"/>
-                  </a:lnTo>
-                  <a:lnTo>
-                    <a:pt x="6444707" y="3350950"/>
-                  </a:lnTo>
-                  <a:lnTo>
-                    <a:pt x="6521339" y="3356010"/>
-                  </a:lnTo>
-                  <a:lnTo>
-                    <a:pt x="6597972" y="3360877"/>
-                  </a:lnTo>
-                  <a:lnTo>
-                    <a:pt x="6674604" y="3365558"/>
-                  </a:lnTo>
-                  <a:lnTo>
-                    <a:pt x="6751237" y="3370062"/>
-                  </a:lnTo>
-                  <a:lnTo>
-                    <a:pt x="6827869" y="3374393"/>
-                  </a:lnTo>
-                  <a:lnTo>
-                    <a:pt x="6827869" y="3482845"/>
-                  </a:lnTo>
-                  <a:lnTo>
-                    <a:pt x="6751237" y="3482719"/>
-                  </a:lnTo>
-                  <a:lnTo>
-                    <a:pt x="6674604" y="3482575"/>
-                  </a:lnTo>
-                  <a:lnTo>
-                    <a:pt x="6597972" y="3482412"/>
-                  </a:lnTo>
-                  <a:lnTo>
-                    <a:pt x="6521339" y="3482225"/>
-                  </a:lnTo>
-                  <a:lnTo>
-                    <a:pt x="6444707" y="3482013"/>
-                  </a:lnTo>
-                  <a:lnTo>
-                    <a:pt x="6368074" y="3481770"/>
-                  </a:lnTo>
-                  <a:lnTo>
-                    <a:pt x="6291441" y="3481494"/>
-                  </a:lnTo>
-                  <a:lnTo>
-                    <a:pt x="6214809" y="3481179"/>
-                  </a:lnTo>
-                  <a:lnTo>
-                    <a:pt x="6138176" y="3480820"/>
-                  </a:lnTo>
-                  <a:lnTo>
-                    <a:pt x="6061544" y="3480411"/>
-                  </a:lnTo>
-                  <a:lnTo>
-                    <a:pt x="5984911" y="3479945"/>
-                  </a:lnTo>
-                  <a:lnTo>
-                    <a:pt x="5908279" y="3479413"/>
-                  </a:lnTo>
-                  <a:lnTo>
-                    <a:pt x="5831646" y="3478808"/>
-                  </a:lnTo>
-                  <a:lnTo>
-                    <a:pt x="5755014" y="3478117"/>
-                  </a:lnTo>
-                  <a:lnTo>
-                    <a:pt x="5678381" y="3477331"/>
-                  </a:lnTo>
-                  <a:lnTo>
-                    <a:pt x="5601749" y="3476434"/>
-                  </a:lnTo>
-                  <a:lnTo>
-                    <a:pt x="5525116" y="3475411"/>
-                  </a:lnTo>
-                  <a:lnTo>
-                    <a:pt x="5448483" y="3474246"/>
-                  </a:lnTo>
-                  <a:lnTo>
-                    <a:pt x="5371851" y="3472918"/>
-                  </a:lnTo>
-                  <a:lnTo>
-                    <a:pt x="5295218" y="3471404"/>
-                  </a:lnTo>
-                  <a:lnTo>
-                    <a:pt x="5218586" y="3469679"/>
-                  </a:lnTo>
-                  <a:lnTo>
-                    <a:pt x="5141953" y="3467713"/>
-                  </a:lnTo>
-                  <a:lnTo>
-                    <a:pt x="5065321" y="3465471"/>
-                  </a:lnTo>
-                  <a:lnTo>
-                    <a:pt x="4988688" y="3462917"/>
-                  </a:lnTo>
-                  <a:lnTo>
-                    <a:pt x="4912056" y="3460005"/>
-                  </a:lnTo>
-                  <a:lnTo>
-                    <a:pt x="4835423" y="3456686"/>
-                  </a:lnTo>
-                  <a:lnTo>
-                    <a:pt x="4758790" y="3452903"/>
-                  </a:lnTo>
-                  <a:lnTo>
-                    <a:pt x="4682158" y="3448592"/>
-                  </a:lnTo>
-                  <a:lnTo>
-                    <a:pt x="4605525" y="3443677"/>
-                  </a:lnTo>
-                  <a:lnTo>
-                    <a:pt x="4528893" y="3438076"/>
-                  </a:lnTo>
-                  <a:lnTo>
-                    <a:pt x="4452260" y="3431692"/>
-                  </a:lnTo>
-                  <a:lnTo>
-                    <a:pt x="4375628" y="3424415"/>
-                  </a:lnTo>
-                  <a:lnTo>
-                    <a:pt x="4298995" y="3416121"/>
-                  </a:lnTo>
-                  <a:lnTo>
-                    <a:pt x="4222363" y="3406667"/>
-                  </a:lnTo>
-                  <a:lnTo>
-                    <a:pt x="4145730" y="3395892"/>
-                  </a:lnTo>
-                  <a:lnTo>
-                    <a:pt x="4069098" y="3383611"/>
-                  </a:lnTo>
-                  <a:lnTo>
-                    <a:pt x="3992465" y="3369613"/>
-                  </a:lnTo>
-                  <a:lnTo>
-                    <a:pt x="3915832" y="3353658"/>
-                  </a:lnTo>
-                  <a:lnTo>
-                    <a:pt x="3839200" y="3335473"/>
-                  </a:lnTo>
-                  <a:lnTo>
-                    <a:pt x="3762567" y="3314746"/>
-                  </a:lnTo>
-                  <a:lnTo>
-                    <a:pt x="3685935" y="3291121"/>
-                  </a:lnTo>
-                  <a:lnTo>
-                    <a:pt x="3609302" y="3264194"/>
-                  </a:lnTo>
-                  <a:lnTo>
-                    <a:pt x="3532670" y="3233503"/>
-                  </a:lnTo>
-                  <a:lnTo>
-                    <a:pt x="3456037" y="3198521"/>
-                  </a:lnTo>
-                  <a:lnTo>
-                    <a:pt x="3379405" y="3158649"/>
-                  </a:lnTo>
-                  <a:lnTo>
-                    <a:pt x="3302772" y="3113203"/>
-                  </a:lnTo>
-                  <a:lnTo>
-                    <a:pt x="3226140" y="3061404"/>
-                  </a:lnTo>
-                  <a:lnTo>
-                    <a:pt x="3149507" y="3002365"/>
-                  </a:lnTo>
-                  <a:lnTo>
-                    <a:pt x="3072874" y="2935072"/>
-                  </a:lnTo>
-                  <a:lnTo>
-                    <a:pt x="2996242" y="2858372"/>
-                  </a:lnTo>
-                  <a:lnTo>
-                    <a:pt x="2919609" y="2770951"/>
-                  </a:lnTo>
-                  <a:lnTo>
-                    <a:pt x="2842977" y="2671308"/>
-                  </a:lnTo>
-                  <a:lnTo>
-                    <a:pt x="2766344" y="2626720"/>
-                  </a:lnTo>
-                  <a:lnTo>
-                    <a:pt x="2689712" y="2592772"/>
-                  </a:lnTo>
-                  <a:lnTo>
-                    <a:pt x="2613079" y="2557480"/>
-                  </a:lnTo>
-                  <a:lnTo>
-                    <a:pt x="2536447" y="2520789"/>
-                  </a:lnTo>
-                  <a:lnTo>
-                    <a:pt x="2459814" y="2482645"/>
-                  </a:lnTo>
-                  <a:lnTo>
-                    <a:pt x="2383181" y="2442990"/>
-                  </a:lnTo>
-                  <a:lnTo>
-                    <a:pt x="2306549" y="2401764"/>
-                  </a:lnTo>
-                  <a:lnTo>
-                    <a:pt x="2229916" y="2358906"/>
-                  </a:lnTo>
-                  <a:lnTo>
-                    <a:pt x="2153284" y="2314349"/>
-                  </a:lnTo>
-                  <a:lnTo>
-                    <a:pt x="2076651" y="2268028"/>
-                  </a:lnTo>
-                  <a:lnTo>
-                    <a:pt x="2000019" y="2219872"/>
-                  </a:lnTo>
-                  <a:lnTo>
-                    <a:pt x="1923386" y="2169808"/>
-                  </a:lnTo>
-                  <a:lnTo>
-                    <a:pt x="1846754" y="2117761"/>
-                  </a:lnTo>
-                  <a:lnTo>
-                    <a:pt x="1770121" y="2063653"/>
-                  </a:lnTo>
-                  <a:lnTo>
-                    <a:pt x="1693489" y="2007401"/>
-                  </a:lnTo>
-                  <a:lnTo>
-                    <a:pt x="1616856" y="1948921"/>
-                  </a:lnTo>
-                  <a:lnTo>
-                    <a:pt x="1540223" y="1888124"/>
-                  </a:lnTo>
-                  <a:lnTo>
-                    <a:pt x="1463591" y="1824920"/>
-                  </a:lnTo>
-                  <a:lnTo>
-                    <a:pt x="1386958" y="1759211"/>
-                  </a:lnTo>
-                  <a:lnTo>
-                    <a:pt x="1310326" y="1690900"/>
-                  </a:lnTo>
-                  <a:lnTo>
-                    <a:pt x="1233693" y="1619883"/>
-                  </a:lnTo>
-                  <a:lnTo>
-                    <a:pt x="1157061" y="1546053"/>
-                  </a:lnTo>
-                  <a:lnTo>
-                    <a:pt x="1080428" y="1469299"/>
-                  </a:lnTo>
-                  <a:lnTo>
-                    <a:pt x="1003796" y="1389504"/>
-                  </a:lnTo>
-                  <a:lnTo>
-                    <a:pt x="927163" y="1306548"/>
-                  </a:lnTo>
-                  <a:lnTo>
-                    <a:pt x="850530" y="1220307"/>
-                  </a:lnTo>
-                  <a:lnTo>
-                    <a:pt x="773898" y="1130649"/>
-                  </a:lnTo>
-                  <a:lnTo>
-                    <a:pt x="697265" y="1037439"/>
-                  </a:lnTo>
-                  <a:lnTo>
-                    <a:pt x="620633" y="940538"/>
-                  </a:lnTo>
-                  <a:lnTo>
-                    <a:pt x="544000" y="839798"/>
-                  </a:lnTo>
-                  <a:lnTo>
-                    <a:pt x="467368" y="735068"/>
-                  </a:lnTo>
-                  <a:lnTo>
-                    <a:pt x="390735" y="626189"/>
-                  </a:lnTo>
-                  <a:lnTo>
-                    <a:pt x="314103" y="512998"/>
-                  </a:lnTo>
-                  <a:lnTo>
-                    <a:pt x="237470" y="395322"/>
-                  </a:lnTo>
-                  <a:lnTo>
-                    <a:pt x="160838" y="272986"/>
-                  </a:lnTo>
-                  <a:lnTo>
-                    <a:pt x="84205" y="145804"/>
-                  </a:lnTo>
-                  <a:lnTo>
-                    <a:pt x="7572" y="13583"/>
+                    <a:pt x="1869263" y="57115"/>
+                  </a:lnTo>
+                  <a:lnTo>
+                    <a:pt x="1940886" y="477378"/>
+                  </a:lnTo>
+                  <a:lnTo>
+                    <a:pt x="2012508" y="846098"/>
+                  </a:lnTo>
+                  <a:lnTo>
+                    <a:pt x="2084131" y="1169595"/>
+                  </a:lnTo>
+                  <a:lnTo>
+                    <a:pt x="2155753" y="1453417"/>
+                  </a:lnTo>
+                  <a:lnTo>
+                    <a:pt x="2227376" y="1702429"/>
+                  </a:lnTo>
+                  <a:lnTo>
+                    <a:pt x="2298998" y="1920900"/>
+                  </a:lnTo>
+                  <a:lnTo>
+                    <a:pt x="2370621" y="2112577"/>
+                  </a:lnTo>
+                  <a:lnTo>
+                    <a:pt x="2442243" y="2280746"/>
+                  </a:lnTo>
+                  <a:lnTo>
+                    <a:pt x="2513866" y="2428289"/>
+                  </a:lnTo>
+                  <a:lnTo>
+                    <a:pt x="2585488" y="2557737"/>
+                  </a:lnTo>
+                  <a:lnTo>
+                    <a:pt x="2657111" y="2659375"/>
+                  </a:lnTo>
+                  <a:lnTo>
+                    <a:pt x="2728733" y="2690785"/>
+                  </a:lnTo>
+                  <a:lnTo>
+                    <a:pt x="2800356" y="2720998"/>
+                  </a:lnTo>
+                  <a:lnTo>
+                    <a:pt x="2871978" y="2750060"/>
+                  </a:lnTo>
+                  <a:lnTo>
+                    <a:pt x="2943601" y="2778015"/>
+                  </a:lnTo>
+                  <a:lnTo>
+                    <a:pt x="3015223" y="2804905"/>
+                  </a:lnTo>
+                  <a:lnTo>
+                    <a:pt x="3086846" y="2830770"/>
+                  </a:lnTo>
+                  <a:lnTo>
+                    <a:pt x="3158469" y="2855650"/>
+                  </a:lnTo>
+                  <a:lnTo>
+                    <a:pt x="3230091" y="2879582"/>
+                  </a:lnTo>
+                  <a:lnTo>
+                    <a:pt x="3301714" y="2902602"/>
+                  </a:lnTo>
+                  <a:lnTo>
+                    <a:pt x="3373336" y="2924745"/>
+                  </a:lnTo>
+                  <a:lnTo>
+                    <a:pt x="3444959" y="2946044"/>
+                  </a:lnTo>
+                  <a:lnTo>
+                    <a:pt x="3516581" y="2966531"/>
+                  </a:lnTo>
+                  <a:lnTo>
+                    <a:pt x="3588204" y="2986238"/>
+                  </a:lnTo>
+                  <a:lnTo>
+                    <a:pt x="3659826" y="3005194"/>
+                  </a:lnTo>
+                  <a:lnTo>
+                    <a:pt x="3731449" y="3023428"/>
+                  </a:lnTo>
+                  <a:lnTo>
+                    <a:pt x="3803071" y="3040967"/>
+                  </a:lnTo>
+                  <a:lnTo>
+                    <a:pt x="3874694" y="3057838"/>
+                  </a:lnTo>
+                  <a:lnTo>
+                    <a:pt x="3946316" y="3074066"/>
+                  </a:lnTo>
+                  <a:lnTo>
+                    <a:pt x="4017939" y="3089676"/>
+                  </a:lnTo>
+                  <a:lnTo>
+                    <a:pt x="4089561" y="3104690"/>
+                  </a:lnTo>
+                  <a:lnTo>
+                    <a:pt x="4161184" y="3119133"/>
+                  </a:lnTo>
+                  <a:lnTo>
+                    <a:pt x="4232806" y="3133026"/>
+                  </a:lnTo>
+                  <a:lnTo>
+                    <a:pt x="4304429" y="3146389"/>
+                  </a:lnTo>
+                  <a:lnTo>
+                    <a:pt x="4376051" y="3159243"/>
+                  </a:lnTo>
+                  <a:lnTo>
+                    <a:pt x="4447674" y="3171607"/>
+                  </a:lnTo>
+                  <a:lnTo>
+                    <a:pt x="4519297" y="3183500"/>
+                  </a:lnTo>
+                  <a:lnTo>
+                    <a:pt x="4590919" y="3194940"/>
+                  </a:lnTo>
+                  <a:lnTo>
+                    <a:pt x="4662542" y="3205944"/>
+                  </a:lnTo>
+                  <a:lnTo>
+                    <a:pt x="4734164" y="3216529"/>
+                  </a:lnTo>
+                  <a:lnTo>
+                    <a:pt x="4805787" y="3226711"/>
+                  </a:lnTo>
+                  <a:lnTo>
+                    <a:pt x="4877409" y="3236504"/>
+                  </a:lnTo>
+                  <a:lnTo>
+                    <a:pt x="4949032" y="3245925"/>
+                  </a:lnTo>
+                  <a:lnTo>
+                    <a:pt x="5020654" y="3254986"/>
+                  </a:lnTo>
+                  <a:lnTo>
+                    <a:pt x="5092277" y="3263702"/>
+                  </a:lnTo>
+                  <a:lnTo>
+                    <a:pt x="5163899" y="3272087"/>
+                  </a:lnTo>
+                  <a:lnTo>
+                    <a:pt x="5235522" y="3280151"/>
+                  </a:lnTo>
+                  <a:lnTo>
+                    <a:pt x="5307144" y="3287909"/>
+                  </a:lnTo>
+                  <a:lnTo>
+                    <a:pt x="5378767" y="3295370"/>
+                  </a:lnTo>
+                  <a:lnTo>
+                    <a:pt x="5450389" y="3302548"/>
+                  </a:lnTo>
+                  <a:lnTo>
+                    <a:pt x="5522012" y="3309452"/>
+                  </a:lnTo>
+                  <a:lnTo>
+                    <a:pt x="5593634" y="3316093"/>
+                  </a:lnTo>
+                  <a:lnTo>
+                    <a:pt x="5665257" y="3322481"/>
+                  </a:lnTo>
+                  <a:lnTo>
+                    <a:pt x="5736879" y="3328625"/>
+                  </a:lnTo>
+                  <a:lnTo>
+                    <a:pt x="5808502" y="3334536"/>
+                  </a:lnTo>
+                  <a:lnTo>
+                    <a:pt x="5880125" y="3340221"/>
+                  </a:lnTo>
+                  <a:lnTo>
+                    <a:pt x="5951747" y="3345690"/>
+                  </a:lnTo>
+                  <a:lnTo>
+                    <a:pt x="6023370" y="3350950"/>
+                  </a:lnTo>
+                  <a:lnTo>
+                    <a:pt x="6094992" y="3356010"/>
+                  </a:lnTo>
+                  <a:lnTo>
+                    <a:pt x="6166615" y="3360877"/>
+                  </a:lnTo>
+                  <a:lnTo>
+                    <a:pt x="6238237" y="3365558"/>
+                  </a:lnTo>
+                  <a:lnTo>
+                    <a:pt x="6309860" y="3370062"/>
+                  </a:lnTo>
+                  <a:lnTo>
+                    <a:pt x="6381482" y="3374393"/>
+                  </a:lnTo>
+                  <a:lnTo>
+                    <a:pt x="6381482" y="3482845"/>
+                  </a:lnTo>
+                  <a:lnTo>
+                    <a:pt x="6309860" y="3482719"/>
+                  </a:lnTo>
+                  <a:lnTo>
+                    <a:pt x="6238237" y="3482575"/>
+                  </a:lnTo>
+                  <a:lnTo>
+                    <a:pt x="6166615" y="3482412"/>
+                  </a:lnTo>
+                  <a:lnTo>
+                    <a:pt x="6094992" y="3482225"/>
+                  </a:lnTo>
+                  <a:lnTo>
+                    <a:pt x="6023370" y="3482013"/>
+                  </a:lnTo>
+                  <a:lnTo>
+                    <a:pt x="5951747" y="3481770"/>
+                  </a:lnTo>
+                  <a:lnTo>
+                    <a:pt x="5880125" y="3481494"/>
+                  </a:lnTo>
+                  <a:lnTo>
+                    <a:pt x="5808502" y="3481179"/>
+                  </a:lnTo>
+                  <a:lnTo>
+                    <a:pt x="5736879" y="3480820"/>
+                  </a:lnTo>
+                  <a:lnTo>
+                    <a:pt x="5665257" y="3480411"/>
+                  </a:lnTo>
+                  <a:lnTo>
+                    <a:pt x="5593634" y="3479945"/>
+                  </a:lnTo>
+                  <a:lnTo>
+                    <a:pt x="5522012" y="3479413"/>
+                  </a:lnTo>
+                  <a:lnTo>
+                    <a:pt x="5450389" y="3478808"/>
+                  </a:lnTo>
+                  <a:lnTo>
+                    <a:pt x="5378767" y="3478117"/>
+                  </a:lnTo>
+                  <a:lnTo>
+                    <a:pt x="5307144" y="3477331"/>
+                  </a:lnTo>
+                  <a:lnTo>
+                    <a:pt x="5235522" y="3476434"/>
+                  </a:lnTo>
+                  <a:lnTo>
+                    <a:pt x="5163899" y="3475411"/>
+                  </a:lnTo>
+                  <a:lnTo>
+                    <a:pt x="5092277" y="3474246"/>
+                  </a:lnTo>
+                  <a:lnTo>
+                    <a:pt x="5020654" y="3472918"/>
+                  </a:lnTo>
+                  <a:lnTo>
+                    <a:pt x="4949032" y="3471404"/>
+                  </a:lnTo>
+                  <a:lnTo>
+                    <a:pt x="4877409" y="3469679"/>
+                  </a:lnTo>
+                  <a:lnTo>
+                    <a:pt x="4805787" y="3467713"/>
+                  </a:lnTo>
+                  <a:lnTo>
+                    <a:pt x="4734164" y="3465471"/>
+                  </a:lnTo>
+                  <a:lnTo>
+                    <a:pt x="4662542" y="3462917"/>
+                  </a:lnTo>
+                  <a:lnTo>
+                    <a:pt x="4590919" y="3460005"/>
+                  </a:lnTo>
+                  <a:lnTo>
+                    <a:pt x="4519297" y="3456686"/>
+                  </a:lnTo>
+                  <a:lnTo>
+                    <a:pt x="4447674" y="3452903"/>
+                  </a:lnTo>
+                  <a:lnTo>
+                    <a:pt x="4376051" y="3448592"/>
+                  </a:lnTo>
+                  <a:lnTo>
+                    <a:pt x="4304429" y="3443677"/>
+                  </a:lnTo>
+                  <a:lnTo>
+                    <a:pt x="4232806" y="3438076"/>
+                  </a:lnTo>
+                  <a:lnTo>
+                    <a:pt x="4161184" y="3431692"/>
+                  </a:lnTo>
+                  <a:lnTo>
+                    <a:pt x="4089561" y="3424415"/>
+                  </a:lnTo>
+                  <a:lnTo>
+                    <a:pt x="4017939" y="3416121"/>
+                  </a:lnTo>
+                  <a:lnTo>
+                    <a:pt x="3946316" y="3406667"/>
+                  </a:lnTo>
+                  <a:lnTo>
+                    <a:pt x="3874694" y="3395892"/>
+                  </a:lnTo>
+                  <a:lnTo>
+                    <a:pt x="3803071" y="3383611"/>
+                  </a:lnTo>
+                  <a:lnTo>
+                    <a:pt x="3731449" y="3369613"/>
+                  </a:lnTo>
+                  <a:lnTo>
+                    <a:pt x="3659826" y="3353658"/>
+                  </a:lnTo>
+                  <a:lnTo>
+                    <a:pt x="3588204" y="3335473"/>
+                  </a:lnTo>
+                  <a:lnTo>
+                    <a:pt x="3516581" y="3314746"/>
+                  </a:lnTo>
+                  <a:lnTo>
+                    <a:pt x="3444959" y="3291121"/>
+                  </a:lnTo>
+                  <a:lnTo>
+                    <a:pt x="3373336" y="3264194"/>
+                  </a:lnTo>
+                  <a:lnTo>
+                    <a:pt x="3301714" y="3233503"/>
+                  </a:lnTo>
+                  <a:lnTo>
+                    <a:pt x="3230091" y="3198521"/>
+                  </a:lnTo>
+                  <a:lnTo>
+                    <a:pt x="3158469" y="3158649"/>
+                  </a:lnTo>
+                  <a:lnTo>
+                    <a:pt x="3086846" y="3113203"/>
+                  </a:lnTo>
+                  <a:lnTo>
+                    <a:pt x="3015223" y="3061404"/>
+                  </a:lnTo>
+                  <a:lnTo>
+                    <a:pt x="2943601" y="3002365"/>
+                  </a:lnTo>
+                  <a:lnTo>
+                    <a:pt x="2871978" y="2935072"/>
+                  </a:lnTo>
+                  <a:lnTo>
+                    <a:pt x="2800356" y="2858372"/>
+                  </a:lnTo>
+                  <a:lnTo>
+                    <a:pt x="2728733" y="2770951"/>
+                  </a:lnTo>
+                  <a:lnTo>
+                    <a:pt x="2657111" y="2671308"/>
+                  </a:lnTo>
+                  <a:lnTo>
+                    <a:pt x="2585488" y="2626720"/>
+                  </a:lnTo>
+                  <a:lnTo>
+                    <a:pt x="2513866" y="2592772"/>
+                  </a:lnTo>
+                  <a:lnTo>
+                    <a:pt x="2442243" y="2557480"/>
+                  </a:lnTo>
+                  <a:lnTo>
+                    <a:pt x="2370621" y="2520789"/>
+                  </a:lnTo>
+                  <a:lnTo>
+                    <a:pt x="2298998" y="2482645"/>
+                  </a:lnTo>
+                  <a:lnTo>
+                    <a:pt x="2227376" y="2442990"/>
+                  </a:lnTo>
+                  <a:lnTo>
+                    <a:pt x="2155753" y="2401764"/>
+                  </a:lnTo>
+                  <a:lnTo>
+                    <a:pt x="2084131" y="2358906"/>
+                  </a:lnTo>
+                  <a:lnTo>
+                    <a:pt x="2012508" y="2314349"/>
+                  </a:lnTo>
+                  <a:lnTo>
+                    <a:pt x="1940886" y="2268028"/>
+                  </a:lnTo>
+                  <a:lnTo>
+                    <a:pt x="1869263" y="2219872"/>
+                  </a:lnTo>
+                  <a:lnTo>
+                    <a:pt x="1797641" y="2169808"/>
+                  </a:lnTo>
+                  <a:lnTo>
+                    <a:pt x="1726018" y="2117761"/>
+                  </a:lnTo>
+                  <a:lnTo>
+                    <a:pt x="1654395" y="2063653"/>
+                  </a:lnTo>
+                  <a:lnTo>
+                    <a:pt x="1582773" y="2007401"/>
+                  </a:lnTo>
+                  <a:lnTo>
+                    <a:pt x="1511150" y="1948921"/>
+                  </a:lnTo>
+                  <a:lnTo>
+                    <a:pt x="1439528" y="1888124"/>
+                  </a:lnTo>
+                  <a:lnTo>
+                    <a:pt x="1367905" y="1824920"/>
+                  </a:lnTo>
+                  <a:lnTo>
+                    <a:pt x="1296283" y="1759211"/>
+                  </a:lnTo>
+                  <a:lnTo>
+                    <a:pt x="1224660" y="1690900"/>
+                  </a:lnTo>
+                  <a:lnTo>
+                    <a:pt x="1153038" y="1619883"/>
+                  </a:lnTo>
+                  <a:lnTo>
+                    <a:pt x="1081415" y="1546053"/>
+                  </a:lnTo>
+                  <a:lnTo>
+                    <a:pt x="1009793" y="1469299"/>
+                  </a:lnTo>
+                  <a:lnTo>
+                    <a:pt x="938170" y="1389504"/>
+                  </a:lnTo>
+                  <a:lnTo>
+                    <a:pt x="866548" y="1306548"/>
+                  </a:lnTo>
+                  <a:lnTo>
+                    <a:pt x="794925" y="1220307"/>
+                  </a:lnTo>
+                  <a:lnTo>
+                    <a:pt x="723303" y="1130649"/>
+                  </a:lnTo>
+                  <a:lnTo>
+                    <a:pt x="651680" y="1037439"/>
+                  </a:lnTo>
+                  <a:lnTo>
+                    <a:pt x="580058" y="940538"/>
+                  </a:lnTo>
+                  <a:lnTo>
+                    <a:pt x="508435" y="839798"/>
+                  </a:lnTo>
+                  <a:lnTo>
+                    <a:pt x="436813" y="735068"/>
+                  </a:lnTo>
+                  <a:lnTo>
+                    <a:pt x="365190" y="626189"/>
+                  </a:lnTo>
+                  <a:lnTo>
+                    <a:pt x="293567" y="512998"/>
+                  </a:lnTo>
+                  <a:lnTo>
+                    <a:pt x="221945" y="395322"/>
+                  </a:lnTo>
+                  <a:lnTo>
+                    <a:pt x="150322" y="272986"/>
+                  </a:lnTo>
+                  <a:lnTo>
+                    <a:pt x="78700" y="145804"/>
+                  </a:lnTo>
+                  <a:lnTo>
+                    <a:pt x="7077" y="13583"/>
                   </a:lnTo>
                   <a:lnTo>
                     <a:pt x="0" y="0"/>
@@ -3495,213 +3452,511 @@
         </p:sp>
         <p:sp>
           <p:nvSpPr>
+            <p:cNvPr id="21" name="pl21"/>
+            <p:cNvSpPr/>
+            <p:nvPr/>
+          </p:nvSpPr>
+          <p:spPr>
+            <a:xfrm>
+              <a:off x="3741920" y="2073503"/>
+              <a:ext cx="4520759" cy="3374393"/>
+            </a:xfrm>
+            <a:custGeom>
+              <a:avLst/>
+              <a:pathLst>
+                <a:path w="4520759" h="3374393">
+                  <a:moveTo>
+                    <a:pt x="0" y="0"/>
+                  </a:moveTo>
+                  <a:lnTo>
+                    <a:pt x="8540" y="57115"/>
+                  </a:lnTo>
+                  <a:lnTo>
+                    <a:pt x="80162" y="477378"/>
+                  </a:lnTo>
+                  <a:lnTo>
+                    <a:pt x="151785" y="846098"/>
+                  </a:lnTo>
+                  <a:lnTo>
+                    <a:pt x="223407" y="1169595"/>
+                  </a:lnTo>
+                  <a:lnTo>
+                    <a:pt x="295030" y="1453417"/>
+                  </a:lnTo>
+                  <a:lnTo>
+                    <a:pt x="366652" y="1702429"/>
+                  </a:lnTo>
+                  <a:lnTo>
+                    <a:pt x="438275" y="1920900"/>
+                  </a:lnTo>
+                  <a:lnTo>
+                    <a:pt x="509897" y="2112577"/>
+                  </a:lnTo>
+                  <a:lnTo>
+                    <a:pt x="581520" y="2280746"/>
+                  </a:lnTo>
+                  <a:lnTo>
+                    <a:pt x="653142" y="2428289"/>
+                  </a:lnTo>
+                  <a:lnTo>
+                    <a:pt x="724765" y="2557737"/>
+                  </a:lnTo>
+                  <a:lnTo>
+                    <a:pt x="796387" y="2659375"/>
+                  </a:lnTo>
+                  <a:lnTo>
+                    <a:pt x="868010" y="2690785"/>
+                  </a:lnTo>
+                  <a:lnTo>
+                    <a:pt x="939632" y="2720998"/>
+                  </a:lnTo>
+                  <a:lnTo>
+                    <a:pt x="1011255" y="2750060"/>
+                  </a:lnTo>
+                  <a:lnTo>
+                    <a:pt x="1082877" y="2778015"/>
+                  </a:lnTo>
+                  <a:lnTo>
+                    <a:pt x="1154500" y="2804905"/>
+                  </a:lnTo>
+                  <a:lnTo>
+                    <a:pt x="1226122" y="2830770"/>
+                  </a:lnTo>
+                  <a:lnTo>
+                    <a:pt x="1297745" y="2855650"/>
+                  </a:lnTo>
+                  <a:lnTo>
+                    <a:pt x="1369368" y="2879582"/>
+                  </a:lnTo>
+                  <a:lnTo>
+                    <a:pt x="1440990" y="2902602"/>
+                  </a:lnTo>
+                  <a:lnTo>
+                    <a:pt x="1512613" y="2924745"/>
+                  </a:lnTo>
+                  <a:lnTo>
+                    <a:pt x="1584235" y="2946044"/>
+                  </a:lnTo>
+                  <a:lnTo>
+                    <a:pt x="1655858" y="2966531"/>
+                  </a:lnTo>
+                  <a:lnTo>
+                    <a:pt x="1727480" y="2986238"/>
+                  </a:lnTo>
+                  <a:lnTo>
+                    <a:pt x="1799103" y="3005194"/>
+                  </a:lnTo>
+                  <a:lnTo>
+                    <a:pt x="1870725" y="3023428"/>
+                  </a:lnTo>
+                  <a:lnTo>
+                    <a:pt x="1942348" y="3040967"/>
+                  </a:lnTo>
+                  <a:lnTo>
+                    <a:pt x="2013970" y="3057838"/>
+                  </a:lnTo>
+                  <a:lnTo>
+                    <a:pt x="2085593" y="3074066"/>
+                  </a:lnTo>
+                  <a:lnTo>
+                    <a:pt x="2157215" y="3089676"/>
+                  </a:lnTo>
+                  <a:lnTo>
+                    <a:pt x="2228838" y="3104690"/>
+                  </a:lnTo>
+                  <a:lnTo>
+                    <a:pt x="2300460" y="3119133"/>
+                  </a:lnTo>
+                  <a:lnTo>
+                    <a:pt x="2372083" y="3133026"/>
+                  </a:lnTo>
+                  <a:lnTo>
+                    <a:pt x="2443705" y="3146389"/>
+                  </a:lnTo>
+                  <a:lnTo>
+                    <a:pt x="2515328" y="3159243"/>
+                  </a:lnTo>
+                  <a:lnTo>
+                    <a:pt x="2586950" y="3171607"/>
+                  </a:lnTo>
+                  <a:lnTo>
+                    <a:pt x="2658573" y="3183500"/>
+                  </a:lnTo>
+                  <a:lnTo>
+                    <a:pt x="2730196" y="3194940"/>
+                  </a:lnTo>
+                  <a:lnTo>
+                    <a:pt x="2801818" y="3205944"/>
+                  </a:lnTo>
+                  <a:lnTo>
+                    <a:pt x="2873441" y="3216529"/>
+                  </a:lnTo>
+                  <a:lnTo>
+                    <a:pt x="2945063" y="3226711"/>
+                  </a:lnTo>
+                  <a:lnTo>
+                    <a:pt x="3016686" y="3236504"/>
+                  </a:lnTo>
+                  <a:lnTo>
+                    <a:pt x="3088308" y="3245925"/>
+                  </a:lnTo>
+                  <a:lnTo>
+                    <a:pt x="3159931" y="3254986"/>
+                  </a:lnTo>
+                  <a:lnTo>
+                    <a:pt x="3231553" y="3263702"/>
+                  </a:lnTo>
+                  <a:lnTo>
+                    <a:pt x="3303176" y="3272087"/>
+                  </a:lnTo>
+                  <a:lnTo>
+                    <a:pt x="3374798" y="3280151"/>
+                  </a:lnTo>
+                  <a:lnTo>
+                    <a:pt x="3446421" y="3287909"/>
+                  </a:lnTo>
+                  <a:lnTo>
+                    <a:pt x="3518043" y="3295370"/>
+                  </a:lnTo>
+                  <a:lnTo>
+                    <a:pt x="3589666" y="3302548"/>
+                  </a:lnTo>
+                  <a:lnTo>
+                    <a:pt x="3661288" y="3309452"/>
+                  </a:lnTo>
+                  <a:lnTo>
+                    <a:pt x="3732911" y="3316093"/>
+                  </a:lnTo>
+                  <a:lnTo>
+                    <a:pt x="3804533" y="3322481"/>
+                  </a:lnTo>
+                  <a:lnTo>
+                    <a:pt x="3876156" y="3328625"/>
+                  </a:lnTo>
+                  <a:lnTo>
+                    <a:pt x="3947778" y="3334536"/>
+                  </a:lnTo>
+                  <a:lnTo>
+                    <a:pt x="4019401" y="3340221"/>
+                  </a:lnTo>
+                  <a:lnTo>
+                    <a:pt x="4091024" y="3345690"/>
+                  </a:lnTo>
+                  <a:lnTo>
+                    <a:pt x="4162646" y="3350950"/>
+                  </a:lnTo>
+                  <a:lnTo>
+                    <a:pt x="4234269" y="3356010"/>
+                  </a:lnTo>
+                  <a:lnTo>
+                    <a:pt x="4305891" y="3360877"/>
+                  </a:lnTo>
+                  <a:lnTo>
+                    <a:pt x="4377514" y="3365558"/>
+                  </a:lnTo>
+                  <a:lnTo>
+                    <a:pt x="4449136" y="3370062"/>
+                  </a:lnTo>
+                  <a:lnTo>
+                    <a:pt x="4520759" y="3374393"/>
+                  </a:lnTo>
+                </a:path>
+              </a:pathLst>
+            </a:custGeom>
+          </p:spPr>
+          <p:txBody>
+            <a:bodyPr/>
+            <a:lstStyle/>
+            <a:p/>
+          </p:txBody>
+        </p:sp>
+        <p:sp>
+          <p:nvSpPr>
             <p:cNvPr id="22" name="pl22"/>
             <p:cNvSpPr/>
             <p:nvPr/>
           </p:nvSpPr>
           <p:spPr>
             <a:xfrm>
-              <a:off x="3384313" y="2073503"/>
-              <a:ext cx="4836987" cy="3374393"/>
+              <a:off x="1881196" y="2073503"/>
+              <a:ext cx="6381482" cy="3482845"/>
             </a:xfrm>
             <a:custGeom>
               <a:avLst/>
               <a:pathLst>
-                <a:path w="4836987" h="3374393">
+                <a:path w="6381482" h="3482845">
                   <a:moveTo>
+                    <a:pt x="6381482" y="3482845"/>
+                  </a:moveTo>
+                  <a:lnTo>
+                    <a:pt x="6309860" y="3482719"/>
+                  </a:lnTo>
+                  <a:lnTo>
+                    <a:pt x="6238237" y="3482575"/>
+                  </a:lnTo>
+                  <a:lnTo>
+                    <a:pt x="6166615" y="3482412"/>
+                  </a:lnTo>
+                  <a:lnTo>
+                    <a:pt x="6094992" y="3482225"/>
+                  </a:lnTo>
+                  <a:lnTo>
+                    <a:pt x="6023370" y="3482013"/>
+                  </a:lnTo>
+                  <a:lnTo>
+                    <a:pt x="5951747" y="3481770"/>
+                  </a:lnTo>
+                  <a:lnTo>
+                    <a:pt x="5880125" y="3481494"/>
+                  </a:lnTo>
+                  <a:lnTo>
+                    <a:pt x="5808502" y="3481179"/>
+                  </a:lnTo>
+                  <a:lnTo>
+                    <a:pt x="5736879" y="3480820"/>
+                  </a:lnTo>
+                  <a:lnTo>
+                    <a:pt x="5665257" y="3480411"/>
+                  </a:lnTo>
+                  <a:lnTo>
+                    <a:pt x="5593634" y="3479945"/>
+                  </a:lnTo>
+                  <a:lnTo>
+                    <a:pt x="5522012" y="3479413"/>
+                  </a:lnTo>
+                  <a:lnTo>
+                    <a:pt x="5450389" y="3478808"/>
+                  </a:lnTo>
+                  <a:lnTo>
+                    <a:pt x="5378767" y="3478117"/>
+                  </a:lnTo>
+                  <a:lnTo>
+                    <a:pt x="5307144" y="3477331"/>
+                  </a:lnTo>
+                  <a:lnTo>
+                    <a:pt x="5235522" y="3476434"/>
+                  </a:lnTo>
+                  <a:lnTo>
+                    <a:pt x="5163899" y="3475411"/>
+                  </a:lnTo>
+                  <a:lnTo>
+                    <a:pt x="5092277" y="3474246"/>
+                  </a:lnTo>
+                  <a:lnTo>
+                    <a:pt x="5020654" y="3472918"/>
+                  </a:lnTo>
+                  <a:lnTo>
+                    <a:pt x="4949032" y="3471404"/>
+                  </a:lnTo>
+                  <a:lnTo>
+                    <a:pt x="4877409" y="3469679"/>
+                  </a:lnTo>
+                  <a:lnTo>
+                    <a:pt x="4805787" y="3467713"/>
+                  </a:lnTo>
+                  <a:lnTo>
+                    <a:pt x="4734164" y="3465471"/>
+                  </a:lnTo>
+                  <a:lnTo>
+                    <a:pt x="4662542" y="3462917"/>
+                  </a:lnTo>
+                  <a:lnTo>
+                    <a:pt x="4590919" y="3460005"/>
+                  </a:lnTo>
+                  <a:lnTo>
+                    <a:pt x="4519297" y="3456686"/>
+                  </a:lnTo>
+                  <a:lnTo>
+                    <a:pt x="4447674" y="3452903"/>
+                  </a:lnTo>
+                  <a:lnTo>
+                    <a:pt x="4376051" y="3448592"/>
+                  </a:lnTo>
+                  <a:lnTo>
+                    <a:pt x="4304429" y="3443677"/>
+                  </a:lnTo>
+                  <a:lnTo>
+                    <a:pt x="4232806" y="3438076"/>
+                  </a:lnTo>
+                  <a:lnTo>
+                    <a:pt x="4161184" y="3431692"/>
+                  </a:lnTo>
+                  <a:lnTo>
+                    <a:pt x="4089561" y="3424415"/>
+                  </a:lnTo>
+                  <a:lnTo>
+                    <a:pt x="4017939" y="3416121"/>
+                  </a:lnTo>
+                  <a:lnTo>
+                    <a:pt x="3946316" y="3406667"/>
+                  </a:lnTo>
+                  <a:lnTo>
+                    <a:pt x="3874694" y="3395892"/>
+                  </a:lnTo>
+                  <a:lnTo>
+                    <a:pt x="3803071" y="3383611"/>
+                  </a:lnTo>
+                  <a:lnTo>
+                    <a:pt x="3731449" y="3369613"/>
+                  </a:lnTo>
+                  <a:lnTo>
+                    <a:pt x="3659826" y="3353658"/>
+                  </a:lnTo>
+                  <a:lnTo>
+                    <a:pt x="3588204" y="3335473"/>
+                  </a:lnTo>
+                  <a:lnTo>
+                    <a:pt x="3516581" y="3314746"/>
+                  </a:lnTo>
+                  <a:lnTo>
+                    <a:pt x="3444959" y="3291121"/>
+                  </a:lnTo>
+                  <a:lnTo>
+                    <a:pt x="3373336" y="3264194"/>
+                  </a:lnTo>
+                  <a:lnTo>
+                    <a:pt x="3301714" y="3233503"/>
+                  </a:lnTo>
+                  <a:lnTo>
+                    <a:pt x="3230091" y="3198521"/>
+                  </a:lnTo>
+                  <a:lnTo>
+                    <a:pt x="3158469" y="3158649"/>
+                  </a:lnTo>
+                  <a:lnTo>
+                    <a:pt x="3086846" y="3113203"/>
+                  </a:lnTo>
+                  <a:lnTo>
+                    <a:pt x="3015223" y="3061404"/>
+                  </a:lnTo>
+                  <a:lnTo>
+                    <a:pt x="2943601" y="3002365"/>
+                  </a:lnTo>
+                  <a:lnTo>
+                    <a:pt x="2871978" y="2935072"/>
+                  </a:lnTo>
+                  <a:lnTo>
+                    <a:pt x="2800356" y="2858372"/>
+                  </a:lnTo>
+                  <a:lnTo>
+                    <a:pt x="2728733" y="2770951"/>
+                  </a:lnTo>
+                  <a:lnTo>
+                    <a:pt x="2657111" y="2671308"/>
+                  </a:lnTo>
+                  <a:lnTo>
+                    <a:pt x="2585488" y="2626720"/>
+                  </a:lnTo>
+                  <a:lnTo>
+                    <a:pt x="2513866" y="2592772"/>
+                  </a:lnTo>
+                  <a:lnTo>
+                    <a:pt x="2442243" y="2557480"/>
+                  </a:lnTo>
+                  <a:lnTo>
+                    <a:pt x="2370621" y="2520789"/>
+                  </a:lnTo>
+                  <a:lnTo>
+                    <a:pt x="2298998" y="2482645"/>
+                  </a:lnTo>
+                  <a:lnTo>
+                    <a:pt x="2227376" y="2442990"/>
+                  </a:lnTo>
+                  <a:lnTo>
+                    <a:pt x="2155753" y="2401764"/>
+                  </a:lnTo>
+                  <a:lnTo>
+                    <a:pt x="2084131" y="2358906"/>
+                  </a:lnTo>
+                  <a:lnTo>
+                    <a:pt x="2012508" y="2314349"/>
+                  </a:lnTo>
+                  <a:lnTo>
+                    <a:pt x="1940886" y="2268028"/>
+                  </a:lnTo>
+                  <a:lnTo>
+                    <a:pt x="1869263" y="2219872"/>
+                  </a:lnTo>
+                  <a:lnTo>
+                    <a:pt x="1797641" y="2169808"/>
+                  </a:lnTo>
+                  <a:lnTo>
+                    <a:pt x="1726018" y="2117761"/>
+                  </a:lnTo>
+                  <a:lnTo>
+                    <a:pt x="1654395" y="2063653"/>
+                  </a:lnTo>
+                  <a:lnTo>
+                    <a:pt x="1582773" y="2007401"/>
+                  </a:lnTo>
+                  <a:lnTo>
+                    <a:pt x="1511150" y="1948921"/>
+                  </a:lnTo>
+                  <a:lnTo>
+                    <a:pt x="1439528" y="1888124"/>
+                  </a:lnTo>
+                  <a:lnTo>
+                    <a:pt x="1367905" y="1824920"/>
+                  </a:lnTo>
+                  <a:lnTo>
+                    <a:pt x="1296283" y="1759211"/>
+                  </a:lnTo>
+                  <a:lnTo>
+                    <a:pt x="1224660" y="1690900"/>
+                  </a:lnTo>
+                  <a:lnTo>
+                    <a:pt x="1153038" y="1619883"/>
+                  </a:lnTo>
+                  <a:lnTo>
+                    <a:pt x="1081415" y="1546053"/>
+                  </a:lnTo>
+                  <a:lnTo>
+                    <a:pt x="1009793" y="1469299"/>
+                  </a:lnTo>
+                  <a:lnTo>
+                    <a:pt x="938170" y="1389504"/>
+                  </a:lnTo>
+                  <a:lnTo>
+                    <a:pt x="866548" y="1306548"/>
+                  </a:lnTo>
+                  <a:lnTo>
+                    <a:pt x="794925" y="1220307"/>
+                  </a:lnTo>
+                  <a:lnTo>
+                    <a:pt x="723303" y="1130649"/>
+                  </a:lnTo>
+                  <a:lnTo>
+                    <a:pt x="651680" y="1037439"/>
+                  </a:lnTo>
+                  <a:lnTo>
+                    <a:pt x="580058" y="940538"/>
+                  </a:lnTo>
+                  <a:lnTo>
+                    <a:pt x="508435" y="839798"/>
+                  </a:lnTo>
+                  <a:lnTo>
+                    <a:pt x="436813" y="735068"/>
+                  </a:lnTo>
+                  <a:lnTo>
+                    <a:pt x="365190" y="626189"/>
+                  </a:lnTo>
+                  <a:lnTo>
+                    <a:pt x="293567" y="512998"/>
+                  </a:lnTo>
+                  <a:lnTo>
+                    <a:pt x="221945" y="395322"/>
+                  </a:lnTo>
+                  <a:lnTo>
+                    <a:pt x="150322" y="272986"/>
+                  </a:lnTo>
+                  <a:lnTo>
+                    <a:pt x="78700" y="145804"/>
+                  </a:lnTo>
+                  <a:lnTo>
+                    <a:pt x="7077" y="13583"/>
+                  </a:lnTo>
+                  <a:lnTo>
                     <a:pt x="0" y="0"/>
-                  </a:moveTo>
-                  <a:lnTo>
-                    <a:pt x="9137" y="57115"/>
-                  </a:lnTo>
-                  <a:lnTo>
-                    <a:pt x="85769" y="477378"/>
-                  </a:lnTo>
-                  <a:lnTo>
-                    <a:pt x="162402" y="846098"/>
-                  </a:lnTo>
-                  <a:lnTo>
-                    <a:pt x="239035" y="1169595"/>
-                  </a:lnTo>
-                  <a:lnTo>
-                    <a:pt x="315667" y="1453417"/>
-                  </a:lnTo>
-                  <a:lnTo>
-                    <a:pt x="392300" y="1702429"/>
-                  </a:lnTo>
-                  <a:lnTo>
-                    <a:pt x="468932" y="1920900"/>
-                  </a:lnTo>
-                  <a:lnTo>
-                    <a:pt x="545565" y="2112577"/>
-                  </a:lnTo>
-                  <a:lnTo>
-                    <a:pt x="622197" y="2280746"/>
-                  </a:lnTo>
-                  <a:lnTo>
-                    <a:pt x="698830" y="2428289"/>
-                  </a:lnTo>
-                  <a:lnTo>
-                    <a:pt x="775462" y="2557737"/>
-                  </a:lnTo>
-                  <a:lnTo>
-                    <a:pt x="852095" y="2659375"/>
-                  </a:lnTo>
-                  <a:lnTo>
-                    <a:pt x="928727" y="2690785"/>
-                  </a:lnTo>
-                  <a:lnTo>
-                    <a:pt x="1005360" y="2720998"/>
-                  </a:lnTo>
-                  <a:lnTo>
-                    <a:pt x="1081993" y="2750060"/>
-                  </a:lnTo>
-                  <a:lnTo>
-                    <a:pt x="1158625" y="2778015"/>
-                  </a:lnTo>
-                  <a:lnTo>
-                    <a:pt x="1235258" y="2804905"/>
-                  </a:lnTo>
-                  <a:lnTo>
-                    <a:pt x="1311890" y="2830770"/>
-                  </a:lnTo>
-                  <a:lnTo>
-                    <a:pt x="1388523" y="2855650"/>
-                  </a:lnTo>
-                  <a:lnTo>
-                    <a:pt x="1465155" y="2879582"/>
-                  </a:lnTo>
-                  <a:lnTo>
-                    <a:pt x="1541788" y="2902602"/>
-                  </a:lnTo>
-                  <a:lnTo>
-                    <a:pt x="1618420" y="2924745"/>
-                  </a:lnTo>
-                  <a:lnTo>
-                    <a:pt x="1695053" y="2946044"/>
-                  </a:lnTo>
-                  <a:lnTo>
-                    <a:pt x="1771686" y="2966531"/>
-                  </a:lnTo>
-                  <a:lnTo>
-                    <a:pt x="1848318" y="2986238"/>
-                  </a:lnTo>
-                  <a:lnTo>
-                    <a:pt x="1924951" y="3005194"/>
-                  </a:lnTo>
-                  <a:lnTo>
-                    <a:pt x="2001583" y="3023428"/>
-                  </a:lnTo>
-                  <a:lnTo>
-                    <a:pt x="2078216" y="3040967"/>
-                  </a:lnTo>
-                  <a:lnTo>
-                    <a:pt x="2154848" y="3057838"/>
-                  </a:lnTo>
-                  <a:lnTo>
-                    <a:pt x="2231481" y="3074066"/>
-                  </a:lnTo>
-                  <a:lnTo>
-                    <a:pt x="2308113" y="3089676"/>
-                  </a:lnTo>
-                  <a:lnTo>
-                    <a:pt x="2384746" y="3104690"/>
-                  </a:lnTo>
-                  <a:lnTo>
-                    <a:pt x="2461378" y="3119133"/>
-                  </a:lnTo>
-                  <a:lnTo>
-                    <a:pt x="2538011" y="3133026"/>
-                  </a:lnTo>
-                  <a:lnTo>
-                    <a:pt x="2614644" y="3146389"/>
-                  </a:lnTo>
-                  <a:lnTo>
-                    <a:pt x="2691276" y="3159243"/>
-                  </a:lnTo>
-                  <a:lnTo>
-                    <a:pt x="2767909" y="3171607"/>
-                  </a:lnTo>
-                  <a:lnTo>
-                    <a:pt x="2844541" y="3183500"/>
-                  </a:lnTo>
-                  <a:lnTo>
-                    <a:pt x="2921174" y="3194940"/>
-                  </a:lnTo>
-                  <a:lnTo>
-                    <a:pt x="2997806" y="3205944"/>
-                  </a:lnTo>
-                  <a:lnTo>
-                    <a:pt x="3074439" y="3216529"/>
-                  </a:lnTo>
-                  <a:lnTo>
-                    <a:pt x="3151071" y="3226711"/>
-                  </a:lnTo>
-                  <a:lnTo>
-                    <a:pt x="3227704" y="3236504"/>
-                  </a:lnTo>
-                  <a:lnTo>
-                    <a:pt x="3304336" y="3245925"/>
-                  </a:lnTo>
-                  <a:lnTo>
-                    <a:pt x="3380969" y="3254986"/>
-                  </a:lnTo>
-                  <a:lnTo>
-                    <a:pt x="3457602" y="3263702"/>
-                  </a:lnTo>
-                  <a:lnTo>
-                    <a:pt x="3534234" y="3272087"/>
-                  </a:lnTo>
-                  <a:lnTo>
-                    <a:pt x="3610867" y="3280151"/>
-                  </a:lnTo>
-                  <a:lnTo>
-                    <a:pt x="3687499" y="3287909"/>
-                  </a:lnTo>
-                  <a:lnTo>
-                    <a:pt x="3764132" y="3295370"/>
-                  </a:lnTo>
-                  <a:lnTo>
-                    <a:pt x="3840764" y="3302548"/>
-                  </a:lnTo>
-                  <a:lnTo>
-                    <a:pt x="3917397" y="3309452"/>
-                  </a:lnTo>
-                  <a:lnTo>
-                    <a:pt x="3994029" y="3316093"/>
-                  </a:lnTo>
-                  <a:lnTo>
-                    <a:pt x="4070662" y="3322481"/>
-                  </a:lnTo>
-                  <a:lnTo>
-                    <a:pt x="4147295" y="3328625"/>
-                  </a:lnTo>
-                  <a:lnTo>
-                    <a:pt x="4223927" y="3334536"/>
-                  </a:lnTo>
-                  <a:lnTo>
-                    <a:pt x="4300560" y="3340221"/>
-                  </a:lnTo>
-                  <a:lnTo>
-                    <a:pt x="4377192" y="3345690"/>
-                  </a:lnTo>
-                  <a:lnTo>
-                    <a:pt x="4453825" y="3350950"/>
-                  </a:lnTo>
-                  <a:lnTo>
-                    <a:pt x="4530457" y="3356010"/>
-                  </a:lnTo>
-                  <a:lnTo>
-                    <a:pt x="4607090" y="3360877"/>
-                  </a:lnTo>
-                  <a:lnTo>
-                    <a:pt x="4683722" y="3365558"/>
-                  </a:lnTo>
-                  <a:lnTo>
-                    <a:pt x="4760355" y="3370062"/>
-                  </a:lnTo>
-                  <a:lnTo>
-                    <a:pt x="4836987" y="3374393"/>
                   </a:lnTo>
                 </a:path>
               </a:pathLst>
@@ -3721,523 +3976,225 @@
           </p:nvSpPr>
           <p:spPr>
             <a:xfrm>
-              <a:off x="1393431" y="2073503"/>
-              <a:ext cx="6827869" cy="3482845"/>
+              <a:off x="3315732" y="2073503"/>
+              <a:ext cx="4946946" cy="3473819"/>
             </a:xfrm>
             <a:custGeom>
               <a:avLst/>
               <a:pathLst>
-                <a:path w="6827869" h="3482845">
-                  <a:moveTo>
-                    <a:pt x="6827869" y="3482845"/>
-                  </a:moveTo>
-                  <a:lnTo>
-                    <a:pt x="6751237" y="3482719"/>
-                  </a:lnTo>
-                  <a:lnTo>
-                    <a:pt x="6674604" y="3482575"/>
-                  </a:lnTo>
-                  <a:lnTo>
-                    <a:pt x="6597972" y="3482412"/>
-                  </a:lnTo>
-                  <a:lnTo>
-                    <a:pt x="6521339" y="3482225"/>
-                  </a:lnTo>
-                  <a:lnTo>
-                    <a:pt x="6444707" y="3482013"/>
-                  </a:lnTo>
-                  <a:lnTo>
-                    <a:pt x="6368074" y="3481770"/>
-                  </a:lnTo>
-                  <a:lnTo>
-                    <a:pt x="6291441" y="3481494"/>
-                  </a:lnTo>
-                  <a:lnTo>
-                    <a:pt x="6214809" y="3481179"/>
-                  </a:lnTo>
-                  <a:lnTo>
-                    <a:pt x="6138176" y="3480820"/>
-                  </a:lnTo>
-                  <a:lnTo>
-                    <a:pt x="6061544" y="3480411"/>
-                  </a:lnTo>
-                  <a:lnTo>
-                    <a:pt x="5984911" y="3479945"/>
-                  </a:lnTo>
-                  <a:lnTo>
-                    <a:pt x="5908279" y="3479413"/>
-                  </a:lnTo>
-                  <a:lnTo>
-                    <a:pt x="5831646" y="3478808"/>
-                  </a:lnTo>
-                  <a:lnTo>
-                    <a:pt x="5755014" y="3478117"/>
-                  </a:lnTo>
-                  <a:lnTo>
-                    <a:pt x="5678381" y="3477331"/>
-                  </a:lnTo>
-                  <a:lnTo>
-                    <a:pt x="5601749" y="3476434"/>
-                  </a:lnTo>
-                  <a:lnTo>
-                    <a:pt x="5525116" y="3475411"/>
-                  </a:lnTo>
-                  <a:lnTo>
-                    <a:pt x="5448483" y="3474246"/>
-                  </a:lnTo>
-                  <a:lnTo>
-                    <a:pt x="5371851" y="3472918"/>
-                  </a:lnTo>
-                  <a:lnTo>
-                    <a:pt x="5295218" y="3471404"/>
-                  </a:lnTo>
-                  <a:lnTo>
-                    <a:pt x="5218586" y="3469679"/>
-                  </a:lnTo>
-                  <a:lnTo>
-                    <a:pt x="5141953" y="3467713"/>
-                  </a:lnTo>
-                  <a:lnTo>
-                    <a:pt x="5065321" y="3465471"/>
-                  </a:lnTo>
-                  <a:lnTo>
-                    <a:pt x="4988688" y="3462917"/>
-                  </a:lnTo>
-                  <a:lnTo>
-                    <a:pt x="4912056" y="3460005"/>
-                  </a:lnTo>
-                  <a:lnTo>
-                    <a:pt x="4835423" y="3456686"/>
-                  </a:lnTo>
-                  <a:lnTo>
-                    <a:pt x="4758790" y="3452903"/>
-                  </a:lnTo>
-                  <a:lnTo>
-                    <a:pt x="4682158" y="3448592"/>
-                  </a:lnTo>
-                  <a:lnTo>
-                    <a:pt x="4605525" y="3443677"/>
-                  </a:lnTo>
-                  <a:lnTo>
-                    <a:pt x="4528893" y="3438076"/>
-                  </a:lnTo>
-                  <a:lnTo>
-                    <a:pt x="4452260" y="3431692"/>
-                  </a:lnTo>
-                  <a:lnTo>
-                    <a:pt x="4375628" y="3424415"/>
-                  </a:lnTo>
-                  <a:lnTo>
-                    <a:pt x="4298995" y="3416121"/>
-                  </a:lnTo>
-                  <a:lnTo>
-                    <a:pt x="4222363" y="3406667"/>
-                  </a:lnTo>
-                  <a:lnTo>
-                    <a:pt x="4145730" y="3395892"/>
-                  </a:lnTo>
-                  <a:lnTo>
-                    <a:pt x="4069098" y="3383611"/>
-                  </a:lnTo>
-                  <a:lnTo>
-                    <a:pt x="3992465" y="3369613"/>
-                  </a:lnTo>
-                  <a:lnTo>
-                    <a:pt x="3915832" y="3353658"/>
-                  </a:lnTo>
-                  <a:lnTo>
-                    <a:pt x="3839200" y="3335473"/>
-                  </a:lnTo>
-                  <a:lnTo>
-                    <a:pt x="3762567" y="3314746"/>
-                  </a:lnTo>
-                  <a:lnTo>
-                    <a:pt x="3685935" y="3291121"/>
-                  </a:lnTo>
-                  <a:lnTo>
-                    <a:pt x="3609302" y="3264194"/>
-                  </a:lnTo>
-                  <a:lnTo>
-                    <a:pt x="3532670" y="3233503"/>
-                  </a:lnTo>
-                  <a:lnTo>
-                    <a:pt x="3456037" y="3198521"/>
-                  </a:lnTo>
-                  <a:lnTo>
-                    <a:pt x="3379405" y="3158649"/>
-                  </a:lnTo>
-                  <a:lnTo>
-                    <a:pt x="3302772" y="3113203"/>
-                  </a:lnTo>
-                  <a:lnTo>
-                    <a:pt x="3226140" y="3061404"/>
-                  </a:lnTo>
-                  <a:lnTo>
-                    <a:pt x="3149507" y="3002365"/>
-                  </a:lnTo>
-                  <a:lnTo>
-                    <a:pt x="3072874" y="2935072"/>
-                  </a:lnTo>
-                  <a:lnTo>
-                    <a:pt x="2996242" y="2858372"/>
-                  </a:lnTo>
-                  <a:lnTo>
-                    <a:pt x="2919609" y="2770951"/>
-                  </a:lnTo>
-                  <a:lnTo>
-                    <a:pt x="2842977" y="2671308"/>
-                  </a:lnTo>
-                  <a:lnTo>
-                    <a:pt x="2766344" y="2626720"/>
-                  </a:lnTo>
-                  <a:lnTo>
-                    <a:pt x="2689712" y="2592772"/>
-                  </a:lnTo>
-                  <a:lnTo>
-                    <a:pt x="2613079" y="2557480"/>
-                  </a:lnTo>
-                  <a:lnTo>
-                    <a:pt x="2536447" y="2520789"/>
-                  </a:lnTo>
-                  <a:lnTo>
-                    <a:pt x="2459814" y="2482645"/>
-                  </a:lnTo>
-                  <a:lnTo>
-                    <a:pt x="2383181" y="2442990"/>
-                  </a:lnTo>
-                  <a:lnTo>
-                    <a:pt x="2306549" y="2401764"/>
-                  </a:lnTo>
-                  <a:lnTo>
-                    <a:pt x="2229916" y="2358906"/>
-                  </a:lnTo>
-                  <a:lnTo>
-                    <a:pt x="2153284" y="2314349"/>
-                  </a:lnTo>
-                  <a:lnTo>
-                    <a:pt x="2076651" y="2268028"/>
-                  </a:lnTo>
-                  <a:lnTo>
-                    <a:pt x="2000019" y="2219872"/>
-                  </a:lnTo>
-                  <a:lnTo>
-                    <a:pt x="1923386" y="2169808"/>
-                  </a:lnTo>
-                  <a:lnTo>
-                    <a:pt x="1846754" y="2117761"/>
-                  </a:lnTo>
-                  <a:lnTo>
-                    <a:pt x="1770121" y="2063653"/>
-                  </a:lnTo>
-                  <a:lnTo>
-                    <a:pt x="1693489" y="2007401"/>
-                  </a:lnTo>
-                  <a:lnTo>
-                    <a:pt x="1616856" y="1948921"/>
-                  </a:lnTo>
-                  <a:lnTo>
-                    <a:pt x="1540223" y="1888124"/>
-                  </a:lnTo>
-                  <a:lnTo>
-                    <a:pt x="1463591" y="1824920"/>
-                  </a:lnTo>
-                  <a:lnTo>
-                    <a:pt x="1386958" y="1759211"/>
-                  </a:lnTo>
-                  <a:lnTo>
-                    <a:pt x="1310326" y="1690900"/>
-                  </a:lnTo>
-                  <a:lnTo>
-                    <a:pt x="1233693" y="1619883"/>
-                  </a:lnTo>
-                  <a:lnTo>
-                    <a:pt x="1157061" y="1546053"/>
-                  </a:lnTo>
-                  <a:lnTo>
-                    <a:pt x="1080428" y="1469299"/>
-                  </a:lnTo>
-                  <a:lnTo>
-                    <a:pt x="1003796" y="1389504"/>
-                  </a:lnTo>
-                  <a:lnTo>
-                    <a:pt x="927163" y="1306548"/>
-                  </a:lnTo>
-                  <a:lnTo>
-                    <a:pt x="850530" y="1220307"/>
-                  </a:lnTo>
-                  <a:lnTo>
-                    <a:pt x="773898" y="1130649"/>
-                  </a:lnTo>
-                  <a:lnTo>
-                    <a:pt x="697265" y="1037439"/>
-                  </a:lnTo>
-                  <a:lnTo>
-                    <a:pt x="620633" y="940538"/>
-                  </a:lnTo>
-                  <a:lnTo>
-                    <a:pt x="544000" y="839798"/>
-                  </a:lnTo>
-                  <a:lnTo>
-                    <a:pt x="467368" y="735068"/>
-                  </a:lnTo>
-                  <a:lnTo>
-                    <a:pt x="390735" y="626189"/>
-                  </a:lnTo>
-                  <a:lnTo>
-                    <a:pt x="314103" y="512998"/>
-                  </a:lnTo>
-                  <a:lnTo>
-                    <a:pt x="237470" y="395322"/>
-                  </a:lnTo>
-                  <a:lnTo>
-                    <a:pt x="160838" y="272986"/>
-                  </a:lnTo>
-                  <a:lnTo>
-                    <a:pt x="84205" y="145804"/>
-                  </a:lnTo>
-                  <a:lnTo>
-                    <a:pt x="7572" y="13583"/>
-                  </a:lnTo>
-                  <a:lnTo>
-                    <a:pt x="0" y="0"/>
-                  </a:lnTo>
-                </a:path>
-              </a:pathLst>
-            </a:custGeom>
-          </p:spPr>
-          <p:txBody>
-            <a:bodyPr/>
-            <a:lstStyle/>
-            <a:p/>
-          </p:txBody>
-        </p:sp>
-        <p:sp>
-          <p:nvSpPr>
-            <p:cNvPr id="24" name="pl24"/>
-            <p:cNvSpPr/>
-            <p:nvPr/>
-          </p:nvSpPr>
-          <p:spPr>
-            <a:xfrm>
-              <a:off x="2928313" y="2073503"/>
-              <a:ext cx="5292987" cy="3473819"/>
-            </a:xfrm>
-            <a:custGeom>
-              <a:avLst/>
-              <a:pathLst>
-                <a:path w="5292987" h="3473819">
+                <a:path w="4946946" h="3473819">
                   <a:moveTo>
                     <a:pt x="0" y="0"/>
                   </a:moveTo>
                   <a:lnTo>
-                    <a:pt x="5341" y="21370"/>
-                  </a:lnTo>
-                  <a:lnTo>
-                    <a:pt x="81974" y="303021"/>
-                  </a:lnTo>
-                  <a:lnTo>
-                    <a:pt x="158606" y="561761"/>
-                  </a:lnTo>
-                  <a:lnTo>
-                    <a:pt x="235239" y="799453"/>
-                  </a:lnTo>
-                  <a:lnTo>
-                    <a:pt x="311871" y="1017810"/>
-                  </a:lnTo>
-                  <a:lnTo>
-                    <a:pt x="388504" y="1218404"/>
-                  </a:lnTo>
-                  <a:lnTo>
-                    <a:pt x="465136" y="1402681"/>
-                  </a:lnTo>
-                  <a:lnTo>
-                    <a:pt x="541769" y="1571968"/>
-                  </a:lnTo>
-                  <a:lnTo>
-                    <a:pt x="618401" y="1727483"/>
-                  </a:lnTo>
-                  <a:lnTo>
-                    <a:pt x="695034" y="1870349"/>
-                  </a:lnTo>
-                  <a:lnTo>
-                    <a:pt x="771667" y="2001592"/>
-                  </a:lnTo>
-                  <a:lnTo>
-                    <a:pt x="848299" y="2122160"/>
-                  </a:lnTo>
-                  <a:lnTo>
-                    <a:pt x="924932" y="2232920"/>
-                  </a:lnTo>
-                  <a:lnTo>
-                    <a:pt x="1001564" y="2334670"/>
-                  </a:lnTo>
-                  <a:lnTo>
-                    <a:pt x="1078197" y="2428143"/>
-                  </a:lnTo>
-                  <a:lnTo>
-                    <a:pt x="1154829" y="2514012"/>
-                  </a:lnTo>
-                  <a:lnTo>
-                    <a:pt x="1231462" y="2592896"/>
-                  </a:lnTo>
-                  <a:lnTo>
-                    <a:pt x="1308094" y="2665363"/>
-                  </a:lnTo>
-                  <a:lnTo>
-                    <a:pt x="1384727" y="2731936"/>
-                  </a:lnTo>
-                  <a:lnTo>
-                    <a:pt x="1461359" y="2793092"/>
-                  </a:lnTo>
-                  <a:lnTo>
-                    <a:pt x="1537992" y="2849275"/>
-                  </a:lnTo>
-                  <a:lnTo>
-                    <a:pt x="1614625" y="2900886"/>
-                  </a:lnTo>
-                  <a:lnTo>
-                    <a:pt x="1691257" y="2948300"/>
-                  </a:lnTo>
-                  <a:lnTo>
-                    <a:pt x="1767890" y="2991856"/>
-                  </a:lnTo>
-                  <a:lnTo>
-                    <a:pt x="1844522" y="3031870"/>
-                  </a:lnTo>
-                  <a:lnTo>
-                    <a:pt x="1921155" y="3068628"/>
-                  </a:lnTo>
-                  <a:lnTo>
-                    <a:pt x="1997787" y="3102396"/>
-                  </a:lnTo>
-                  <a:lnTo>
-                    <a:pt x="2074420" y="3133418"/>
-                  </a:lnTo>
-                  <a:lnTo>
-                    <a:pt x="2151052" y="3161916"/>
-                  </a:lnTo>
-                  <a:lnTo>
-                    <a:pt x="2227685" y="3188095"/>
-                  </a:lnTo>
-                  <a:lnTo>
-                    <a:pt x="2304318" y="3212145"/>
-                  </a:lnTo>
-                  <a:lnTo>
-                    <a:pt x="2380950" y="3234239"/>
-                  </a:lnTo>
-                  <a:lnTo>
-                    <a:pt x="2457583" y="3254536"/>
-                  </a:lnTo>
-                  <a:lnTo>
-                    <a:pt x="2534215" y="3273181"/>
-                  </a:lnTo>
-                  <a:lnTo>
-                    <a:pt x="2610848" y="3290310"/>
-                  </a:lnTo>
-                  <a:lnTo>
-                    <a:pt x="2687480" y="3306045"/>
-                  </a:lnTo>
-                  <a:lnTo>
-                    <a:pt x="2764113" y="3320500"/>
-                  </a:lnTo>
-                  <a:lnTo>
-                    <a:pt x="2840745" y="3333780"/>
-                  </a:lnTo>
-                  <a:lnTo>
-                    <a:pt x="2917378" y="3345979"/>
-                  </a:lnTo>
-                  <a:lnTo>
-                    <a:pt x="2994010" y="3357186"/>
-                  </a:lnTo>
-                  <a:lnTo>
-                    <a:pt x="3070643" y="3367481"/>
-                  </a:lnTo>
-                  <a:lnTo>
-                    <a:pt x="3147276" y="3376939"/>
-                  </a:lnTo>
-                  <a:lnTo>
-                    <a:pt x="3223908" y="3385627"/>
-                  </a:lnTo>
-                  <a:lnTo>
-                    <a:pt x="3300541" y="3393609"/>
-                  </a:lnTo>
-                  <a:lnTo>
-                    <a:pt x="3377173" y="3400941"/>
-                  </a:lnTo>
-                  <a:lnTo>
-                    <a:pt x="3453806" y="3407677"/>
-                  </a:lnTo>
-                  <a:lnTo>
-                    <a:pt x="3530438" y="3413865"/>
-                  </a:lnTo>
-                  <a:lnTo>
-                    <a:pt x="3607071" y="3419550"/>
-                  </a:lnTo>
-                  <a:lnTo>
-                    <a:pt x="3683703" y="3424772"/>
-                  </a:lnTo>
-                  <a:lnTo>
-                    <a:pt x="3760336" y="3429569"/>
-                  </a:lnTo>
-                  <a:lnTo>
-                    <a:pt x="3836968" y="3433976"/>
-                  </a:lnTo>
-                  <a:lnTo>
-                    <a:pt x="3913601" y="3438025"/>
-                  </a:lnTo>
-                  <a:lnTo>
-                    <a:pt x="3990234" y="3441744"/>
-                  </a:lnTo>
-                  <a:lnTo>
-                    <a:pt x="4066866" y="3445161"/>
-                  </a:lnTo>
-                  <a:lnTo>
-                    <a:pt x="4143499" y="3448300"/>
-                  </a:lnTo>
-                  <a:lnTo>
-                    <a:pt x="4220131" y="3451183"/>
-                  </a:lnTo>
-                  <a:lnTo>
-                    <a:pt x="4296764" y="3453832"/>
-                  </a:lnTo>
-                  <a:lnTo>
-                    <a:pt x="4373396" y="3456265"/>
-                  </a:lnTo>
-                  <a:lnTo>
-                    <a:pt x="4450029" y="3458501"/>
-                  </a:lnTo>
-                  <a:lnTo>
-                    <a:pt x="4526661" y="3460554"/>
-                  </a:lnTo>
-                  <a:lnTo>
-                    <a:pt x="4603294" y="3462441"/>
-                  </a:lnTo>
-                  <a:lnTo>
-                    <a:pt x="4679927" y="3464174"/>
-                  </a:lnTo>
-                  <a:lnTo>
-                    <a:pt x="4756559" y="3465766"/>
-                  </a:lnTo>
-                  <a:lnTo>
-                    <a:pt x="4833192" y="3467229"/>
-                  </a:lnTo>
-                  <a:lnTo>
-                    <a:pt x="4909824" y="3468573"/>
-                  </a:lnTo>
-                  <a:lnTo>
-                    <a:pt x="4986457" y="3469807"/>
-                  </a:lnTo>
-                  <a:lnTo>
-                    <a:pt x="5063089" y="3470941"/>
-                  </a:lnTo>
-                  <a:lnTo>
-                    <a:pt x="5139722" y="3471982"/>
-                  </a:lnTo>
-                  <a:lnTo>
-                    <a:pt x="5216354" y="3472939"/>
-                  </a:lnTo>
-                  <a:lnTo>
-                    <a:pt x="5292987" y="3473819"/>
+                    <a:pt x="4992" y="21370"/>
+                  </a:lnTo>
+                  <a:lnTo>
+                    <a:pt x="76614" y="303021"/>
+                  </a:lnTo>
+                  <a:lnTo>
+                    <a:pt x="148237" y="561761"/>
+                  </a:lnTo>
+                  <a:lnTo>
+                    <a:pt x="219859" y="799453"/>
+                  </a:lnTo>
+                  <a:lnTo>
+                    <a:pt x="291482" y="1017810"/>
+                  </a:lnTo>
+                  <a:lnTo>
+                    <a:pt x="363104" y="1218404"/>
+                  </a:lnTo>
+                  <a:lnTo>
+                    <a:pt x="434727" y="1402681"/>
+                  </a:lnTo>
+                  <a:lnTo>
+                    <a:pt x="506350" y="1571968"/>
+                  </a:lnTo>
+                  <a:lnTo>
+                    <a:pt x="577972" y="1727483"/>
+                  </a:lnTo>
+                  <a:lnTo>
+                    <a:pt x="649595" y="1870349"/>
+                  </a:lnTo>
+                  <a:lnTo>
+                    <a:pt x="721217" y="2001592"/>
+                  </a:lnTo>
+                  <a:lnTo>
+                    <a:pt x="792840" y="2122160"/>
+                  </a:lnTo>
+                  <a:lnTo>
+                    <a:pt x="864462" y="2232920"/>
+                  </a:lnTo>
+                  <a:lnTo>
+                    <a:pt x="936085" y="2334670"/>
+                  </a:lnTo>
+                  <a:lnTo>
+                    <a:pt x="1007707" y="2428143"/>
+                  </a:lnTo>
+                  <a:lnTo>
+                    <a:pt x="1079330" y="2514012"/>
+                  </a:lnTo>
+                  <a:lnTo>
+                    <a:pt x="1150952" y="2592896"/>
+                  </a:lnTo>
+                  <a:lnTo>
+                    <a:pt x="1222575" y="2665363"/>
+                  </a:lnTo>
+                  <a:lnTo>
+                    <a:pt x="1294197" y="2731936"/>
+                  </a:lnTo>
+                  <a:lnTo>
+                    <a:pt x="1365820" y="2793092"/>
+                  </a:lnTo>
+                  <a:lnTo>
+                    <a:pt x="1437442" y="2849275"/>
+                  </a:lnTo>
+                  <a:lnTo>
+                    <a:pt x="1509065" y="2900886"/>
+                  </a:lnTo>
+                  <a:lnTo>
+                    <a:pt x="1580687" y="2948300"/>
+                  </a:lnTo>
+                  <a:lnTo>
+                    <a:pt x="1652310" y="2991856"/>
+                  </a:lnTo>
+                  <a:lnTo>
+                    <a:pt x="1723932" y="3031870"/>
+                  </a:lnTo>
+                  <a:lnTo>
+                    <a:pt x="1795555" y="3068628"/>
+                  </a:lnTo>
+                  <a:lnTo>
+                    <a:pt x="1867177" y="3102396"/>
+                  </a:lnTo>
+                  <a:lnTo>
+                    <a:pt x="1938800" y="3133418"/>
+                  </a:lnTo>
+                  <a:lnTo>
+                    <a:pt x="2010423" y="3161916"/>
+                  </a:lnTo>
+                  <a:lnTo>
+                    <a:pt x="2082045" y="3188095"/>
+                  </a:lnTo>
+                  <a:lnTo>
+                    <a:pt x="2153668" y="3212145"/>
+                  </a:lnTo>
+                  <a:lnTo>
+                    <a:pt x="2225290" y="3234239"/>
+                  </a:lnTo>
+                  <a:lnTo>
+                    <a:pt x="2296913" y="3254536"/>
+                  </a:lnTo>
+                  <a:lnTo>
+                    <a:pt x="2368535" y="3273181"/>
+                  </a:lnTo>
+                  <a:lnTo>
+                    <a:pt x="2440158" y="3290310"/>
+                  </a:lnTo>
+                  <a:lnTo>
+                    <a:pt x="2511780" y="3306045"/>
+                  </a:lnTo>
+                  <a:lnTo>
+                    <a:pt x="2583403" y="3320500"/>
+                  </a:lnTo>
+                  <a:lnTo>
+                    <a:pt x="2655025" y="3333780"/>
+                  </a:lnTo>
+                  <a:lnTo>
+                    <a:pt x="2726648" y="3345979"/>
+                  </a:lnTo>
+                  <a:lnTo>
+                    <a:pt x="2798270" y="3357186"/>
+                  </a:lnTo>
+                  <a:lnTo>
+                    <a:pt x="2869893" y="3367481"/>
+                  </a:lnTo>
+                  <a:lnTo>
+                    <a:pt x="2941515" y="3376939"/>
+                  </a:lnTo>
+                  <a:lnTo>
+                    <a:pt x="3013138" y="3385627"/>
+                  </a:lnTo>
+                  <a:lnTo>
+                    <a:pt x="3084760" y="3393609"/>
+                  </a:lnTo>
+                  <a:lnTo>
+                    <a:pt x="3156383" y="3400941"/>
+                  </a:lnTo>
+                  <a:lnTo>
+                    <a:pt x="3228005" y="3407677"/>
+                  </a:lnTo>
+                  <a:lnTo>
+                    <a:pt x="3299628" y="3413865"/>
+                  </a:lnTo>
+                  <a:lnTo>
+                    <a:pt x="3371251" y="3419550"/>
+                  </a:lnTo>
+                  <a:lnTo>
+                    <a:pt x="3442873" y="3424772"/>
+                  </a:lnTo>
+                  <a:lnTo>
+                    <a:pt x="3514496" y="3429569"/>
+                  </a:lnTo>
+                  <a:lnTo>
+                    <a:pt x="3586118" y="3433976"/>
+                  </a:lnTo>
+                  <a:lnTo>
+                    <a:pt x="3657741" y="3438025"/>
+                  </a:lnTo>
+                  <a:lnTo>
+                    <a:pt x="3729363" y="3441744"/>
+                  </a:lnTo>
+                  <a:lnTo>
+                    <a:pt x="3800986" y="3445161"/>
+                  </a:lnTo>
+                  <a:lnTo>
+                    <a:pt x="3872608" y="3448300"/>
+                  </a:lnTo>
+                  <a:lnTo>
+                    <a:pt x="3944231" y="3451183"/>
+                  </a:lnTo>
+                  <a:lnTo>
+                    <a:pt x="4015853" y="3453832"/>
+                  </a:lnTo>
+                  <a:lnTo>
+                    <a:pt x="4087476" y="3456265"/>
+                  </a:lnTo>
+                  <a:lnTo>
+                    <a:pt x="4159098" y="3458501"/>
+                  </a:lnTo>
+                  <a:lnTo>
+                    <a:pt x="4230721" y="3460554"/>
+                  </a:lnTo>
+                  <a:lnTo>
+                    <a:pt x="4302343" y="3462441"/>
+                  </a:lnTo>
+                  <a:lnTo>
+                    <a:pt x="4373966" y="3464174"/>
+                  </a:lnTo>
+                  <a:lnTo>
+                    <a:pt x="4445588" y="3465766"/>
+                  </a:lnTo>
+                  <a:lnTo>
+                    <a:pt x="4517211" y="3467229"/>
+                  </a:lnTo>
+                  <a:lnTo>
+                    <a:pt x="4588833" y="3468573"/>
+                  </a:lnTo>
+                  <a:lnTo>
+                    <a:pt x="4660456" y="3469807"/>
+                  </a:lnTo>
+                  <a:lnTo>
+                    <a:pt x="4732079" y="3470941"/>
+                  </a:lnTo>
+                  <a:lnTo>
+                    <a:pt x="4803701" y="3471982"/>
+                  </a:lnTo>
+                  <a:lnTo>
+                    <a:pt x="4875324" y="3472939"/>
+                  </a:lnTo>
+                  <a:lnTo>
+                    <a:pt x="4946946" y="3473819"/>
                   </a:lnTo>
                 </a:path>
               </a:pathLst>
@@ -4260,7 +4217,7 @@
         </p:sp>
         <p:sp>
           <p:nvSpPr>
-            <p:cNvPr id="25" name="pl25"/>
+            <p:cNvPr id="24" name="pl24"/>
             <p:cNvSpPr/>
             <p:nvPr/>
           </p:nvSpPr>
@@ -4303,13 +4260,13 @@
         </p:sp>
         <p:sp>
           <p:nvSpPr>
-            <p:cNvPr id="26" name="pl26"/>
+            <p:cNvPr id="25" name="pl25"/>
             <p:cNvSpPr/>
             <p:nvPr/>
           </p:nvSpPr>
           <p:spPr>
             <a:xfrm>
-              <a:off x="4224261" y="2073503"/>
+              <a:off x="4526955" y="2073503"/>
               <a:ext cx="0" cy="3649639"/>
             </a:xfrm>
             <a:custGeom>
@@ -4346,7 +4303,7 @@
         </p:sp>
         <p:sp>
           <p:nvSpPr>
-            <p:cNvPr id="27" name="tx27"/>
+            <p:cNvPr id="26" name="tx26"/>
             <p:cNvSpPr/>
             <p:nvPr/>
           </p:nvSpPr>
@@ -4392,7 +4349,7 @@
         </p:sp>
         <p:sp>
           <p:nvSpPr>
-            <p:cNvPr id="28" name="tx28"/>
+            <p:cNvPr id="27" name="tx27"/>
             <p:cNvSpPr/>
             <p:nvPr/>
           </p:nvSpPr>
@@ -4438,7 +4395,7 @@
         </p:sp>
         <p:sp>
           <p:nvSpPr>
-            <p:cNvPr id="29" name="tx29"/>
+            <p:cNvPr id="28" name="tx28"/>
             <p:cNvSpPr/>
             <p:nvPr/>
           </p:nvSpPr>
@@ -4484,7 +4441,7 @@
         </p:sp>
         <p:sp>
           <p:nvSpPr>
-            <p:cNvPr id="30" name="tx30"/>
+            <p:cNvPr id="29" name="tx29"/>
             <p:cNvSpPr/>
             <p:nvPr/>
           </p:nvSpPr>
@@ -4530,7 +4487,7 @@
         </p:sp>
         <p:sp>
           <p:nvSpPr>
-            <p:cNvPr id="31" name="tx31"/>
+            <p:cNvPr id="30" name="tx30"/>
             <p:cNvSpPr/>
             <p:nvPr/>
           </p:nvSpPr>
@@ -4576,14 +4533,14 @@
         </p:sp>
         <p:sp>
           <p:nvSpPr>
-            <p:cNvPr id="32" name="tx32"/>
+            <p:cNvPr id="31" name="tx31"/>
             <p:cNvSpPr/>
             <p:nvPr/>
           </p:nvSpPr>
           <p:spPr>
             <a:xfrm>
-              <a:off x="2423864" y="5785772"/>
-              <a:ext cx="155356" cy="80101"/>
+              <a:off x="2421884" y="5785772"/>
+              <a:ext cx="161574" cy="80101"/>
             </a:xfrm>
             <a:prstGeom prst="rect">
               <a:avLst/>
@@ -4615,21 +4572,21 @@
                   <a:latin typeface="Helvetica"/>
                   <a:cs typeface="Helvetica"/>
                 </a:rPr>
-                <a:t>0.8</a:t>
+                <a:t>-25</a:t>
               </a:r>
             </a:p>
           </p:txBody>
         </p:sp>
         <p:sp>
           <p:nvSpPr>
-            <p:cNvPr id="33" name="tx33"/>
+            <p:cNvPr id="32" name="tx32"/>
             <p:cNvSpPr/>
             <p:nvPr/>
           </p:nvSpPr>
           <p:spPr>
             <a:xfrm>
-              <a:off x="4196521" y="5785772"/>
-              <a:ext cx="155356" cy="80101"/>
+              <a:off x="4542539" y="5785772"/>
+              <a:ext cx="62179" cy="80101"/>
             </a:xfrm>
             <a:prstGeom prst="rect">
               <a:avLst/>
@@ -4661,21 +4618,21 @@
                   <a:latin typeface="Helvetica"/>
                   <a:cs typeface="Helvetica"/>
                 </a:rPr>
-                <a:t>1.0</a:t>
+                <a:t>0</a:t>
               </a:r>
             </a:p>
           </p:txBody>
         </p:sp>
         <p:sp>
           <p:nvSpPr>
-            <p:cNvPr id="34" name="tx34"/>
+            <p:cNvPr id="33" name="tx33"/>
             <p:cNvSpPr/>
             <p:nvPr/>
           </p:nvSpPr>
           <p:spPr>
             <a:xfrm>
-              <a:off x="5969179" y="5785772"/>
-              <a:ext cx="155356" cy="80101"/>
+              <a:off x="6582407" y="5785772"/>
+              <a:ext cx="124358" cy="80101"/>
             </a:xfrm>
             <a:prstGeom prst="rect">
               <a:avLst/>
@@ -4707,67 +4664,21 @@
                   <a:latin typeface="Helvetica"/>
                   <a:cs typeface="Helvetica"/>
                 </a:rPr>
-                <a:t>1.2</a:t>
+                <a:t>25</a:t>
               </a:r>
             </a:p>
           </p:txBody>
         </p:sp>
         <p:sp>
           <p:nvSpPr>
-            <p:cNvPr id="35" name="tx35"/>
+            <p:cNvPr id="34" name="tx34"/>
             <p:cNvSpPr/>
             <p:nvPr/>
           </p:nvSpPr>
           <p:spPr>
             <a:xfrm>
-              <a:off x="7741836" y="5785772"/>
-              <a:ext cx="155356" cy="80101"/>
-            </a:xfrm>
-            <a:prstGeom prst="rect">
-              <a:avLst/>
-            </a:prstGeom>
-            <a:noFill/>
-          </p:spPr>
-          <p:txBody>
-            <a:bodyPr lIns="0" rIns="0" tIns="0" bIns="0" anchorCtr="1" anchor="ctr" wrap="none"/>
-            <a:lstStyle/>
-            <a:p>
-              <a:pPr algn="l" marL="0" marR="0" indent="0">
-                <a:lnSpc>
-                  <a:spcPts val="880"/>
-                </a:lnSpc>
-                <a:spcBef>
-                  <a:spcPts val="0"/>
-                </a:spcBef>
-                <a:spcAft>
-                  <a:spcPts val="0"/>
-                </a:spcAft>
-              </a:pPr>
-              <a:r>
-                <a:rPr sz="880">
-                  <a:solidFill>
-                    <a:srgbClr val="4D4D4D">
-                      <a:alpha val="100000"/>
-                    </a:srgbClr>
-                  </a:solidFill>
-                  <a:latin typeface="Helvetica"/>
-                  <a:cs typeface="Helvetica"/>
-                </a:rPr>
-                <a:t>1.4</a:t>
-              </a:r>
-            </a:p>
-          </p:txBody>
-        </p:sp>
-        <p:sp>
-          <p:nvSpPr>
-            <p:cNvPr id="36" name="tx36"/>
-            <p:cNvSpPr/>
-            <p:nvPr/>
-          </p:nvSpPr>
-          <p:spPr>
-            <a:xfrm>
-              <a:off x="3879271" y="5925448"/>
-              <a:ext cx="1676186" cy="100218"/>
+              <a:off x="2928340" y="5925448"/>
+              <a:ext cx="3578047" cy="100218"/>
             </a:xfrm>
             <a:prstGeom prst="rect">
               <a:avLst/>
@@ -4799,14 +4710,14 @@
                   <a:latin typeface="Helvetica"/>
                   <a:cs typeface="Helvetica"/>
                 </a:rPr>
-                <a:t>CKD-EPI Cr-Cys / CG ratio</a:t>
+                <a:t>eGFR difference (%): 100 × (CKD-EPI Cr-Cys − CG) / CG</a:t>
               </a:r>
             </a:p>
           </p:txBody>
         </p:sp>
         <p:sp>
           <p:nvSpPr>
-            <p:cNvPr id="37" name="tx37"/>
+            <p:cNvPr id="35" name="tx35"/>
             <p:cNvSpPr/>
             <p:nvPr/>
           </p:nvSpPr>
@@ -4852,14 +4763,14 @@
         </p:sp>
         <p:sp>
           <p:nvSpPr>
-            <p:cNvPr id="38" name="tx38"/>
+            <p:cNvPr id="36" name="tx36"/>
             <p:cNvSpPr/>
             <p:nvPr/>
           </p:nvSpPr>
           <p:spPr>
             <a:xfrm>
               <a:off x="817517" y="1896563"/>
-              <a:ext cx="6363218" cy="82021"/>
+              <a:ext cx="6515465" cy="82021"/>
             </a:xfrm>
             <a:prstGeom prst="rect">
               <a:avLst/>
@@ -4891,14 +4802,14 @@
                   <a:latin typeface="Helvetica"/>
                   <a:cs typeface="Helvetica"/>
                 </a:rPr>
-                <a:t>subHR per 0.1 ratio decline: 2.67 (1.57-4.54), p = &lt;0.001  |  per IQR decline (Δ = 0.30): 18.84 (3.83-92.51)  |  IQR: [0.85, 1.15]</a:t>
+                <a:t>subHR per 10 % decline: 2.67 (1.57-4.54), p = &lt;0.001  |  per IQR decline (Δ = 29.9 %): 18.84 (3.83-92.51)  |  IQR: [-15.0, 14.9] %</a:t>
               </a:r>
             </a:p>
           </p:txBody>
         </p:sp>
         <p:sp>
           <p:nvSpPr>
-            <p:cNvPr id="39" name="tx39"/>
+            <p:cNvPr id="37" name="tx37"/>
             <p:cNvSpPr/>
             <p:nvPr/>
           </p:nvSpPr>

--- a/docs/pptx/carbo/jx-carbo-linsubhr-ratio-hosp3.pptx
+++ b/docs/pptx/carbo/jx-carbo-linsubhr-ratio-hosp3.pptx
@@ -2265,27 +2265,62 @@
         </p:sp>
         <p:sp>
           <p:nvSpPr>
-            <p:cNvPr id="4" name="pl4"/>
+            <p:cNvPr id="4" name="rc4"/>
             <p:cNvSpPr/>
             <p:nvPr/>
           </p:nvSpPr>
           <p:spPr>
             <a:xfrm>
-              <a:off x="817517" y="5142518"/>
-              <a:ext cx="7799693" cy="0"/>
+              <a:off x="457200" y="1600200"/>
+              <a:ext cx="8229600" cy="4525962"/>
+            </a:xfrm>
+            <a:prstGeom prst="rect">
+              <a:avLst/>
+            </a:prstGeom>
+            <a:solidFill>
+              <a:srgbClr val="FFFFFF">
+                <a:alpha val="100000"/>
+              </a:srgbClr>
+            </a:solidFill>
+            <a:ln w="13550" cap="rnd">
+              <a:solidFill>
+                <a:srgbClr val="FFFFFF">
+                  <a:alpha val="100000"/>
+                </a:srgbClr>
+              </a:solidFill>
+              <a:prstDash val="solid"/>
+              <a:round/>
+            </a:ln>
+          </p:spPr>
+          <p:txBody>
+            <a:bodyPr/>
+            <a:lstStyle/>
+            <a:p/>
+          </p:txBody>
+        </p:sp>
+        <p:sp>
+          <p:nvSpPr>
+            <p:cNvPr id="5" name="pl5"/>
+            <p:cNvSpPr/>
+            <p:nvPr/>
+          </p:nvSpPr>
+          <p:spPr>
+            <a:xfrm>
+              <a:off x="887106" y="3250627"/>
+              <a:ext cx="7660515" cy="0"/>
             </a:xfrm>
             <a:custGeom>
               <a:avLst/>
               <a:pathLst>
-                <a:path w="7799693" h="0">
+                <a:path w="7660515" h="0">
                   <a:moveTo>
                     <a:pt x="0" y="0"/>
                   </a:moveTo>
                   <a:lnTo>
-                    <a:pt x="7799693" y="0"/>
-                  </a:lnTo>
-                  <a:lnTo>
-                    <a:pt x="7799693" y="0"/>
+                    <a:pt x="7660515" y="0"/>
+                  </a:lnTo>
+                  <a:lnTo>
+                    <a:pt x="7660515" y="0"/>
                   </a:lnTo>
                 </a:path>
               </a:pathLst>
@@ -2308,27 +2343,27 @@
         </p:sp>
         <p:sp>
           <p:nvSpPr>
-            <p:cNvPr id="5" name="pl5"/>
+            <p:cNvPr id="6" name="pl6"/>
             <p:cNvSpPr/>
             <p:nvPr/>
           </p:nvSpPr>
           <p:spPr>
             <a:xfrm>
-              <a:off x="817517" y="4313054"/>
-              <a:ext cx="7799693" cy="0"/>
+              <a:off x="887106" y="2951293"/>
+              <a:ext cx="7660515" cy="0"/>
             </a:xfrm>
             <a:custGeom>
               <a:avLst/>
               <a:pathLst>
-                <a:path w="7799693" h="0">
+                <a:path w="7660515" h="0">
                   <a:moveTo>
                     <a:pt x="0" y="0"/>
                   </a:moveTo>
                   <a:lnTo>
-                    <a:pt x="7799693" y="0"/>
-                  </a:lnTo>
-                  <a:lnTo>
-                    <a:pt x="7799693" y="0"/>
+                    <a:pt x="7660515" y="0"/>
+                  </a:lnTo>
+                  <a:lnTo>
+                    <a:pt x="7660515" y="0"/>
                   </a:lnTo>
                 </a:path>
               </a:pathLst>
@@ -2351,27 +2386,27 @@
         </p:sp>
         <p:sp>
           <p:nvSpPr>
-            <p:cNvPr id="6" name="pl6"/>
+            <p:cNvPr id="7" name="pl7"/>
             <p:cNvSpPr/>
             <p:nvPr/>
           </p:nvSpPr>
           <p:spPr>
             <a:xfrm>
-              <a:off x="817517" y="3483591"/>
-              <a:ext cx="7799693" cy="0"/>
+              <a:off x="887106" y="2651959"/>
+              <a:ext cx="7660515" cy="0"/>
             </a:xfrm>
             <a:custGeom>
               <a:avLst/>
               <a:pathLst>
-                <a:path w="7799693" h="0">
+                <a:path w="7660515" h="0">
                   <a:moveTo>
                     <a:pt x="0" y="0"/>
                   </a:moveTo>
                   <a:lnTo>
-                    <a:pt x="7799693" y="0"/>
-                  </a:lnTo>
-                  <a:lnTo>
-                    <a:pt x="7799693" y="0"/>
+                    <a:pt x="7660515" y="0"/>
+                  </a:lnTo>
+                  <a:lnTo>
+                    <a:pt x="7660515" y="0"/>
                   </a:lnTo>
                 </a:path>
               </a:pathLst>
@@ -2394,27 +2429,27 @@
         </p:sp>
         <p:sp>
           <p:nvSpPr>
-            <p:cNvPr id="7" name="pl7"/>
+            <p:cNvPr id="8" name="pl8"/>
             <p:cNvSpPr/>
             <p:nvPr/>
           </p:nvSpPr>
           <p:spPr>
             <a:xfrm>
-              <a:off x="817517" y="2654127"/>
-              <a:ext cx="7799693" cy="0"/>
+              <a:off x="887106" y="2352625"/>
+              <a:ext cx="7660515" cy="0"/>
             </a:xfrm>
             <a:custGeom>
               <a:avLst/>
               <a:pathLst>
-                <a:path w="7799693" h="0">
+                <a:path w="7660515" h="0">
                   <a:moveTo>
                     <a:pt x="0" y="0"/>
                   </a:moveTo>
                   <a:lnTo>
-                    <a:pt x="7799693" y="0"/>
-                  </a:lnTo>
-                  <a:lnTo>
-                    <a:pt x="7799693" y="0"/>
+                    <a:pt x="7660515" y="0"/>
+                  </a:lnTo>
+                  <a:lnTo>
+                    <a:pt x="7660515" y="0"/>
                   </a:lnTo>
                 </a:path>
               </a:pathLst>
@@ -2437,21 +2472,21 @@
         </p:sp>
         <p:sp>
           <p:nvSpPr>
-            <p:cNvPr id="8" name="pl8"/>
+            <p:cNvPr id="9" name="pl9"/>
             <p:cNvSpPr/>
             <p:nvPr/>
           </p:nvSpPr>
           <p:spPr>
             <a:xfrm>
-              <a:off x="1467192" y="2073503"/>
-              <a:ext cx="0" cy="3649639"/>
+              <a:off x="1525188" y="2143092"/>
+              <a:ext cx="0" cy="1317069"/>
             </a:xfrm>
             <a:custGeom>
               <a:avLst/>
               <a:pathLst>
-                <a:path w="0" h="3649639">
+                <a:path w="0" h="1317069">
                   <a:moveTo>
-                    <a:pt x="0" y="3649639"/>
+                    <a:pt x="0" y="1317069"/>
                   </a:moveTo>
                   <a:lnTo>
                     <a:pt x="0" y="0"/>
@@ -2480,21 +2515,21 @@
         </p:sp>
         <p:sp>
           <p:nvSpPr>
-            <p:cNvPr id="9" name="pl9"/>
+            <p:cNvPr id="10" name="pl10"/>
             <p:cNvSpPr/>
             <p:nvPr/>
           </p:nvSpPr>
           <p:spPr>
             <a:xfrm>
-              <a:off x="3538150" y="2073503"/>
-              <a:ext cx="0" cy="3649639"/>
+              <a:off x="3559192" y="2143092"/>
+              <a:ext cx="0" cy="1317069"/>
             </a:xfrm>
             <a:custGeom>
               <a:avLst/>
               <a:pathLst>
-                <a:path w="0" h="3649639">
+                <a:path w="0" h="1317069">
                   <a:moveTo>
-                    <a:pt x="0" y="3649639"/>
+                    <a:pt x="0" y="1317069"/>
                   </a:moveTo>
                   <a:lnTo>
                     <a:pt x="0" y="0"/>
@@ -2523,21 +2558,21 @@
         </p:sp>
         <p:sp>
           <p:nvSpPr>
-            <p:cNvPr id="10" name="pl10"/>
+            <p:cNvPr id="11" name="pl11"/>
             <p:cNvSpPr/>
             <p:nvPr/>
           </p:nvSpPr>
           <p:spPr>
             <a:xfrm>
-              <a:off x="5609107" y="2073503"/>
-              <a:ext cx="0" cy="3649639"/>
+              <a:off x="5593195" y="2143092"/>
+              <a:ext cx="0" cy="1317069"/>
             </a:xfrm>
             <a:custGeom>
               <a:avLst/>
               <a:pathLst>
-                <a:path w="0" h="3649639">
+                <a:path w="0" h="1317069">
                   <a:moveTo>
-                    <a:pt x="0" y="3649639"/>
+                    <a:pt x="0" y="1317069"/>
                   </a:moveTo>
                   <a:lnTo>
                     <a:pt x="0" y="0"/>
@@ -2566,21 +2601,21 @@
         </p:sp>
         <p:sp>
           <p:nvSpPr>
-            <p:cNvPr id="11" name="pl11"/>
+            <p:cNvPr id="12" name="pl12"/>
             <p:cNvSpPr/>
             <p:nvPr/>
           </p:nvSpPr>
           <p:spPr>
             <a:xfrm>
-              <a:off x="7680065" y="2073503"/>
-              <a:ext cx="0" cy="3649639"/>
+              <a:off x="7627198" y="2143092"/>
+              <a:ext cx="0" cy="1317069"/>
             </a:xfrm>
             <a:custGeom>
               <a:avLst/>
               <a:pathLst>
-                <a:path w="0" h="3649639">
+                <a:path w="0" h="1317069">
                   <a:moveTo>
-                    <a:pt x="0" y="3649639"/>
+                    <a:pt x="0" y="1317069"/>
                   </a:moveTo>
                   <a:lnTo>
                     <a:pt x="0" y="0"/>
@@ -2609,27 +2644,27 @@
         </p:sp>
         <p:sp>
           <p:nvSpPr>
-            <p:cNvPr id="12" name="pl12"/>
+            <p:cNvPr id="13" name="pl13"/>
             <p:cNvSpPr/>
             <p:nvPr/>
           </p:nvSpPr>
           <p:spPr>
             <a:xfrm>
-              <a:off x="817517" y="5557249"/>
-              <a:ext cx="7799693" cy="0"/>
+              <a:off x="887106" y="3400294"/>
+              <a:ext cx="7660515" cy="0"/>
             </a:xfrm>
             <a:custGeom>
               <a:avLst/>
               <a:pathLst>
-                <a:path w="7799693" h="0">
+                <a:path w="7660515" h="0">
                   <a:moveTo>
                     <a:pt x="0" y="0"/>
                   </a:moveTo>
                   <a:lnTo>
-                    <a:pt x="7799693" y="0"/>
-                  </a:lnTo>
-                  <a:lnTo>
-                    <a:pt x="7799693" y="0"/>
+                    <a:pt x="7660515" y="0"/>
+                  </a:lnTo>
+                  <a:lnTo>
+                    <a:pt x="7660515" y="0"/>
                   </a:lnTo>
                 </a:path>
               </a:pathLst>
@@ -2652,27 +2687,27 @@
         </p:sp>
         <p:sp>
           <p:nvSpPr>
-            <p:cNvPr id="13" name="pl13"/>
+            <p:cNvPr id="14" name="pl14"/>
             <p:cNvSpPr/>
             <p:nvPr/>
           </p:nvSpPr>
           <p:spPr>
             <a:xfrm>
-              <a:off x="817517" y="4727786"/>
-              <a:ext cx="7799693" cy="0"/>
+              <a:off x="887106" y="3100960"/>
+              <a:ext cx="7660515" cy="0"/>
             </a:xfrm>
             <a:custGeom>
               <a:avLst/>
               <a:pathLst>
-                <a:path w="7799693" h="0">
+                <a:path w="7660515" h="0">
                   <a:moveTo>
                     <a:pt x="0" y="0"/>
                   </a:moveTo>
                   <a:lnTo>
-                    <a:pt x="7799693" y="0"/>
-                  </a:lnTo>
-                  <a:lnTo>
-                    <a:pt x="7799693" y="0"/>
+                    <a:pt x="7660515" y="0"/>
+                  </a:lnTo>
+                  <a:lnTo>
+                    <a:pt x="7660515" y="0"/>
                   </a:lnTo>
                 </a:path>
               </a:pathLst>
@@ -2695,27 +2730,27 @@
         </p:sp>
         <p:sp>
           <p:nvSpPr>
-            <p:cNvPr id="14" name="pl14"/>
+            <p:cNvPr id="15" name="pl15"/>
             <p:cNvSpPr/>
             <p:nvPr/>
           </p:nvSpPr>
           <p:spPr>
             <a:xfrm>
-              <a:off x="817517" y="3898322"/>
-              <a:ext cx="7799693" cy="0"/>
+              <a:off x="887106" y="2801626"/>
+              <a:ext cx="7660515" cy="0"/>
             </a:xfrm>
             <a:custGeom>
               <a:avLst/>
               <a:pathLst>
-                <a:path w="7799693" h="0">
+                <a:path w="7660515" h="0">
                   <a:moveTo>
                     <a:pt x="0" y="0"/>
                   </a:moveTo>
                   <a:lnTo>
-                    <a:pt x="7799693" y="0"/>
-                  </a:lnTo>
-                  <a:lnTo>
-                    <a:pt x="7799693" y="0"/>
+                    <a:pt x="7660515" y="0"/>
+                  </a:lnTo>
+                  <a:lnTo>
+                    <a:pt x="7660515" y="0"/>
                   </a:lnTo>
                 </a:path>
               </a:pathLst>
@@ -2738,27 +2773,27 @@
         </p:sp>
         <p:sp>
           <p:nvSpPr>
-            <p:cNvPr id="15" name="pl15"/>
+            <p:cNvPr id="16" name="pl16"/>
             <p:cNvSpPr/>
             <p:nvPr/>
           </p:nvSpPr>
           <p:spPr>
             <a:xfrm>
-              <a:off x="817517" y="3068859"/>
-              <a:ext cx="7799693" cy="0"/>
+              <a:off x="887106" y="2502292"/>
+              <a:ext cx="7660515" cy="0"/>
             </a:xfrm>
             <a:custGeom>
               <a:avLst/>
               <a:pathLst>
-                <a:path w="7799693" h="0">
+                <a:path w="7660515" h="0">
                   <a:moveTo>
                     <a:pt x="0" y="0"/>
                   </a:moveTo>
                   <a:lnTo>
-                    <a:pt x="7799693" y="0"/>
-                  </a:lnTo>
-                  <a:lnTo>
-                    <a:pt x="7799693" y="0"/>
+                    <a:pt x="7660515" y="0"/>
+                  </a:lnTo>
+                  <a:lnTo>
+                    <a:pt x="7660515" y="0"/>
                   </a:lnTo>
                 </a:path>
               </a:pathLst>
@@ -2781,27 +2816,27 @@
         </p:sp>
         <p:sp>
           <p:nvSpPr>
-            <p:cNvPr id="16" name="pl16"/>
+            <p:cNvPr id="17" name="pl17"/>
             <p:cNvSpPr/>
             <p:nvPr/>
           </p:nvSpPr>
           <p:spPr>
             <a:xfrm>
-              <a:off x="817517" y="2239395"/>
-              <a:ext cx="7799693" cy="0"/>
+              <a:off x="887106" y="2202958"/>
+              <a:ext cx="7660515" cy="0"/>
             </a:xfrm>
             <a:custGeom>
               <a:avLst/>
               <a:pathLst>
-                <a:path w="7799693" h="0">
+                <a:path w="7660515" h="0">
                   <a:moveTo>
                     <a:pt x="0" y="0"/>
                   </a:moveTo>
                   <a:lnTo>
-                    <a:pt x="7799693" y="0"/>
-                  </a:lnTo>
-                  <a:lnTo>
-                    <a:pt x="7799693" y="0"/>
+                    <a:pt x="7660515" y="0"/>
+                  </a:lnTo>
+                  <a:lnTo>
+                    <a:pt x="7660515" y="0"/>
                   </a:lnTo>
                 </a:path>
               </a:pathLst>
@@ -2824,21 +2859,21 @@
         </p:sp>
         <p:sp>
           <p:nvSpPr>
-            <p:cNvPr id="17" name="pl17"/>
+            <p:cNvPr id="18" name="pl18"/>
             <p:cNvSpPr/>
             <p:nvPr/>
           </p:nvSpPr>
           <p:spPr>
             <a:xfrm>
-              <a:off x="2502671" y="2073503"/>
-              <a:ext cx="0" cy="3649639"/>
+              <a:off x="2542190" y="2143092"/>
+              <a:ext cx="0" cy="1317069"/>
             </a:xfrm>
             <a:custGeom>
               <a:avLst/>
               <a:pathLst>
-                <a:path w="0" h="3649639">
+                <a:path w="0" h="1317069">
                   <a:moveTo>
-                    <a:pt x="0" y="3649639"/>
+                    <a:pt x="0" y="1317069"/>
                   </a:moveTo>
                   <a:lnTo>
                     <a:pt x="0" y="0"/>
@@ -2867,21 +2902,21 @@
         </p:sp>
         <p:sp>
           <p:nvSpPr>
-            <p:cNvPr id="18" name="pl18"/>
+            <p:cNvPr id="19" name="pl19"/>
             <p:cNvSpPr/>
             <p:nvPr/>
           </p:nvSpPr>
           <p:spPr>
             <a:xfrm>
-              <a:off x="4573628" y="2073503"/>
-              <a:ext cx="0" cy="3649639"/>
+              <a:off x="4576193" y="2143092"/>
+              <a:ext cx="0" cy="1317069"/>
             </a:xfrm>
             <a:custGeom>
               <a:avLst/>
               <a:pathLst>
-                <a:path w="0" h="3649639">
+                <a:path w="0" h="1317069">
                   <a:moveTo>
-                    <a:pt x="0" y="3649639"/>
+                    <a:pt x="0" y="1317069"/>
                   </a:moveTo>
                   <a:lnTo>
                     <a:pt x="0" y="0"/>
@@ -2910,21 +2945,21 @@
         </p:sp>
         <p:sp>
           <p:nvSpPr>
-            <p:cNvPr id="19" name="pl19"/>
+            <p:cNvPr id="20" name="pl20"/>
             <p:cNvSpPr/>
             <p:nvPr/>
           </p:nvSpPr>
           <p:spPr>
             <a:xfrm>
-              <a:off x="6644586" y="2073503"/>
-              <a:ext cx="0" cy="3649639"/>
+              <a:off x="6610197" y="2143092"/>
+              <a:ext cx="0" cy="1317069"/>
             </a:xfrm>
             <a:custGeom>
               <a:avLst/>
               <a:pathLst>
-                <a:path w="0" h="3649639">
+                <a:path w="0" h="1317069">
                   <a:moveTo>
-                    <a:pt x="0" y="3649639"/>
+                    <a:pt x="0" y="1317069"/>
                   </a:moveTo>
                   <a:lnTo>
                     <a:pt x="0" y="0"/>
@@ -2953,483 +2988,483 @@
         </p:sp>
         <p:sp>
           <p:nvSpPr>
-            <p:cNvPr id="20" name="pg20"/>
+            <p:cNvPr id="21" name="pg21"/>
             <p:cNvSpPr/>
             <p:nvPr/>
           </p:nvSpPr>
           <p:spPr>
             <a:xfrm>
-              <a:off x="1881196" y="2073503"/>
-              <a:ext cx="6381482" cy="3482845"/>
+              <a:off x="1931805" y="2143092"/>
+              <a:ext cx="6267611" cy="1256877"/>
             </a:xfrm>
             <a:custGeom>
               <a:avLst/>
               <a:pathLst>
-                <a:path w="6381482" h="3482845">
+                <a:path w="6267611" h="1256877">
                   <a:moveTo>
-                    <a:pt x="1860723" y="0"/>
+                    <a:pt x="1827520" y="0"/>
                   </a:moveTo>
                   <a:lnTo>
-                    <a:pt x="1869263" y="57115"/>
-                  </a:lnTo>
-                  <a:lnTo>
-                    <a:pt x="1940886" y="477378"/>
-                  </a:lnTo>
-                  <a:lnTo>
-                    <a:pt x="2012508" y="846098"/>
-                  </a:lnTo>
-                  <a:lnTo>
-                    <a:pt x="2084131" y="1169595"/>
-                  </a:lnTo>
-                  <a:lnTo>
-                    <a:pt x="2155753" y="1453417"/>
-                  </a:lnTo>
-                  <a:lnTo>
-                    <a:pt x="2227376" y="1702429"/>
-                  </a:lnTo>
-                  <a:lnTo>
-                    <a:pt x="2298998" y="1920900"/>
-                  </a:lnTo>
-                  <a:lnTo>
-                    <a:pt x="2370621" y="2112577"/>
-                  </a:lnTo>
-                  <a:lnTo>
-                    <a:pt x="2442243" y="2280746"/>
-                  </a:lnTo>
-                  <a:lnTo>
-                    <a:pt x="2513866" y="2428289"/>
-                  </a:lnTo>
-                  <a:lnTo>
-                    <a:pt x="2585488" y="2557737"/>
-                  </a:lnTo>
-                  <a:lnTo>
-                    <a:pt x="2657111" y="2659375"/>
-                  </a:lnTo>
-                  <a:lnTo>
-                    <a:pt x="2728733" y="2690785"/>
-                  </a:lnTo>
-                  <a:lnTo>
-                    <a:pt x="2800356" y="2720998"/>
-                  </a:lnTo>
-                  <a:lnTo>
-                    <a:pt x="2871978" y="2750060"/>
-                  </a:lnTo>
-                  <a:lnTo>
-                    <a:pt x="2943601" y="2778015"/>
-                  </a:lnTo>
-                  <a:lnTo>
-                    <a:pt x="3015223" y="2804905"/>
-                  </a:lnTo>
-                  <a:lnTo>
-                    <a:pt x="3086846" y="2830770"/>
-                  </a:lnTo>
-                  <a:lnTo>
-                    <a:pt x="3158469" y="2855650"/>
-                  </a:lnTo>
-                  <a:lnTo>
-                    <a:pt x="3230091" y="2879582"/>
-                  </a:lnTo>
-                  <a:lnTo>
-                    <a:pt x="3301714" y="2902602"/>
-                  </a:lnTo>
-                  <a:lnTo>
-                    <a:pt x="3373336" y="2924745"/>
-                  </a:lnTo>
-                  <a:lnTo>
-                    <a:pt x="3444959" y="2946044"/>
-                  </a:lnTo>
-                  <a:lnTo>
-                    <a:pt x="3516581" y="2966531"/>
-                  </a:lnTo>
-                  <a:lnTo>
-                    <a:pt x="3588204" y="2986238"/>
-                  </a:lnTo>
-                  <a:lnTo>
-                    <a:pt x="3659826" y="3005194"/>
-                  </a:lnTo>
-                  <a:lnTo>
-                    <a:pt x="3731449" y="3023428"/>
-                  </a:lnTo>
-                  <a:lnTo>
-                    <a:pt x="3803071" y="3040967"/>
-                  </a:lnTo>
-                  <a:lnTo>
-                    <a:pt x="3874694" y="3057838"/>
-                  </a:lnTo>
-                  <a:lnTo>
-                    <a:pt x="3946316" y="3074066"/>
-                  </a:lnTo>
-                  <a:lnTo>
-                    <a:pt x="4017939" y="3089676"/>
-                  </a:lnTo>
-                  <a:lnTo>
-                    <a:pt x="4089561" y="3104690"/>
-                  </a:lnTo>
-                  <a:lnTo>
-                    <a:pt x="4161184" y="3119133"/>
-                  </a:lnTo>
-                  <a:lnTo>
-                    <a:pt x="4232806" y="3133026"/>
-                  </a:lnTo>
-                  <a:lnTo>
-                    <a:pt x="4304429" y="3146389"/>
-                  </a:lnTo>
-                  <a:lnTo>
-                    <a:pt x="4376051" y="3159243"/>
-                  </a:lnTo>
-                  <a:lnTo>
-                    <a:pt x="4447674" y="3171607"/>
-                  </a:lnTo>
-                  <a:lnTo>
-                    <a:pt x="4519297" y="3183500"/>
-                  </a:lnTo>
-                  <a:lnTo>
-                    <a:pt x="4590919" y="3194940"/>
-                  </a:lnTo>
-                  <a:lnTo>
-                    <a:pt x="4662542" y="3205944"/>
-                  </a:lnTo>
-                  <a:lnTo>
-                    <a:pt x="4734164" y="3216529"/>
-                  </a:lnTo>
-                  <a:lnTo>
-                    <a:pt x="4805787" y="3226711"/>
-                  </a:lnTo>
-                  <a:lnTo>
-                    <a:pt x="4877409" y="3236504"/>
-                  </a:lnTo>
-                  <a:lnTo>
-                    <a:pt x="4949032" y="3245925"/>
-                  </a:lnTo>
-                  <a:lnTo>
-                    <a:pt x="5020654" y="3254986"/>
-                  </a:lnTo>
-                  <a:lnTo>
-                    <a:pt x="5092277" y="3263702"/>
-                  </a:lnTo>
-                  <a:lnTo>
-                    <a:pt x="5163899" y="3272087"/>
-                  </a:lnTo>
-                  <a:lnTo>
-                    <a:pt x="5235522" y="3280151"/>
-                  </a:lnTo>
-                  <a:lnTo>
-                    <a:pt x="5307144" y="3287909"/>
-                  </a:lnTo>
-                  <a:lnTo>
-                    <a:pt x="5378767" y="3295370"/>
-                  </a:lnTo>
-                  <a:lnTo>
-                    <a:pt x="5450389" y="3302548"/>
-                  </a:lnTo>
-                  <a:lnTo>
-                    <a:pt x="5522012" y="3309452"/>
-                  </a:lnTo>
-                  <a:lnTo>
-                    <a:pt x="5593634" y="3316093"/>
-                  </a:lnTo>
-                  <a:lnTo>
-                    <a:pt x="5665257" y="3322481"/>
-                  </a:lnTo>
-                  <a:lnTo>
-                    <a:pt x="5736879" y="3328625"/>
-                  </a:lnTo>
-                  <a:lnTo>
-                    <a:pt x="5808502" y="3334536"/>
-                  </a:lnTo>
-                  <a:lnTo>
-                    <a:pt x="5880125" y="3340221"/>
-                  </a:lnTo>
-                  <a:lnTo>
-                    <a:pt x="5951747" y="3345690"/>
-                  </a:lnTo>
-                  <a:lnTo>
-                    <a:pt x="6023370" y="3350950"/>
-                  </a:lnTo>
-                  <a:lnTo>
-                    <a:pt x="6094992" y="3356010"/>
-                  </a:lnTo>
-                  <a:lnTo>
-                    <a:pt x="6166615" y="3360877"/>
-                  </a:lnTo>
-                  <a:lnTo>
-                    <a:pt x="6238237" y="3365558"/>
-                  </a:lnTo>
-                  <a:lnTo>
-                    <a:pt x="6309860" y="3370062"/>
-                  </a:lnTo>
-                  <a:lnTo>
-                    <a:pt x="6381482" y="3374393"/>
-                  </a:lnTo>
-                  <a:lnTo>
-                    <a:pt x="6381482" y="3482845"/>
-                  </a:lnTo>
-                  <a:lnTo>
-                    <a:pt x="6309860" y="3482719"/>
-                  </a:lnTo>
-                  <a:lnTo>
-                    <a:pt x="6238237" y="3482575"/>
-                  </a:lnTo>
-                  <a:lnTo>
-                    <a:pt x="6166615" y="3482412"/>
-                  </a:lnTo>
-                  <a:lnTo>
-                    <a:pt x="6094992" y="3482225"/>
-                  </a:lnTo>
-                  <a:lnTo>
-                    <a:pt x="6023370" y="3482013"/>
-                  </a:lnTo>
-                  <a:lnTo>
-                    <a:pt x="5951747" y="3481770"/>
-                  </a:lnTo>
-                  <a:lnTo>
-                    <a:pt x="5880125" y="3481494"/>
-                  </a:lnTo>
-                  <a:lnTo>
-                    <a:pt x="5808502" y="3481179"/>
-                  </a:lnTo>
-                  <a:lnTo>
-                    <a:pt x="5736879" y="3480820"/>
-                  </a:lnTo>
-                  <a:lnTo>
-                    <a:pt x="5665257" y="3480411"/>
-                  </a:lnTo>
-                  <a:lnTo>
-                    <a:pt x="5593634" y="3479945"/>
-                  </a:lnTo>
-                  <a:lnTo>
-                    <a:pt x="5522012" y="3479413"/>
-                  </a:lnTo>
-                  <a:lnTo>
-                    <a:pt x="5450389" y="3478808"/>
-                  </a:lnTo>
-                  <a:lnTo>
-                    <a:pt x="5378767" y="3478117"/>
-                  </a:lnTo>
-                  <a:lnTo>
-                    <a:pt x="5307144" y="3477331"/>
-                  </a:lnTo>
-                  <a:lnTo>
-                    <a:pt x="5235522" y="3476434"/>
-                  </a:lnTo>
-                  <a:lnTo>
-                    <a:pt x="5163899" y="3475411"/>
-                  </a:lnTo>
-                  <a:lnTo>
-                    <a:pt x="5092277" y="3474246"/>
-                  </a:lnTo>
-                  <a:lnTo>
-                    <a:pt x="5020654" y="3472918"/>
-                  </a:lnTo>
-                  <a:lnTo>
-                    <a:pt x="4949032" y="3471404"/>
-                  </a:lnTo>
-                  <a:lnTo>
-                    <a:pt x="4877409" y="3469679"/>
-                  </a:lnTo>
-                  <a:lnTo>
-                    <a:pt x="4805787" y="3467713"/>
-                  </a:lnTo>
-                  <a:lnTo>
-                    <a:pt x="4734164" y="3465471"/>
-                  </a:lnTo>
-                  <a:lnTo>
-                    <a:pt x="4662542" y="3462917"/>
-                  </a:lnTo>
-                  <a:lnTo>
-                    <a:pt x="4590919" y="3460005"/>
-                  </a:lnTo>
-                  <a:lnTo>
-                    <a:pt x="4519297" y="3456686"/>
-                  </a:lnTo>
-                  <a:lnTo>
-                    <a:pt x="4447674" y="3452903"/>
-                  </a:lnTo>
-                  <a:lnTo>
-                    <a:pt x="4376051" y="3448592"/>
-                  </a:lnTo>
-                  <a:lnTo>
-                    <a:pt x="4304429" y="3443677"/>
-                  </a:lnTo>
-                  <a:lnTo>
-                    <a:pt x="4232806" y="3438076"/>
-                  </a:lnTo>
-                  <a:lnTo>
-                    <a:pt x="4161184" y="3431692"/>
-                  </a:lnTo>
-                  <a:lnTo>
-                    <a:pt x="4089561" y="3424415"/>
-                  </a:lnTo>
-                  <a:lnTo>
-                    <a:pt x="4017939" y="3416121"/>
-                  </a:lnTo>
-                  <a:lnTo>
-                    <a:pt x="3946316" y="3406667"/>
-                  </a:lnTo>
-                  <a:lnTo>
-                    <a:pt x="3874694" y="3395892"/>
-                  </a:lnTo>
-                  <a:lnTo>
-                    <a:pt x="3803071" y="3383611"/>
-                  </a:lnTo>
-                  <a:lnTo>
-                    <a:pt x="3731449" y="3369613"/>
-                  </a:lnTo>
-                  <a:lnTo>
-                    <a:pt x="3659826" y="3353658"/>
-                  </a:lnTo>
-                  <a:lnTo>
-                    <a:pt x="3588204" y="3335473"/>
-                  </a:lnTo>
-                  <a:lnTo>
-                    <a:pt x="3516581" y="3314746"/>
-                  </a:lnTo>
-                  <a:lnTo>
-                    <a:pt x="3444959" y="3291121"/>
-                  </a:lnTo>
-                  <a:lnTo>
-                    <a:pt x="3373336" y="3264194"/>
-                  </a:lnTo>
-                  <a:lnTo>
-                    <a:pt x="3301714" y="3233503"/>
-                  </a:lnTo>
-                  <a:lnTo>
-                    <a:pt x="3230091" y="3198521"/>
-                  </a:lnTo>
-                  <a:lnTo>
-                    <a:pt x="3158469" y="3158649"/>
-                  </a:lnTo>
-                  <a:lnTo>
-                    <a:pt x="3086846" y="3113203"/>
-                  </a:lnTo>
-                  <a:lnTo>
-                    <a:pt x="3015223" y="3061404"/>
-                  </a:lnTo>
-                  <a:lnTo>
-                    <a:pt x="2943601" y="3002365"/>
-                  </a:lnTo>
-                  <a:lnTo>
-                    <a:pt x="2871978" y="2935072"/>
-                  </a:lnTo>
-                  <a:lnTo>
-                    <a:pt x="2800356" y="2858372"/>
-                  </a:lnTo>
-                  <a:lnTo>
-                    <a:pt x="2728733" y="2770951"/>
-                  </a:lnTo>
-                  <a:lnTo>
-                    <a:pt x="2657111" y="2671308"/>
-                  </a:lnTo>
-                  <a:lnTo>
-                    <a:pt x="2585488" y="2626720"/>
-                  </a:lnTo>
-                  <a:lnTo>
-                    <a:pt x="2513866" y="2592772"/>
-                  </a:lnTo>
-                  <a:lnTo>
-                    <a:pt x="2442243" y="2557480"/>
-                  </a:lnTo>
-                  <a:lnTo>
-                    <a:pt x="2370621" y="2520789"/>
-                  </a:lnTo>
-                  <a:lnTo>
-                    <a:pt x="2298998" y="2482645"/>
-                  </a:lnTo>
-                  <a:lnTo>
-                    <a:pt x="2227376" y="2442990"/>
-                  </a:lnTo>
-                  <a:lnTo>
-                    <a:pt x="2155753" y="2401764"/>
-                  </a:lnTo>
-                  <a:lnTo>
-                    <a:pt x="2084131" y="2358906"/>
-                  </a:lnTo>
-                  <a:lnTo>
-                    <a:pt x="2012508" y="2314349"/>
-                  </a:lnTo>
-                  <a:lnTo>
-                    <a:pt x="1940886" y="2268028"/>
-                  </a:lnTo>
-                  <a:lnTo>
-                    <a:pt x="1869263" y="2219872"/>
-                  </a:lnTo>
-                  <a:lnTo>
-                    <a:pt x="1797641" y="2169808"/>
-                  </a:lnTo>
-                  <a:lnTo>
-                    <a:pt x="1726018" y="2117761"/>
-                  </a:lnTo>
-                  <a:lnTo>
-                    <a:pt x="1654395" y="2063653"/>
-                  </a:lnTo>
-                  <a:lnTo>
-                    <a:pt x="1582773" y="2007401"/>
-                  </a:lnTo>
-                  <a:lnTo>
-                    <a:pt x="1511150" y="1948921"/>
-                  </a:lnTo>
-                  <a:lnTo>
-                    <a:pt x="1439528" y="1888124"/>
-                  </a:lnTo>
-                  <a:lnTo>
-                    <a:pt x="1367905" y="1824920"/>
-                  </a:lnTo>
-                  <a:lnTo>
-                    <a:pt x="1296283" y="1759211"/>
-                  </a:lnTo>
-                  <a:lnTo>
-                    <a:pt x="1224660" y="1690900"/>
-                  </a:lnTo>
-                  <a:lnTo>
-                    <a:pt x="1153038" y="1619883"/>
-                  </a:lnTo>
-                  <a:lnTo>
-                    <a:pt x="1081415" y="1546053"/>
-                  </a:lnTo>
-                  <a:lnTo>
-                    <a:pt x="1009793" y="1469299"/>
-                  </a:lnTo>
-                  <a:lnTo>
-                    <a:pt x="938170" y="1389504"/>
-                  </a:lnTo>
-                  <a:lnTo>
-                    <a:pt x="866548" y="1306548"/>
-                  </a:lnTo>
-                  <a:lnTo>
-                    <a:pt x="794925" y="1220307"/>
-                  </a:lnTo>
-                  <a:lnTo>
-                    <a:pt x="723303" y="1130649"/>
-                  </a:lnTo>
-                  <a:lnTo>
-                    <a:pt x="651680" y="1037439"/>
-                  </a:lnTo>
-                  <a:lnTo>
-                    <a:pt x="580058" y="940538"/>
-                  </a:lnTo>
-                  <a:lnTo>
-                    <a:pt x="508435" y="839798"/>
-                  </a:lnTo>
-                  <a:lnTo>
-                    <a:pt x="436813" y="735068"/>
-                  </a:lnTo>
-                  <a:lnTo>
-                    <a:pt x="365190" y="626189"/>
-                  </a:lnTo>
-                  <a:lnTo>
-                    <a:pt x="293567" y="512998"/>
-                  </a:lnTo>
-                  <a:lnTo>
-                    <a:pt x="221945" y="395322"/>
-                  </a:lnTo>
-                  <a:lnTo>
-                    <a:pt x="150322" y="272986"/>
-                  </a:lnTo>
-                  <a:lnTo>
-                    <a:pt x="78700" y="145804"/>
-                  </a:lnTo>
-                  <a:lnTo>
-                    <a:pt x="7077" y="13583"/>
+                    <a:pt x="1835908" y="20611"/>
+                  </a:lnTo>
+                  <a:lnTo>
+                    <a:pt x="1906252" y="172274"/>
+                  </a:lnTo>
+                  <a:lnTo>
+                    <a:pt x="1976597" y="305336"/>
+                  </a:lnTo>
+                  <a:lnTo>
+                    <a:pt x="2046941" y="422079"/>
+                  </a:lnTo>
+                  <a:lnTo>
+                    <a:pt x="2117286" y="524504"/>
+                  </a:lnTo>
+                  <a:lnTo>
+                    <a:pt x="2187630" y="614366"/>
+                  </a:lnTo>
+                  <a:lnTo>
+                    <a:pt x="2257975" y="693207"/>
+                  </a:lnTo>
+                  <a:lnTo>
+                    <a:pt x="2328319" y="762379"/>
+                  </a:lnTo>
+                  <a:lnTo>
+                    <a:pt x="2398664" y="823067"/>
+                  </a:lnTo>
+                  <a:lnTo>
+                    <a:pt x="2469008" y="876312"/>
+                  </a:lnTo>
+                  <a:lnTo>
+                    <a:pt x="2539353" y="923027"/>
+                  </a:lnTo>
+                  <a:lnTo>
+                    <a:pt x="2609697" y="959705"/>
+                  </a:lnTo>
+                  <a:lnTo>
+                    <a:pt x="2680042" y="971041"/>
+                  </a:lnTo>
+                  <a:lnTo>
+                    <a:pt x="2750386" y="981944"/>
+                  </a:lnTo>
+                  <a:lnTo>
+                    <a:pt x="2820731" y="992432"/>
+                  </a:lnTo>
+                  <a:lnTo>
+                    <a:pt x="2891075" y="1002520"/>
+                  </a:lnTo>
+                  <a:lnTo>
+                    <a:pt x="2961420" y="1012224"/>
+                  </a:lnTo>
+                  <a:lnTo>
+                    <a:pt x="3031764" y="1021558"/>
+                  </a:lnTo>
+                  <a:lnTo>
+                    <a:pt x="3102109" y="1030537"/>
+                  </a:lnTo>
+                  <a:lnTo>
+                    <a:pt x="3172453" y="1039173"/>
+                  </a:lnTo>
+                  <a:lnTo>
+                    <a:pt x="3242798" y="1047480"/>
+                  </a:lnTo>
+                  <a:lnTo>
+                    <a:pt x="3313142" y="1055471"/>
+                  </a:lnTo>
+                  <a:lnTo>
+                    <a:pt x="3383487" y="1063158"/>
+                  </a:lnTo>
+                  <a:lnTo>
+                    <a:pt x="3453831" y="1070551"/>
+                  </a:lnTo>
+                  <a:lnTo>
+                    <a:pt x="3524176" y="1077663"/>
+                  </a:lnTo>
+                  <a:lnTo>
+                    <a:pt x="3594520" y="1084504"/>
+                  </a:lnTo>
+                  <a:lnTo>
+                    <a:pt x="3664865" y="1091084"/>
+                  </a:lnTo>
+                  <a:lnTo>
+                    <a:pt x="3735209" y="1097413"/>
+                  </a:lnTo>
+                  <a:lnTo>
+                    <a:pt x="3805554" y="1103501"/>
+                  </a:lnTo>
+                  <a:lnTo>
+                    <a:pt x="3875898" y="1109358"/>
+                  </a:lnTo>
+                  <a:lnTo>
+                    <a:pt x="3946243" y="1114991"/>
+                  </a:lnTo>
+                  <a:lnTo>
+                    <a:pt x="4016587" y="1120409"/>
+                  </a:lnTo>
+                  <a:lnTo>
+                    <a:pt x="4086932" y="1125621"/>
+                  </a:lnTo>
+                  <a:lnTo>
+                    <a:pt x="4157276" y="1130635"/>
+                  </a:lnTo>
+                  <a:lnTo>
+                    <a:pt x="4227620" y="1135457"/>
+                  </a:lnTo>
+                  <a:lnTo>
+                    <a:pt x="4297965" y="1140096"/>
+                  </a:lnTo>
+                  <a:lnTo>
+                    <a:pt x="4368309" y="1144558"/>
+                  </a:lnTo>
+                  <a:lnTo>
+                    <a:pt x="4438654" y="1148850"/>
+                  </a:lnTo>
+                  <a:lnTo>
+                    <a:pt x="4508998" y="1152978"/>
+                  </a:lnTo>
+                  <a:lnTo>
+                    <a:pt x="4579343" y="1156950"/>
+                  </a:lnTo>
+                  <a:lnTo>
+                    <a:pt x="4649687" y="1160769"/>
+                  </a:lnTo>
+                  <a:lnTo>
+                    <a:pt x="4720032" y="1164444"/>
+                  </a:lnTo>
+                  <a:lnTo>
+                    <a:pt x="4790376" y="1167978"/>
+                  </a:lnTo>
+                  <a:lnTo>
+                    <a:pt x="4860721" y="1171378"/>
+                  </a:lnTo>
+                  <a:lnTo>
+                    <a:pt x="4931065" y="1174648"/>
+                  </a:lnTo>
+                  <a:lnTo>
+                    <a:pt x="5001410" y="1177793"/>
+                  </a:lnTo>
+                  <a:lnTo>
+                    <a:pt x="5071754" y="1180819"/>
+                  </a:lnTo>
+                  <a:lnTo>
+                    <a:pt x="5142099" y="1183729"/>
+                  </a:lnTo>
+                  <a:lnTo>
+                    <a:pt x="5212443" y="1186529"/>
+                  </a:lnTo>
+                  <a:lnTo>
+                    <a:pt x="5282788" y="1189221"/>
+                  </a:lnTo>
+                  <a:lnTo>
+                    <a:pt x="5353132" y="1191812"/>
+                  </a:lnTo>
+                  <a:lnTo>
+                    <a:pt x="5423477" y="1194303"/>
+                  </a:lnTo>
+                  <a:lnTo>
+                    <a:pt x="5493821" y="1196700"/>
+                  </a:lnTo>
+                  <a:lnTo>
+                    <a:pt x="5564166" y="1199005"/>
+                  </a:lnTo>
+                  <a:lnTo>
+                    <a:pt x="5634510" y="1201222"/>
+                  </a:lnTo>
+                  <a:lnTo>
+                    <a:pt x="5704855" y="1203355"/>
+                  </a:lnTo>
+                  <a:lnTo>
+                    <a:pt x="5775199" y="1205407"/>
+                  </a:lnTo>
+                  <a:lnTo>
+                    <a:pt x="5845544" y="1207380"/>
+                  </a:lnTo>
+                  <a:lnTo>
+                    <a:pt x="5915888" y="1209279"/>
+                  </a:lnTo>
+                  <a:lnTo>
+                    <a:pt x="5986233" y="1211105"/>
+                  </a:lnTo>
+                  <a:lnTo>
+                    <a:pt x="6056577" y="1212861"/>
+                  </a:lnTo>
+                  <a:lnTo>
+                    <a:pt x="6126922" y="1214551"/>
+                  </a:lnTo>
+                  <a:lnTo>
+                    <a:pt x="6197266" y="1216176"/>
+                  </a:lnTo>
+                  <a:lnTo>
+                    <a:pt x="6267611" y="1217739"/>
+                  </a:lnTo>
+                  <a:lnTo>
+                    <a:pt x="6267611" y="1256877"/>
+                  </a:lnTo>
+                  <a:lnTo>
+                    <a:pt x="6197266" y="1256831"/>
+                  </a:lnTo>
+                  <a:lnTo>
+                    <a:pt x="6126922" y="1256779"/>
+                  </a:lnTo>
+                  <a:lnTo>
+                    <a:pt x="6056577" y="1256720"/>
+                  </a:lnTo>
+                  <a:lnTo>
+                    <a:pt x="5986233" y="1256653"/>
+                  </a:lnTo>
+                  <a:lnTo>
+                    <a:pt x="5915888" y="1256576"/>
+                  </a:lnTo>
+                  <a:lnTo>
+                    <a:pt x="5845544" y="1256489"/>
+                  </a:lnTo>
+                  <a:lnTo>
+                    <a:pt x="5775199" y="1256389"/>
+                  </a:lnTo>
+                  <a:lnTo>
+                    <a:pt x="5704855" y="1256275"/>
+                  </a:lnTo>
+                  <a:lnTo>
+                    <a:pt x="5634510" y="1256146"/>
+                  </a:lnTo>
+                  <a:lnTo>
+                    <a:pt x="5564166" y="1255998"/>
+                  </a:lnTo>
+                  <a:lnTo>
+                    <a:pt x="5493821" y="1255830"/>
+                  </a:lnTo>
+                  <a:lnTo>
+                    <a:pt x="5423477" y="1255638"/>
+                  </a:lnTo>
+                  <a:lnTo>
+                    <a:pt x="5353132" y="1255420"/>
+                  </a:lnTo>
+                  <a:lnTo>
+                    <a:pt x="5282788" y="1255170"/>
+                  </a:lnTo>
+                  <a:lnTo>
+                    <a:pt x="5212443" y="1254886"/>
+                  </a:lnTo>
+                  <a:lnTo>
+                    <a:pt x="5142099" y="1254563"/>
+                  </a:lnTo>
+                  <a:lnTo>
+                    <a:pt x="5071754" y="1254194"/>
+                  </a:lnTo>
+                  <a:lnTo>
+                    <a:pt x="5001410" y="1253773"/>
+                  </a:lnTo>
+                  <a:lnTo>
+                    <a:pt x="4931065" y="1253294"/>
+                  </a:lnTo>
+                  <a:lnTo>
+                    <a:pt x="4860721" y="1252748"/>
+                  </a:lnTo>
+                  <a:lnTo>
+                    <a:pt x="4790376" y="1252125"/>
+                  </a:lnTo>
+                  <a:lnTo>
+                    <a:pt x="4720032" y="1251416"/>
+                  </a:lnTo>
+                  <a:lnTo>
+                    <a:pt x="4649687" y="1250607"/>
+                  </a:lnTo>
+                  <a:lnTo>
+                    <a:pt x="4579343" y="1249685"/>
+                  </a:lnTo>
+                  <a:lnTo>
+                    <a:pt x="4508998" y="1248634"/>
+                  </a:lnTo>
+                  <a:lnTo>
+                    <a:pt x="4438654" y="1247436"/>
+                  </a:lnTo>
+                  <a:lnTo>
+                    <a:pt x="4368309" y="1246071"/>
+                  </a:lnTo>
+                  <a:lnTo>
+                    <a:pt x="4297965" y="1244515"/>
+                  </a:lnTo>
+                  <a:lnTo>
+                    <a:pt x="4227620" y="1242742"/>
+                  </a:lnTo>
+                  <a:lnTo>
+                    <a:pt x="4157276" y="1240720"/>
+                  </a:lnTo>
+                  <a:lnTo>
+                    <a:pt x="4086932" y="1238416"/>
+                  </a:lnTo>
+                  <a:lnTo>
+                    <a:pt x="4016587" y="1235790"/>
+                  </a:lnTo>
+                  <a:lnTo>
+                    <a:pt x="3946243" y="1232797"/>
+                  </a:lnTo>
+                  <a:lnTo>
+                    <a:pt x="3875898" y="1229386"/>
+                  </a:lnTo>
+                  <a:lnTo>
+                    <a:pt x="3805554" y="1225497"/>
+                  </a:lnTo>
+                  <a:lnTo>
+                    <a:pt x="3735209" y="1221065"/>
+                  </a:lnTo>
+                  <a:lnTo>
+                    <a:pt x="3664865" y="1216014"/>
+                  </a:lnTo>
+                  <a:lnTo>
+                    <a:pt x="3594520" y="1210256"/>
+                  </a:lnTo>
+                  <a:lnTo>
+                    <a:pt x="3524176" y="1203693"/>
+                  </a:lnTo>
+                  <a:lnTo>
+                    <a:pt x="3453831" y="1196214"/>
+                  </a:lnTo>
+                  <a:lnTo>
+                    <a:pt x="3383487" y="1187688"/>
+                  </a:lnTo>
+                  <a:lnTo>
+                    <a:pt x="3313142" y="1177971"/>
+                  </a:lnTo>
+                  <a:lnTo>
+                    <a:pt x="3242798" y="1166895"/>
+                  </a:lnTo>
+                  <a:lnTo>
+                    <a:pt x="3172453" y="1154271"/>
+                  </a:lnTo>
+                  <a:lnTo>
+                    <a:pt x="3102109" y="1139882"/>
+                  </a:lnTo>
+                  <a:lnTo>
+                    <a:pt x="3031764" y="1123481"/>
+                  </a:lnTo>
+                  <a:lnTo>
+                    <a:pt x="2961420" y="1104789"/>
+                  </a:lnTo>
+                  <a:lnTo>
+                    <a:pt x="2891075" y="1083483"/>
+                  </a:lnTo>
+                  <a:lnTo>
+                    <a:pt x="2820731" y="1059198"/>
+                  </a:lnTo>
+                  <a:lnTo>
+                    <a:pt x="2750386" y="1031519"/>
+                  </a:lnTo>
+                  <a:lnTo>
+                    <a:pt x="2680042" y="999971"/>
+                  </a:lnTo>
+                  <a:lnTo>
+                    <a:pt x="2609697" y="964012"/>
+                  </a:lnTo>
+                  <a:lnTo>
+                    <a:pt x="2539353" y="947921"/>
+                  </a:lnTo>
+                  <a:lnTo>
+                    <a:pt x="2469008" y="935670"/>
+                  </a:lnTo>
+                  <a:lnTo>
+                    <a:pt x="2398664" y="922934"/>
+                  </a:lnTo>
+                  <a:lnTo>
+                    <a:pt x="2328319" y="909693"/>
+                  </a:lnTo>
+                  <a:lnTo>
+                    <a:pt x="2257975" y="895928"/>
+                  </a:lnTo>
+                  <a:lnTo>
+                    <a:pt x="2187630" y="881617"/>
+                  </a:lnTo>
+                  <a:lnTo>
+                    <a:pt x="2117286" y="866740"/>
+                  </a:lnTo>
+                  <a:lnTo>
+                    <a:pt x="2046941" y="851273"/>
+                  </a:lnTo>
+                  <a:lnTo>
+                    <a:pt x="1976597" y="835194"/>
+                  </a:lnTo>
+                  <a:lnTo>
+                    <a:pt x="1906252" y="818478"/>
+                  </a:lnTo>
+                  <a:lnTo>
+                    <a:pt x="1835908" y="801099"/>
+                  </a:lnTo>
+                  <a:lnTo>
+                    <a:pt x="1765563" y="783032"/>
+                  </a:lnTo>
+                  <a:lnTo>
+                    <a:pt x="1695219" y="764250"/>
+                  </a:lnTo>
+                  <a:lnTo>
+                    <a:pt x="1624874" y="744723"/>
+                  </a:lnTo>
+                  <a:lnTo>
+                    <a:pt x="1554530" y="724423"/>
+                  </a:lnTo>
+                  <a:lnTo>
+                    <a:pt x="1484185" y="703319"/>
+                  </a:lnTo>
+                  <a:lnTo>
+                    <a:pt x="1413841" y="681379"/>
+                  </a:lnTo>
+                  <a:lnTo>
+                    <a:pt x="1343496" y="658570"/>
+                  </a:lnTo>
+                  <a:lnTo>
+                    <a:pt x="1273152" y="634858"/>
+                  </a:lnTo>
+                  <a:lnTo>
+                    <a:pt x="1202807" y="610206"/>
+                  </a:lnTo>
+                  <a:lnTo>
+                    <a:pt x="1132463" y="584577"/>
+                  </a:lnTo>
+                  <a:lnTo>
+                    <a:pt x="1062118" y="557934"/>
+                  </a:lnTo>
+                  <a:lnTo>
+                    <a:pt x="991774" y="530235"/>
+                  </a:lnTo>
+                  <a:lnTo>
+                    <a:pt x="921429" y="501439"/>
+                  </a:lnTo>
+                  <a:lnTo>
+                    <a:pt x="851085" y="471502"/>
+                  </a:lnTo>
+                  <a:lnTo>
+                    <a:pt x="780740" y="440380"/>
+                  </a:lnTo>
+                  <a:lnTo>
+                    <a:pt x="710396" y="408024"/>
+                  </a:lnTo>
+                  <a:lnTo>
+                    <a:pt x="640051" y="374387"/>
+                  </a:lnTo>
+                  <a:lnTo>
+                    <a:pt x="569707" y="339418"/>
+                  </a:lnTo>
+                  <a:lnTo>
+                    <a:pt x="499362" y="303063"/>
+                  </a:lnTo>
+                  <a:lnTo>
+                    <a:pt x="429018" y="265268"/>
+                  </a:lnTo>
+                  <a:lnTo>
+                    <a:pt x="358674" y="225977"/>
+                  </a:lnTo>
+                  <a:lnTo>
+                    <a:pt x="288329" y="185128"/>
+                  </a:lnTo>
+                  <a:lnTo>
+                    <a:pt x="217985" y="142662"/>
+                  </a:lnTo>
+                  <a:lnTo>
+                    <a:pt x="147640" y="98514"/>
+                  </a:lnTo>
+                  <a:lnTo>
+                    <a:pt x="77296" y="52617"/>
+                  </a:lnTo>
+                  <a:lnTo>
+                    <a:pt x="6951" y="4902"/>
                   </a:lnTo>
                   <a:lnTo>
                     <a:pt x="0" y="0"/>
@@ -3452,213 +3487,213 @@
         </p:sp>
         <p:sp>
           <p:nvSpPr>
-            <p:cNvPr id="21" name="pl21"/>
+            <p:cNvPr id="22" name="pl22"/>
             <p:cNvSpPr/>
             <p:nvPr/>
           </p:nvSpPr>
           <p:spPr>
             <a:xfrm>
-              <a:off x="3741920" y="2073503"/>
-              <a:ext cx="4520759" cy="3374393"/>
+              <a:off x="3759326" y="2143092"/>
+              <a:ext cx="4440090" cy="1217739"/>
             </a:xfrm>
             <a:custGeom>
               <a:avLst/>
               <a:pathLst>
-                <a:path w="4520759" h="3374393">
+                <a:path w="4440090" h="1217739">
                   <a:moveTo>
                     <a:pt x="0" y="0"/>
                   </a:moveTo>
                   <a:lnTo>
-                    <a:pt x="8540" y="57115"/>
-                  </a:lnTo>
-                  <a:lnTo>
-                    <a:pt x="80162" y="477378"/>
-                  </a:lnTo>
-                  <a:lnTo>
-                    <a:pt x="151785" y="846098"/>
-                  </a:lnTo>
-                  <a:lnTo>
-                    <a:pt x="223407" y="1169595"/>
-                  </a:lnTo>
-                  <a:lnTo>
-                    <a:pt x="295030" y="1453417"/>
-                  </a:lnTo>
-                  <a:lnTo>
-                    <a:pt x="366652" y="1702429"/>
-                  </a:lnTo>
-                  <a:lnTo>
-                    <a:pt x="438275" y="1920900"/>
-                  </a:lnTo>
-                  <a:lnTo>
-                    <a:pt x="509897" y="2112577"/>
-                  </a:lnTo>
-                  <a:lnTo>
-                    <a:pt x="581520" y="2280746"/>
-                  </a:lnTo>
-                  <a:lnTo>
-                    <a:pt x="653142" y="2428289"/>
-                  </a:lnTo>
-                  <a:lnTo>
-                    <a:pt x="724765" y="2557737"/>
-                  </a:lnTo>
-                  <a:lnTo>
-                    <a:pt x="796387" y="2659375"/>
-                  </a:lnTo>
-                  <a:lnTo>
-                    <a:pt x="868010" y="2690785"/>
-                  </a:lnTo>
-                  <a:lnTo>
-                    <a:pt x="939632" y="2720998"/>
-                  </a:lnTo>
-                  <a:lnTo>
-                    <a:pt x="1011255" y="2750060"/>
-                  </a:lnTo>
-                  <a:lnTo>
-                    <a:pt x="1082877" y="2778015"/>
-                  </a:lnTo>
-                  <a:lnTo>
-                    <a:pt x="1154500" y="2804905"/>
-                  </a:lnTo>
-                  <a:lnTo>
-                    <a:pt x="1226122" y="2830770"/>
-                  </a:lnTo>
-                  <a:lnTo>
-                    <a:pt x="1297745" y="2855650"/>
-                  </a:lnTo>
-                  <a:lnTo>
-                    <a:pt x="1369368" y="2879582"/>
-                  </a:lnTo>
-                  <a:lnTo>
-                    <a:pt x="1440990" y="2902602"/>
-                  </a:lnTo>
-                  <a:lnTo>
-                    <a:pt x="1512613" y="2924745"/>
-                  </a:lnTo>
-                  <a:lnTo>
-                    <a:pt x="1584235" y="2946044"/>
-                  </a:lnTo>
-                  <a:lnTo>
-                    <a:pt x="1655858" y="2966531"/>
-                  </a:lnTo>
-                  <a:lnTo>
-                    <a:pt x="1727480" y="2986238"/>
-                  </a:lnTo>
-                  <a:lnTo>
-                    <a:pt x="1799103" y="3005194"/>
-                  </a:lnTo>
-                  <a:lnTo>
-                    <a:pt x="1870725" y="3023428"/>
-                  </a:lnTo>
-                  <a:lnTo>
-                    <a:pt x="1942348" y="3040967"/>
-                  </a:lnTo>
-                  <a:lnTo>
-                    <a:pt x="2013970" y="3057838"/>
-                  </a:lnTo>
-                  <a:lnTo>
-                    <a:pt x="2085593" y="3074066"/>
-                  </a:lnTo>
-                  <a:lnTo>
-                    <a:pt x="2157215" y="3089676"/>
-                  </a:lnTo>
-                  <a:lnTo>
-                    <a:pt x="2228838" y="3104690"/>
-                  </a:lnTo>
-                  <a:lnTo>
-                    <a:pt x="2300460" y="3119133"/>
-                  </a:lnTo>
-                  <a:lnTo>
-                    <a:pt x="2372083" y="3133026"/>
-                  </a:lnTo>
-                  <a:lnTo>
-                    <a:pt x="2443705" y="3146389"/>
-                  </a:lnTo>
-                  <a:lnTo>
-                    <a:pt x="2515328" y="3159243"/>
-                  </a:lnTo>
-                  <a:lnTo>
-                    <a:pt x="2586950" y="3171607"/>
-                  </a:lnTo>
-                  <a:lnTo>
-                    <a:pt x="2658573" y="3183500"/>
-                  </a:lnTo>
-                  <a:lnTo>
-                    <a:pt x="2730196" y="3194940"/>
-                  </a:lnTo>
-                  <a:lnTo>
-                    <a:pt x="2801818" y="3205944"/>
-                  </a:lnTo>
-                  <a:lnTo>
-                    <a:pt x="2873441" y="3216529"/>
-                  </a:lnTo>
-                  <a:lnTo>
-                    <a:pt x="2945063" y="3226711"/>
-                  </a:lnTo>
-                  <a:lnTo>
-                    <a:pt x="3016686" y="3236504"/>
-                  </a:lnTo>
-                  <a:lnTo>
-                    <a:pt x="3088308" y="3245925"/>
-                  </a:lnTo>
-                  <a:lnTo>
-                    <a:pt x="3159931" y="3254986"/>
-                  </a:lnTo>
-                  <a:lnTo>
-                    <a:pt x="3231553" y="3263702"/>
-                  </a:lnTo>
-                  <a:lnTo>
-                    <a:pt x="3303176" y="3272087"/>
-                  </a:lnTo>
-                  <a:lnTo>
-                    <a:pt x="3374798" y="3280151"/>
-                  </a:lnTo>
-                  <a:lnTo>
-                    <a:pt x="3446421" y="3287909"/>
-                  </a:lnTo>
-                  <a:lnTo>
-                    <a:pt x="3518043" y="3295370"/>
-                  </a:lnTo>
-                  <a:lnTo>
-                    <a:pt x="3589666" y="3302548"/>
-                  </a:lnTo>
-                  <a:lnTo>
-                    <a:pt x="3661288" y="3309452"/>
-                  </a:lnTo>
-                  <a:lnTo>
-                    <a:pt x="3732911" y="3316093"/>
-                  </a:lnTo>
-                  <a:lnTo>
-                    <a:pt x="3804533" y="3322481"/>
-                  </a:lnTo>
-                  <a:lnTo>
-                    <a:pt x="3876156" y="3328625"/>
-                  </a:lnTo>
-                  <a:lnTo>
-                    <a:pt x="3947778" y="3334536"/>
-                  </a:lnTo>
-                  <a:lnTo>
-                    <a:pt x="4019401" y="3340221"/>
-                  </a:lnTo>
-                  <a:lnTo>
-                    <a:pt x="4091024" y="3345690"/>
-                  </a:lnTo>
-                  <a:lnTo>
-                    <a:pt x="4162646" y="3350950"/>
-                  </a:lnTo>
-                  <a:lnTo>
-                    <a:pt x="4234269" y="3356010"/>
-                  </a:lnTo>
-                  <a:lnTo>
-                    <a:pt x="4305891" y="3360877"/>
-                  </a:lnTo>
-                  <a:lnTo>
-                    <a:pt x="4377514" y="3365558"/>
-                  </a:lnTo>
-                  <a:lnTo>
-                    <a:pt x="4449136" y="3370062"/>
-                  </a:lnTo>
-                  <a:lnTo>
-                    <a:pt x="4520759" y="3374393"/>
+                    <a:pt x="8387" y="20611"/>
+                  </a:lnTo>
+                  <a:lnTo>
+                    <a:pt x="78732" y="172274"/>
+                  </a:lnTo>
+                  <a:lnTo>
+                    <a:pt x="149076" y="305336"/>
+                  </a:lnTo>
+                  <a:lnTo>
+                    <a:pt x="219421" y="422079"/>
+                  </a:lnTo>
+                  <a:lnTo>
+                    <a:pt x="289765" y="524504"/>
+                  </a:lnTo>
+                  <a:lnTo>
+                    <a:pt x="360110" y="614366"/>
+                  </a:lnTo>
+                  <a:lnTo>
+                    <a:pt x="430454" y="693207"/>
+                  </a:lnTo>
+                  <a:lnTo>
+                    <a:pt x="500799" y="762379"/>
+                  </a:lnTo>
+                  <a:lnTo>
+                    <a:pt x="571143" y="823067"/>
+                  </a:lnTo>
+                  <a:lnTo>
+                    <a:pt x="641488" y="876312"/>
+                  </a:lnTo>
+                  <a:lnTo>
+                    <a:pt x="711832" y="923027"/>
+                  </a:lnTo>
+                  <a:lnTo>
+                    <a:pt x="782177" y="959705"/>
+                  </a:lnTo>
+                  <a:lnTo>
+                    <a:pt x="852521" y="971041"/>
+                  </a:lnTo>
+                  <a:lnTo>
+                    <a:pt x="922866" y="981944"/>
+                  </a:lnTo>
+                  <a:lnTo>
+                    <a:pt x="993210" y="992432"/>
+                  </a:lnTo>
+                  <a:lnTo>
+                    <a:pt x="1063554" y="1002520"/>
+                  </a:lnTo>
+                  <a:lnTo>
+                    <a:pt x="1133899" y="1012224"/>
+                  </a:lnTo>
+                  <a:lnTo>
+                    <a:pt x="1204243" y="1021558"/>
+                  </a:lnTo>
+                  <a:lnTo>
+                    <a:pt x="1274588" y="1030537"/>
+                  </a:lnTo>
+                  <a:lnTo>
+                    <a:pt x="1344932" y="1039173"/>
+                  </a:lnTo>
+                  <a:lnTo>
+                    <a:pt x="1415277" y="1047480"/>
+                  </a:lnTo>
+                  <a:lnTo>
+                    <a:pt x="1485621" y="1055471"/>
+                  </a:lnTo>
+                  <a:lnTo>
+                    <a:pt x="1555966" y="1063158"/>
+                  </a:lnTo>
+                  <a:lnTo>
+                    <a:pt x="1626310" y="1070551"/>
+                  </a:lnTo>
+                  <a:lnTo>
+                    <a:pt x="1696655" y="1077663"/>
+                  </a:lnTo>
+                  <a:lnTo>
+                    <a:pt x="1766999" y="1084504"/>
+                  </a:lnTo>
+                  <a:lnTo>
+                    <a:pt x="1837344" y="1091084"/>
+                  </a:lnTo>
+                  <a:lnTo>
+                    <a:pt x="1907688" y="1097413"/>
+                  </a:lnTo>
+                  <a:lnTo>
+                    <a:pt x="1978033" y="1103501"/>
+                  </a:lnTo>
+                  <a:lnTo>
+                    <a:pt x="2048377" y="1109358"/>
+                  </a:lnTo>
+                  <a:lnTo>
+                    <a:pt x="2118722" y="1114991"/>
+                  </a:lnTo>
+                  <a:lnTo>
+                    <a:pt x="2189066" y="1120409"/>
+                  </a:lnTo>
+                  <a:lnTo>
+                    <a:pt x="2259411" y="1125621"/>
+                  </a:lnTo>
+                  <a:lnTo>
+                    <a:pt x="2329755" y="1130635"/>
+                  </a:lnTo>
+                  <a:lnTo>
+                    <a:pt x="2400100" y="1135457"/>
+                  </a:lnTo>
+                  <a:lnTo>
+                    <a:pt x="2470444" y="1140096"/>
+                  </a:lnTo>
+                  <a:lnTo>
+                    <a:pt x="2540789" y="1144558"/>
+                  </a:lnTo>
+                  <a:lnTo>
+                    <a:pt x="2611133" y="1148850"/>
+                  </a:lnTo>
+                  <a:lnTo>
+                    <a:pt x="2681478" y="1152978"/>
+                  </a:lnTo>
+                  <a:lnTo>
+                    <a:pt x="2751822" y="1156950"/>
+                  </a:lnTo>
+                  <a:lnTo>
+                    <a:pt x="2822167" y="1160769"/>
+                  </a:lnTo>
+                  <a:lnTo>
+                    <a:pt x="2892511" y="1164444"/>
+                  </a:lnTo>
+                  <a:lnTo>
+                    <a:pt x="2962856" y="1167978"/>
+                  </a:lnTo>
+                  <a:lnTo>
+                    <a:pt x="3033200" y="1171378"/>
+                  </a:lnTo>
+                  <a:lnTo>
+                    <a:pt x="3103545" y="1174648"/>
+                  </a:lnTo>
+                  <a:lnTo>
+                    <a:pt x="3173889" y="1177793"/>
+                  </a:lnTo>
+                  <a:lnTo>
+                    <a:pt x="3244234" y="1180819"/>
+                  </a:lnTo>
+                  <a:lnTo>
+                    <a:pt x="3314578" y="1183729"/>
+                  </a:lnTo>
+                  <a:lnTo>
+                    <a:pt x="3384923" y="1186529"/>
+                  </a:lnTo>
+                  <a:lnTo>
+                    <a:pt x="3455267" y="1189221"/>
+                  </a:lnTo>
+                  <a:lnTo>
+                    <a:pt x="3525612" y="1191812"/>
+                  </a:lnTo>
+                  <a:lnTo>
+                    <a:pt x="3595956" y="1194303"/>
+                  </a:lnTo>
+                  <a:lnTo>
+                    <a:pt x="3666301" y="1196700"/>
+                  </a:lnTo>
+                  <a:lnTo>
+                    <a:pt x="3736645" y="1199005"/>
+                  </a:lnTo>
+                  <a:lnTo>
+                    <a:pt x="3806990" y="1201222"/>
+                  </a:lnTo>
+                  <a:lnTo>
+                    <a:pt x="3877334" y="1203355"/>
+                  </a:lnTo>
+                  <a:lnTo>
+                    <a:pt x="3947679" y="1205407"/>
+                  </a:lnTo>
+                  <a:lnTo>
+                    <a:pt x="4018023" y="1207380"/>
+                  </a:lnTo>
+                  <a:lnTo>
+                    <a:pt x="4088368" y="1209279"/>
+                  </a:lnTo>
+                  <a:lnTo>
+                    <a:pt x="4158712" y="1211105"/>
+                  </a:lnTo>
+                  <a:lnTo>
+                    <a:pt x="4229057" y="1212861"/>
+                  </a:lnTo>
+                  <a:lnTo>
+                    <a:pt x="4299401" y="1214551"/>
+                  </a:lnTo>
+                  <a:lnTo>
+                    <a:pt x="4369746" y="1216176"/>
+                  </a:lnTo>
+                  <a:lnTo>
+                    <a:pt x="4440090" y="1217739"/>
                   </a:lnTo>
                 </a:path>
               </a:pathLst>
@@ -3672,288 +3707,288 @@
         </p:sp>
         <p:sp>
           <p:nvSpPr>
-            <p:cNvPr id="22" name="pl22"/>
+            <p:cNvPr id="23" name="pl23"/>
             <p:cNvSpPr/>
             <p:nvPr/>
           </p:nvSpPr>
           <p:spPr>
             <a:xfrm>
-              <a:off x="1881196" y="2073503"/>
-              <a:ext cx="6381482" cy="3482845"/>
+              <a:off x="1931805" y="2143092"/>
+              <a:ext cx="6267611" cy="1256877"/>
             </a:xfrm>
             <a:custGeom>
               <a:avLst/>
               <a:pathLst>
-                <a:path w="6381482" h="3482845">
+                <a:path w="6267611" h="1256877">
                   <a:moveTo>
-                    <a:pt x="6381482" y="3482845"/>
+                    <a:pt x="6267611" y="1256877"/>
                   </a:moveTo>
                   <a:lnTo>
-                    <a:pt x="6309860" y="3482719"/>
-                  </a:lnTo>
-                  <a:lnTo>
-                    <a:pt x="6238237" y="3482575"/>
-                  </a:lnTo>
-                  <a:lnTo>
-                    <a:pt x="6166615" y="3482412"/>
-                  </a:lnTo>
-                  <a:lnTo>
-                    <a:pt x="6094992" y="3482225"/>
-                  </a:lnTo>
-                  <a:lnTo>
-                    <a:pt x="6023370" y="3482013"/>
-                  </a:lnTo>
-                  <a:lnTo>
-                    <a:pt x="5951747" y="3481770"/>
-                  </a:lnTo>
-                  <a:lnTo>
-                    <a:pt x="5880125" y="3481494"/>
-                  </a:lnTo>
-                  <a:lnTo>
-                    <a:pt x="5808502" y="3481179"/>
-                  </a:lnTo>
-                  <a:lnTo>
-                    <a:pt x="5736879" y="3480820"/>
-                  </a:lnTo>
-                  <a:lnTo>
-                    <a:pt x="5665257" y="3480411"/>
-                  </a:lnTo>
-                  <a:lnTo>
-                    <a:pt x="5593634" y="3479945"/>
-                  </a:lnTo>
-                  <a:lnTo>
-                    <a:pt x="5522012" y="3479413"/>
-                  </a:lnTo>
-                  <a:lnTo>
-                    <a:pt x="5450389" y="3478808"/>
-                  </a:lnTo>
-                  <a:lnTo>
-                    <a:pt x="5378767" y="3478117"/>
-                  </a:lnTo>
-                  <a:lnTo>
-                    <a:pt x="5307144" y="3477331"/>
-                  </a:lnTo>
-                  <a:lnTo>
-                    <a:pt x="5235522" y="3476434"/>
-                  </a:lnTo>
-                  <a:lnTo>
-                    <a:pt x="5163899" y="3475411"/>
-                  </a:lnTo>
-                  <a:lnTo>
-                    <a:pt x="5092277" y="3474246"/>
-                  </a:lnTo>
-                  <a:lnTo>
-                    <a:pt x="5020654" y="3472918"/>
-                  </a:lnTo>
-                  <a:lnTo>
-                    <a:pt x="4949032" y="3471404"/>
-                  </a:lnTo>
-                  <a:lnTo>
-                    <a:pt x="4877409" y="3469679"/>
-                  </a:lnTo>
-                  <a:lnTo>
-                    <a:pt x="4805787" y="3467713"/>
-                  </a:lnTo>
-                  <a:lnTo>
-                    <a:pt x="4734164" y="3465471"/>
-                  </a:lnTo>
-                  <a:lnTo>
-                    <a:pt x="4662542" y="3462917"/>
-                  </a:lnTo>
-                  <a:lnTo>
-                    <a:pt x="4590919" y="3460005"/>
-                  </a:lnTo>
-                  <a:lnTo>
-                    <a:pt x="4519297" y="3456686"/>
-                  </a:lnTo>
-                  <a:lnTo>
-                    <a:pt x="4447674" y="3452903"/>
-                  </a:lnTo>
-                  <a:lnTo>
-                    <a:pt x="4376051" y="3448592"/>
-                  </a:lnTo>
-                  <a:lnTo>
-                    <a:pt x="4304429" y="3443677"/>
-                  </a:lnTo>
-                  <a:lnTo>
-                    <a:pt x="4232806" y="3438076"/>
-                  </a:lnTo>
-                  <a:lnTo>
-                    <a:pt x="4161184" y="3431692"/>
-                  </a:lnTo>
-                  <a:lnTo>
-                    <a:pt x="4089561" y="3424415"/>
-                  </a:lnTo>
-                  <a:lnTo>
-                    <a:pt x="4017939" y="3416121"/>
-                  </a:lnTo>
-                  <a:lnTo>
-                    <a:pt x="3946316" y="3406667"/>
-                  </a:lnTo>
-                  <a:lnTo>
-                    <a:pt x="3874694" y="3395892"/>
-                  </a:lnTo>
-                  <a:lnTo>
-                    <a:pt x="3803071" y="3383611"/>
-                  </a:lnTo>
-                  <a:lnTo>
-                    <a:pt x="3731449" y="3369613"/>
-                  </a:lnTo>
-                  <a:lnTo>
-                    <a:pt x="3659826" y="3353658"/>
-                  </a:lnTo>
-                  <a:lnTo>
-                    <a:pt x="3588204" y="3335473"/>
-                  </a:lnTo>
-                  <a:lnTo>
-                    <a:pt x="3516581" y="3314746"/>
-                  </a:lnTo>
-                  <a:lnTo>
-                    <a:pt x="3444959" y="3291121"/>
-                  </a:lnTo>
-                  <a:lnTo>
-                    <a:pt x="3373336" y="3264194"/>
-                  </a:lnTo>
-                  <a:lnTo>
-                    <a:pt x="3301714" y="3233503"/>
-                  </a:lnTo>
-                  <a:lnTo>
-                    <a:pt x="3230091" y="3198521"/>
-                  </a:lnTo>
-                  <a:lnTo>
-                    <a:pt x="3158469" y="3158649"/>
-                  </a:lnTo>
-                  <a:lnTo>
-                    <a:pt x="3086846" y="3113203"/>
-                  </a:lnTo>
-                  <a:lnTo>
-                    <a:pt x="3015223" y="3061404"/>
-                  </a:lnTo>
-                  <a:lnTo>
-                    <a:pt x="2943601" y="3002365"/>
-                  </a:lnTo>
-                  <a:lnTo>
-                    <a:pt x="2871978" y="2935072"/>
-                  </a:lnTo>
-                  <a:lnTo>
-                    <a:pt x="2800356" y="2858372"/>
-                  </a:lnTo>
-                  <a:lnTo>
-                    <a:pt x="2728733" y="2770951"/>
-                  </a:lnTo>
-                  <a:lnTo>
-                    <a:pt x="2657111" y="2671308"/>
-                  </a:lnTo>
-                  <a:lnTo>
-                    <a:pt x="2585488" y="2626720"/>
-                  </a:lnTo>
-                  <a:lnTo>
-                    <a:pt x="2513866" y="2592772"/>
-                  </a:lnTo>
-                  <a:lnTo>
-                    <a:pt x="2442243" y="2557480"/>
-                  </a:lnTo>
-                  <a:lnTo>
-                    <a:pt x="2370621" y="2520789"/>
-                  </a:lnTo>
-                  <a:lnTo>
-                    <a:pt x="2298998" y="2482645"/>
-                  </a:lnTo>
-                  <a:lnTo>
-                    <a:pt x="2227376" y="2442990"/>
-                  </a:lnTo>
-                  <a:lnTo>
-                    <a:pt x="2155753" y="2401764"/>
-                  </a:lnTo>
-                  <a:lnTo>
-                    <a:pt x="2084131" y="2358906"/>
-                  </a:lnTo>
-                  <a:lnTo>
-                    <a:pt x="2012508" y="2314349"/>
-                  </a:lnTo>
-                  <a:lnTo>
-                    <a:pt x="1940886" y="2268028"/>
-                  </a:lnTo>
-                  <a:lnTo>
-                    <a:pt x="1869263" y="2219872"/>
-                  </a:lnTo>
-                  <a:lnTo>
-                    <a:pt x="1797641" y="2169808"/>
-                  </a:lnTo>
-                  <a:lnTo>
-                    <a:pt x="1726018" y="2117761"/>
-                  </a:lnTo>
-                  <a:lnTo>
-                    <a:pt x="1654395" y="2063653"/>
-                  </a:lnTo>
-                  <a:lnTo>
-                    <a:pt x="1582773" y="2007401"/>
-                  </a:lnTo>
-                  <a:lnTo>
-                    <a:pt x="1511150" y="1948921"/>
-                  </a:lnTo>
-                  <a:lnTo>
-                    <a:pt x="1439528" y="1888124"/>
-                  </a:lnTo>
-                  <a:lnTo>
-                    <a:pt x="1367905" y="1824920"/>
-                  </a:lnTo>
-                  <a:lnTo>
-                    <a:pt x="1296283" y="1759211"/>
-                  </a:lnTo>
-                  <a:lnTo>
-                    <a:pt x="1224660" y="1690900"/>
-                  </a:lnTo>
-                  <a:lnTo>
-                    <a:pt x="1153038" y="1619883"/>
-                  </a:lnTo>
-                  <a:lnTo>
-                    <a:pt x="1081415" y="1546053"/>
-                  </a:lnTo>
-                  <a:lnTo>
-                    <a:pt x="1009793" y="1469299"/>
-                  </a:lnTo>
-                  <a:lnTo>
-                    <a:pt x="938170" y="1389504"/>
-                  </a:lnTo>
-                  <a:lnTo>
-                    <a:pt x="866548" y="1306548"/>
-                  </a:lnTo>
-                  <a:lnTo>
-                    <a:pt x="794925" y="1220307"/>
-                  </a:lnTo>
-                  <a:lnTo>
-                    <a:pt x="723303" y="1130649"/>
-                  </a:lnTo>
-                  <a:lnTo>
-                    <a:pt x="651680" y="1037439"/>
-                  </a:lnTo>
-                  <a:lnTo>
-                    <a:pt x="580058" y="940538"/>
-                  </a:lnTo>
-                  <a:lnTo>
-                    <a:pt x="508435" y="839798"/>
-                  </a:lnTo>
-                  <a:lnTo>
-                    <a:pt x="436813" y="735068"/>
-                  </a:lnTo>
-                  <a:lnTo>
-                    <a:pt x="365190" y="626189"/>
-                  </a:lnTo>
-                  <a:lnTo>
-                    <a:pt x="293567" y="512998"/>
-                  </a:lnTo>
-                  <a:lnTo>
-                    <a:pt x="221945" y="395322"/>
-                  </a:lnTo>
-                  <a:lnTo>
-                    <a:pt x="150322" y="272986"/>
-                  </a:lnTo>
-                  <a:lnTo>
-                    <a:pt x="78700" y="145804"/>
-                  </a:lnTo>
-                  <a:lnTo>
-                    <a:pt x="7077" y="13583"/>
+                    <a:pt x="6197266" y="1256831"/>
+                  </a:lnTo>
+                  <a:lnTo>
+                    <a:pt x="6126922" y="1256779"/>
+                  </a:lnTo>
+                  <a:lnTo>
+                    <a:pt x="6056577" y="1256720"/>
+                  </a:lnTo>
+                  <a:lnTo>
+                    <a:pt x="5986233" y="1256653"/>
+                  </a:lnTo>
+                  <a:lnTo>
+                    <a:pt x="5915888" y="1256576"/>
+                  </a:lnTo>
+                  <a:lnTo>
+                    <a:pt x="5845544" y="1256489"/>
+                  </a:lnTo>
+                  <a:lnTo>
+                    <a:pt x="5775199" y="1256389"/>
+                  </a:lnTo>
+                  <a:lnTo>
+                    <a:pt x="5704855" y="1256275"/>
+                  </a:lnTo>
+                  <a:lnTo>
+                    <a:pt x="5634510" y="1256146"/>
+                  </a:lnTo>
+                  <a:lnTo>
+                    <a:pt x="5564166" y="1255998"/>
+                  </a:lnTo>
+                  <a:lnTo>
+                    <a:pt x="5493821" y="1255830"/>
+                  </a:lnTo>
+                  <a:lnTo>
+                    <a:pt x="5423477" y="1255638"/>
+                  </a:lnTo>
+                  <a:lnTo>
+                    <a:pt x="5353132" y="1255420"/>
+                  </a:lnTo>
+                  <a:lnTo>
+                    <a:pt x="5282788" y="1255170"/>
+                  </a:lnTo>
+                  <a:lnTo>
+                    <a:pt x="5212443" y="1254886"/>
+                  </a:lnTo>
+                  <a:lnTo>
+                    <a:pt x="5142099" y="1254563"/>
+                  </a:lnTo>
+                  <a:lnTo>
+                    <a:pt x="5071754" y="1254194"/>
+                  </a:lnTo>
+                  <a:lnTo>
+                    <a:pt x="5001410" y="1253773"/>
+                  </a:lnTo>
+                  <a:lnTo>
+                    <a:pt x="4931065" y="1253294"/>
+                  </a:lnTo>
+                  <a:lnTo>
+                    <a:pt x="4860721" y="1252748"/>
+                  </a:lnTo>
+                  <a:lnTo>
+                    <a:pt x="4790376" y="1252125"/>
+                  </a:lnTo>
+                  <a:lnTo>
+                    <a:pt x="4720032" y="1251416"/>
+                  </a:lnTo>
+                  <a:lnTo>
+                    <a:pt x="4649687" y="1250607"/>
+                  </a:lnTo>
+                  <a:lnTo>
+                    <a:pt x="4579343" y="1249685"/>
+                  </a:lnTo>
+                  <a:lnTo>
+                    <a:pt x="4508998" y="1248634"/>
+                  </a:lnTo>
+                  <a:lnTo>
+                    <a:pt x="4438654" y="1247436"/>
+                  </a:lnTo>
+                  <a:lnTo>
+                    <a:pt x="4368309" y="1246071"/>
+                  </a:lnTo>
+                  <a:lnTo>
+                    <a:pt x="4297965" y="1244515"/>
+                  </a:lnTo>
+                  <a:lnTo>
+                    <a:pt x="4227620" y="1242742"/>
+                  </a:lnTo>
+                  <a:lnTo>
+                    <a:pt x="4157276" y="1240720"/>
+                  </a:lnTo>
+                  <a:lnTo>
+                    <a:pt x="4086932" y="1238416"/>
+                  </a:lnTo>
+                  <a:lnTo>
+                    <a:pt x="4016587" y="1235790"/>
+                  </a:lnTo>
+                  <a:lnTo>
+                    <a:pt x="3946243" y="1232797"/>
+                  </a:lnTo>
+                  <a:lnTo>
+                    <a:pt x="3875898" y="1229386"/>
+                  </a:lnTo>
+                  <a:lnTo>
+                    <a:pt x="3805554" y="1225497"/>
+                  </a:lnTo>
+                  <a:lnTo>
+                    <a:pt x="3735209" y="1221065"/>
+                  </a:lnTo>
+                  <a:lnTo>
+                    <a:pt x="3664865" y="1216014"/>
+                  </a:lnTo>
+                  <a:lnTo>
+                    <a:pt x="3594520" y="1210256"/>
+                  </a:lnTo>
+                  <a:lnTo>
+                    <a:pt x="3524176" y="1203693"/>
+                  </a:lnTo>
+                  <a:lnTo>
+                    <a:pt x="3453831" y="1196214"/>
+                  </a:lnTo>
+                  <a:lnTo>
+                    <a:pt x="3383487" y="1187688"/>
+                  </a:lnTo>
+                  <a:lnTo>
+                    <a:pt x="3313142" y="1177971"/>
+                  </a:lnTo>
+                  <a:lnTo>
+                    <a:pt x="3242798" y="1166895"/>
+                  </a:lnTo>
+                  <a:lnTo>
+                    <a:pt x="3172453" y="1154271"/>
+                  </a:lnTo>
+                  <a:lnTo>
+                    <a:pt x="3102109" y="1139882"/>
+                  </a:lnTo>
+                  <a:lnTo>
+                    <a:pt x="3031764" y="1123481"/>
+                  </a:lnTo>
+                  <a:lnTo>
+                    <a:pt x="2961420" y="1104789"/>
+                  </a:lnTo>
+                  <a:lnTo>
+                    <a:pt x="2891075" y="1083483"/>
+                  </a:lnTo>
+                  <a:lnTo>
+                    <a:pt x="2820731" y="1059198"/>
+                  </a:lnTo>
+                  <a:lnTo>
+                    <a:pt x="2750386" y="1031519"/>
+                  </a:lnTo>
+                  <a:lnTo>
+                    <a:pt x="2680042" y="999971"/>
+                  </a:lnTo>
+                  <a:lnTo>
+                    <a:pt x="2609697" y="964012"/>
+                  </a:lnTo>
+                  <a:lnTo>
+                    <a:pt x="2539353" y="947921"/>
+                  </a:lnTo>
+                  <a:lnTo>
+                    <a:pt x="2469008" y="935670"/>
+                  </a:lnTo>
+                  <a:lnTo>
+                    <a:pt x="2398664" y="922934"/>
+                  </a:lnTo>
+                  <a:lnTo>
+                    <a:pt x="2328319" y="909693"/>
+                  </a:lnTo>
+                  <a:lnTo>
+                    <a:pt x="2257975" y="895928"/>
+                  </a:lnTo>
+                  <a:lnTo>
+                    <a:pt x="2187630" y="881617"/>
+                  </a:lnTo>
+                  <a:lnTo>
+                    <a:pt x="2117286" y="866740"/>
+                  </a:lnTo>
+                  <a:lnTo>
+                    <a:pt x="2046941" y="851273"/>
+                  </a:lnTo>
+                  <a:lnTo>
+                    <a:pt x="1976597" y="835194"/>
+                  </a:lnTo>
+                  <a:lnTo>
+                    <a:pt x="1906252" y="818478"/>
+                  </a:lnTo>
+                  <a:lnTo>
+                    <a:pt x="1835908" y="801099"/>
+                  </a:lnTo>
+                  <a:lnTo>
+                    <a:pt x="1765563" y="783032"/>
+                  </a:lnTo>
+                  <a:lnTo>
+                    <a:pt x="1695219" y="764250"/>
+                  </a:lnTo>
+                  <a:lnTo>
+                    <a:pt x="1624874" y="744723"/>
+                  </a:lnTo>
+                  <a:lnTo>
+                    <a:pt x="1554530" y="724423"/>
+                  </a:lnTo>
+                  <a:lnTo>
+                    <a:pt x="1484185" y="703319"/>
+                  </a:lnTo>
+                  <a:lnTo>
+                    <a:pt x="1413841" y="681379"/>
+                  </a:lnTo>
+                  <a:lnTo>
+                    <a:pt x="1343496" y="658570"/>
+                  </a:lnTo>
+                  <a:lnTo>
+                    <a:pt x="1273152" y="634858"/>
+                  </a:lnTo>
+                  <a:lnTo>
+                    <a:pt x="1202807" y="610206"/>
+                  </a:lnTo>
+                  <a:lnTo>
+                    <a:pt x="1132463" y="584577"/>
+                  </a:lnTo>
+                  <a:lnTo>
+                    <a:pt x="1062118" y="557934"/>
+                  </a:lnTo>
+                  <a:lnTo>
+                    <a:pt x="991774" y="530235"/>
+                  </a:lnTo>
+                  <a:lnTo>
+                    <a:pt x="921429" y="501439"/>
+                  </a:lnTo>
+                  <a:lnTo>
+                    <a:pt x="851085" y="471502"/>
+                  </a:lnTo>
+                  <a:lnTo>
+                    <a:pt x="780740" y="440380"/>
+                  </a:lnTo>
+                  <a:lnTo>
+                    <a:pt x="710396" y="408024"/>
+                  </a:lnTo>
+                  <a:lnTo>
+                    <a:pt x="640051" y="374387"/>
+                  </a:lnTo>
+                  <a:lnTo>
+                    <a:pt x="569707" y="339418"/>
+                  </a:lnTo>
+                  <a:lnTo>
+                    <a:pt x="499362" y="303063"/>
+                  </a:lnTo>
+                  <a:lnTo>
+                    <a:pt x="429018" y="265268"/>
+                  </a:lnTo>
+                  <a:lnTo>
+                    <a:pt x="358674" y="225977"/>
+                  </a:lnTo>
+                  <a:lnTo>
+                    <a:pt x="288329" y="185128"/>
+                  </a:lnTo>
+                  <a:lnTo>
+                    <a:pt x="217985" y="142662"/>
+                  </a:lnTo>
+                  <a:lnTo>
+                    <a:pt x="147640" y="98514"/>
+                  </a:lnTo>
+                  <a:lnTo>
+                    <a:pt x="77296" y="52617"/>
+                  </a:lnTo>
+                  <a:lnTo>
+                    <a:pt x="6951" y="4902"/>
                   </a:lnTo>
                   <a:lnTo>
                     <a:pt x="0" y="0"/>
@@ -3970,231 +4005,231 @@
         </p:sp>
         <p:sp>
           <p:nvSpPr>
-            <p:cNvPr id="23" name="pl23"/>
+            <p:cNvPr id="24" name="pl24"/>
             <p:cNvSpPr/>
             <p:nvPr/>
           </p:nvSpPr>
           <p:spPr>
             <a:xfrm>
-              <a:off x="3315732" y="2073503"/>
-              <a:ext cx="4946946" cy="3473819"/>
+              <a:off x="3340743" y="2143092"/>
+              <a:ext cx="4858673" cy="1253619"/>
             </a:xfrm>
             <a:custGeom>
               <a:avLst/>
               <a:pathLst>
-                <a:path w="4946946" h="3473819">
+                <a:path w="4858673" h="1253619">
                   <a:moveTo>
                     <a:pt x="0" y="0"/>
                   </a:moveTo>
                   <a:lnTo>
-                    <a:pt x="4992" y="21370"/>
-                  </a:lnTo>
-                  <a:lnTo>
-                    <a:pt x="76614" y="303021"/>
-                  </a:lnTo>
-                  <a:lnTo>
-                    <a:pt x="148237" y="561761"/>
-                  </a:lnTo>
-                  <a:lnTo>
-                    <a:pt x="219859" y="799453"/>
-                  </a:lnTo>
-                  <a:lnTo>
-                    <a:pt x="291482" y="1017810"/>
-                  </a:lnTo>
-                  <a:lnTo>
-                    <a:pt x="363104" y="1218404"/>
-                  </a:lnTo>
-                  <a:lnTo>
-                    <a:pt x="434727" y="1402681"/>
-                  </a:lnTo>
-                  <a:lnTo>
-                    <a:pt x="506350" y="1571968"/>
-                  </a:lnTo>
-                  <a:lnTo>
-                    <a:pt x="577972" y="1727483"/>
-                  </a:lnTo>
-                  <a:lnTo>
-                    <a:pt x="649595" y="1870349"/>
-                  </a:lnTo>
-                  <a:lnTo>
-                    <a:pt x="721217" y="2001592"/>
-                  </a:lnTo>
-                  <a:lnTo>
-                    <a:pt x="792840" y="2122160"/>
-                  </a:lnTo>
-                  <a:lnTo>
-                    <a:pt x="864462" y="2232920"/>
-                  </a:lnTo>
-                  <a:lnTo>
-                    <a:pt x="936085" y="2334670"/>
-                  </a:lnTo>
-                  <a:lnTo>
-                    <a:pt x="1007707" y="2428143"/>
-                  </a:lnTo>
-                  <a:lnTo>
-                    <a:pt x="1079330" y="2514012"/>
-                  </a:lnTo>
-                  <a:lnTo>
-                    <a:pt x="1150952" y="2592896"/>
-                  </a:lnTo>
-                  <a:lnTo>
-                    <a:pt x="1222575" y="2665363"/>
-                  </a:lnTo>
-                  <a:lnTo>
-                    <a:pt x="1294197" y="2731936"/>
-                  </a:lnTo>
-                  <a:lnTo>
-                    <a:pt x="1365820" y="2793092"/>
-                  </a:lnTo>
-                  <a:lnTo>
-                    <a:pt x="1437442" y="2849275"/>
-                  </a:lnTo>
-                  <a:lnTo>
-                    <a:pt x="1509065" y="2900886"/>
-                  </a:lnTo>
-                  <a:lnTo>
-                    <a:pt x="1580687" y="2948300"/>
-                  </a:lnTo>
-                  <a:lnTo>
-                    <a:pt x="1652310" y="2991856"/>
-                  </a:lnTo>
-                  <a:lnTo>
-                    <a:pt x="1723932" y="3031870"/>
-                  </a:lnTo>
-                  <a:lnTo>
-                    <a:pt x="1795555" y="3068628"/>
-                  </a:lnTo>
-                  <a:lnTo>
-                    <a:pt x="1867177" y="3102396"/>
-                  </a:lnTo>
-                  <a:lnTo>
-                    <a:pt x="1938800" y="3133418"/>
-                  </a:lnTo>
-                  <a:lnTo>
-                    <a:pt x="2010423" y="3161916"/>
-                  </a:lnTo>
-                  <a:lnTo>
-                    <a:pt x="2082045" y="3188095"/>
-                  </a:lnTo>
-                  <a:lnTo>
-                    <a:pt x="2153668" y="3212145"/>
-                  </a:lnTo>
-                  <a:lnTo>
-                    <a:pt x="2225290" y="3234239"/>
-                  </a:lnTo>
-                  <a:lnTo>
-                    <a:pt x="2296913" y="3254536"/>
-                  </a:lnTo>
-                  <a:lnTo>
-                    <a:pt x="2368535" y="3273181"/>
-                  </a:lnTo>
-                  <a:lnTo>
-                    <a:pt x="2440158" y="3290310"/>
-                  </a:lnTo>
-                  <a:lnTo>
-                    <a:pt x="2511780" y="3306045"/>
-                  </a:lnTo>
-                  <a:lnTo>
-                    <a:pt x="2583403" y="3320500"/>
-                  </a:lnTo>
-                  <a:lnTo>
-                    <a:pt x="2655025" y="3333780"/>
-                  </a:lnTo>
-                  <a:lnTo>
-                    <a:pt x="2726648" y="3345979"/>
-                  </a:lnTo>
-                  <a:lnTo>
-                    <a:pt x="2798270" y="3357186"/>
-                  </a:lnTo>
-                  <a:lnTo>
-                    <a:pt x="2869893" y="3367481"/>
-                  </a:lnTo>
-                  <a:lnTo>
-                    <a:pt x="2941515" y="3376939"/>
-                  </a:lnTo>
-                  <a:lnTo>
-                    <a:pt x="3013138" y="3385627"/>
-                  </a:lnTo>
-                  <a:lnTo>
-                    <a:pt x="3084760" y="3393609"/>
-                  </a:lnTo>
-                  <a:lnTo>
-                    <a:pt x="3156383" y="3400941"/>
-                  </a:lnTo>
-                  <a:lnTo>
-                    <a:pt x="3228005" y="3407677"/>
-                  </a:lnTo>
-                  <a:lnTo>
-                    <a:pt x="3299628" y="3413865"/>
-                  </a:lnTo>
-                  <a:lnTo>
-                    <a:pt x="3371251" y="3419550"/>
-                  </a:lnTo>
-                  <a:lnTo>
-                    <a:pt x="3442873" y="3424772"/>
-                  </a:lnTo>
-                  <a:lnTo>
-                    <a:pt x="3514496" y="3429569"/>
-                  </a:lnTo>
-                  <a:lnTo>
-                    <a:pt x="3586118" y="3433976"/>
-                  </a:lnTo>
-                  <a:lnTo>
-                    <a:pt x="3657741" y="3438025"/>
-                  </a:lnTo>
-                  <a:lnTo>
-                    <a:pt x="3729363" y="3441744"/>
-                  </a:lnTo>
-                  <a:lnTo>
-                    <a:pt x="3800986" y="3445161"/>
-                  </a:lnTo>
-                  <a:lnTo>
-                    <a:pt x="3872608" y="3448300"/>
-                  </a:lnTo>
-                  <a:lnTo>
-                    <a:pt x="3944231" y="3451183"/>
-                  </a:lnTo>
-                  <a:lnTo>
-                    <a:pt x="4015853" y="3453832"/>
-                  </a:lnTo>
-                  <a:lnTo>
-                    <a:pt x="4087476" y="3456265"/>
-                  </a:lnTo>
-                  <a:lnTo>
-                    <a:pt x="4159098" y="3458501"/>
-                  </a:lnTo>
-                  <a:lnTo>
-                    <a:pt x="4230721" y="3460554"/>
-                  </a:lnTo>
-                  <a:lnTo>
-                    <a:pt x="4302343" y="3462441"/>
-                  </a:lnTo>
-                  <a:lnTo>
-                    <a:pt x="4373966" y="3464174"/>
-                  </a:lnTo>
-                  <a:lnTo>
-                    <a:pt x="4445588" y="3465766"/>
-                  </a:lnTo>
-                  <a:lnTo>
-                    <a:pt x="4517211" y="3467229"/>
-                  </a:lnTo>
-                  <a:lnTo>
-                    <a:pt x="4588833" y="3468573"/>
-                  </a:lnTo>
-                  <a:lnTo>
-                    <a:pt x="4660456" y="3469807"/>
-                  </a:lnTo>
-                  <a:lnTo>
-                    <a:pt x="4732079" y="3470941"/>
-                  </a:lnTo>
-                  <a:lnTo>
-                    <a:pt x="4803701" y="3471982"/>
-                  </a:lnTo>
-                  <a:lnTo>
-                    <a:pt x="4875324" y="3472939"/>
-                  </a:lnTo>
-                  <a:lnTo>
-                    <a:pt x="4946946" y="3473819"/>
+                    <a:pt x="4903" y="7712"/>
+                  </a:lnTo>
+                  <a:lnTo>
+                    <a:pt x="75247" y="109353"/>
+                  </a:lnTo>
+                  <a:lnTo>
+                    <a:pt x="145592" y="202726"/>
+                  </a:lnTo>
+                  <a:lnTo>
+                    <a:pt x="215936" y="288503"/>
+                  </a:lnTo>
+                  <a:lnTo>
+                    <a:pt x="286281" y="367303"/>
+                  </a:lnTo>
+                  <a:lnTo>
+                    <a:pt x="356625" y="439693"/>
+                  </a:lnTo>
+                  <a:lnTo>
+                    <a:pt x="426970" y="506194"/>
+                  </a:lnTo>
+                  <a:lnTo>
+                    <a:pt x="497314" y="567286"/>
+                  </a:lnTo>
+                  <a:lnTo>
+                    <a:pt x="567659" y="623408"/>
+                  </a:lnTo>
+                  <a:lnTo>
+                    <a:pt x="638003" y="674965"/>
+                  </a:lnTo>
+                  <a:lnTo>
+                    <a:pt x="708348" y="722327"/>
+                  </a:lnTo>
+                  <a:lnTo>
+                    <a:pt x="778692" y="765837"/>
+                  </a:lnTo>
+                  <a:lnTo>
+                    <a:pt x="849037" y="805808"/>
+                  </a:lnTo>
+                  <a:lnTo>
+                    <a:pt x="919381" y="842527"/>
+                  </a:lnTo>
+                  <a:lnTo>
+                    <a:pt x="989726" y="876259"/>
+                  </a:lnTo>
+                  <a:lnTo>
+                    <a:pt x="1060070" y="907247"/>
+                  </a:lnTo>
+                  <a:lnTo>
+                    <a:pt x="1130415" y="935715"/>
+                  </a:lnTo>
+                  <a:lnTo>
+                    <a:pt x="1200759" y="961867"/>
+                  </a:lnTo>
+                  <a:lnTo>
+                    <a:pt x="1271104" y="985891"/>
+                  </a:lnTo>
+                  <a:lnTo>
+                    <a:pt x="1341448" y="1007961"/>
+                  </a:lnTo>
+                  <a:lnTo>
+                    <a:pt x="1411793" y="1028236"/>
+                  </a:lnTo>
+                  <a:lnTo>
+                    <a:pt x="1482137" y="1046861"/>
+                  </a:lnTo>
+                  <a:lnTo>
+                    <a:pt x="1552482" y="1063972"/>
+                  </a:lnTo>
+                  <a:lnTo>
+                    <a:pt x="1622826" y="1079690"/>
+                  </a:lnTo>
+                  <a:lnTo>
+                    <a:pt x="1693171" y="1094130"/>
+                  </a:lnTo>
+                  <a:lnTo>
+                    <a:pt x="1763515" y="1107395"/>
+                  </a:lnTo>
+                  <a:lnTo>
+                    <a:pt x="1833859" y="1119582"/>
+                  </a:lnTo>
+                  <a:lnTo>
+                    <a:pt x="1904204" y="1130776"/>
+                  </a:lnTo>
+                  <a:lnTo>
+                    <a:pt x="1974548" y="1141061"/>
+                  </a:lnTo>
+                  <a:lnTo>
+                    <a:pt x="2044893" y="1150508"/>
+                  </a:lnTo>
+                  <a:lnTo>
+                    <a:pt x="2115237" y="1159187"/>
+                  </a:lnTo>
+                  <a:lnTo>
+                    <a:pt x="2185582" y="1167160"/>
+                  </a:lnTo>
+                  <a:lnTo>
+                    <a:pt x="2255926" y="1174485"/>
+                  </a:lnTo>
+                  <a:lnTo>
+                    <a:pt x="2326271" y="1181214"/>
+                  </a:lnTo>
+                  <a:lnTo>
+                    <a:pt x="2396615" y="1187395"/>
+                  </a:lnTo>
+                  <a:lnTo>
+                    <a:pt x="2466960" y="1193074"/>
+                  </a:lnTo>
+                  <a:lnTo>
+                    <a:pt x="2537304" y="1198290"/>
+                  </a:lnTo>
+                  <a:lnTo>
+                    <a:pt x="2607649" y="1203082"/>
+                  </a:lnTo>
+                  <a:lnTo>
+                    <a:pt x="2677993" y="1207485"/>
+                  </a:lnTo>
+                  <a:lnTo>
+                    <a:pt x="2748338" y="1211529"/>
+                  </a:lnTo>
+                  <a:lnTo>
+                    <a:pt x="2818682" y="1215244"/>
+                  </a:lnTo>
+                  <a:lnTo>
+                    <a:pt x="2889027" y="1218657"/>
+                  </a:lnTo>
+                  <a:lnTo>
+                    <a:pt x="2959371" y="1221793"/>
+                  </a:lnTo>
+                  <a:lnTo>
+                    <a:pt x="3029716" y="1224673"/>
+                  </a:lnTo>
+                  <a:lnTo>
+                    <a:pt x="3100060" y="1227319"/>
+                  </a:lnTo>
+                  <a:lnTo>
+                    <a:pt x="3170405" y="1229750"/>
+                  </a:lnTo>
+                  <a:lnTo>
+                    <a:pt x="3240749" y="1231983"/>
+                  </a:lnTo>
+                  <a:lnTo>
+                    <a:pt x="3311094" y="1234035"/>
+                  </a:lnTo>
+                  <a:lnTo>
+                    <a:pt x="3381438" y="1235919"/>
+                  </a:lnTo>
+                  <a:lnTo>
+                    <a:pt x="3451783" y="1237650"/>
+                  </a:lnTo>
+                  <a:lnTo>
+                    <a:pt x="3522127" y="1239241"/>
+                  </a:lnTo>
+                  <a:lnTo>
+                    <a:pt x="3592472" y="1240702"/>
+                  </a:lnTo>
+                  <a:lnTo>
+                    <a:pt x="3662816" y="1242044"/>
+                  </a:lnTo>
+                  <a:lnTo>
+                    <a:pt x="3733161" y="1243277"/>
+                  </a:lnTo>
+                  <a:lnTo>
+                    <a:pt x="3803505" y="1244410"/>
+                  </a:lnTo>
+                  <a:lnTo>
+                    <a:pt x="3873850" y="1245450"/>
+                  </a:lnTo>
+                  <a:lnTo>
+                    <a:pt x="3944194" y="1246406"/>
+                  </a:lnTo>
+                  <a:lnTo>
+                    <a:pt x="4014539" y="1247285"/>
+                  </a:lnTo>
+                  <a:lnTo>
+                    <a:pt x="4084883" y="1248091"/>
+                  </a:lnTo>
+                  <a:lnTo>
+                    <a:pt x="4155228" y="1248832"/>
+                  </a:lnTo>
+                  <a:lnTo>
+                    <a:pt x="4225572" y="1249513"/>
+                  </a:lnTo>
+                  <a:lnTo>
+                    <a:pt x="4295917" y="1250139"/>
+                  </a:lnTo>
+                  <a:lnTo>
+                    <a:pt x="4366261" y="1250713"/>
+                  </a:lnTo>
+                  <a:lnTo>
+                    <a:pt x="4436606" y="1251241"/>
+                  </a:lnTo>
+                  <a:lnTo>
+                    <a:pt x="4506950" y="1251726"/>
+                  </a:lnTo>
+                  <a:lnTo>
+                    <a:pt x="4577295" y="1252171"/>
+                  </a:lnTo>
+                  <a:lnTo>
+                    <a:pt x="4647639" y="1252581"/>
+                  </a:lnTo>
+                  <a:lnTo>
+                    <a:pt x="4717984" y="1252956"/>
+                  </a:lnTo>
+                  <a:lnTo>
+                    <a:pt x="4788328" y="1253302"/>
+                  </a:lnTo>
+                  <a:lnTo>
+                    <a:pt x="4858673" y="1253619"/>
                   </a:lnTo>
                 </a:path>
               </a:pathLst>
@@ -4217,27 +4252,27 @@
         </p:sp>
         <p:sp>
           <p:nvSpPr>
-            <p:cNvPr id="24" name="pl24"/>
+            <p:cNvPr id="25" name="pl25"/>
             <p:cNvSpPr/>
             <p:nvPr/>
           </p:nvSpPr>
           <p:spPr>
             <a:xfrm>
-              <a:off x="817517" y="4727786"/>
-              <a:ext cx="7799693" cy="0"/>
+              <a:off x="887106" y="3100960"/>
+              <a:ext cx="7660515" cy="0"/>
             </a:xfrm>
             <a:custGeom>
               <a:avLst/>
               <a:pathLst>
-                <a:path w="7799693" h="0">
+                <a:path w="7660515" h="0">
                   <a:moveTo>
                     <a:pt x="0" y="0"/>
                   </a:moveTo>
                   <a:lnTo>
-                    <a:pt x="7799693" y="0"/>
-                  </a:lnTo>
-                  <a:lnTo>
-                    <a:pt x="7799693" y="0"/>
+                    <a:pt x="7660515" y="0"/>
+                  </a:lnTo>
+                  <a:lnTo>
+                    <a:pt x="7660515" y="0"/>
                   </a:lnTo>
                 </a:path>
               </a:pathLst>
@@ -4260,21 +4295,21 @@
         </p:sp>
         <p:sp>
           <p:nvSpPr>
-            <p:cNvPr id="25" name="pl25"/>
+            <p:cNvPr id="26" name="pl26"/>
             <p:cNvSpPr/>
             <p:nvPr/>
           </p:nvSpPr>
           <p:spPr>
             <a:xfrm>
-              <a:off x="4526955" y="2073503"/>
-              <a:ext cx="0" cy="3649639"/>
+              <a:off x="4530353" y="2143092"/>
+              <a:ext cx="0" cy="1317069"/>
             </a:xfrm>
             <a:custGeom>
               <a:avLst/>
               <a:pathLst>
-                <a:path w="0" h="3649639">
+                <a:path w="0" h="1317069">
                   <a:moveTo>
-                    <a:pt x="0" y="3649639"/>
+                    <a:pt x="0" y="1317069"/>
                   </a:moveTo>
                   <a:lnTo>
                     <a:pt x="0" y="0"/>
@@ -4303,13 +4338,13 @@
         </p:sp>
         <p:sp>
           <p:nvSpPr>
-            <p:cNvPr id="26" name="tx26"/>
+            <p:cNvPr id="27" name="tx27"/>
             <p:cNvSpPr/>
             <p:nvPr/>
           </p:nvSpPr>
           <p:spPr>
             <a:xfrm>
-              <a:off x="692708" y="5517199"/>
+              <a:off x="762297" y="3360243"/>
               <a:ext cx="62179" cy="80101"/>
             </a:xfrm>
             <a:prstGeom prst="rect">
@@ -4349,13 +4384,13 @@
         </p:sp>
         <p:sp>
           <p:nvSpPr>
-            <p:cNvPr id="27" name="tx27"/>
+            <p:cNvPr id="28" name="tx28"/>
             <p:cNvSpPr/>
             <p:nvPr/>
           </p:nvSpPr>
           <p:spPr>
             <a:xfrm>
-              <a:off x="692708" y="4687735"/>
+              <a:off x="762297" y="3060909"/>
               <a:ext cx="62179" cy="80101"/>
             </a:xfrm>
             <a:prstGeom prst="rect">
@@ -4395,13 +4430,13 @@
         </p:sp>
         <p:sp>
           <p:nvSpPr>
-            <p:cNvPr id="28" name="tx28"/>
+            <p:cNvPr id="29" name="tx29"/>
             <p:cNvSpPr/>
             <p:nvPr/>
           </p:nvSpPr>
           <p:spPr>
             <a:xfrm>
-              <a:off x="692708" y="3858272"/>
+              <a:off x="762297" y="2761575"/>
               <a:ext cx="62179" cy="80101"/>
             </a:xfrm>
             <a:prstGeom prst="rect">
@@ -4441,13 +4476,13 @@
         </p:sp>
         <p:sp>
           <p:nvSpPr>
-            <p:cNvPr id="29" name="tx29"/>
+            <p:cNvPr id="30" name="tx30"/>
             <p:cNvSpPr/>
             <p:nvPr/>
           </p:nvSpPr>
           <p:spPr>
             <a:xfrm>
-              <a:off x="692708" y="3028808"/>
+              <a:off x="762297" y="2462242"/>
               <a:ext cx="62179" cy="80101"/>
             </a:xfrm>
             <a:prstGeom prst="rect">
@@ -4487,13 +4522,13 @@
         </p:sp>
         <p:sp>
           <p:nvSpPr>
-            <p:cNvPr id="30" name="tx30"/>
+            <p:cNvPr id="31" name="tx31"/>
             <p:cNvSpPr/>
             <p:nvPr/>
           </p:nvSpPr>
           <p:spPr>
             <a:xfrm>
-              <a:off x="692708" y="2199345"/>
+              <a:off x="762297" y="2162908"/>
               <a:ext cx="62179" cy="80101"/>
             </a:xfrm>
             <a:prstGeom prst="rect">
@@ -4533,13 +4568,13 @@
         </p:sp>
         <p:sp>
           <p:nvSpPr>
-            <p:cNvPr id="31" name="tx31"/>
+            <p:cNvPr id="32" name="tx32"/>
             <p:cNvSpPr/>
             <p:nvPr/>
           </p:nvSpPr>
           <p:spPr>
             <a:xfrm>
-              <a:off x="2421884" y="5785772"/>
+              <a:off x="2461403" y="3522791"/>
               <a:ext cx="161574" cy="80101"/>
             </a:xfrm>
             <a:prstGeom prst="rect">
@@ -4579,13 +4614,13 @@
         </p:sp>
         <p:sp>
           <p:nvSpPr>
-            <p:cNvPr id="32" name="tx32"/>
+            <p:cNvPr id="33" name="tx33"/>
             <p:cNvSpPr/>
             <p:nvPr/>
           </p:nvSpPr>
           <p:spPr>
             <a:xfrm>
-              <a:off x="4542539" y="5785772"/>
+              <a:off x="4545104" y="3522791"/>
               <a:ext cx="62179" cy="80101"/>
             </a:xfrm>
             <a:prstGeom prst="rect">
@@ -4625,13 +4660,13 @@
         </p:sp>
         <p:sp>
           <p:nvSpPr>
-            <p:cNvPr id="33" name="tx33"/>
+            <p:cNvPr id="34" name="tx34"/>
             <p:cNvSpPr/>
             <p:nvPr/>
           </p:nvSpPr>
           <p:spPr>
             <a:xfrm>
-              <a:off x="6582407" y="5785772"/>
+              <a:off x="6548017" y="3522791"/>
               <a:ext cx="124358" cy="80101"/>
             </a:xfrm>
             <a:prstGeom prst="rect">
@@ -4671,13 +4706,13 @@
         </p:sp>
         <p:sp>
           <p:nvSpPr>
-            <p:cNvPr id="34" name="tx34"/>
+            <p:cNvPr id="35" name="tx35"/>
             <p:cNvSpPr/>
             <p:nvPr/>
           </p:nvSpPr>
           <p:spPr>
             <a:xfrm>
-              <a:off x="2928340" y="5925448"/>
+              <a:off x="2928340" y="3662467"/>
               <a:ext cx="3578047" cy="100218"/>
             </a:xfrm>
             <a:prstGeom prst="rect">
@@ -4717,13 +4752,13 @@
         </p:sp>
         <p:sp>
           <p:nvSpPr>
-            <p:cNvPr id="35" name="tx35"/>
+            <p:cNvPr id="36" name="tx36"/>
             <p:cNvSpPr/>
             <p:nvPr/>
           </p:nvSpPr>
           <p:spPr>
             <a:xfrm rot="-5400000">
-              <a:off x="68446" y="3848213"/>
+              <a:off x="138035" y="2751517"/>
               <a:ext cx="1016904" cy="100218"/>
             </a:xfrm>
             <a:prstGeom prst="rect">
@@ -4763,13 +4798,13 @@
         </p:sp>
         <p:sp>
           <p:nvSpPr>
-            <p:cNvPr id="36" name="tx36"/>
+            <p:cNvPr id="37" name="tx37"/>
             <p:cNvSpPr/>
             <p:nvPr/>
           </p:nvSpPr>
           <p:spPr>
             <a:xfrm>
-              <a:off x="817517" y="1896563"/>
+              <a:off x="887106" y="1966152"/>
               <a:ext cx="6515465" cy="82021"/>
             </a:xfrm>
             <a:prstGeom prst="rect">
@@ -4809,13 +4844,3395 @@
         </p:sp>
         <p:sp>
           <p:nvSpPr>
-            <p:cNvPr id="37" name="tx37"/>
+            <p:cNvPr id="38" name="tx38"/>
             <p:cNvSpPr/>
             <p:nvPr/>
           </p:nvSpPr>
           <p:spPr>
             <a:xfrm>
-              <a:off x="817517" y="1669789"/>
+              <a:off x="887106" y="1739378"/>
+              <a:ext cx="1284914" cy="120152"/>
+            </a:xfrm>
+            <a:prstGeom prst="rect">
+              <a:avLst/>
+            </a:prstGeom>
+            <a:noFill/>
+          </p:spPr>
+          <p:txBody>
+            <a:bodyPr lIns="0" rIns="0" tIns="0" bIns="0" anchorCtr="1" anchor="ctr" wrap="none"/>
+            <a:lstStyle/>
+            <a:p>
+              <a:pPr algn="l" marL="0" marR="0" indent="0">
+                <a:lnSpc>
+                  <a:spcPts val="1320"/>
+                </a:lnSpc>
+                <a:spcBef>
+                  <a:spcPts val="0"/>
+                </a:spcBef>
+                <a:spcAft>
+                  <a:spcPts val="0"/>
+                </a:spcAft>
+              </a:pPr>
+              <a:r>
+                <a:rPr sz="1320">
+                  <a:solidFill>
+                    <a:srgbClr val="000000">
+                      <a:alpha val="100000"/>
+                    </a:srgbClr>
+                  </a:solidFill>
+                  <a:latin typeface="Helvetica"/>
+                  <a:cs typeface="Helvetica"/>
+                </a:rPr>
+                <a:t>AKI (Carboplatin)</a:t>
+              </a:r>
+            </a:p>
+          </p:txBody>
+        </p:sp>
+        <p:sp>
+          <p:nvSpPr>
+            <p:cNvPr id="39" name="pl39"/>
+            <p:cNvSpPr/>
+            <p:nvPr/>
+          </p:nvSpPr>
+          <p:spPr>
+            <a:xfrm>
+              <a:off x="887106" y="5444019"/>
+              <a:ext cx="7660515" cy="0"/>
+            </a:xfrm>
+            <a:custGeom>
+              <a:avLst/>
+              <a:pathLst>
+                <a:path w="7660515" h="0">
+                  <a:moveTo>
+                    <a:pt x="0" y="0"/>
+                  </a:moveTo>
+                  <a:lnTo>
+                    <a:pt x="7660515" y="0"/>
+                  </a:lnTo>
+                  <a:lnTo>
+                    <a:pt x="7660515" y="0"/>
+                  </a:lnTo>
+                </a:path>
+              </a:pathLst>
+            </a:custGeom>
+            <a:ln w="6775" cap="flat">
+              <a:solidFill>
+                <a:srgbClr val="EBEBEB">
+                  <a:alpha val="100000"/>
+                </a:srgbClr>
+              </a:solidFill>
+              <a:prstDash val="solid"/>
+              <a:round/>
+            </a:ln>
+          </p:spPr>
+          <p:txBody>
+            <a:bodyPr/>
+            <a:lstStyle/>
+            <a:p/>
+          </p:txBody>
+        </p:sp>
+        <p:sp>
+          <p:nvSpPr>
+            <p:cNvPr id="40" name="pl40"/>
+            <p:cNvSpPr/>
+            <p:nvPr/>
+          </p:nvSpPr>
+          <p:spPr>
+            <a:xfrm>
+              <a:off x="887106" y="5144686"/>
+              <a:ext cx="7660515" cy="0"/>
+            </a:xfrm>
+            <a:custGeom>
+              <a:avLst/>
+              <a:pathLst>
+                <a:path w="7660515" h="0">
+                  <a:moveTo>
+                    <a:pt x="0" y="0"/>
+                  </a:moveTo>
+                  <a:lnTo>
+                    <a:pt x="7660515" y="0"/>
+                  </a:lnTo>
+                  <a:lnTo>
+                    <a:pt x="7660515" y="0"/>
+                  </a:lnTo>
+                </a:path>
+              </a:pathLst>
+            </a:custGeom>
+            <a:ln w="6775" cap="flat">
+              <a:solidFill>
+                <a:srgbClr val="EBEBEB">
+                  <a:alpha val="100000"/>
+                </a:srgbClr>
+              </a:solidFill>
+              <a:prstDash val="solid"/>
+              <a:round/>
+            </a:ln>
+          </p:spPr>
+          <p:txBody>
+            <a:bodyPr/>
+            <a:lstStyle/>
+            <a:p/>
+          </p:txBody>
+        </p:sp>
+        <p:sp>
+          <p:nvSpPr>
+            <p:cNvPr id="41" name="pl41"/>
+            <p:cNvSpPr/>
+            <p:nvPr/>
+          </p:nvSpPr>
+          <p:spPr>
+            <a:xfrm>
+              <a:off x="887106" y="4845352"/>
+              <a:ext cx="7660515" cy="0"/>
+            </a:xfrm>
+            <a:custGeom>
+              <a:avLst/>
+              <a:pathLst>
+                <a:path w="7660515" h="0">
+                  <a:moveTo>
+                    <a:pt x="0" y="0"/>
+                  </a:moveTo>
+                  <a:lnTo>
+                    <a:pt x="7660515" y="0"/>
+                  </a:lnTo>
+                  <a:lnTo>
+                    <a:pt x="7660515" y="0"/>
+                  </a:lnTo>
+                </a:path>
+              </a:pathLst>
+            </a:custGeom>
+            <a:ln w="6775" cap="flat">
+              <a:solidFill>
+                <a:srgbClr val="EBEBEB">
+                  <a:alpha val="100000"/>
+                </a:srgbClr>
+              </a:solidFill>
+              <a:prstDash val="solid"/>
+              <a:round/>
+            </a:ln>
+          </p:spPr>
+          <p:txBody>
+            <a:bodyPr/>
+            <a:lstStyle/>
+            <a:p/>
+          </p:txBody>
+        </p:sp>
+        <p:sp>
+          <p:nvSpPr>
+            <p:cNvPr id="42" name="pl42"/>
+            <p:cNvSpPr/>
+            <p:nvPr/>
+          </p:nvSpPr>
+          <p:spPr>
+            <a:xfrm>
+              <a:off x="887106" y="4546018"/>
+              <a:ext cx="7660515" cy="0"/>
+            </a:xfrm>
+            <a:custGeom>
+              <a:avLst/>
+              <a:pathLst>
+                <a:path w="7660515" h="0">
+                  <a:moveTo>
+                    <a:pt x="0" y="0"/>
+                  </a:moveTo>
+                  <a:lnTo>
+                    <a:pt x="7660515" y="0"/>
+                  </a:lnTo>
+                  <a:lnTo>
+                    <a:pt x="7660515" y="0"/>
+                  </a:lnTo>
+                </a:path>
+              </a:pathLst>
+            </a:custGeom>
+            <a:ln w="6775" cap="flat">
+              <a:solidFill>
+                <a:srgbClr val="EBEBEB">
+                  <a:alpha val="100000"/>
+                </a:srgbClr>
+              </a:solidFill>
+              <a:prstDash val="solid"/>
+              <a:round/>
+            </a:ln>
+          </p:spPr>
+          <p:txBody>
+            <a:bodyPr/>
+            <a:lstStyle/>
+            <a:p/>
+          </p:txBody>
+        </p:sp>
+        <p:sp>
+          <p:nvSpPr>
+            <p:cNvPr id="43" name="pl43"/>
+            <p:cNvSpPr/>
+            <p:nvPr/>
+          </p:nvSpPr>
+          <p:spPr>
+            <a:xfrm>
+              <a:off x="914987" y="4336484"/>
+              <a:ext cx="0" cy="1317069"/>
+            </a:xfrm>
+            <a:custGeom>
+              <a:avLst/>
+              <a:pathLst>
+                <a:path w="0" h="1317069">
+                  <a:moveTo>
+                    <a:pt x="0" y="1317069"/>
+                  </a:moveTo>
+                  <a:lnTo>
+                    <a:pt x="0" y="0"/>
+                  </a:lnTo>
+                  <a:lnTo>
+                    <a:pt x="0" y="0"/>
+                  </a:lnTo>
+                </a:path>
+              </a:pathLst>
+            </a:custGeom>
+            <a:ln w="6775" cap="flat">
+              <a:solidFill>
+                <a:srgbClr val="EBEBEB">
+                  <a:alpha val="100000"/>
+                </a:srgbClr>
+              </a:solidFill>
+              <a:prstDash val="solid"/>
+              <a:round/>
+            </a:ln>
+          </p:spPr>
+          <p:txBody>
+            <a:bodyPr/>
+            <a:lstStyle/>
+            <a:p/>
+          </p:txBody>
+        </p:sp>
+        <p:sp>
+          <p:nvSpPr>
+            <p:cNvPr id="44" name="pl44"/>
+            <p:cNvSpPr/>
+            <p:nvPr/>
+          </p:nvSpPr>
+          <p:spPr>
+            <a:xfrm>
+              <a:off x="1728588" y="4336484"/>
+              <a:ext cx="0" cy="1317069"/>
+            </a:xfrm>
+            <a:custGeom>
+              <a:avLst/>
+              <a:pathLst>
+                <a:path w="0" h="1317069">
+                  <a:moveTo>
+                    <a:pt x="0" y="1317069"/>
+                  </a:moveTo>
+                  <a:lnTo>
+                    <a:pt x="0" y="0"/>
+                  </a:lnTo>
+                  <a:lnTo>
+                    <a:pt x="0" y="0"/>
+                  </a:lnTo>
+                </a:path>
+              </a:pathLst>
+            </a:custGeom>
+            <a:ln w="6775" cap="flat">
+              <a:solidFill>
+                <a:srgbClr val="EBEBEB">
+                  <a:alpha val="100000"/>
+                </a:srgbClr>
+              </a:solidFill>
+              <a:prstDash val="solid"/>
+              <a:round/>
+            </a:ln>
+          </p:spPr>
+          <p:txBody>
+            <a:bodyPr/>
+            <a:lstStyle/>
+            <a:p/>
+          </p:txBody>
+        </p:sp>
+        <p:sp>
+          <p:nvSpPr>
+            <p:cNvPr id="45" name="pl45"/>
+            <p:cNvSpPr/>
+            <p:nvPr/>
+          </p:nvSpPr>
+          <p:spPr>
+            <a:xfrm>
+              <a:off x="2542190" y="4336484"/>
+              <a:ext cx="0" cy="1317069"/>
+            </a:xfrm>
+            <a:custGeom>
+              <a:avLst/>
+              <a:pathLst>
+                <a:path w="0" h="1317069">
+                  <a:moveTo>
+                    <a:pt x="0" y="1317069"/>
+                  </a:moveTo>
+                  <a:lnTo>
+                    <a:pt x="0" y="0"/>
+                  </a:lnTo>
+                  <a:lnTo>
+                    <a:pt x="0" y="0"/>
+                  </a:lnTo>
+                </a:path>
+              </a:pathLst>
+            </a:custGeom>
+            <a:ln w="6775" cap="flat">
+              <a:solidFill>
+                <a:srgbClr val="EBEBEB">
+                  <a:alpha val="100000"/>
+                </a:srgbClr>
+              </a:solidFill>
+              <a:prstDash val="solid"/>
+              <a:round/>
+            </a:ln>
+          </p:spPr>
+          <p:txBody>
+            <a:bodyPr/>
+            <a:lstStyle/>
+            <a:p/>
+          </p:txBody>
+        </p:sp>
+        <p:sp>
+          <p:nvSpPr>
+            <p:cNvPr id="46" name="pl46"/>
+            <p:cNvSpPr/>
+            <p:nvPr/>
+          </p:nvSpPr>
+          <p:spPr>
+            <a:xfrm>
+              <a:off x="3355791" y="4336484"/>
+              <a:ext cx="0" cy="1317069"/>
+            </a:xfrm>
+            <a:custGeom>
+              <a:avLst/>
+              <a:pathLst>
+                <a:path w="0" h="1317069">
+                  <a:moveTo>
+                    <a:pt x="0" y="1317069"/>
+                  </a:moveTo>
+                  <a:lnTo>
+                    <a:pt x="0" y="0"/>
+                  </a:lnTo>
+                  <a:lnTo>
+                    <a:pt x="0" y="0"/>
+                  </a:lnTo>
+                </a:path>
+              </a:pathLst>
+            </a:custGeom>
+            <a:ln w="6775" cap="flat">
+              <a:solidFill>
+                <a:srgbClr val="EBEBEB">
+                  <a:alpha val="100000"/>
+                </a:srgbClr>
+              </a:solidFill>
+              <a:prstDash val="solid"/>
+              <a:round/>
+            </a:ln>
+          </p:spPr>
+          <p:txBody>
+            <a:bodyPr/>
+            <a:lstStyle/>
+            <a:p/>
+          </p:txBody>
+        </p:sp>
+        <p:sp>
+          <p:nvSpPr>
+            <p:cNvPr id="47" name="pl47"/>
+            <p:cNvSpPr/>
+            <p:nvPr/>
+          </p:nvSpPr>
+          <p:spPr>
+            <a:xfrm>
+              <a:off x="4169393" y="4336484"/>
+              <a:ext cx="0" cy="1317069"/>
+            </a:xfrm>
+            <a:custGeom>
+              <a:avLst/>
+              <a:pathLst>
+                <a:path w="0" h="1317069">
+                  <a:moveTo>
+                    <a:pt x="0" y="1317069"/>
+                  </a:moveTo>
+                  <a:lnTo>
+                    <a:pt x="0" y="0"/>
+                  </a:lnTo>
+                  <a:lnTo>
+                    <a:pt x="0" y="0"/>
+                  </a:lnTo>
+                </a:path>
+              </a:pathLst>
+            </a:custGeom>
+            <a:ln w="6775" cap="flat">
+              <a:solidFill>
+                <a:srgbClr val="EBEBEB">
+                  <a:alpha val="100000"/>
+                </a:srgbClr>
+              </a:solidFill>
+              <a:prstDash val="solid"/>
+              <a:round/>
+            </a:ln>
+          </p:spPr>
+          <p:txBody>
+            <a:bodyPr/>
+            <a:lstStyle/>
+            <a:p/>
+          </p:txBody>
+        </p:sp>
+        <p:sp>
+          <p:nvSpPr>
+            <p:cNvPr id="48" name="pl48"/>
+            <p:cNvSpPr/>
+            <p:nvPr/>
+          </p:nvSpPr>
+          <p:spPr>
+            <a:xfrm>
+              <a:off x="4982994" y="4336484"/>
+              <a:ext cx="0" cy="1317069"/>
+            </a:xfrm>
+            <a:custGeom>
+              <a:avLst/>
+              <a:pathLst>
+                <a:path w="0" h="1317069">
+                  <a:moveTo>
+                    <a:pt x="0" y="1317069"/>
+                  </a:moveTo>
+                  <a:lnTo>
+                    <a:pt x="0" y="0"/>
+                  </a:lnTo>
+                  <a:lnTo>
+                    <a:pt x="0" y="0"/>
+                  </a:lnTo>
+                </a:path>
+              </a:pathLst>
+            </a:custGeom>
+            <a:ln w="6775" cap="flat">
+              <a:solidFill>
+                <a:srgbClr val="EBEBEB">
+                  <a:alpha val="100000"/>
+                </a:srgbClr>
+              </a:solidFill>
+              <a:prstDash val="solid"/>
+              <a:round/>
+            </a:ln>
+          </p:spPr>
+          <p:txBody>
+            <a:bodyPr/>
+            <a:lstStyle/>
+            <a:p/>
+          </p:txBody>
+        </p:sp>
+        <p:sp>
+          <p:nvSpPr>
+            <p:cNvPr id="49" name="pl49"/>
+            <p:cNvSpPr/>
+            <p:nvPr/>
+          </p:nvSpPr>
+          <p:spPr>
+            <a:xfrm>
+              <a:off x="5796595" y="4336484"/>
+              <a:ext cx="0" cy="1317069"/>
+            </a:xfrm>
+            <a:custGeom>
+              <a:avLst/>
+              <a:pathLst>
+                <a:path w="0" h="1317069">
+                  <a:moveTo>
+                    <a:pt x="0" y="1317069"/>
+                  </a:moveTo>
+                  <a:lnTo>
+                    <a:pt x="0" y="0"/>
+                  </a:lnTo>
+                  <a:lnTo>
+                    <a:pt x="0" y="0"/>
+                  </a:lnTo>
+                </a:path>
+              </a:pathLst>
+            </a:custGeom>
+            <a:ln w="6775" cap="flat">
+              <a:solidFill>
+                <a:srgbClr val="EBEBEB">
+                  <a:alpha val="100000"/>
+                </a:srgbClr>
+              </a:solidFill>
+              <a:prstDash val="solid"/>
+              <a:round/>
+            </a:ln>
+          </p:spPr>
+          <p:txBody>
+            <a:bodyPr/>
+            <a:lstStyle/>
+            <a:p/>
+          </p:txBody>
+        </p:sp>
+        <p:sp>
+          <p:nvSpPr>
+            <p:cNvPr id="50" name="pl50"/>
+            <p:cNvSpPr/>
+            <p:nvPr/>
+          </p:nvSpPr>
+          <p:spPr>
+            <a:xfrm>
+              <a:off x="6610197" y="4336484"/>
+              <a:ext cx="0" cy="1317069"/>
+            </a:xfrm>
+            <a:custGeom>
+              <a:avLst/>
+              <a:pathLst>
+                <a:path w="0" h="1317069">
+                  <a:moveTo>
+                    <a:pt x="0" y="1317069"/>
+                  </a:moveTo>
+                  <a:lnTo>
+                    <a:pt x="0" y="0"/>
+                  </a:lnTo>
+                  <a:lnTo>
+                    <a:pt x="0" y="0"/>
+                  </a:lnTo>
+                </a:path>
+              </a:pathLst>
+            </a:custGeom>
+            <a:ln w="6775" cap="flat">
+              <a:solidFill>
+                <a:srgbClr val="EBEBEB">
+                  <a:alpha val="100000"/>
+                </a:srgbClr>
+              </a:solidFill>
+              <a:prstDash val="solid"/>
+              <a:round/>
+            </a:ln>
+          </p:spPr>
+          <p:txBody>
+            <a:bodyPr/>
+            <a:lstStyle/>
+            <a:p/>
+          </p:txBody>
+        </p:sp>
+        <p:sp>
+          <p:nvSpPr>
+            <p:cNvPr id="51" name="pl51"/>
+            <p:cNvSpPr/>
+            <p:nvPr/>
+          </p:nvSpPr>
+          <p:spPr>
+            <a:xfrm>
+              <a:off x="7423798" y="4336484"/>
+              <a:ext cx="0" cy="1317069"/>
+            </a:xfrm>
+            <a:custGeom>
+              <a:avLst/>
+              <a:pathLst>
+                <a:path w="0" h="1317069">
+                  <a:moveTo>
+                    <a:pt x="0" y="1317069"/>
+                  </a:moveTo>
+                  <a:lnTo>
+                    <a:pt x="0" y="0"/>
+                  </a:lnTo>
+                  <a:lnTo>
+                    <a:pt x="0" y="0"/>
+                  </a:lnTo>
+                </a:path>
+              </a:pathLst>
+            </a:custGeom>
+            <a:ln w="6775" cap="flat">
+              <a:solidFill>
+                <a:srgbClr val="EBEBEB">
+                  <a:alpha val="100000"/>
+                </a:srgbClr>
+              </a:solidFill>
+              <a:prstDash val="solid"/>
+              <a:round/>
+            </a:ln>
+          </p:spPr>
+          <p:txBody>
+            <a:bodyPr/>
+            <a:lstStyle/>
+            <a:p/>
+          </p:txBody>
+        </p:sp>
+        <p:sp>
+          <p:nvSpPr>
+            <p:cNvPr id="52" name="pl52"/>
+            <p:cNvSpPr/>
+            <p:nvPr/>
+          </p:nvSpPr>
+          <p:spPr>
+            <a:xfrm>
+              <a:off x="8237399" y="4336484"/>
+              <a:ext cx="0" cy="1317069"/>
+            </a:xfrm>
+            <a:custGeom>
+              <a:avLst/>
+              <a:pathLst>
+                <a:path w="0" h="1317069">
+                  <a:moveTo>
+                    <a:pt x="0" y="1317069"/>
+                  </a:moveTo>
+                  <a:lnTo>
+                    <a:pt x="0" y="0"/>
+                  </a:lnTo>
+                  <a:lnTo>
+                    <a:pt x="0" y="0"/>
+                  </a:lnTo>
+                </a:path>
+              </a:pathLst>
+            </a:custGeom>
+            <a:ln w="6775" cap="flat">
+              <a:solidFill>
+                <a:srgbClr val="EBEBEB">
+                  <a:alpha val="100000"/>
+                </a:srgbClr>
+              </a:solidFill>
+              <a:prstDash val="solid"/>
+              <a:round/>
+            </a:ln>
+          </p:spPr>
+          <p:txBody>
+            <a:bodyPr/>
+            <a:lstStyle/>
+            <a:p/>
+          </p:txBody>
+        </p:sp>
+        <p:sp>
+          <p:nvSpPr>
+            <p:cNvPr id="53" name="pl53"/>
+            <p:cNvSpPr/>
+            <p:nvPr/>
+          </p:nvSpPr>
+          <p:spPr>
+            <a:xfrm>
+              <a:off x="887106" y="5593686"/>
+              <a:ext cx="7660515" cy="0"/>
+            </a:xfrm>
+            <a:custGeom>
+              <a:avLst/>
+              <a:pathLst>
+                <a:path w="7660515" h="0">
+                  <a:moveTo>
+                    <a:pt x="0" y="0"/>
+                  </a:moveTo>
+                  <a:lnTo>
+                    <a:pt x="7660515" y="0"/>
+                  </a:lnTo>
+                  <a:lnTo>
+                    <a:pt x="7660515" y="0"/>
+                  </a:lnTo>
+                </a:path>
+              </a:pathLst>
+            </a:custGeom>
+            <a:ln w="13550" cap="flat">
+              <a:solidFill>
+                <a:srgbClr val="EBEBEB">
+                  <a:alpha val="100000"/>
+                </a:srgbClr>
+              </a:solidFill>
+              <a:prstDash val="solid"/>
+              <a:round/>
+            </a:ln>
+          </p:spPr>
+          <p:txBody>
+            <a:bodyPr/>
+            <a:lstStyle/>
+            <a:p/>
+          </p:txBody>
+        </p:sp>
+        <p:sp>
+          <p:nvSpPr>
+            <p:cNvPr id="54" name="pl54"/>
+            <p:cNvSpPr/>
+            <p:nvPr/>
+          </p:nvSpPr>
+          <p:spPr>
+            <a:xfrm>
+              <a:off x="887106" y="5294352"/>
+              <a:ext cx="7660515" cy="0"/>
+            </a:xfrm>
+            <a:custGeom>
+              <a:avLst/>
+              <a:pathLst>
+                <a:path w="7660515" h="0">
+                  <a:moveTo>
+                    <a:pt x="0" y="0"/>
+                  </a:moveTo>
+                  <a:lnTo>
+                    <a:pt x="7660515" y="0"/>
+                  </a:lnTo>
+                  <a:lnTo>
+                    <a:pt x="7660515" y="0"/>
+                  </a:lnTo>
+                </a:path>
+              </a:pathLst>
+            </a:custGeom>
+            <a:ln w="13550" cap="flat">
+              <a:solidFill>
+                <a:srgbClr val="EBEBEB">
+                  <a:alpha val="100000"/>
+                </a:srgbClr>
+              </a:solidFill>
+              <a:prstDash val="solid"/>
+              <a:round/>
+            </a:ln>
+          </p:spPr>
+          <p:txBody>
+            <a:bodyPr/>
+            <a:lstStyle/>
+            <a:p/>
+          </p:txBody>
+        </p:sp>
+        <p:sp>
+          <p:nvSpPr>
+            <p:cNvPr id="55" name="pl55"/>
+            <p:cNvSpPr/>
+            <p:nvPr/>
+          </p:nvSpPr>
+          <p:spPr>
+            <a:xfrm>
+              <a:off x="887106" y="4995019"/>
+              <a:ext cx="7660515" cy="0"/>
+            </a:xfrm>
+            <a:custGeom>
+              <a:avLst/>
+              <a:pathLst>
+                <a:path w="7660515" h="0">
+                  <a:moveTo>
+                    <a:pt x="0" y="0"/>
+                  </a:moveTo>
+                  <a:lnTo>
+                    <a:pt x="7660515" y="0"/>
+                  </a:lnTo>
+                  <a:lnTo>
+                    <a:pt x="7660515" y="0"/>
+                  </a:lnTo>
+                </a:path>
+              </a:pathLst>
+            </a:custGeom>
+            <a:ln w="13550" cap="flat">
+              <a:solidFill>
+                <a:srgbClr val="EBEBEB">
+                  <a:alpha val="100000"/>
+                </a:srgbClr>
+              </a:solidFill>
+              <a:prstDash val="solid"/>
+              <a:round/>
+            </a:ln>
+          </p:spPr>
+          <p:txBody>
+            <a:bodyPr/>
+            <a:lstStyle/>
+            <a:p/>
+          </p:txBody>
+        </p:sp>
+        <p:sp>
+          <p:nvSpPr>
+            <p:cNvPr id="56" name="pl56"/>
+            <p:cNvSpPr/>
+            <p:nvPr/>
+          </p:nvSpPr>
+          <p:spPr>
+            <a:xfrm>
+              <a:off x="887106" y="4695685"/>
+              <a:ext cx="7660515" cy="0"/>
+            </a:xfrm>
+            <a:custGeom>
+              <a:avLst/>
+              <a:pathLst>
+                <a:path w="7660515" h="0">
+                  <a:moveTo>
+                    <a:pt x="0" y="0"/>
+                  </a:moveTo>
+                  <a:lnTo>
+                    <a:pt x="7660515" y="0"/>
+                  </a:lnTo>
+                  <a:lnTo>
+                    <a:pt x="7660515" y="0"/>
+                  </a:lnTo>
+                </a:path>
+              </a:pathLst>
+            </a:custGeom>
+            <a:ln w="13550" cap="flat">
+              <a:solidFill>
+                <a:srgbClr val="EBEBEB">
+                  <a:alpha val="100000"/>
+                </a:srgbClr>
+              </a:solidFill>
+              <a:prstDash val="solid"/>
+              <a:round/>
+            </a:ln>
+          </p:spPr>
+          <p:txBody>
+            <a:bodyPr/>
+            <a:lstStyle/>
+            <a:p/>
+          </p:txBody>
+        </p:sp>
+        <p:sp>
+          <p:nvSpPr>
+            <p:cNvPr id="57" name="pl57"/>
+            <p:cNvSpPr/>
+            <p:nvPr/>
+          </p:nvSpPr>
+          <p:spPr>
+            <a:xfrm>
+              <a:off x="887106" y="4396351"/>
+              <a:ext cx="7660515" cy="0"/>
+            </a:xfrm>
+            <a:custGeom>
+              <a:avLst/>
+              <a:pathLst>
+                <a:path w="7660515" h="0">
+                  <a:moveTo>
+                    <a:pt x="0" y="0"/>
+                  </a:moveTo>
+                  <a:lnTo>
+                    <a:pt x="7660515" y="0"/>
+                  </a:lnTo>
+                  <a:lnTo>
+                    <a:pt x="7660515" y="0"/>
+                  </a:lnTo>
+                </a:path>
+              </a:pathLst>
+            </a:custGeom>
+            <a:ln w="13550" cap="flat">
+              <a:solidFill>
+                <a:srgbClr val="EBEBEB">
+                  <a:alpha val="100000"/>
+                </a:srgbClr>
+              </a:solidFill>
+              <a:prstDash val="solid"/>
+              <a:round/>
+            </a:ln>
+          </p:spPr>
+          <p:txBody>
+            <a:bodyPr/>
+            <a:lstStyle/>
+            <a:p/>
+          </p:txBody>
+        </p:sp>
+        <p:sp>
+          <p:nvSpPr>
+            <p:cNvPr id="58" name="pl58"/>
+            <p:cNvSpPr/>
+            <p:nvPr/>
+          </p:nvSpPr>
+          <p:spPr>
+            <a:xfrm>
+              <a:off x="1321788" y="4336484"/>
+              <a:ext cx="0" cy="1317069"/>
+            </a:xfrm>
+            <a:custGeom>
+              <a:avLst/>
+              <a:pathLst>
+                <a:path w="0" h="1317069">
+                  <a:moveTo>
+                    <a:pt x="0" y="1317069"/>
+                  </a:moveTo>
+                  <a:lnTo>
+                    <a:pt x="0" y="0"/>
+                  </a:lnTo>
+                  <a:lnTo>
+                    <a:pt x="0" y="0"/>
+                  </a:lnTo>
+                </a:path>
+              </a:pathLst>
+            </a:custGeom>
+            <a:ln w="13550" cap="flat">
+              <a:solidFill>
+                <a:srgbClr val="EBEBEB">
+                  <a:alpha val="100000"/>
+                </a:srgbClr>
+              </a:solidFill>
+              <a:prstDash val="solid"/>
+              <a:round/>
+            </a:ln>
+          </p:spPr>
+          <p:txBody>
+            <a:bodyPr/>
+            <a:lstStyle/>
+            <a:p/>
+          </p:txBody>
+        </p:sp>
+        <p:sp>
+          <p:nvSpPr>
+            <p:cNvPr id="59" name="pl59"/>
+            <p:cNvSpPr/>
+            <p:nvPr/>
+          </p:nvSpPr>
+          <p:spPr>
+            <a:xfrm>
+              <a:off x="2135389" y="4336484"/>
+              <a:ext cx="0" cy="1317069"/>
+            </a:xfrm>
+            <a:custGeom>
+              <a:avLst/>
+              <a:pathLst>
+                <a:path w="0" h="1317069">
+                  <a:moveTo>
+                    <a:pt x="0" y="1317069"/>
+                  </a:moveTo>
+                  <a:lnTo>
+                    <a:pt x="0" y="0"/>
+                  </a:lnTo>
+                  <a:lnTo>
+                    <a:pt x="0" y="0"/>
+                  </a:lnTo>
+                </a:path>
+              </a:pathLst>
+            </a:custGeom>
+            <a:ln w="13550" cap="flat">
+              <a:solidFill>
+                <a:srgbClr val="EBEBEB">
+                  <a:alpha val="100000"/>
+                </a:srgbClr>
+              </a:solidFill>
+              <a:prstDash val="solid"/>
+              <a:round/>
+            </a:ln>
+          </p:spPr>
+          <p:txBody>
+            <a:bodyPr/>
+            <a:lstStyle/>
+            <a:p/>
+          </p:txBody>
+        </p:sp>
+        <p:sp>
+          <p:nvSpPr>
+            <p:cNvPr id="60" name="pl60"/>
+            <p:cNvSpPr/>
+            <p:nvPr/>
+          </p:nvSpPr>
+          <p:spPr>
+            <a:xfrm>
+              <a:off x="2948991" y="4336484"/>
+              <a:ext cx="0" cy="1317069"/>
+            </a:xfrm>
+            <a:custGeom>
+              <a:avLst/>
+              <a:pathLst>
+                <a:path w="0" h="1317069">
+                  <a:moveTo>
+                    <a:pt x="0" y="1317069"/>
+                  </a:moveTo>
+                  <a:lnTo>
+                    <a:pt x="0" y="0"/>
+                  </a:lnTo>
+                  <a:lnTo>
+                    <a:pt x="0" y="0"/>
+                  </a:lnTo>
+                </a:path>
+              </a:pathLst>
+            </a:custGeom>
+            <a:ln w="13550" cap="flat">
+              <a:solidFill>
+                <a:srgbClr val="EBEBEB">
+                  <a:alpha val="100000"/>
+                </a:srgbClr>
+              </a:solidFill>
+              <a:prstDash val="solid"/>
+              <a:round/>
+            </a:ln>
+          </p:spPr>
+          <p:txBody>
+            <a:bodyPr/>
+            <a:lstStyle/>
+            <a:p/>
+          </p:txBody>
+        </p:sp>
+        <p:sp>
+          <p:nvSpPr>
+            <p:cNvPr id="61" name="pl61"/>
+            <p:cNvSpPr/>
+            <p:nvPr/>
+          </p:nvSpPr>
+          <p:spPr>
+            <a:xfrm>
+              <a:off x="3762592" y="4336484"/>
+              <a:ext cx="0" cy="1317069"/>
+            </a:xfrm>
+            <a:custGeom>
+              <a:avLst/>
+              <a:pathLst>
+                <a:path w="0" h="1317069">
+                  <a:moveTo>
+                    <a:pt x="0" y="1317069"/>
+                  </a:moveTo>
+                  <a:lnTo>
+                    <a:pt x="0" y="0"/>
+                  </a:lnTo>
+                  <a:lnTo>
+                    <a:pt x="0" y="0"/>
+                  </a:lnTo>
+                </a:path>
+              </a:pathLst>
+            </a:custGeom>
+            <a:ln w="13550" cap="flat">
+              <a:solidFill>
+                <a:srgbClr val="EBEBEB">
+                  <a:alpha val="100000"/>
+                </a:srgbClr>
+              </a:solidFill>
+              <a:prstDash val="solid"/>
+              <a:round/>
+            </a:ln>
+          </p:spPr>
+          <p:txBody>
+            <a:bodyPr/>
+            <a:lstStyle/>
+            <a:p/>
+          </p:txBody>
+        </p:sp>
+        <p:sp>
+          <p:nvSpPr>
+            <p:cNvPr id="62" name="pl62"/>
+            <p:cNvSpPr/>
+            <p:nvPr/>
+          </p:nvSpPr>
+          <p:spPr>
+            <a:xfrm>
+              <a:off x="4576193" y="4336484"/>
+              <a:ext cx="0" cy="1317069"/>
+            </a:xfrm>
+            <a:custGeom>
+              <a:avLst/>
+              <a:pathLst>
+                <a:path w="0" h="1317069">
+                  <a:moveTo>
+                    <a:pt x="0" y="1317069"/>
+                  </a:moveTo>
+                  <a:lnTo>
+                    <a:pt x="0" y="0"/>
+                  </a:lnTo>
+                  <a:lnTo>
+                    <a:pt x="0" y="0"/>
+                  </a:lnTo>
+                </a:path>
+              </a:pathLst>
+            </a:custGeom>
+            <a:ln w="13550" cap="flat">
+              <a:solidFill>
+                <a:srgbClr val="EBEBEB">
+                  <a:alpha val="100000"/>
+                </a:srgbClr>
+              </a:solidFill>
+              <a:prstDash val="solid"/>
+              <a:round/>
+            </a:ln>
+          </p:spPr>
+          <p:txBody>
+            <a:bodyPr/>
+            <a:lstStyle/>
+            <a:p/>
+          </p:txBody>
+        </p:sp>
+        <p:sp>
+          <p:nvSpPr>
+            <p:cNvPr id="63" name="pl63"/>
+            <p:cNvSpPr/>
+            <p:nvPr/>
+          </p:nvSpPr>
+          <p:spPr>
+            <a:xfrm>
+              <a:off x="5389795" y="4336484"/>
+              <a:ext cx="0" cy="1317069"/>
+            </a:xfrm>
+            <a:custGeom>
+              <a:avLst/>
+              <a:pathLst>
+                <a:path w="0" h="1317069">
+                  <a:moveTo>
+                    <a:pt x="0" y="1317069"/>
+                  </a:moveTo>
+                  <a:lnTo>
+                    <a:pt x="0" y="0"/>
+                  </a:lnTo>
+                  <a:lnTo>
+                    <a:pt x="0" y="0"/>
+                  </a:lnTo>
+                </a:path>
+              </a:pathLst>
+            </a:custGeom>
+            <a:ln w="13550" cap="flat">
+              <a:solidFill>
+                <a:srgbClr val="EBEBEB">
+                  <a:alpha val="100000"/>
+                </a:srgbClr>
+              </a:solidFill>
+              <a:prstDash val="solid"/>
+              <a:round/>
+            </a:ln>
+          </p:spPr>
+          <p:txBody>
+            <a:bodyPr/>
+            <a:lstStyle/>
+            <a:p/>
+          </p:txBody>
+        </p:sp>
+        <p:sp>
+          <p:nvSpPr>
+            <p:cNvPr id="64" name="pl64"/>
+            <p:cNvSpPr/>
+            <p:nvPr/>
+          </p:nvSpPr>
+          <p:spPr>
+            <a:xfrm>
+              <a:off x="6203396" y="4336484"/>
+              <a:ext cx="0" cy="1317069"/>
+            </a:xfrm>
+            <a:custGeom>
+              <a:avLst/>
+              <a:pathLst>
+                <a:path w="0" h="1317069">
+                  <a:moveTo>
+                    <a:pt x="0" y="1317069"/>
+                  </a:moveTo>
+                  <a:lnTo>
+                    <a:pt x="0" y="0"/>
+                  </a:lnTo>
+                  <a:lnTo>
+                    <a:pt x="0" y="0"/>
+                  </a:lnTo>
+                </a:path>
+              </a:pathLst>
+            </a:custGeom>
+            <a:ln w="13550" cap="flat">
+              <a:solidFill>
+                <a:srgbClr val="EBEBEB">
+                  <a:alpha val="100000"/>
+                </a:srgbClr>
+              </a:solidFill>
+              <a:prstDash val="solid"/>
+              <a:round/>
+            </a:ln>
+          </p:spPr>
+          <p:txBody>
+            <a:bodyPr/>
+            <a:lstStyle/>
+            <a:p/>
+          </p:txBody>
+        </p:sp>
+        <p:sp>
+          <p:nvSpPr>
+            <p:cNvPr id="65" name="pl65"/>
+            <p:cNvSpPr/>
+            <p:nvPr/>
+          </p:nvSpPr>
+          <p:spPr>
+            <a:xfrm>
+              <a:off x="7016997" y="4336484"/>
+              <a:ext cx="0" cy="1317069"/>
+            </a:xfrm>
+            <a:custGeom>
+              <a:avLst/>
+              <a:pathLst>
+                <a:path w="0" h="1317069">
+                  <a:moveTo>
+                    <a:pt x="0" y="1317069"/>
+                  </a:moveTo>
+                  <a:lnTo>
+                    <a:pt x="0" y="0"/>
+                  </a:lnTo>
+                  <a:lnTo>
+                    <a:pt x="0" y="0"/>
+                  </a:lnTo>
+                </a:path>
+              </a:pathLst>
+            </a:custGeom>
+            <a:ln w="13550" cap="flat">
+              <a:solidFill>
+                <a:srgbClr val="EBEBEB">
+                  <a:alpha val="100000"/>
+                </a:srgbClr>
+              </a:solidFill>
+              <a:prstDash val="solid"/>
+              <a:round/>
+            </a:ln>
+          </p:spPr>
+          <p:txBody>
+            <a:bodyPr/>
+            <a:lstStyle/>
+            <a:p/>
+          </p:txBody>
+        </p:sp>
+        <p:sp>
+          <p:nvSpPr>
+            <p:cNvPr id="66" name="pl66"/>
+            <p:cNvSpPr/>
+            <p:nvPr/>
+          </p:nvSpPr>
+          <p:spPr>
+            <a:xfrm>
+              <a:off x="7830599" y="4336484"/>
+              <a:ext cx="0" cy="1317069"/>
+            </a:xfrm>
+            <a:custGeom>
+              <a:avLst/>
+              <a:pathLst>
+                <a:path w="0" h="1317069">
+                  <a:moveTo>
+                    <a:pt x="0" y="1317069"/>
+                  </a:moveTo>
+                  <a:lnTo>
+                    <a:pt x="0" y="0"/>
+                  </a:lnTo>
+                  <a:lnTo>
+                    <a:pt x="0" y="0"/>
+                  </a:lnTo>
+                </a:path>
+              </a:pathLst>
+            </a:custGeom>
+            <a:ln w="13550" cap="flat">
+              <a:solidFill>
+                <a:srgbClr val="EBEBEB">
+                  <a:alpha val="100000"/>
+                </a:srgbClr>
+              </a:solidFill>
+              <a:prstDash val="solid"/>
+              <a:round/>
+            </a:ln>
+          </p:spPr>
+          <p:txBody>
+            <a:bodyPr/>
+            <a:lstStyle/>
+            <a:p/>
+          </p:txBody>
+        </p:sp>
+        <p:sp>
+          <p:nvSpPr>
+            <p:cNvPr id="67" name="pg67"/>
+            <p:cNvSpPr/>
+            <p:nvPr/>
+          </p:nvSpPr>
+          <p:spPr>
+            <a:xfrm>
+              <a:off x="1931805" y="4336484"/>
+              <a:ext cx="6267611" cy="1256877"/>
+            </a:xfrm>
+            <a:custGeom>
+              <a:avLst/>
+              <a:pathLst>
+                <a:path w="6267611" h="1256877">
+                  <a:moveTo>
+                    <a:pt x="1827520" y="0"/>
+                  </a:moveTo>
+                  <a:lnTo>
+                    <a:pt x="1835908" y="20611"/>
+                  </a:lnTo>
+                  <a:lnTo>
+                    <a:pt x="1906252" y="172274"/>
+                  </a:lnTo>
+                  <a:lnTo>
+                    <a:pt x="1976597" y="305336"/>
+                  </a:lnTo>
+                  <a:lnTo>
+                    <a:pt x="2046941" y="422079"/>
+                  </a:lnTo>
+                  <a:lnTo>
+                    <a:pt x="2117286" y="524504"/>
+                  </a:lnTo>
+                  <a:lnTo>
+                    <a:pt x="2187630" y="614366"/>
+                  </a:lnTo>
+                  <a:lnTo>
+                    <a:pt x="2257975" y="693207"/>
+                  </a:lnTo>
+                  <a:lnTo>
+                    <a:pt x="2328319" y="762379"/>
+                  </a:lnTo>
+                  <a:lnTo>
+                    <a:pt x="2398664" y="823067"/>
+                  </a:lnTo>
+                  <a:lnTo>
+                    <a:pt x="2469008" y="876312"/>
+                  </a:lnTo>
+                  <a:lnTo>
+                    <a:pt x="2539353" y="923027"/>
+                  </a:lnTo>
+                  <a:lnTo>
+                    <a:pt x="2609697" y="959705"/>
+                  </a:lnTo>
+                  <a:lnTo>
+                    <a:pt x="2680042" y="971041"/>
+                  </a:lnTo>
+                  <a:lnTo>
+                    <a:pt x="2750386" y="981944"/>
+                  </a:lnTo>
+                  <a:lnTo>
+                    <a:pt x="2820731" y="992432"/>
+                  </a:lnTo>
+                  <a:lnTo>
+                    <a:pt x="2891075" y="1002520"/>
+                  </a:lnTo>
+                  <a:lnTo>
+                    <a:pt x="2961420" y="1012224"/>
+                  </a:lnTo>
+                  <a:lnTo>
+                    <a:pt x="3031764" y="1021558"/>
+                  </a:lnTo>
+                  <a:lnTo>
+                    <a:pt x="3102109" y="1030537"/>
+                  </a:lnTo>
+                  <a:lnTo>
+                    <a:pt x="3172453" y="1039173"/>
+                  </a:lnTo>
+                  <a:lnTo>
+                    <a:pt x="3242798" y="1047480"/>
+                  </a:lnTo>
+                  <a:lnTo>
+                    <a:pt x="3313142" y="1055471"/>
+                  </a:lnTo>
+                  <a:lnTo>
+                    <a:pt x="3383487" y="1063158"/>
+                  </a:lnTo>
+                  <a:lnTo>
+                    <a:pt x="3453831" y="1070551"/>
+                  </a:lnTo>
+                  <a:lnTo>
+                    <a:pt x="3524176" y="1077663"/>
+                  </a:lnTo>
+                  <a:lnTo>
+                    <a:pt x="3594520" y="1084504"/>
+                  </a:lnTo>
+                  <a:lnTo>
+                    <a:pt x="3664865" y="1091084"/>
+                  </a:lnTo>
+                  <a:lnTo>
+                    <a:pt x="3735209" y="1097413"/>
+                  </a:lnTo>
+                  <a:lnTo>
+                    <a:pt x="3805554" y="1103501"/>
+                  </a:lnTo>
+                  <a:lnTo>
+                    <a:pt x="3875898" y="1109358"/>
+                  </a:lnTo>
+                  <a:lnTo>
+                    <a:pt x="3946243" y="1114991"/>
+                  </a:lnTo>
+                  <a:lnTo>
+                    <a:pt x="4016587" y="1120409"/>
+                  </a:lnTo>
+                  <a:lnTo>
+                    <a:pt x="4086932" y="1125621"/>
+                  </a:lnTo>
+                  <a:lnTo>
+                    <a:pt x="4157276" y="1130635"/>
+                  </a:lnTo>
+                  <a:lnTo>
+                    <a:pt x="4227620" y="1135457"/>
+                  </a:lnTo>
+                  <a:lnTo>
+                    <a:pt x="4297965" y="1140096"/>
+                  </a:lnTo>
+                  <a:lnTo>
+                    <a:pt x="4368309" y="1144558"/>
+                  </a:lnTo>
+                  <a:lnTo>
+                    <a:pt x="4438654" y="1148850"/>
+                  </a:lnTo>
+                  <a:lnTo>
+                    <a:pt x="4508998" y="1152978"/>
+                  </a:lnTo>
+                  <a:lnTo>
+                    <a:pt x="4579343" y="1156950"/>
+                  </a:lnTo>
+                  <a:lnTo>
+                    <a:pt x="4649687" y="1160769"/>
+                  </a:lnTo>
+                  <a:lnTo>
+                    <a:pt x="4720032" y="1164444"/>
+                  </a:lnTo>
+                  <a:lnTo>
+                    <a:pt x="4790376" y="1167978"/>
+                  </a:lnTo>
+                  <a:lnTo>
+                    <a:pt x="4860721" y="1171378"/>
+                  </a:lnTo>
+                  <a:lnTo>
+                    <a:pt x="4931065" y="1174648"/>
+                  </a:lnTo>
+                  <a:lnTo>
+                    <a:pt x="5001410" y="1177793"/>
+                  </a:lnTo>
+                  <a:lnTo>
+                    <a:pt x="5071754" y="1180819"/>
+                  </a:lnTo>
+                  <a:lnTo>
+                    <a:pt x="5142099" y="1183729"/>
+                  </a:lnTo>
+                  <a:lnTo>
+                    <a:pt x="5212443" y="1186529"/>
+                  </a:lnTo>
+                  <a:lnTo>
+                    <a:pt x="5282788" y="1189221"/>
+                  </a:lnTo>
+                  <a:lnTo>
+                    <a:pt x="5353132" y="1191812"/>
+                  </a:lnTo>
+                  <a:lnTo>
+                    <a:pt x="5423477" y="1194303"/>
+                  </a:lnTo>
+                  <a:lnTo>
+                    <a:pt x="5493821" y="1196700"/>
+                  </a:lnTo>
+                  <a:lnTo>
+                    <a:pt x="5564166" y="1199005"/>
+                  </a:lnTo>
+                  <a:lnTo>
+                    <a:pt x="5634510" y="1201222"/>
+                  </a:lnTo>
+                  <a:lnTo>
+                    <a:pt x="5704855" y="1203355"/>
+                  </a:lnTo>
+                  <a:lnTo>
+                    <a:pt x="5775199" y="1205407"/>
+                  </a:lnTo>
+                  <a:lnTo>
+                    <a:pt x="5845544" y="1207380"/>
+                  </a:lnTo>
+                  <a:lnTo>
+                    <a:pt x="5915888" y="1209279"/>
+                  </a:lnTo>
+                  <a:lnTo>
+                    <a:pt x="5986233" y="1211105"/>
+                  </a:lnTo>
+                  <a:lnTo>
+                    <a:pt x="6056577" y="1212861"/>
+                  </a:lnTo>
+                  <a:lnTo>
+                    <a:pt x="6126922" y="1214551"/>
+                  </a:lnTo>
+                  <a:lnTo>
+                    <a:pt x="6197266" y="1216176"/>
+                  </a:lnTo>
+                  <a:lnTo>
+                    <a:pt x="6267611" y="1217739"/>
+                  </a:lnTo>
+                  <a:lnTo>
+                    <a:pt x="6267611" y="1256877"/>
+                  </a:lnTo>
+                  <a:lnTo>
+                    <a:pt x="6197266" y="1256831"/>
+                  </a:lnTo>
+                  <a:lnTo>
+                    <a:pt x="6126922" y="1256779"/>
+                  </a:lnTo>
+                  <a:lnTo>
+                    <a:pt x="6056577" y="1256720"/>
+                  </a:lnTo>
+                  <a:lnTo>
+                    <a:pt x="5986233" y="1256653"/>
+                  </a:lnTo>
+                  <a:lnTo>
+                    <a:pt x="5915888" y="1256576"/>
+                  </a:lnTo>
+                  <a:lnTo>
+                    <a:pt x="5845544" y="1256489"/>
+                  </a:lnTo>
+                  <a:lnTo>
+                    <a:pt x="5775199" y="1256389"/>
+                  </a:lnTo>
+                  <a:lnTo>
+                    <a:pt x="5704855" y="1256275"/>
+                  </a:lnTo>
+                  <a:lnTo>
+                    <a:pt x="5634510" y="1256146"/>
+                  </a:lnTo>
+                  <a:lnTo>
+                    <a:pt x="5564166" y="1255998"/>
+                  </a:lnTo>
+                  <a:lnTo>
+                    <a:pt x="5493821" y="1255830"/>
+                  </a:lnTo>
+                  <a:lnTo>
+                    <a:pt x="5423477" y="1255638"/>
+                  </a:lnTo>
+                  <a:lnTo>
+                    <a:pt x="5353132" y="1255420"/>
+                  </a:lnTo>
+                  <a:lnTo>
+                    <a:pt x="5282788" y="1255170"/>
+                  </a:lnTo>
+                  <a:lnTo>
+                    <a:pt x="5212443" y="1254886"/>
+                  </a:lnTo>
+                  <a:lnTo>
+                    <a:pt x="5142099" y="1254563"/>
+                  </a:lnTo>
+                  <a:lnTo>
+                    <a:pt x="5071754" y="1254194"/>
+                  </a:lnTo>
+                  <a:lnTo>
+                    <a:pt x="5001410" y="1253773"/>
+                  </a:lnTo>
+                  <a:lnTo>
+                    <a:pt x="4931065" y="1253294"/>
+                  </a:lnTo>
+                  <a:lnTo>
+                    <a:pt x="4860721" y="1252748"/>
+                  </a:lnTo>
+                  <a:lnTo>
+                    <a:pt x="4790376" y="1252125"/>
+                  </a:lnTo>
+                  <a:lnTo>
+                    <a:pt x="4720032" y="1251416"/>
+                  </a:lnTo>
+                  <a:lnTo>
+                    <a:pt x="4649687" y="1250607"/>
+                  </a:lnTo>
+                  <a:lnTo>
+                    <a:pt x="4579343" y="1249685"/>
+                  </a:lnTo>
+                  <a:lnTo>
+                    <a:pt x="4508998" y="1248634"/>
+                  </a:lnTo>
+                  <a:lnTo>
+                    <a:pt x="4438654" y="1247436"/>
+                  </a:lnTo>
+                  <a:lnTo>
+                    <a:pt x="4368309" y="1246071"/>
+                  </a:lnTo>
+                  <a:lnTo>
+                    <a:pt x="4297965" y="1244515"/>
+                  </a:lnTo>
+                  <a:lnTo>
+                    <a:pt x="4227620" y="1242742"/>
+                  </a:lnTo>
+                  <a:lnTo>
+                    <a:pt x="4157276" y="1240720"/>
+                  </a:lnTo>
+                  <a:lnTo>
+                    <a:pt x="4086932" y="1238416"/>
+                  </a:lnTo>
+                  <a:lnTo>
+                    <a:pt x="4016587" y="1235790"/>
+                  </a:lnTo>
+                  <a:lnTo>
+                    <a:pt x="3946243" y="1232797"/>
+                  </a:lnTo>
+                  <a:lnTo>
+                    <a:pt x="3875898" y="1229386"/>
+                  </a:lnTo>
+                  <a:lnTo>
+                    <a:pt x="3805554" y="1225497"/>
+                  </a:lnTo>
+                  <a:lnTo>
+                    <a:pt x="3735209" y="1221065"/>
+                  </a:lnTo>
+                  <a:lnTo>
+                    <a:pt x="3664865" y="1216014"/>
+                  </a:lnTo>
+                  <a:lnTo>
+                    <a:pt x="3594520" y="1210256"/>
+                  </a:lnTo>
+                  <a:lnTo>
+                    <a:pt x="3524176" y="1203693"/>
+                  </a:lnTo>
+                  <a:lnTo>
+                    <a:pt x="3453831" y="1196214"/>
+                  </a:lnTo>
+                  <a:lnTo>
+                    <a:pt x="3383487" y="1187688"/>
+                  </a:lnTo>
+                  <a:lnTo>
+                    <a:pt x="3313142" y="1177971"/>
+                  </a:lnTo>
+                  <a:lnTo>
+                    <a:pt x="3242798" y="1166895"/>
+                  </a:lnTo>
+                  <a:lnTo>
+                    <a:pt x="3172453" y="1154271"/>
+                  </a:lnTo>
+                  <a:lnTo>
+                    <a:pt x="3102109" y="1139882"/>
+                  </a:lnTo>
+                  <a:lnTo>
+                    <a:pt x="3031764" y="1123481"/>
+                  </a:lnTo>
+                  <a:lnTo>
+                    <a:pt x="2961420" y="1104789"/>
+                  </a:lnTo>
+                  <a:lnTo>
+                    <a:pt x="2891075" y="1083483"/>
+                  </a:lnTo>
+                  <a:lnTo>
+                    <a:pt x="2820731" y="1059198"/>
+                  </a:lnTo>
+                  <a:lnTo>
+                    <a:pt x="2750386" y="1031519"/>
+                  </a:lnTo>
+                  <a:lnTo>
+                    <a:pt x="2680042" y="999971"/>
+                  </a:lnTo>
+                  <a:lnTo>
+                    <a:pt x="2609697" y="964012"/>
+                  </a:lnTo>
+                  <a:lnTo>
+                    <a:pt x="2539353" y="947921"/>
+                  </a:lnTo>
+                  <a:lnTo>
+                    <a:pt x="2469008" y="935670"/>
+                  </a:lnTo>
+                  <a:lnTo>
+                    <a:pt x="2398664" y="922934"/>
+                  </a:lnTo>
+                  <a:lnTo>
+                    <a:pt x="2328319" y="909693"/>
+                  </a:lnTo>
+                  <a:lnTo>
+                    <a:pt x="2257975" y="895928"/>
+                  </a:lnTo>
+                  <a:lnTo>
+                    <a:pt x="2187630" y="881617"/>
+                  </a:lnTo>
+                  <a:lnTo>
+                    <a:pt x="2117286" y="866740"/>
+                  </a:lnTo>
+                  <a:lnTo>
+                    <a:pt x="2046941" y="851273"/>
+                  </a:lnTo>
+                  <a:lnTo>
+                    <a:pt x="1976597" y="835194"/>
+                  </a:lnTo>
+                  <a:lnTo>
+                    <a:pt x="1906252" y="818478"/>
+                  </a:lnTo>
+                  <a:lnTo>
+                    <a:pt x="1835908" y="801099"/>
+                  </a:lnTo>
+                  <a:lnTo>
+                    <a:pt x="1765563" y="783032"/>
+                  </a:lnTo>
+                  <a:lnTo>
+                    <a:pt x="1695219" y="764250"/>
+                  </a:lnTo>
+                  <a:lnTo>
+                    <a:pt x="1624874" y="744723"/>
+                  </a:lnTo>
+                  <a:lnTo>
+                    <a:pt x="1554530" y="724423"/>
+                  </a:lnTo>
+                  <a:lnTo>
+                    <a:pt x="1484185" y="703319"/>
+                  </a:lnTo>
+                  <a:lnTo>
+                    <a:pt x="1413841" y="681379"/>
+                  </a:lnTo>
+                  <a:lnTo>
+                    <a:pt x="1343496" y="658570"/>
+                  </a:lnTo>
+                  <a:lnTo>
+                    <a:pt x="1273152" y="634858"/>
+                  </a:lnTo>
+                  <a:lnTo>
+                    <a:pt x="1202807" y="610206"/>
+                  </a:lnTo>
+                  <a:lnTo>
+                    <a:pt x="1132463" y="584577"/>
+                  </a:lnTo>
+                  <a:lnTo>
+                    <a:pt x="1062118" y="557934"/>
+                  </a:lnTo>
+                  <a:lnTo>
+                    <a:pt x="991774" y="530235"/>
+                  </a:lnTo>
+                  <a:lnTo>
+                    <a:pt x="921429" y="501439"/>
+                  </a:lnTo>
+                  <a:lnTo>
+                    <a:pt x="851085" y="471502"/>
+                  </a:lnTo>
+                  <a:lnTo>
+                    <a:pt x="780740" y="440380"/>
+                  </a:lnTo>
+                  <a:lnTo>
+                    <a:pt x="710396" y="408024"/>
+                  </a:lnTo>
+                  <a:lnTo>
+                    <a:pt x="640051" y="374387"/>
+                  </a:lnTo>
+                  <a:lnTo>
+                    <a:pt x="569707" y="339418"/>
+                  </a:lnTo>
+                  <a:lnTo>
+                    <a:pt x="499362" y="303063"/>
+                  </a:lnTo>
+                  <a:lnTo>
+                    <a:pt x="429018" y="265268"/>
+                  </a:lnTo>
+                  <a:lnTo>
+                    <a:pt x="358674" y="225977"/>
+                  </a:lnTo>
+                  <a:lnTo>
+                    <a:pt x="288329" y="185128"/>
+                  </a:lnTo>
+                  <a:lnTo>
+                    <a:pt x="217985" y="142662"/>
+                  </a:lnTo>
+                  <a:lnTo>
+                    <a:pt x="147640" y="98514"/>
+                  </a:lnTo>
+                  <a:lnTo>
+                    <a:pt x="77296" y="52617"/>
+                  </a:lnTo>
+                  <a:lnTo>
+                    <a:pt x="6951" y="4902"/>
+                  </a:lnTo>
+                  <a:lnTo>
+                    <a:pt x="0" y="0"/>
+                  </a:lnTo>
+                  <a:close/>
+                </a:path>
+              </a:pathLst>
+            </a:custGeom>
+            <a:solidFill>
+              <a:srgbClr val="FF8C00">
+                <a:alpha val="20000"/>
+              </a:srgbClr>
+            </a:solidFill>
+          </p:spPr>
+          <p:txBody>
+            <a:bodyPr/>
+            <a:lstStyle/>
+            <a:p/>
+          </p:txBody>
+        </p:sp>
+        <p:sp>
+          <p:nvSpPr>
+            <p:cNvPr id="68" name="pl68"/>
+            <p:cNvSpPr/>
+            <p:nvPr/>
+          </p:nvSpPr>
+          <p:spPr>
+            <a:xfrm>
+              <a:off x="3759326" y="4336484"/>
+              <a:ext cx="4440090" cy="1217739"/>
+            </a:xfrm>
+            <a:custGeom>
+              <a:avLst/>
+              <a:pathLst>
+                <a:path w="4440090" h="1217739">
+                  <a:moveTo>
+                    <a:pt x="0" y="0"/>
+                  </a:moveTo>
+                  <a:lnTo>
+                    <a:pt x="8387" y="20611"/>
+                  </a:lnTo>
+                  <a:lnTo>
+                    <a:pt x="78732" y="172274"/>
+                  </a:lnTo>
+                  <a:lnTo>
+                    <a:pt x="149076" y="305336"/>
+                  </a:lnTo>
+                  <a:lnTo>
+                    <a:pt x="219421" y="422079"/>
+                  </a:lnTo>
+                  <a:lnTo>
+                    <a:pt x="289765" y="524504"/>
+                  </a:lnTo>
+                  <a:lnTo>
+                    <a:pt x="360110" y="614366"/>
+                  </a:lnTo>
+                  <a:lnTo>
+                    <a:pt x="430454" y="693207"/>
+                  </a:lnTo>
+                  <a:lnTo>
+                    <a:pt x="500799" y="762379"/>
+                  </a:lnTo>
+                  <a:lnTo>
+                    <a:pt x="571143" y="823067"/>
+                  </a:lnTo>
+                  <a:lnTo>
+                    <a:pt x="641488" y="876312"/>
+                  </a:lnTo>
+                  <a:lnTo>
+                    <a:pt x="711832" y="923027"/>
+                  </a:lnTo>
+                  <a:lnTo>
+                    <a:pt x="782177" y="959705"/>
+                  </a:lnTo>
+                  <a:lnTo>
+                    <a:pt x="852521" y="971041"/>
+                  </a:lnTo>
+                  <a:lnTo>
+                    <a:pt x="922866" y="981944"/>
+                  </a:lnTo>
+                  <a:lnTo>
+                    <a:pt x="993210" y="992432"/>
+                  </a:lnTo>
+                  <a:lnTo>
+                    <a:pt x="1063554" y="1002520"/>
+                  </a:lnTo>
+                  <a:lnTo>
+                    <a:pt x="1133899" y="1012224"/>
+                  </a:lnTo>
+                  <a:lnTo>
+                    <a:pt x="1204243" y="1021558"/>
+                  </a:lnTo>
+                  <a:lnTo>
+                    <a:pt x="1274588" y="1030537"/>
+                  </a:lnTo>
+                  <a:lnTo>
+                    <a:pt x="1344932" y="1039173"/>
+                  </a:lnTo>
+                  <a:lnTo>
+                    <a:pt x="1415277" y="1047480"/>
+                  </a:lnTo>
+                  <a:lnTo>
+                    <a:pt x="1485621" y="1055471"/>
+                  </a:lnTo>
+                  <a:lnTo>
+                    <a:pt x="1555966" y="1063158"/>
+                  </a:lnTo>
+                  <a:lnTo>
+                    <a:pt x="1626310" y="1070551"/>
+                  </a:lnTo>
+                  <a:lnTo>
+                    <a:pt x="1696655" y="1077663"/>
+                  </a:lnTo>
+                  <a:lnTo>
+                    <a:pt x="1766999" y="1084504"/>
+                  </a:lnTo>
+                  <a:lnTo>
+                    <a:pt x="1837344" y="1091084"/>
+                  </a:lnTo>
+                  <a:lnTo>
+                    <a:pt x="1907688" y="1097413"/>
+                  </a:lnTo>
+                  <a:lnTo>
+                    <a:pt x="1978033" y="1103501"/>
+                  </a:lnTo>
+                  <a:lnTo>
+                    <a:pt x="2048377" y="1109358"/>
+                  </a:lnTo>
+                  <a:lnTo>
+                    <a:pt x="2118722" y="1114991"/>
+                  </a:lnTo>
+                  <a:lnTo>
+                    <a:pt x="2189066" y="1120409"/>
+                  </a:lnTo>
+                  <a:lnTo>
+                    <a:pt x="2259411" y="1125621"/>
+                  </a:lnTo>
+                  <a:lnTo>
+                    <a:pt x="2329755" y="1130635"/>
+                  </a:lnTo>
+                  <a:lnTo>
+                    <a:pt x="2400100" y="1135457"/>
+                  </a:lnTo>
+                  <a:lnTo>
+                    <a:pt x="2470444" y="1140096"/>
+                  </a:lnTo>
+                  <a:lnTo>
+                    <a:pt x="2540789" y="1144558"/>
+                  </a:lnTo>
+                  <a:lnTo>
+                    <a:pt x="2611133" y="1148850"/>
+                  </a:lnTo>
+                  <a:lnTo>
+                    <a:pt x="2681478" y="1152978"/>
+                  </a:lnTo>
+                  <a:lnTo>
+                    <a:pt x="2751822" y="1156950"/>
+                  </a:lnTo>
+                  <a:lnTo>
+                    <a:pt x="2822167" y="1160769"/>
+                  </a:lnTo>
+                  <a:lnTo>
+                    <a:pt x="2892511" y="1164444"/>
+                  </a:lnTo>
+                  <a:lnTo>
+                    <a:pt x="2962856" y="1167978"/>
+                  </a:lnTo>
+                  <a:lnTo>
+                    <a:pt x="3033200" y="1171378"/>
+                  </a:lnTo>
+                  <a:lnTo>
+                    <a:pt x="3103545" y="1174648"/>
+                  </a:lnTo>
+                  <a:lnTo>
+                    <a:pt x="3173889" y="1177793"/>
+                  </a:lnTo>
+                  <a:lnTo>
+                    <a:pt x="3244234" y="1180819"/>
+                  </a:lnTo>
+                  <a:lnTo>
+                    <a:pt x="3314578" y="1183729"/>
+                  </a:lnTo>
+                  <a:lnTo>
+                    <a:pt x="3384923" y="1186529"/>
+                  </a:lnTo>
+                  <a:lnTo>
+                    <a:pt x="3455267" y="1189221"/>
+                  </a:lnTo>
+                  <a:lnTo>
+                    <a:pt x="3525612" y="1191812"/>
+                  </a:lnTo>
+                  <a:lnTo>
+                    <a:pt x="3595956" y="1194303"/>
+                  </a:lnTo>
+                  <a:lnTo>
+                    <a:pt x="3666301" y="1196700"/>
+                  </a:lnTo>
+                  <a:lnTo>
+                    <a:pt x="3736645" y="1199005"/>
+                  </a:lnTo>
+                  <a:lnTo>
+                    <a:pt x="3806990" y="1201222"/>
+                  </a:lnTo>
+                  <a:lnTo>
+                    <a:pt x="3877334" y="1203355"/>
+                  </a:lnTo>
+                  <a:lnTo>
+                    <a:pt x="3947679" y="1205407"/>
+                  </a:lnTo>
+                  <a:lnTo>
+                    <a:pt x="4018023" y="1207380"/>
+                  </a:lnTo>
+                  <a:lnTo>
+                    <a:pt x="4088368" y="1209279"/>
+                  </a:lnTo>
+                  <a:lnTo>
+                    <a:pt x="4158712" y="1211105"/>
+                  </a:lnTo>
+                  <a:lnTo>
+                    <a:pt x="4229057" y="1212861"/>
+                  </a:lnTo>
+                  <a:lnTo>
+                    <a:pt x="4299401" y="1214551"/>
+                  </a:lnTo>
+                  <a:lnTo>
+                    <a:pt x="4369746" y="1216176"/>
+                  </a:lnTo>
+                  <a:lnTo>
+                    <a:pt x="4440090" y="1217739"/>
+                  </a:lnTo>
+                </a:path>
+              </a:pathLst>
+            </a:custGeom>
+          </p:spPr>
+          <p:txBody>
+            <a:bodyPr/>
+            <a:lstStyle/>
+            <a:p/>
+          </p:txBody>
+        </p:sp>
+        <p:sp>
+          <p:nvSpPr>
+            <p:cNvPr id="69" name="pl69"/>
+            <p:cNvSpPr/>
+            <p:nvPr/>
+          </p:nvSpPr>
+          <p:spPr>
+            <a:xfrm>
+              <a:off x="1931805" y="4336484"/>
+              <a:ext cx="6267611" cy="1256877"/>
+            </a:xfrm>
+            <a:custGeom>
+              <a:avLst/>
+              <a:pathLst>
+                <a:path w="6267611" h="1256877">
+                  <a:moveTo>
+                    <a:pt x="6267611" y="1256877"/>
+                  </a:moveTo>
+                  <a:lnTo>
+                    <a:pt x="6197266" y="1256831"/>
+                  </a:lnTo>
+                  <a:lnTo>
+                    <a:pt x="6126922" y="1256779"/>
+                  </a:lnTo>
+                  <a:lnTo>
+                    <a:pt x="6056577" y="1256720"/>
+                  </a:lnTo>
+                  <a:lnTo>
+                    <a:pt x="5986233" y="1256653"/>
+                  </a:lnTo>
+                  <a:lnTo>
+                    <a:pt x="5915888" y="1256576"/>
+                  </a:lnTo>
+                  <a:lnTo>
+                    <a:pt x="5845544" y="1256489"/>
+                  </a:lnTo>
+                  <a:lnTo>
+                    <a:pt x="5775199" y="1256389"/>
+                  </a:lnTo>
+                  <a:lnTo>
+                    <a:pt x="5704855" y="1256275"/>
+                  </a:lnTo>
+                  <a:lnTo>
+                    <a:pt x="5634510" y="1256146"/>
+                  </a:lnTo>
+                  <a:lnTo>
+                    <a:pt x="5564166" y="1255998"/>
+                  </a:lnTo>
+                  <a:lnTo>
+                    <a:pt x="5493821" y="1255830"/>
+                  </a:lnTo>
+                  <a:lnTo>
+                    <a:pt x="5423477" y="1255638"/>
+                  </a:lnTo>
+                  <a:lnTo>
+                    <a:pt x="5353132" y="1255420"/>
+                  </a:lnTo>
+                  <a:lnTo>
+                    <a:pt x="5282788" y="1255170"/>
+                  </a:lnTo>
+                  <a:lnTo>
+                    <a:pt x="5212443" y="1254886"/>
+                  </a:lnTo>
+                  <a:lnTo>
+                    <a:pt x="5142099" y="1254563"/>
+                  </a:lnTo>
+                  <a:lnTo>
+                    <a:pt x="5071754" y="1254194"/>
+                  </a:lnTo>
+                  <a:lnTo>
+                    <a:pt x="5001410" y="1253773"/>
+                  </a:lnTo>
+                  <a:lnTo>
+                    <a:pt x="4931065" y="1253294"/>
+                  </a:lnTo>
+                  <a:lnTo>
+                    <a:pt x="4860721" y="1252748"/>
+                  </a:lnTo>
+                  <a:lnTo>
+                    <a:pt x="4790376" y="1252125"/>
+                  </a:lnTo>
+                  <a:lnTo>
+                    <a:pt x="4720032" y="1251416"/>
+                  </a:lnTo>
+                  <a:lnTo>
+                    <a:pt x="4649687" y="1250607"/>
+                  </a:lnTo>
+                  <a:lnTo>
+                    <a:pt x="4579343" y="1249685"/>
+                  </a:lnTo>
+                  <a:lnTo>
+                    <a:pt x="4508998" y="1248634"/>
+                  </a:lnTo>
+                  <a:lnTo>
+                    <a:pt x="4438654" y="1247436"/>
+                  </a:lnTo>
+                  <a:lnTo>
+                    <a:pt x="4368309" y="1246071"/>
+                  </a:lnTo>
+                  <a:lnTo>
+                    <a:pt x="4297965" y="1244515"/>
+                  </a:lnTo>
+                  <a:lnTo>
+                    <a:pt x="4227620" y="1242742"/>
+                  </a:lnTo>
+                  <a:lnTo>
+                    <a:pt x="4157276" y="1240720"/>
+                  </a:lnTo>
+                  <a:lnTo>
+                    <a:pt x="4086932" y="1238416"/>
+                  </a:lnTo>
+                  <a:lnTo>
+                    <a:pt x="4016587" y="1235790"/>
+                  </a:lnTo>
+                  <a:lnTo>
+                    <a:pt x="3946243" y="1232797"/>
+                  </a:lnTo>
+                  <a:lnTo>
+                    <a:pt x="3875898" y="1229386"/>
+                  </a:lnTo>
+                  <a:lnTo>
+                    <a:pt x="3805554" y="1225497"/>
+                  </a:lnTo>
+                  <a:lnTo>
+                    <a:pt x="3735209" y="1221065"/>
+                  </a:lnTo>
+                  <a:lnTo>
+                    <a:pt x="3664865" y="1216014"/>
+                  </a:lnTo>
+                  <a:lnTo>
+                    <a:pt x="3594520" y="1210256"/>
+                  </a:lnTo>
+                  <a:lnTo>
+                    <a:pt x="3524176" y="1203693"/>
+                  </a:lnTo>
+                  <a:lnTo>
+                    <a:pt x="3453831" y="1196214"/>
+                  </a:lnTo>
+                  <a:lnTo>
+                    <a:pt x="3383487" y="1187688"/>
+                  </a:lnTo>
+                  <a:lnTo>
+                    <a:pt x="3313142" y="1177971"/>
+                  </a:lnTo>
+                  <a:lnTo>
+                    <a:pt x="3242798" y="1166895"/>
+                  </a:lnTo>
+                  <a:lnTo>
+                    <a:pt x="3172453" y="1154271"/>
+                  </a:lnTo>
+                  <a:lnTo>
+                    <a:pt x="3102109" y="1139882"/>
+                  </a:lnTo>
+                  <a:lnTo>
+                    <a:pt x="3031764" y="1123481"/>
+                  </a:lnTo>
+                  <a:lnTo>
+                    <a:pt x="2961420" y="1104789"/>
+                  </a:lnTo>
+                  <a:lnTo>
+                    <a:pt x="2891075" y="1083483"/>
+                  </a:lnTo>
+                  <a:lnTo>
+                    <a:pt x="2820731" y="1059198"/>
+                  </a:lnTo>
+                  <a:lnTo>
+                    <a:pt x="2750386" y="1031519"/>
+                  </a:lnTo>
+                  <a:lnTo>
+                    <a:pt x="2680042" y="999971"/>
+                  </a:lnTo>
+                  <a:lnTo>
+                    <a:pt x="2609697" y="964012"/>
+                  </a:lnTo>
+                  <a:lnTo>
+                    <a:pt x="2539353" y="947921"/>
+                  </a:lnTo>
+                  <a:lnTo>
+                    <a:pt x="2469008" y="935670"/>
+                  </a:lnTo>
+                  <a:lnTo>
+                    <a:pt x="2398664" y="922934"/>
+                  </a:lnTo>
+                  <a:lnTo>
+                    <a:pt x="2328319" y="909693"/>
+                  </a:lnTo>
+                  <a:lnTo>
+                    <a:pt x="2257975" y="895928"/>
+                  </a:lnTo>
+                  <a:lnTo>
+                    <a:pt x="2187630" y="881617"/>
+                  </a:lnTo>
+                  <a:lnTo>
+                    <a:pt x="2117286" y="866740"/>
+                  </a:lnTo>
+                  <a:lnTo>
+                    <a:pt x="2046941" y="851273"/>
+                  </a:lnTo>
+                  <a:lnTo>
+                    <a:pt x="1976597" y="835194"/>
+                  </a:lnTo>
+                  <a:lnTo>
+                    <a:pt x="1906252" y="818478"/>
+                  </a:lnTo>
+                  <a:lnTo>
+                    <a:pt x="1835908" y="801099"/>
+                  </a:lnTo>
+                  <a:lnTo>
+                    <a:pt x="1765563" y="783032"/>
+                  </a:lnTo>
+                  <a:lnTo>
+                    <a:pt x="1695219" y="764250"/>
+                  </a:lnTo>
+                  <a:lnTo>
+                    <a:pt x="1624874" y="744723"/>
+                  </a:lnTo>
+                  <a:lnTo>
+                    <a:pt x="1554530" y="724423"/>
+                  </a:lnTo>
+                  <a:lnTo>
+                    <a:pt x="1484185" y="703319"/>
+                  </a:lnTo>
+                  <a:lnTo>
+                    <a:pt x="1413841" y="681379"/>
+                  </a:lnTo>
+                  <a:lnTo>
+                    <a:pt x="1343496" y="658570"/>
+                  </a:lnTo>
+                  <a:lnTo>
+                    <a:pt x="1273152" y="634858"/>
+                  </a:lnTo>
+                  <a:lnTo>
+                    <a:pt x="1202807" y="610206"/>
+                  </a:lnTo>
+                  <a:lnTo>
+                    <a:pt x="1132463" y="584577"/>
+                  </a:lnTo>
+                  <a:lnTo>
+                    <a:pt x="1062118" y="557934"/>
+                  </a:lnTo>
+                  <a:lnTo>
+                    <a:pt x="991774" y="530235"/>
+                  </a:lnTo>
+                  <a:lnTo>
+                    <a:pt x="921429" y="501439"/>
+                  </a:lnTo>
+                  <a:lnTo>
+                    <a:pt x="851085" y="471502"/>
+                  </a:lnTo>
+                  <a:lnTo>
+                    <a:pt x="780740" y="440380"/>
+                  </a:lnTo>
+                  <a:lnTo>
+                    <a:pt x="710396" y="408024"/>
+                  </a:lnTo>
+                  <a:lnTo>
+                    <a:pt x="640051" y="374387"/>
+                  </a:lnTo>
+                  <a:lnTo>
+                    <a:pt x="569707" y="339418"/>
+                  </a:lnTo>
+                  <a:lnTo>
+                    <a:pt x="499362" y="303063"/>
+                  </a:lnTo>
+                  <a:lnTo>
+                    <a:pt x="429018" y="265268"/>
+                  </a:lnTo>
+                  <a:lnTo>
+                    <a:pt x="358674" y="225977"/>
+                  </a:lnTo>
+                  <a:lnTo>
+                    <a:pt x="288329" y="185128"/>
+                  </a:lnTo>
+                  <a:lnTo>
+                    <a:pt x="217985" y="142662"/>
+                  </a:lnTo>
+                  <a:lnTo>
+                    <a:pt x="147640" y="98514"/>
+                  </a:lnTo>
+                  <a:lnTo>
+                    <a:pt x="77296" y="52617"/>
+                  </a:lnTo>
+                  <a:lnTo>
+                    <a:pt x="6951" y="4902"/>
+                  </a:lnTo>
+                  <a:lnTo>
+                    <a:pt x="0" y="0"/>
+                  </a:lnTo>
+                </a:path>
+              </a:pathLst>
+            </a:custGeom>
+          </p:spPr>
+          <p:txBody>
+            <a:bodyPr/>
+            <a:lstStyle/>
+            <a:p/>
+          </p:txBody>
+        </p:sp>
+        <p:sp>
+          <p:nvSpPr>
+            <p:cNvPr id="70" name="pl70"/>
+            <p:cNvSpPr/>
+            <p:nvPr/>
+          </p:nvSpPr>
+          <p:spPr>
+            <a:xfrm>
+              <a:off x="3340743" y="4336484"/>
+              <a:ext cx="4858673" cy="1253619"/>
+            </a:xfrm>
+            <a:custGeom>
+              <a:avLst/>
+              <a:pathLst>
+                <a:path w="4858673" h="1253619">
+                  <a:moveTo>
+                    <a:pt x="0" y="0"/>
+                  </a:moveTo>
+                  <a:lnTo>
+                    <a:pt x="4903" y="7712"/>
+                  </a:lnTo>
+                  <a:lnTo>
+                    <a:pt x="75247" y="109353"/>
+                  </a:lnTo>
+                  <a:lnTo>
+                    <a:pt x="145592" y="202726"/>
+                  </a:lnTo>
+                  <a:lnTo>
+                    <a:pt x="215936" y="288503"/>
+                  </a:lnTo>
+                  <a:lnTo>
+                    <a:pt x="286281" y="367303"/>
+                  </a:lnTo>
+                  <a:lnTo>
+                    <a:pt x="356625" y="439693"/>
+                  </a:lnTo>
+                  <a:lnTo>
+                    <a:pt x="426970" y="506194"/>
+                  </a:lnTo>
+                  <a:lnTo>
+                    <a:pt x="497314" y="567286"/>
+                  </a:lnTo>
+                  <a:lnTo>
+                    <a:pt x="567659" y="623408"/>
+                  </a:lnTo>
+                  <a:lnTo>
+                    <a:pt x="638003" y="674965"/>
+                  </a:lnTo>
+                  <a:lnTo>
+                    <a:pt x="708348" y="722327"/>
+                  </a:lnTo>
+                  <a:lnTo>
+                    <a:pt x="778692" y="765837"/>
+                  </a:lnTo>
+                  <a:lnTo>
+                    <a:pt x="849037" y="805808"/>
+                  </a:lnTo>
+                  <a:lnTo>
+                    <a:pt x="919381" y="842527"/>
+                  </a:lnTo>
+                  <a:lnTo>
+                    <a:pt x="989726" y="876259"/>
+                  </a:lnTo>
+                  <a:lnTo>
+                    <a:pt x="1060070" y="907247"/>
+                  </a:lnTo>
+                  <a:lnTo>
+                    <a:pt x="1130415" y="935715"/>
+                  </a:lnTo>
+                  <a:lnTo>
+                    <a:pt x="1200759" y="961867"/>
+                  </a:lnTo>
+                  <a:lnTo>
+                    <a:pt x="1271104" y="985891"/>
+                  </a:lnTo>
+                  <a:lnTo>
+                    <a:pt x="1341448" y="1007961"/>
+                  </a:lnTo>
+                  <a:lnTo>
+                    <a:pt x="1411793" y="1028236"/>
+                  </a:lnTo>
+                  <a:lnTo>
+                    <a:pt x="1482137" y="1046861"/>
+                  </a:lnTo>
+                  <a:lnTo>
+                    <a:pt x="1552482" y="1063972"/>
+                  </a:lnTo>
+                  <a:lnTo>
+                    <a:pt x="1622826" y="1079690"/>
+                  </a:lnTo>
+                  <a:lnTo>
+                    <a:pt x="1693171" y="1094130"/>
+                  </a:lnTo>
+                  <a:lnTo>
+                    <a:pt x="1763515" y="1107395"/>
+                  </a:lnTo>
+                  <a:lnTo>
+                    <a:pt x="1833859" y="1119582"/>
+                  </a:lnTo>
+                  <a:lnTo>
+                    <a:pt x="1904204" y="1130776"/>
+                  </a:lnTo>
+                  <a:lnTo>
+                    <a:pt x="1974548" y="1141061"/>
+                  </a:lnTo>
+                  <a:lnTo>
+                    <a:pt x="2044893" y="1150508"/>
+                  </a:lnTo>
+                  <a:lnTo>
+                    <a:pt x="2115237" y="1159187"/>
+                  </a:lnTo>
+                  <a:lnTo>
+                    <a:pt x="2185582" y="1167160"/>
+                  </a:lnTo>
+                  <a:lnTo>
+                    <a:pt x="2255926" y="1174485"/>
+                  </a:lnTo>
+                  <a:lnTo>
+                    <a:pt x="2326271" y="1181214"/>
+                  </a:lnTo>
+                  <a:lnTo>
+                    <a:pt x="2396615" y="1187395"/>
+                  </a:lnTo>
+                  <a:lnTo>
+                    <a:pt x="2466960" y="1193074"/>
+                  </a:lnTo>
+                  <a:lnTo>
+                    <a:pt x="2537304" y="1198290"/>
+                  </a:lnTo>
+                  <a:lnTo>
+                    <a:pt x="2607649" y="1203082"/>
+                  </a:lnTo>
+                  <a:lnTo>
+                    <a:pt x="2677993" y="1207485"/>
+                  </a:lnTo>
+                  <a:lnTo>
+                    <a:pt x="2748338" y="1211529"/>
+                  </a:lnTo>
+                  <a:lnTo>
+                    <a:pt x="2818682" y="1215244"/>
+                  </a:lnTo>
+                  <a:lnTo>
+                    <a:pt x="2889027" y="1218657"/>
+                  </a:lnTo>
+                  <a:lnTo>
+                    <a:pt x="2959371" y="1221793"/>
+                  </a:lnTo>
+                  <a:lnTo>
+                    <a:pt x="3029716" y="1224673"/>
+                  </a:lnTo>
+                  <a:lnTo>
+                    <a:pt x="3100060" y="1227319"/>
+                  </a:lnTo>
+                  <a:lnTo>
+                    <a:pt x="3170405" y="1229750"/>
+                  </a:lnTo>
+                  <a:lnTo>
+                    <a:pt x="3240749" y="1231983"/>
+                  </a:lnTo>
+                  <a:lnTo>
+                    <a:pt x="3311094" y="1234035"/>
+                  </a:lnTo>
+                  <a:lnTo>
+                    <a:pt x="3381438" y="1235919"/>
+                  </a:lnTo>
+                  <a:lnTo>
+                    <a:pt x="3451783" y="1237650"/>
+                  </a:lnTo>
+                  <a:lnTo>
+                    <a:pt x="3522127" y="1239241"/>
+                  </a:lnTo>
+                  <a:lnTo>
+                    <a:pt x="3592472" y="1240702"/>
+                  </a:lnTo>
+                  <a:lnTo>
+                    <a:pt x="3662816" y="1242044"/>
+                  </a:lnTo>
+                  <a:lnTo>
+                    <a:pt x="3733161" y="1243277"/>
+                  </a:lnTo>
+                  <a:lnTo>
+                    <a:pt x="3803505" y="1244410"/>
+                  </a:lnTo>
+                  <a:lnTo>
+                    <a:pt x="3873850" y="1245450"/>
+                  </a:lnTo>
+                  <a:lnTo>
+                    <a:pt x="3944194" y="1246406"/>
+                  </a:lnTo>
+                  <a:lnTo>
+                    <a:pt x="4014539" y="1247285"/>
+                  </a:lnTo>
+                  <a:lnTo>
+                    <a:pt x="4084883" y="1248091"/>
+                  </a:lnTo>
+                  <a:lnTo>
+                    <a:pt x="4155228" y="1248832"/>
+                  </a:lnTo>
+                  <a:lnTo>
+                    <a:pt x="4225572" y="1249513"/>
+                  </a:lnTo>
+                  <a:lnTo>
+                    <a:pt x="4295917" y="1250139"/>
+                  </a:lnTo>
+                  <a:lnTo>
+                    <a:pt x="4366261" y="1250713"/>
+                  </a:lnTo>
+                  <a:lnTo>
+                    <a:pt x="4436606" y="1251241"/>
+                  </a:lnTo>
+                  <a:lnTo>
+                    <a:pt x="4506950" y="1251726"/>
+                  </a:lnTo>
+                  <a:lnTo>
+                    <a:pt x="4577295" y="1252171"/>
+                  </a:lnTo>
+                  <a:lnTo>
+                    <a:pt x="4647639" y="1252581"/>
+                  </a:lnTo>
+                  <a:lnTo>
+                    <a:pt x="4717984" y="1252956"/>
+                  </a:lnTo>
+                  <a:lnTo>
+                    <a:pt x="4788328" y="1253302"/>
+                  </a:lnTo>
+                  <a:lnTo>
+                    <a:pt x="4858673" y="1253619"/>
+                  </a:lnTo>
+                </a:path>
+              </a:pathLst>
+            </a:custGeom>
+            <a:ln w="27101" cap="flat">
+              <a:solidFill>
+                <a:srgbClr val="FF8C00">
+                  <a:alpha val="100000"/>
+                </a:srgbClr>
+              </a:solidFill>
+              <a:prstDash val="solid"/>
+              <a:round/>
+            </a:ln>
+          </p:spPr>
+          <p:txBody>
+            <a:bodyPr/>
+            <a:lstStyle/>
+            <a:p/>
+          </p:txBody>
+        </p:sp>
+        <p:sp>
+          <p:nvSpPr>
+            <p:cNvPr id="71" name="pl71"/>
+            <p:cNvSpPr/>
+            <p:nvPr/>
+          </p:nvSpPr>
+          <p:spPr>
+            <a:xfrm>
+              <a:off x="887106" y="5294352"/>
+              <a:ext cx="7660515" cy="0"/>
+            </a:xfrm>
+            <a:custGeom>
+              <a:avLst/>
+              <a:pathLst>
+                <a:path w="7660515" h="0">
+                  <a:moveTo>
+                    <a:pt x="0" y="0"/>
+                  </a:moveTo>
+                  <a:lnTo>
+                    <a:pt x="7660515" y="0"/>
+                  </a:lnTo>
+                  <a:lnTo>
+                    <a:pt x="7660515" y="0"/>
+                  </a:lnTo>
+                </a:path>
+              </a:pathLst>
+            </a:custGeom>
+            <a:ln w="13550" cap="flat">
+              <a:solidFill>
+                <a:srgbClr val="7F7F7F">
+                  <a:alpha val="100000"/>
+                </a:srgbClr>
+              </a:solidFill>
+              <a:prstDash val="dash"/>
+              <a:round/>
+            </a:ln>
+          </p:spPr>
+          <p:txBody>
+            <a:bodyPr/>
+            <a:lstStyle/>
+            <a:p/>
+          </p:txBody>
+        </p:sp>
+        <p:sp>
+          <p:nvSpPr>
+            <p:cNvPr id="72" name="pl72"/>
+            <p:cNvSpPr/>
+            <p:nvPr/>
+          </p:nvSpPr>
+          <p:spPr>
+            <a:xfrm>
+              <a:off x="4530353" y="4336484"/>
+              <a:ext cx="0" cy="1317069"/>
+            </a:xfrm>
+            <a:custGeom>
+              <a:avLst/>
+              <a:pathLst>
+                <a:path w="0" h="1317069">
+                  <a:moveTo>
+                    <a:pt x="0" y="1317069"/>
+                  </a:moveTo>
+                  <a:lnTo>
+                    <a:pt x="0" y="0"/>
+                  </a:lnTo>
+                  <a:lnTo>
+                    <a:pt x="0" y="0"/>
+                  </a:lnTo>
+                </a:path>
+              </a:pathLst>
+            </a:custGeom>
+            <a:ln w="13550" cap="flat">
+              <a:solidFill>
+                <a:srgbClr val="666666">
+                  <a:alpha val="100000"/>
+                </a:srgbClr>
+              </a:solidFill>
+              <a:prstDash val="dot"/>
+              <a:round/>
+            </a:ln>
+          </p:spPr>
+          <p:txBody>
+            <a:bodyPr/>
+            <a:lstStyle/>
+            <a:p/>
+          </p:txBody>
+        </p:sp>
+        <p:sp>
+          <p:nvSpPr>
+            <p:cNvPr id="73" name="tx73"/>
+            <p:cNvSpPr/>
+            <p:nvPr/>
+          </p:nvSpPr>
+          <p:spPr>
+            <a:xfrm>
+              <a:off x="762297" y="5553636"/>
+              <a:ext cx="62179" cy="80101"/>
+            </a:xfrm>
+            <a:prstGeom prst="rect">
+              <a:avLst/>
+            </a:prstGeom>
+            <a:noFill/>
+          </p:spPr>
+          <p:txBody>
+            <a:bodyPr lIns="0" rIns="0" tIns="0" bIns="0" anchorCtr="1" anchor="ctr" wrap="none"/>
+            <a:lstStyle/>
+            <a:p>
+              <a:pPr algn="l" marL="0" marR="0" indent="0">
+                <a:lnSpc>
+                  <a:spcPts val="880"/>
+                </a:lnSpc>
+                <a:spcBef>
+                  <a:spcPts val="0"/>
+                </a:spcBef>
+                <a:spcAft>
+                  <a:spcPts val="0"/>
+                </a:spcAft>
+              </a:pPr>
+              <a:r>
+                <a:rPr sz="880">
+                  <a:solidFill>
+                    <a:srgbClr val="4D4D4D">
+                      <a:alpha val="100000"/>
+                    </a:srgbClr>
+                  </a:solidFill>
+                  <a:latin typeface="Helvetica"/>
+                  <a:cs typeface="Helvetica"/>
+                </a:rPr>
+                <a:t>0</a:t>
+              </a:r>
+            </a:p>
+          </p:txBody>
+        </p:sp>
+        <p:sp>
+          <p:nvSpPr>
+            <p:cNvPr id="74" name="tx74"/>
+            <p:cNvSpPr/>
+            <p:nvPr/>
+          </p:nvSpPr>
+          <p:spPr>
+            <a:xfrm>
+              <a:off x="762297" y="5254302"/>
+              <a:ext cx="62179" cy="80101"/>
+            </a:xfrm>
+            <a:prstGeom prst="rect">
+              <a:avLst/>
+            </a:prstGeom>
+            <a:noFill/>
+          </p:spPr>
+          <p:txBody>
+            <a:bodyPr lIns="0" rIns="0" tIns="0" bIns="0" anchorCtr="1" anchor="ctr" wrap="none"/>
+            <a:lstStyle/>
+            <a:p>
+              <a:pPr algn="l" marL="0" marR="0" indent="0">
+                <a:lnSpc>
+                  <a:spcPts val="880"/>
+                </a:lnSpc>
+                <a:spcBef>
+                  <a:spcPts val="0"/>
+                </a:spcBef>
+                <a:spcAft>
+                  <a:spcPts val="0"/>
+                </a:spcAft>
+              </a:pPr>
+              <a:r>
+                <a:rPr sz="880">
+                  <a:solidFill>
+                    <a:srgbClr val="4D4D4D">
+                      <a:alpha val="100000"/>
+                    </a:srgbClr>
+                  </a:solidFill>
+                  <a:latin typeface="Helvetica"/>
+                  <a:cs typeface="Helvetica"/>
+                </a:rPr>
+                <a:t>1</a:t>
+              </a:r>
+            </a:p>
+          </p:txBody>
+        </p:sp>
+        <p:sp>
+          <p:nvSpPr>
+            <p:cNvPr id="75" name="tx75"/>
+            <p:cNvSpPr/>
+            <p:nvPr/>
+          </p:nvSpPr>
+          <p:spPr>
+            <a:xfrm>
+              <a:off x="762297" y="4954968"/>
+              <a:ext cx="62179" cy="80101"/>
+            </a:xfrm>
+            <a:prstGeom prst="rect">
+              <a:avLst/>
+            </a:prstGeom>
+            <a:noFill/>
+          </p:spPr>
+          <p:txBody>
+            <a:bodyPr lIns="0" rIns="0" tIns="0" bIns="0" anchorCtr="1" anchor="ctr" wrap="none"/>
+            <a:lstStyle/>
+            <a:p>
+              <a:pPr algn="l" marL="0" marR="0" indent="0">
+                <a:lnSpc>
+                  <a:spcPts val="880"/>
+                </a:lnSpc>
+                <a:spcBef>
+                  <a:spcPts val="0"/>
+                </a:spcBef>
+                <a:spcAft>
+                  <a:spcPts val="0"/>
+                </a:spcAft>
+              </a:pPr>
+              <a:r>
+                <a:rPr sz="880">
+                  <a:solidFill>
+                    <a:srgbClr val="4D4D4D">
+                      <a:alpha val="100000"/>
+                    </a:srgbClr>
+                  </a:solidFill>
+                  <a:latin typeface="Helvetica"/>
+                  <a:cs typeface="Helvetica"/>
+                </a:rPr>
+                <a:t>2</a:t>
+              </a:r>
+            </a:p>
+          </p:txBody>
+        </p:sp>
+        <p:sp>
+          <p:nvSpPr>
+            <p:cNvPr id="76" name="tx76"/>
+            <p:cNvSpPr/>
+            <p:nvPr/>
+          </p:nvSpPr>
+          <p:spPr>
+            <a:xfrm>
+              <a:off x="762297" y="4655634"/>
+              <a:ext cx="62179" cy="80101"/>
+            </a:xfrm>
+            <a:prstGeom prst="rect">
+              <a:avLst/>
+            </a:prstGeom>
+            <a:noFill/>
+          </p:spPr>
+          <p:txBody>
+            <a:bodyPr lIns="0" rIns="0" tIns="0" bIns="0" anchorCtr="1" anchor="ctr" wrap="none"/>
+            <a:lstStyle/>
+            <a:p>
+              <a:pPr algn="l" marL="0" marR="0" indent="0">
+                <a:lnSpc>
+                  <a:spcPts val="880"/>
+                </a:lnSpc>
+                <a:spcBef>
+                  <a:spcPts val="0"/>
+                </a:spcBef>
+                <a:spcAft>
+                  <a:spcPts val="0"/>
+                </a:spcAft>
+              </a:pPr>
+              <a:r>
+                <a:rPr sz="880">
+                  <a:solidFill>
+                    <a:srgbClr val="4D4D4D">
+                      <a:alpha val="100000"/>
+                    </a:srgbClr>
+                  </a:solidFill>
+                  <a:latin typeface="Helvetica"/>
+                  <a:cs typeface="Helvetica"/>
+                </a:rPr>
+                <a:t>3</a:t>
+              </a:r>
+            </a:p>
+          </p:txBody>
+        </p:sp>
+        <p:sp>
+          <p:nvSpPr>
+            <p:cNvPr id="77" name="tx77"/>
+            <p:cNvSpPr/>
+            <p:nvPr/>
+          </p:nvSpPr>
+          <p:spPr>
+            <a:xfrm>
+              <a:off x="762297" y="4356300"/>
+              <a:ext cx="62179" cy="80101"/>
+            </a:xfrm>
+            <a:prstGeom prst="rect">
+              <a:avLst/>
+            </a:prstGeom>
+            <a:noFill/>
+          </p:spPr>
+          <p:txBody>
+            <a:bodyPr lIns="0" rIns="0" tIns="0" bIns="0" anchorCtr="1" anchor="ctr" wrap="none"/>
+            <a:lstStyle/>
+            <a:p>
+              <a:pPr algn="l" marL="0" marR="0" indent="0">
+                <a:lnSpc>
+                  <a:spcPts val="880"/>
+                </a:lnSpc>
+                <a:spcBef>
+                  <a:spcPts val="0"/>
+                </a:spcBef>
+                <a:spcAft>
+                  <a:spcPts val="0"/>
+                </a:spcAft>
+              </a:pPr>
+              <a:r>
+                <a:rPr sz="880">
+                  <a:solidFill>
+                    <a:srgbClr val="4D4D4D">
+                      <a:alpha val="100000"/>
+                    </a:srgbClr>
+                  </a:solidFill>
+                  <a:latin typeface="Helvetica"/>
+                  <a:cs typeface="Helvetica"/>
+                </a:rPr>
+                <a:t>4</a:t>
+              </a:r>
+            </a:p>
+          </p:txBody>
+        </p:sp>
+        <p:sp>
+          <p:nvSpPr>
+            <p:cNvPr id="78" name="tx78"/>
+            <p:cNvSpPr/>
+            <p:nvPr/>
+          </p:nvSpPr>
+          <p:spPr>
+            <a:xfrm>
+              <a:off x="1241001" y="5716183"/>
+              <a:ext cx="161574" cy="80101"/>
+            </a:xfrm>
+            <a:prstGeom prst="rect">
+              <a:avLst/>
+            </a:prstGeom>
+            <a:noFill/>
+          </p:spPr>
+          <p:txBody>
+            <a:bodyPr lIns="0" rIns="0" tIns="0" bIns="0" anchorCtr="1" anchor="ctr" wrap="none"/>
+            <a:lstStyle/>
+            <a:p>
+              <a:pPr algn="l" marL="0" marR="0" indent="0">
+                <a:lnSpc>
+                  <a:spcPts val="880"/>
+                </a:lnSpc>
+                <a:spcBef>
+                  <a:spcPts val="0"/>
+                </a:spcBef>
+                <a:spcAft>
+                  <a:spcPts val="0"/>
+                </a:spcAft>
+              </a:pPr>
+              <a:r>
+                <a:rPr sz="880">
+                  <a:solidFill>
+                    <a:srgbClr val="4D4D4D">
+                      <a:alpha val="100000"/>
+                    </a:srgbClr>
+                  </a:solidFill>
+                  <a:latin typeface="Helvetica"/>
+                  <a:cs typeface="Helvetica"/>
+                </a:rPr>
+                <a:t>-40</a:t>
+              </a:r>
+            </a:p>
+          </p:txBody>
+        </p:sp>
+        <p:sp>
+          <p:nvSpPr>
+            <p:cNvPr id="79" name="tx79"/>
+            <p:cNvSpPr/>
+            <p:nvPr/>
+          </p:nvSpPr>
+          <p:spPr>
+            <a:xfrm>
+              <a:off x="2054602" y="5716183"/>
+              <a:ext cx="161574" cy="80101"/>
+            </a:xfrm>
+            <a:prstGeom prst="rect">
+              <a:avLst/>
+            </a:prstGeom>
+            <a:noFill/>
+          </p:spPr>
+          <p:txBody>
+            <a:bodyPr lIns="0" rIns="0" tIns="0" bIns="0" anchorCtr="1" anchor="ctr" wrap="none"/>
+            <a:lstStyle/>
+            <a:p>
+              <a:pPr algn="l" marL="0" marR="0" indent="0">
+                <a:lnSpc>
+                  <a:spcPts val="880"/>
+                </a:lnSpc>
+                <a:spcBef>
+                  <a:spcPts val="0"/>
+                </a:spcBef>
+                <a:spcAft>
+                  <a:spcPts val="0"/>
+                </a:spcAft>
+              </a:pPr>
+              <a:r>
+                <a:rPr sz="880">
+                  <a:solidFill>
+                    <a:srgbClr val="4D4D4D">
+                      <a:alpha val="100000"/>
+                    </a:srgbClr>
+                  </a:solidFill>
+                  <a:latin typeface="Helvetica"/>
+                  <a:cs typeface="Helvetica"/>
+                </a:rPr>
+                <a:t>-30</a:t>
+              </a:r>
+            </a:p>
+          </p:txBody>
+        </p:sp>
+        <p:sp>
+          <p:nvSpPr>
+            <p:cNvPr id="80" name="tx80"/>
+            <p:cNvSpPr/>
+            <p:nvPr/>
+          </p:nvSpPr>
+          <p:spPr>
+            <a:xfrm>
+              <a:off x="2868203" y="5716183"/>
+              <a:ext cx="161574" cy="80101"/>
+            </a:xfrm>
+            <a:prstGeom prst="rect">
+              <a:avLst/>
+            </a:prstGeom>
+            <a:noFill/>
+          </p:spPr>
+          <p:txBody>
+            <a:bodyPr lIns="0" rIns="0" tIns="0" bIns="0" anchorCtr="1" anchor="ctr" wrap="none"/>
+            <a:lstStyle/>
+            <a:p>
+              <a:pPr algn="l" marL="0" marR="0" indent="0">
+                <a:lnSpc>
+                  <a:spcPts val="880"/>
+                </a:lnSpc>
+                <a:spcBef>
+                  <a:spcPts val="0"/>
+                </a:spcBef>
+                <a:spcAft>
+                  <a:spcPts val="0"/>
+                </a:spcAft>
+              </a:pPr>
+              <a:r>
+                <a:rPr sz="880">
+                  <a:solidFill>
+                    <a:srgbClr val="4D4D4D">
+                      <a:alpha val="100000"/>
+                    </a:srgbClr>
+                  </a:solidFill>
+                  <a:latin typeface="Helvetica"/>
+                  <a:cs typeface="Helvetica"/>
+                </a:rPr>
+                <a:t>-20</a:t>
+              </a:r>
+            </a:p>
+          </p:txBody>
+        </p:sp>
+        <p:sp>
+          <p:nvSpPr>
+            <p:cNvPr id="81" name="tx81"/>
+            <p:cNvSpPr/>
+            <p:nvPr/>
+          </p:nvSpPr>
+          <p:spPr>
+            <a:xfrm>
+              <a:off x="3681805" y="5716183"/>
+              <a:ext cx="161574" cy="80101"/>
+            </a:xfrm>
+            <a:prstGeom prst="rect">
+              <a:avLst/>
+            </a:prstGeom>
+            <a:noFill/>
+          </p:spPr>
+          <p:txBody>
+            <a:bodyPr lIns="0" rIns="0" tIns="0" bIns="0" anchorCtr="1" anchor="ctr" wrap="none"/>
+            <a:lstStyle/>
+            <a:p>
+              <a:pPr algn="l" marL="0" marR="0" indent="0">
+                <a:lnSpc>
+                  <a:spcPts val="880"/>
+                </a:lnSpc>
+                <a:spcBef>
+                  <a:spcPts val="0"/>
+                </a:spcBef>
+                <a:spcAft>
+                  <a:spcPts val="0"/>
+                </a:spcAft>
+              </a:pPr>
+              <a:r>
+                <a:rPr sz="880">
+                  <a:solidFill>
+                    <a:srgbClr val="4D4D4D">
+                      <a:alpha val="100000"/>
+                    </a:srgbClr>
+                  </a:solidFill>
+                  <a:latin typeface="Helvetica"/>
+                  <a:cs typeface="Helvetica"/>
+                </a:rPr>
+                <a:t>-10</a:t>
+              </a:r>
+            </a:p>
+          </p:txBody>
+        </p:sp>
+        <p:sp>
+          <p:nvSpPr>
+            <p:cNvPr id="82" name="tx82"/>
+            <p:cNvSpPr/>
+            <p:nvPr/>
+          </p:nvSpPr>
+          <p:spPr>
+            <a:xfrm>
+              <a:off x="4545104" y="5716183"/>
+              <a:ext cx="62179" cy="80101"/>
+            </a:xfrm>
+            <a:prstGeom prst="rect">
+              <a:avLst/>
+            </a:prstGeom>
+            <a:noFill/>
+          </p:spPr>
+          <p:txBody>
+            <a:bodyPr lIns="0" rIns="0" tIns="0" bIns="0" anchorCtr="1" anchor="ctr" wrap="none"/>
+            <a:lstStyle/>
+            <a:p>
+              <a:pPr algn="l" marL="0" marR="0" indent="0">
+                <a:lnSpc>
+                  <a:spcPts val="880"/>
+                </a:lnSpc>
+                <a:spcBef>
+                  <a:spcPts val="0"/>
+                </a:spcBef>
+                <a:spcAft>
+                  <a:spcPts val="0"/>
+                </a:spcAft>
+              </a:pPr>
+              <a:r>
+                <a:rPr sz="880">
+                  <a:solidFill>
+                    <a:srgbClr val="4D4D4D">
+                      <a:alpha val="100000"/>
+                    </a:srgbClr>
+                  </a:solidFill>
+                  <a:latin typeface="Helvetica"/>
+                  <a:cs typeface="Helvetica"/>
+                </a:rPr>
+                <a:t>0</a:t>
+              </a:r>
+            </a:p>
+          </p:txBody>
+        </p:sp>
+        <p:sp>
+          <p:nvSpPr>
+            <p:cNvPr id="83" name="tx83"/>
+            <p:cNvSpPr/>
+            <p:nvPr/>
+          </p:nvSpPr>
+          <p:spPr>
+            <a:xfrm>
+              <a:off x="5327615" y="5716183"/>
+              <a:ext cx="124358" cy="80101"/>
+            </a:xfrm>
+            <a:prstGeom prst="rect">
+              <a:avLst/>
+            </a:prstGeom>
+            <a:noFill/>
+          </p:spPr>
+          <p:txBody>
+            <a:bodyPr lIns="0" rIns="0" tIns="0" bIns="0" anchorCtr="1" anchor="ctr" wrap="none"/>
+            <a:lstStyle/>
+            <a:p>
+              <a:pPr algn="l" marL="0" marR="0" indent="0">
+                <a:lnSpc>
+                  <a:spcPts val="880"/>
+                </a:lnSpc>
+                <a:spcBef>
+                  <a:spcPts val="0"/>
+                </a:spcBef>
+                <a:spcAft>
+                  <a:spcPts val="0"/>
+                </a:spcAft>
+              </a:pPr>
+              <a:r>
+                <a:rPr sz="880">
+                  <a:solidFill>
+                    <a:srgbClr val="4D4D4D">
+                      <a:alpha val="100000"/>
+                    </a:srgbClr>
+                  </a:solidFill>
+                  <a:latin typeface="Helvetica"/>
+                  <a:cs typeface="Helvetica"/>
+                </a:rPr>
+                <a:t>10</a:t>
+              </a:r>
+            </a:p>
+          </p:txBody>
+        </p:sp>
+        <p:sp>
+          <p:nvSpPr>
+            <p:cNvPr id="84" name="tx84"/>
+            <p:cNvSpPr/>
+            <p:nvPr/>
+          </p:nvSpPr>
+          <p:spPr>
+            <a:xfrm>
+              <a:off x="6141217" y="5716183"/>
+              <a:ext cx="124358" cy="80101"/>
+            </a:xfrm>
+            <a:prstGeom prst="rect">
+              <a:avLst/>
+            </a:prstGeom>
+            <a:noFill/>
+          </p:spPr>
+          <p:txBody>
+            <a:bodyPr lIns="0" rIns="0" tIns="0" bIns="0" anchorCtr="1" anchor="ctr" wrap="none"/>
+            <a:lstStyle/>
+            <a:p>
+              <a:pPr algn="l" marL="0" marR="0" indent="0">
+                <a:lnSpc>
+                  <a:spcPts val="880"/>
+                </a:lnSpc>
+                <a:spcBef>
+                  <a:spcPts val="0"/>
+                </a:spcBef>
+                <a:spcAft>
+                  <a:spcPts val="0"/>
+                </a:spcAft>
+              </a:pPr>
+              <a:r>
+                <a:rPr sz="880">
+                  <a:solidFill>
+                    <a:srgbClr val="4D4D4D">
+                      <a:alpha val="100000"/>
+                    </a:srgbClr>
+                  </a:solidFill>
+                  <a:latin typeface="Helvetica"/>
+                  <a:cs typeface="Helvetica"/>
+                </a:rPr>
+                <a:t>20</a:t>
+              </a:r>
+            </a:p>
+          </p:txBody>
+        </p:sp>
+        <p:sp>
+          <p:nvSpPr>
+            <p:cNvPr id="85" name="tx85"/>
+            <p:cNvSpPr/>
+            <p:nvPr/>
+          </p:nvSpPr>
+          <p:spPr>
+            <a:xfrm>
+              <a:off x="6954818" y="5716183"/>
+              <a:ext cx="124358" cy="80101"/>
+            </a:xfrm>
+            <a:prstGeom prst="rect">
+              <a:avLst/>
+            </a:prstGeom>
+            <a:noFill/>
+          </p:spPr>
+          <p:txBody>
+            <a:bodyPr lIns="0" rIns="0" tIns="0" bIns="0" anchorCtr="1" anchor="ctr" wrap="none"/>
+            <a:lstStyle/>
+            <a:p>
+              <a:pPr algn="l" marL="0" marR="0" indent="0">
+                <a:lnSpc>
+                  <a:spcPts val="880"/>
+                </a:lnSpc>
+                <a:spcBef>
+                  <a:spcPts val="0"/>
+                </a:spcBef>
+                <a:spcAft>
+                  <a:spcPts val="0"/>
+                </a:spcAft>
+              </a:pPr>
+              <a:r>
+                <a:rPr sz="880">
+                  <a:solidFill>
+                    <a:srgbClr val="4D4D4D">
+                      <a:alpha val="100000"/>
+                    </a:srgbClr>
+                  </a:solidFill>
+                  <a:latin typeface="Helvetica"/>
+                  <a:cs typeface="Helvetica"/>
+                </a:rPr>
+                <a:t>30</a:t>
+              </a:r>
+            </a:p>
+          </p:txBody>
+        </p:sp>
+        <p:sp>
+          <p:nvSpPr>
+            <p:cNvPr id="86" name="tx86"/>
+            <p:cNvSpPr/>
+            <p:nvPr/>
+          </p:nvSpPr>
+          <p:spPr>
+            <a:xfrm>
+              <a:off x="7768419" y="5716183"/>
+              <a:ext cx="124358" cy="80101"/>
+            </a:xfrm>
+            <a:prstGeom prst="rect">
+              <a:avLst/>
+            </a:prstGeom>
+            <a:noFill/>
+          </p:spPr>
+          <p:txBody>
+            <a:bodyPr lIns="0" rIns="0" tIns="0" bIns="0" anchorCtr="1" anchor="ctr" wrap="none"/>
+            <a:lstStyle/>
+            <a:p>
+              <a:pPr algn="l" marL="0" marR="0" indent="0">
+                <a:lnSpc>
+                  <a:spcPts val="880"/>
+                </a:lnSpc>
+                <a:spcBef>
+                  <a:spcPts val="0"/>
+                </a:spcBef>
+                <a:spcAft>
+                  <a:spcPts val="0"/>
+                </a:spcAft>
+              </a:pPr>
+              <a:r>
+                <a:rPr sz="880">
+                  <a:solidFill>
+                    <a:srgbClr val="4D4D4D">
+                      <a:alpha val="100000"/>
+                    </a:srgbClr>
+                  </a:solidFill>
+                  <a:latin typeface="Helvetica"/>
+                  <a:cs typeface="Helvetica"/>
+                </a:rPr>
+                <a:t>40</a:t>
+              </a:r>
+            </a:p>
+          </p:txBody>
+        </p:sp>
+        <p:sp>
+          <p:nvSpPr>
+            <p:cNvPr id="87" name="tx87"/>
+            <p:cNvSpPr/>
+            <p:nvPr/>
+          </p:nvSpPr>
+          <p:spPr>
+            <a:xfrm>
+              <a:off x="2928340" y="5855859"/>
+              <a:ext cx="3578047" cy="100218"/>
+            </a:xfrm>
+            <a:prstGeom prst="rect">
+              <a:avLst/>
+            </a:prstGeom>
+            <a:noFill/>
+          </p:spPr>
+          <p:txBody>
+            <a:bodyPr lIns="0" rIns="0" tIns="0" bIns="0" anchorCtr="1" anchor="ctr" wrap="none"/>
+            <a:lstStyle/>
+            <a:p>
+              <a:pPr algn="l" marL="0" marR="0" indent="0">
+                <a:lnSpc>
+                  <a:spcPts val="1100"/>
+                </a:lnSpc>
+                <a:spcBef>
+                  <a:spcPts val="0"/>
+                </a:spcBef>
+                <a:spcAft>
+                  <a:spcPts val="0"/>
+                </a:spcAft>
+              </a:pPr>
+              <a:r>
+                <a:rPr sz="1100">
+                  <a:solidFill>
+                    <a:srgbClr val="000000">
+                      <a:alpha val="100000"/>
+                    </a:srgbClr>
+                  </a:solidFill>
+                  <a:latin typeface="Helvetica"/>
+                  <a:cs typeface="Helvetica"/>
+                </a:rPr>
+                <a:t>eGFR difference (%): 100 × (CKD-EPI Cr-Cys − CG) / CG</a:t>
+              </a:r>
+            </a:p>
+          </p:txBody>
+        </p:sp>
+        <p:sp>
+          <p:nvSpPr>
+            <p:cNvPr id="88" name="tx88"/>
+            <p:cNvSpPr/>
+            <p:nvPr/>
+          </p:nvSpPr>
+          <p:spPr>
+            <a:xfrm rot="-5400000">
+              <a:off x="138035" y="4944909"/>
+              <a:ext cx="1016904" cy="100218"/>
+            </a:xfrm>
+            <a:prstGeom prst="rect">
+              <a:avLst/>
+            </a:prstGeom>
+            <a:noFill/>
+          </p:spPr>
+          <p:txBody>
+            <a:bodyPr lIns="0" rIns="0" tIns="0" bIns="0" anchorCtr="1" anchor="ctr" wrap="none"/>
+            <a:lstStyle/>
+            <a:p>
+              <a:pPr algn="l" marL="0" marR="0" indent="0">
+                <a:lnSpc>
+                  <a:spcPts val="1100"/>
+                </a:lnSpc>
+                <a:spcBef>
+                  <a:spcPts val="0"/>
+                </a:spcBef>
+                <a:spcAft>
+                  <a:spcPts val="0"/>
+                </a:spcAft>
+              </a:pPr>
+              <a:r>
+                <a:rPr sz="1100">
+                  <a:solidFill>
+                    <a:srgbClr val="000000">
+                      <a:alpha val="100000"/>
+                    </a:srgbClr>
+                  </a:solidFill>
+                  <a:latin typeface="Helvetica"/>
+                  <a:cs typeface="Helvetica"/>
+                </a:rPr>
+                <a:t>subHR (95% CI)</a:t>
+              </a:r>
+            </a:p>
+          </p:txBody>
+        </p:sp>
+        <p:sp>
+          <p:nvSpPr>
+            <p:cNvPr id="89" name="tx89"/>
+            <p:cNvSpPr/>
+            <p:nvPr/>
+          </p:nvSpPr>
+          <p:spPr>
+            <a:xfrm>
+              <a:off x="887106" y="4159544"/>
+              <a:ext cx="6515465" cy="82021"/>
+            </a:xfrm>
+            <a:prstGeom prst="rect">
+              <a:avLst/>
+            </a:prstGeom>
+            <a:noFill/>
+          </p:spPr>
+          <p:txBody>
+            <a:bodyPr lIns="0" rIns="0" tIns="0" bIns="0" anchorCtr="1" anchor="ctr" wrap="none"/>
+            <a:lstStyle/>
+            <a:p>
+              <a:pPr algn="l" marL="0" marR="0" indent="0">
+                <a:lnSpc>
+                  <a:spcPts val="900"/>
+                </a:lnSpc>
+                <a:spcBef>
+                  <a:spcPts val="0"/>
+                </a:spcBef>
+                <a:spcAft>
+                  <a:spcPts val="0"/>
+                </a:spcAft>
+              </a:pPr>
+              <a:r>
+                <a:rPr sz="900">
+                  <a:solidFill>
+                    <a:srgbClr val="404040">
+                      <a:alpha val="100000"/>
+                    </a:srgbClr>
+                  </a:solidFill>
+                  <a:latin typeface="Helvetica"/>
+                  <a:cs typeface="Helvetica"/>
+                </a:rPr>
+                <a:t>subHR per 10 % decline: 2.67 (1.57-4.54), p = &lt;0.001  |  per IQR decline (Δ = 29.9 %): 18.84 (3.83-92.51)  |  IQR: [-15.0, 14.9] %</a:t>
+              </a:r>
+            </a:p>
+          </p:txBody>
+        </p:sp>
+        <p:sp>
+          <p:nvSpPr>
+            <p:cNvPr id="90" name="tx90"/>
+            <p:cNvSpPr/>
+            <p:nvPr/>
+          </p:nvSpPr>
+          <p:spPr>
+            <a:xfrm>
+              <a:off x="887106" y="3932770"/>
               <a:ext cx="1284914" cy="120152"/>
             </a:xfrm>
             <a:prstGeom prst="rect">
